--- a/docs/作品集/参赛/知迹答辩/知迹答辩.pptx
+++ b/docs/作品集/参赛/知迹答辩/知迹答辩.pptx
@@ -553,7 +553,7 @@
   <p:cSld>
     <p:spTree>
       <p:nvGrpSpPr>
-        <p:cNvPr id="1" name="" descr="&lt;Slide style={{ width: 1280, height: 720, background: '#0E3F8C', padding: 0, position: 'relative', overflow: 'hidden', fontFamily: 'PingFang SC' }}&gt;&#10;&#10;  &lt;Box style={{ position: 'absolute', top: 0, left: 0, width: 1280, height: 6, background: '#3D7BD9' }} /&gt;&#10;&#10;  &lt;Box style={{ position: 'relative', zIndex: 2, width: 1280, height: 664, flexDirection: 'column', paddingLeft: 76, paddingRight: 76, paddingTop: 60 }}&gt;&#10;&#10;    &lt;Text style={{ fontSize: 15, color: '#8FB2E0', letterSpacing: 1.2 }}&gt;&#10;      全国大学生数字媒体科技作品及创意竞赛 · 赛道十三 · 智慧教育与智能软件类&#10;    &lt;/Text&gt;&#10;&#10;    &lt;Box style={{ flexDirection: 'row', alignItems: 'flex-end', gap: 26, marginTop: 14 }}&gt;&#10;      &lt;Text style={{ fontSize: 104, fontWeight: 'bold', color: '#FFFFFF', letterSpacing: 8 }}&gt;知迹&lt;/Text&gt;&#10;      &lt;Text style={{ fontSize: 18, color: '#8FB2E0', letterSpacing: 5, paddingBottom: 20 }}&gt;ZHIJI&lt;/Text&gt;&#10;    &lt;/Box&gt;&#10;&#10;    &lt;Box style={{ width: 88, height: 2, background: '#3D7BD9', marginTop: 14 }} /&gt;&#10;&#10;    &lt;Text style={{ fontSize: 34, color: '#FFFFFF', letterSpacing: 0.8, marginTop: 16 }}&gt;&#10;      基于大模型智能体的 AI 教育学习系统&#10;    &lt;/Text&gt;&#10;&#10;    &lt;Text style={{ fontSize: 18, color: '#B9CCE8', lineHeight: 1.6, marginTop: 12 }}&gt;&#10;      把讲义、板书与错题沉淀成学科知识库；期末从库里生成复习材料——每一步都留下可复用的数据。&#10;    &lt;/Text&gt;&#10;&#10;    &lt;Box style={{ position: 'relative', width: 1128, height: 258, marginTop: 18 }}&gt;&#10;&#10;      &lt;Box style={{ position: 'absolute', left: 124, top: 57, width: 152, height: 2, background: '#3D7BD9' }} /&gt;&#10;      &lt;Box style={{ position: 'absolute', left: 364, top: 57, width: 152, height: 2, background: '#3D7BD9' }} /&gt;&#10;      &lt;Box style={{ position: 'absolute', left: 604, top: 57, width: 152, height: 2, background: '#3D7BD9' }} /&gt;&#10;      &lt;Box style={{ position: 'absolute', left: 844, top: 57, width: 152, height: 2, background: '#3D7BD9' }} /&gt;&#10;&#10;      &lt;Box style={{ position: 'absolute', left: 36, top: 14, width: 88, height: 88, borderRadius: 44, background: '#1E4FA8', border: '1.4px solid #6EA0E8', justifyContent: 'center', alignItems: 'center' }}&gt;&#10;        &lt;Text style={{ fontSize: 19, color: '#FFFFFF' }}&gt;资料&lt;/Text&gt;&#10;      &lt;/Box&gt;&#10;      &lt;Box style={{ position: 'absolute', left: 276, top: 14, width: 88, height: 88, borderRadius: 44, background: '#1E4FA8', border: '1.4px solid #6EA0E8', justifyContent: 'center', alignItems: 'center' }}&gt;&#10;        &lt;Text style={{ fontSize: 19, color: '#FFFFFF' }}&gt;检索&lt;/Text&gt;&#10;      &lt;/Box&gt;&#10;      &lt;Box style={{ position: 'absolute', left: 516, top: 14, width: 88, height: 88, borderRadius: 44, background: '#1E4FA8', border: '1.4px solid #6EA0E8', justifyContent: 'center', alignItems: 'center' }}&gt;&#10;        &lt;Text style={{ fontSize: 19, color: '#FFFFFF' }}&gt;出题&lt;/Text&gt;&#10;      &lt;/Box&gt;&#10;      &lt;Box style={{ position: 'absolute', left: 756, top: 14, width: 88, height: 88, borderRadius: 44, background: '#1E4FA8', border: '1.4px solid #6EA0E8', justifyContent: 'center', alignItems: 'center' }}&gt;&#10;        &lt;Text style={{ fontSize: 19, color: '#FFFFFF' }}&gt;复习&lt;/Text&gt;&#10;      &lt;/Box&gt;&#10;      &lt;Box style={{ position: 'absolute', left: 996, top: 14, width: 88, height: 88, borderRadius: 44, background: '#1E4FA8', border: '1.4px solid #6EA0E8', justifyContent: 'center', alignItems: 'center' }}&gt;&#10;        &lt;Text style={{ fontSize: 19, color: '#FFFFFF' }}&gt;掌握度&lt;/Text&gt;&#10;      &lt;/Box&gt;&#10;&#10;      &lt;Text style={{ position: 'absolute', left: 5, top: 120, width: 150, textAlign: 'center', fontSize: 15, color: '#8FB2E0' }}&gt;讲义 · 板书 · 错题&lt;/Text&gt;&#10;      &lt;Text style={{ position: 'absolute', left: 245, top: 120, width: 150, textAlign: 'center', fontSize: 15, color: '#8FB2E0' }}&gt;四路召回 · 带页码&lt;/Text&gt;&#10;      &lt;Text style={{ position: 'absolute', left: 485, top: 120, width: 150, textAlign: 'center', fontSize: 15, color: '#8FB2E0' }}&gt;按错因生成变式题&lt;/Text&gt;&#10;      &lt;Text style={{ position: 'absolute', left: 725, top: 120, width: 150, textAlign: 'center', fontSize: 15, color: '#8FB2E0' }}&gt;自评与间隔重复&lt;/Text&gt;&#10;      &lt;Text style={{ position: 'absolute', left: 965, top: 120, width: 150, textAlign: 'center', fontSize: 15, color: '#8FB2E0' }}&gt;学科掌握度画像&lt;/Text&gt;&#10;&#10;      &lt;Box style={{ position: 'absolute', left: 80, top: 176, width: 960, height: 1, background: '#3D7BD9', opacity: 0.55 }} /&gt;&#10;&#10;      &lt;Text style={{ position: 'absolute', left: 80, top: 192, fontSize: 14, color: '#6E8FBF' }}&gt;沉淀&lt;/Text&gt;&#10;      &lt;Text style={{ position: 'absolute', left: 680, top: 192, width: 360, textAlign: 'right', fontSize: 14, color: '#6E8FBF' }}&gt;回到薄弱学科，继续沉淀&lt;/Text&gt;&#10;&#10;      &lt;Box style={{ position: 'absolute', left: 80, top: 228, width: 960, height: 1, background: '#3D7BD9', opacity: 0.25 }} /&gt;&#10;&#10;    &lt;/Box&gt;&#10;&#10;    &lt;Box style={{ flexDirection: 'row', alignItems: 'center', gap: 18, marginTop: 10 }}&gt;&#10;      &lt;Text style={{ fontSize: 14, color: '#C9D8EF' }}&gt;279 项自动化测试&lt;/Text&gt;&#10;      &lt;Box style={{ width: 1, height: 13, background: '#3D7BD9' }} /&gt;&#10;      &lt;Text style={{ fontSize: 14, color: '#C9D8EF' }}&gt;检索 Hit@3 = 1.0&lt;/Text&gt;&#10;      &lt;Box style={{ width: 1, height: 13, background: '#3D7BD9' }} /&gt;&#10;      &lt;Text style={{ fontSize: 14, color: '#C9D8EF' }}&gt;意图准确率 = 1.0&lt;/Text&gt;&#10;      &lt;Box style={{ width: 1, height: 13, background: '#3D7BD9' }} /&gt;&#10;      &lt;Text style={{ fontSize: 14, color: '#C9D8EF' }}&gt;7 个功能页面&lt;/Text&gt;&#10;    &lt;/Box&gt;&#10;&#10;  &lt;/Box&gt;&#10;&#10;  &lt;Box style={{ position: 'absolute', bottom: 0, left: 0, width: 1280, height: 56, background: 'rgba(255, 255, 255, 0.07)', flexDirection: 'row', alignItems: 'center', justifyContent: 'space-between', paddingLeft: 76, paddingRight: 76 }}&gt;&#10;    &lt;Text style={{ fontSize: 14, color: '#C9D8EF' }}&gt;汇报人：项目团队&lt;/Text&gt;&#10;    &lt;Text style={{ fontSize: 14, color: '#C9D8EF' }}&gt;2026 年 10 月&lt;/Text&gt;&#10;  &lt;/Box&gt;&#10;&#10;&lt;/Slide&gt;&#10;"/>
+        <p:cNvPr id="1" name="" descr="&lt;Slide style={{ width: 1280, height: 720, background: '#0E3F8C', padding: 0, position: 'relative', overflow: 'hidden', fontFamily: 'PingFang SC' }}&gt;&#10;&#10;  &lt;Box style={{ position: 'absolute', top: 0, left: 0, width: 1280, height: 6, background: '#3D7BD9' }} /&gt;&#10;&#10;  &lt;Box style={{ position: 'relative', zIndex: 2, width: 1280, height: 664, flexDirection: 'column', paddingLeft: 76, paddingRight: 76, paddingTop: 60 }}&gt;&#10;&#10;    &lt;Text style={{ fontSize: 15, color: '#8FB2E0', letterSpacing: 1.2 }}&gt;&#10;      全国大学生数字媒体科技作品及创意竞赛 · 赛道十三 · 智慧教育与智能软件类&#10;    &lt;/Text&gt;&#10;&#10;    &lt;Box style={{ flexDirection: 'row', alignItems: 'flex-end', gap: 26, marginTop: 14 }}&gt;&#10;      &lt;Text style={{ fontSize: 104, fontWeight: 'bold', color: '#FFFFFF', letterSpacing: 8 }}&gt;知迹&lt;/Text&gt;&#10;      &lt;Text style={{ fontSize: 18, color: '#8FB2E0', letterSpacing: 5, paddingBottom: 20 }}&gt;ZHIJI&lt;/Text&gt;&#10;    &lt;/Box&gt;&#10;&#10;    &lt;Box style={{ width: 88, height: 2, background: '#3D7BD9', marginTop: 14 }} /&gt;&#10;&#10;    &lt;Text style={{ fontSize: 34, color: '#FFFFFF', letterSpacing: 0.8, marginTop: 16 }}&gt;&#10;      基于大模型智能体的 AI 教育学习系统&#10;    &lt;/Text&gt;&#10;&#10;    &lt;Text style={{ fontSize: 18, color: '#B9CCE8', lineHeight: 1.6, marginTop: 12 }}&gt;&#10;      把讲义、板书与错题沉淀成学科知识库；期末从库里生成复习材料——每一步都留下可复用的数据。&#10;    &lt;/Text&gt;&#10;&#10;    &lt;Box style={{ position: 'relative', width: 1128, height: 258, marginTop: 18 }}&gt;&#10;&#10;      &lt;Box style={{ position: 'absolute', left: 124, top: 57, width: 152, height: 2, background: '#3D7BD9' }} /&gt;&#10;      &lt;Box style={{ position: 'absolute', left: 364, top: 57, width: 152, height: 2, background: '#3D7BD9' }} /&gt;&#10;      &lt;Box style={{ position: 'absolute', left: 604, top: 57, width: 152, height: 2, background: '#3D7BD9' }} /&gt;&#10;      &lt;Box style={{ position: 'absolute', left: 844, top: 57, width: 152, height: 2, background: '#3D7BD9' }} /&gt;&#10;&#10;      &lt;Box style={{ position: 'absolute', left: 36, top: 14, width: 88, height: 88, borderRadius: 44, background: '#1E4FA8', border: '1.4px solid #6EA0E8', justifyContent: 'center', alignItems: 'center' }}&gt;&#10;        &lt;Text style={{ fontSize: 19, color: '#FFFFFF' }}&gt;资料&lt;/Text&gt;&#10;      &lt;/Box&gt;&#10;      &lt;Box style={{ position: 'absolute', left: 276, top: 14, width: 88, height: 88, borderRadius: 44, background: '#1E4FA8', border: '1.4px solid #6EA0E8', justifyContent: 'center', alignItems: 'center' }}&gt;&#10;        &lt;Text style={{ fontSize: 19, color: '#FFFFFF' }}&gt;检索&lt;/Text&gt;&#10;      &lt;/Box&gt;&#10;      &lt;Box style={{ position: 'absolute', left: 516, top: 14, width: 88, height: 88, borderRadius: 44, background: '#1E4FA8', border: '1.4px solid #6EA0E8', justifyContent: 'center', alignItems: 'center' }}&gt;&#10;        &lt;Text style={{ fontSize: 19, color: '#FFFFFF' }}&gt;出题&lt;/Text&gt;&#10;      &lt;/Box&gt;&#10;      &lt;Box style={{ position: 'absolute', left: 756, top: 14, width: 88, height: 88, borderRadius: 44, background: '#1E4FA8', border: '1.4px solid #6EA0E8', justifyContent: 'center', alignItems: 'center' }}&gt;&#10;        &lt;Text style={{ fontSize: 19, color: '#FFFFFF' }}&gt;复习&lt;/Text&gt;&#10;      &lt;/Box&gt;&#10;      &lt;Box style={{ position: 'absolute', left: 996, top: 14, width: 88, height: 88, borderRadius: 44, background: '#1E4FA8', border: '1.4px solid #6EA0E8', justifyContent: 'center', alignItems: 'center' }}&gt;&#10;        &lt;Text style={{ fontSize: 19, color: '#FFFFFF' }}&gt;掌握度&lt;/Text&gt;&#10;      &lt;/Box&gt;&#10;&#10;      &lt;Text style={{ position: 'absolute', left: 5, top: 120, width: 150, textAlign: 'center', fontSize: 15, color: '#8FB2E0' }}&gt;讲义 · 板书 · 错题&lt;/Text&gt;&#10;      &lt;Text style={{ position: 'absolute', left: 245, top: 120, width: 150, textAlign: 'center', fontSize: 15, color: '#8FB2E0' }}&gt;四路召回 · 带页码&lt;/Text&gt;&#10;      &lt;Text style={{ position: 'absolute', left: 485, top: 120, width: 150, textAlign: 'center', fontSize: 15, color: '#8FB2E0' }}&gt;按错因生成变式题&lt;/Text&gt;&#10;      &lt;Text style={{ position: 'absolute', left: 725, top: 120, width: 150, textAlign: 'center', fontSize: 15, color: '#8FB2E0' }}&gt;自评与间隔重复&lt;/Text&gt;&#10;      &lt;Text style={{ position: 'absolute', left: 965, top: 120, width: 150, textAlign: 'center', fontSize: 15, color: '#8FB2E0' }}&gt;学科掌握度画像&lt;/Text&gt;&#10;&#10;      &lt;Box style={{ position: 'absolute', left: 80, top: 176, width: 960, height: 1, background: '#3D7BD9', opacity: 0.55 }} /&gt;&#10;&#10;      &lt;Text style={{ position: 'absolute', left: 80, top: 192, fontSize: 14, color: '#6E8FBF' }}&gt;沉淀&lt;/Text&gt;&#10;      &lt;Text style={{ position: 'absolute', left: 680, top: 192, width: 360, textAlign: 'right', fontSize: 14, color: '#6E8FBF' }}&gt;回到薄弱学科，继续沉淀&lt;/Text&gt;&#10;&#10;      &lt;Box style={{ position: 'absolute', left: 80, top: 228, width: 960, height: 1, background: '#3D7BD9', opacity: 0.25 }} /&gt;&#10;&#10;    &lt;/Box&gt;&#10;&#10;    &lt;Box style={{ flexDirection: 'row', alignItems: 'center', gap: 18, marginTop: 10 }}&gt;&#10;      &lt;Text style={{ fontSize: 14, color: '#C9D8EF' }}&gt;284 项自动化测试&lt;/Text&gt;&#10;      &lt;Box style={{ width: 1, height: 13, background: '#3D7BD9' }} /&gt;&#10;      &lt;Text style={{ fontSize: 14, color: '#C9D8EF' }}&gt;检索 Hit@3 = 1.0&lt;/Text&gt;&#10;      &lt;Box style={{ width: 1, height: 13, background: '#3D7BD9' }} /&gt;&#10;      &lt;Text style={{ fontSize: 14, color: '#C9D8EF' }}&gt;意图准确率 = 1.0&lt;/Text&gt;&#10;      &lt;Box style={{ width: 1, height: 13, background: '#3D7BD9' }} /&gt;&#10;      &lt;Text style={{ fontSize: 14, color: '#C9D8EF' }}&gt;7 个功能页面&lt;/Text&gt;&#10;    &lt;/Box&gt;&#10;&#10;  &lt;/Box&gt;&#10;&#10;  &lt;Box style={{ position: 'absolute', bottom: 0, left: 0, width: 1280, height: 56, background: 'rgba(255, 255, 255, 0.07)', flexDirection: 'row', alignItems: 'center', justifyContent: 'space-between', paddingLeft: 76, paddingRight: 76 }}&gt;&#10;    &lt;Text style={{ fontSize: 14, color: '#C9D8EF' }}&gt;汇报人：项目团队&lt;/Text&gt;&#10;    &lt;Text style={{ fontSize: 14, color: '#C9D8EF' }}&gt;2026 年 10 月&lt;/Text&gt;&#10;  &lt;/Box&gt;&#10;&#10;&lt;/Slide&gt;&#10;"/>
         <p:cNvGrpSpPr/>
         <p:nvPr/>
       </p:nvGrpSpPr>
@@ -1027,7 +1027,7 @@
                 <a:latin typeface="PingFang SC"/>
                 <a:ea typeface="PingFang SC"/>
               </a:rPr>
-              <a:t xml:space="preserve">279 </a:t>
+              <a:t xml:space="preserve">284 </a:t>
             </a:r>
             <a:r>
               <a:rPr lang="zh-CN" sz="1050">
@@ -2043,7 +2043,7 @@
   <p:cSld>
     <p:spTree>
       <p:nvGrpSpPr>
-        <p:cNvPr id="43" name="" descr="&lt;Slide style={{ width: 1280, height: 720, background: '#FFFFFF', padding: 0, position: 'relative', fontFamily: 'PingFang SC' }}&gt;&#10;&#10;  &lt;Box style={{ position: 'absolute', top: 0, left: 0, width: 1280, height: 64, background: '#1E4FA8' }} /&gt;&#10;  &lt;Text style={{ position: 'absolute', left: 76, top: 21, fontSize: 15, color: '#C9D8EF', letterSpacing: 1 }}&gt;知迹 · 答辩汇报&lt;/Text&gt;&#10;  &lt;Text style={{ position: 'absolute', left: 1010, top: 21, width: 194, textAlign: 'right', fontSize: 15, color: '#C9D8EF' }}&gt;赛道十三 · 智慧教育&lt;/Text&gt;&#10;&#10;  &lt;Box style={{ position: 'absolute', left: 76, top: 92, width: 1128, flexDirection: 'column', alignItems: 'center' }}&gt;&#10;    &lt;Text style={{ fontSize: 104, fontWeight: 'bold', color: '#1E4FA8', lineHeight: 1 }}&gt;3&lt;/Text&gt;&#10;    &lt;Text style={{ fontSize: 19, color: '#1A2230', fontWeight: 'bold', marginTop: 10 }}&gt;项还没做，我不打算留到被问出来&lt;/Text&gt;&#10;    &lt;Text style={{ fontSize: 14.5, color: '#4A5568', marginTop: 8 }}&gt;&#10;      边界写在这里，也写在材料的功能核对表里——标&quot;计划中&quot;，不冒充已完成&#10;    &lt;/Text&gt;&#10;  &lt;/Box&gt;&#10;&#10;  &lt;Box style={{ position: 'absolute', left: 76, top: 320, width: 1128, height: 160, flexDirection: 'row', gap: 30 }}&gt;&#10;&#10;    &lt;Box style={{ width: 356, flexDirection: 'column', background: '#F7F9FC', borderRadius: 8, padding: 18 }}&gt;&#10;      &lt;Text style={{ fontSize: 17, fontWeight: 'bold', color: '#0E3F8C' }}&gt;多用户与数据隔离&lt;/Text&gt;&#10;      &lt;Text style={{ fontSize: 13.5, color: '#4A5568', lineHeight: 1.7, marginTop: 8 }}&gt;&#10;        当前单用户。要做成能交付班级的产品，这是第一件必须补的事——登录、课程归属、数据隔离。&#10;      &lt;/Text&gt;&#10;    &lt;/Box&gt;&#10;&#10;    &lt;Box style={{ width: 356, flexDirection: 'column', background: '#F7F9FC', borderRadius: 8, padding: 18 }}&gt;&#10;      &lt;Text style={{ fontSize: 17, fontWeight: 'bold', color: '#0E3F8C' }}&gt;在线监控聚合面板&lt;/Text&gt;&#10;      &lt;Text style={{ fontSize: 13.5, color: '#4A5568', lineHeight: 1.7, marginTop: 8 }}&gt;&#10;        目前靠 trace 命令行诊断，够开发用；长期运营需要面板把失败率与耗时聚起来。&#10;      &lt;/Text&gt;&#10;    &lt;/Box&gt;&#10;&#10;    &lt;Box style={{ width: 356, flexDirection: 'column', background: '#F7F9FC', borderRadius: 8, padding: 18 }}&gt;&#10;      &lt;Text style={{ fontSize: 17, fontWeight: 'bold', color: '#0E3F8C' }}&gt;Reranker 重排&lt;/Text&gt;&#10;      &lt;Text style={{ fontSize: 13.5, color: '#4A5568', lineHeight: 1.7, marginTop: 8 }}&gt;&#10;        现在四路召回 + RRF 融合已经够用；资料量再上一个量级时，重排才值得引入。&#10;      &lt;/Text&gt;&#10;    &lt;/Box&gt;&#10;&#10;  &lt;/Box&gt;&#10;&#10;  &lt;Box style={{ position: 'absolute', left: 76, top: 508, width: 1128, height: 62, background: '#0E3F8C', borderRadius: 8, justifyContent: 'center', alignItems: 'center' }}&gt;&#10;    &lt;Text style={{ fontSize: 21, fontWeight: 'bold', color: '#FFFFFF', letterSpacing: 1 }}&gt;&#10;      边界说出来，剩下的部分才可信。&#10;    &lt;/Text&gt;&#10;  &lt;/Box&gt;&#10;&#10;  &lt;Box style={{ position: 'absolute', left: 76, top: 592, width: 1128, height: 44, flexDirection: 'row', alignItems: 'center', justifyContent: 'space-between' }}&gt;&#10;    &lt;Text style={{ fontSize: 15, color: '#4A5568' }}&gt;谢谢，欢迎提问&lt;/Text&gt;&#10;    &lt;Text style={{ fontSize: 13, color: '#8B97A8' }}&gt;材料与代码：知迹 · 参赛作品仓库&lt;/Text&gt;&#10;  &lt;/Box&gt;&#10;&#10;  &lt;Box style={{ position: 'absolute', left: 76, bottom: 24, width: 1128, height: 22, flexDirection: 'row', alignItems: 'center', justifyContent: 'space-between' }}&gt;&#10;    &lt;Text style={{ fontSize: 13, color: '#8B97A8' }}&gt;知迹 · 基于大模型智能体的 AI 教育学习系统&lt;/Text&gt;&#10;    &lt;Text style={{ fontSize: 14, fontWeight: 'bold', color: '#0E3F8C' }}&gt;10 / 10&lt;/Text&gt;&#10;  &lt;/Box&gt;&#10;&#10;&lt;/Slide&gt;&#10;"/>
+        <p:cNvPr id="43" name=""/>
         <p:cNvGrpSpPr/>
         <p:nvPr/>
       </p:nvGrpSpPr>
@@ -2076,7 +2076,10 @@
         </p:spPr>
         <p:txBody>
           <a:bodyPr/>
-          <a:p/>
+          <a:p>
+            <a:pPr/>
+            <a:endParaRPr/>
+          </a:p>
         </p:txBody>
       </p:sp>
       <p:sp>
@@ -2100,7 +2103,10 @@
         </p:spPr>
         <p:txBody>
           <a:bodyPr/>
-          <a:p/>
+          <a:p>
+            <a:pPr/>
+            <a:endParaRPr/>
+          </a:p>
         </p:txBody>
       </p:sp>
       <p:sp>
@@ -2381,7 +2387,10 @@
         </p:spPr>
         <p:txBody>
           <a:bodyPr/>
-          <a:p/>
+          <a:p>
+            <a:pPr/>
+            <a:endParaRPr/>
+          </a:p>
         </p:txBody>
       </p:sp>
       <p:sp>
@@ -2479,7 +2488,10 @@
         </p:spPr>
         <p:txBody>
           <a:bodyPr/>
-          <a:p/>
+          <a:p>
+            <a:pPr/>
+            <a:endParaRPr/>
+          </a:p>
         </p:txBody>
       </p:sp>
       <p:sp>
@@ -2597,7 +2609,10 @@
         </p:spPr>
         <p:txBody>
           <a:bodyPr/>
-          <a:p/>
+          <a:p>
+            <a:pPr/>
+            <a:endParaRPr/>
+          </a:p>
         </p:txBody>
       </p:sp>
       <p:sp>
@@ -2725,7 +2740,10 @@
         </p:spPr>
         <p:txBody>
           <a:bodyPr/>
-          <a:p/>
+          <a:p>
+            <a:pPr/>
+            <a:endParaRPr/>
+          </a:p>
         </p:txBody>
       </p:sp>
       <p:sp>
@@ -2973,7 +2991,7 @@
   <p:cSld>
     <p:spTree>
       <p:nvGrpSpPr>
-        <p:cNvPr id="66" name="" descr="&lt;Slide style={{ width: 1280, height: 720, background: '#FFFFFF', padding: 0, position: 'relative', fontFamily: 'PingFang SC' }}&gt;&#10;&#10;  &lt;Box style={{ position: 'absolute', top: 0, left: 0, width: 1280, height: 64, background: '#1E4FA8' }} /&gt;&#10;  &lt;Text style={{ position: 'absolute', left: 76, top: 21, fontSize: 15, color: '#C9D8EF', letterSpacing: 1 }}&gt;知迹 · 答辩汇报&lt;/Text&gt;&#10;  &lt;Text style={{ position: 'absolute', left: 1010, top: 21, width: 194, textAlign: 'right', fontSize: 15, color: '#C9D8EF' }}&gt;赛道十三 · 智慧教育&lt;/Text&gt;&#10;&#10;  &lt;Box style={{ position: 'absolute', left: 76, top: 96, width: 1128 }}&gt;&#10;    &lt;Text style={{ fontSize: 34, fontWeight: 'bold', color: '#0E3F8C' }}&gt;资料都在，为什么复习时找不到&lt;/Text&gt;&#10;    &lt;Text style={{ fontSize: 16, color: '#4A5568', marginTop: 10 }}&gt;断点不在&quot;有没有资料&quot;，而在&quot;有没有把资料沉淀下来&quot;这一步&lt;/Text&gt;&#10;  &lt;/Box&gt;&#10;&#10;  &lt;Box style={{ position: 'absolute', left: 76, top: 190, width: 700, height: 466, flexDirection: 'column' }}&gt;&#10;&#10;    &lt;Text style={{ fontSize: 14, color: '#3D7BD9', letterSpacing: 1.5 }}&gt;现象 · 断在哪一步&lt;/Text&gt;&#10;&#10;    &lt;Box style={{ flexDirection: 'row', alignItems: 'flex-start', gap: 18, marginTop: 20 }}&gt;&#10;&#10;      &lt;Box style={{ flexDirection: 'column', alignItems: 'center' }}&gt;&#10;        &lt;Box style={{ width: 40, height: 40, borderRadius: 6, background: '#1E4FA8', justifyContent: 'center', alignItems: 'center' }}&gt;&#10;          &lt;Text style={{ fontSize: 18, fontWeight: 'bold', color: '#FFFFFF' }}&gt;1&lt;/Text&gt;&#10;        &lt;/Box&gt;&#10;        &lt;Box style={{ width: 2, height: 86, background: '#D6DCE5', marginTop: 10 }} /&gt;&#10;        &lt;Box style={{ width: 40, height: 40, borderRadius: 6, background: '#1E4FA8', justifyContent: 'center', alignItems: 'center' }}&gt;&#10;          &lt;Text style={{ fontSize: 18, fontWeight: 'bold', color: '#FFFFFF' }}&gt;2&lt;/Text&gt;&#10;        &lt;/Box&gt;&#10;        &lt;Box style={{ width: 2, height: 86, background: '#D6DCE5', marginTop: 10 }} /&gt;&#10;        &lt;Box style={{ width: 40, height: 40, borderRadius: 6, background: '#D9534F', justifyContent: 'center', alignItems: 'center' }}&gt;&#10;          &lt;Text style={{ fontSize: 18, fontWeight: 'bold', color: '#FFFFFF' }}&gt;3&lt;/Text&gt;&#10;        &lt;/Box&gt;&#10;      &lt;/Box&gt;&#10;&#10;      &lt;Box style={{ width: 642, flexDirection: 'column' }}&gt;&#10;&#10;        &lt;Box style={{ height: 128, flexDirection: 'column' }}&gt;&#10;          &lt;Text style={{ fontSize: 21, fontWeight: 'bold', color: '#1A2230' }}&gt;资料散落在三处，各存一份&lt;/Text&gt;&#10;          &lt;Text style={{ fontSize: 15.5, color: '#4A5568', lineHeight: 1.65, marginTop: 8 }}&gt;&#10;            课程平台上的作业与课件、聊天工具里的答疑记录、手机拍的纸质板书——三处各有一半，谁也不全。&#10;          &lt;/Text&gt;&#10;        &lt;/Box&gt;&#10;&#10;        &lt;Box style={{ height: 128, flexDirection: 'column', marginTop: 8 }}&gt;&#10;          &lt;Text style={{ fontSize: 21, fontWeight: 'bold', color: '#1A2230' }}&gt;没有沉淀环节，平时不会主动整理&lt;/Text&gt;&#10;          &lt;Text style={{ fontSize: 15.5, color: '#4A5568', lineHeight: 1.65, marginTop: 8 }}&gt;&#10;            打开这类工具的第一件事总是&quot;提问&quot;，而不是&quot;归档&quot;；整理只发生在期末，而期末最缺时间。&#10;          &lt;/Text&gt;&#10;        &lt;/Box&gt;&#10;&#10;        &lt;Box style={{ height: 128, flexDirection: 'column', marginTop: 8 }}&gt;&#10;          &lt;Text style={{ fontSize: 21, fontWeight: 'bold', color: '#D9534F' }}&gt;期末只剩一个空库，无题可练&lt;/Text&gt;&#10;          &lt;Text style={{ fontSize: 15.5, color: '#4A5568', lineHeight: 1.65, marginTop: 8 }}&gt;&#10;            既没有成套的资料可查，也没有可练的题；只能重新翻聊天记录，从头把知识再捡一遍。&#10;          &lt;/Text&gt;&#10;        &lt;/Box&gt;&#10;&#10;      &lt;/Box&gt;&#10;&#10;    &lt;/Box&gt;&#10;&#10;  &lt;/Box&gt;&#10;&#10;  &lt;Box style={{ position: 'absolute', left: 824, top: 190, width: 380, height: 466, flexDirection: 'column' }}&gt;&#10;&#10;    &lt;Box style={{ background: '#0E3F8C', borderRadius: 8, padding: 22, height: 236, flexDirection: 'column', justifyContent: 'space-between' }}&gt;&#10;      &lt;Text style={{ fontSize: 14, color: '#8FB2E0', letterSpacing: 1.5 }}&gt;我们的判断&lt;/Text&gt;&#10;      &lt;Text style={{ fontSize: 20, fontWeight: 'bold', color: '#FFFFFF', lineHeight: 1.55 }}&gt;&#10;        缺的不是更聪明的问答，而是把日常碎片自动攒成复习材料的机制。&#10;      &lt;/Text&gt;&#10;      &lt;Text style={{ fontSize: 13.5, color: '#B9CCE8', lineHeight: 1.6 }}&gt;&#10;        所以知识库要当&quot;沉淀罐&quot;，不是&quot;资料夹&quot;。&#10;      &lt;/Text&gt;&#10;    &lt;/Box&gt;&#10;&#10;    &lt;Box style={{ flexDirection: 'column', marginTop: 22, gap: 14 }}&gt;&#10;&#10;      &lt;Box style={{ flexDirection: 'row', alignItems: 'flex-start', gap: 12 }}&gt;&#10;        &lt;Text style={{ fontSize: 15, fontWeight: 'bold', color: '#1E4FA8', width: 62 }}&gt;三处&lt;/Text&gt;&#10;        &lt;Text style={{ fontSize: 15, color: '#4A5568', lineHeight: 1.6, width: 300 }}&gt;课程平台 / 聊天工具 / 纸质讲义&lt;/Text&gt;&#10;      &lt;/Box&gt;&#10;&#10;      &lt;Box style={{ flexDirection: 'row', alignItems: 'flex-start', gap: 12 }}&gt;&#10;        &lt;Text style={{ fontSize: 15, fontWeight: 'bold', color: '#1E4FA8', width: 62 }}&gt;缺失&lt;/Text&gt;&#10;        &lt;Text style={{ fontSize: 15, color: '#4A5568', lineHeight: 1.6, width: 300 }}&gt;平时把资料变成可检索片段的那一步&lt;/Text&gt;&#10;      &lt;/Box&gt;&#10;&#10;      &lt;Box style={{ flexDirection: 'row', alignItems: 'flex-start', gap: 12 }}&gt;&#10;        &lt;Text style={{ fontSize: 15, fontWeight: 'bold', color: '#1E4FA8', width: 62 }}&gt;结果&lt;/Text&gt;&#10;        &lt;Text style={{ fontSize: 15, color: '#4A5568', lineHeight: 1.6, width: 300 }}&gt;期末有资料、没有可练的题&lt;/Text&gt;&#10;      &lt;/Box&gt;&#10;&#10;    &lt;/Box&gt;&#10;&#10;  &lt;/Box&gt;&#10;&#10;  &lt;Box style={{ position: 'absolute', left: 76, bottom: 24, width: 1128, height: 22, flexDirection: 'row', alignItems: 'center', justifyContent: 'space-between' }}&gt;&#10;    &lt;Text style={{ fontSize: 13, color: '#8B97A8' }}&gt;知迹 · 基于大模型智能体的 AI 教育学习系统&lt;/Text&gt;&#10;    &lt;Text style={{ fontSize: 14, fontWeight: 'bold', color: '#0E3F8C' }}&gt;02 / 10&lt;/Text&gt;&#10;  &lt;/Box&gt;&#10;&#10;&lt;/Slide&gt;&#10;"/>
+        <p:cNvPr id="66" name=""/>
         <p:cNvGrpSpPr/>
         <p:nvPr/>
       </p:nvGrpSpPr>
@@ -3006,7 +3024,10 @@
         </p:spPr>
         <p:txBody>
           <a:bodyPr/>
-          <a:p/>
+          <a:p>
+            <a:pPr/>
+            <a:endParaRPr/>
+          </a:p>
         </p:txBody>
       </p:sp>
       <p:sp>
@@ -3030,7 +3051,10 @@
         </p:spPr>
         <p:txBody>
           <a:bodyPr/>
-          <a:p/>
+          <a:p>
+            <a:pPr/>
+            <a:endParaRPr/>
+          </a:p>
         </p:txBody>
       </p:sp>
       <p:sp>
@@ -3371,7 +3395,10 @@
         </p:spPr>
         <p:txBody>
           <a:bodyPr/>
-          <a:p/>
+          <a:p>
+            <a:pPr/>
+            <a:endParaRPr/>
+          </a:p>
         </p:txBody>
       </p:sp>
       <p:sp>
@@ -3430,7 +3457,10 @@
         </p:spPr>
         <p:txBody>
           <a:bodyPr/>
-          <a:p/>
+          <a:p>
+            <a:pPr/>
+            <a:endParaRPr/>
+          </a:p>
         </p:txBody>
       </p:sp>
       <p:sp>
@@ -3456,7 +3486,10 @@
         </p:spPr>
         <p:txBody>
           <a:bodyPr/>
-          <a:p/>
+          <a:p>
+            <a:pPr/>
+            <a:endParaRPr/>
+          </a:p>
         </p:txBody>
       </p:sp>
       <p:sp>
@@ -3515,7 +3548,10 @@
         </p:spPr>
         <p:txBody>
           <a:bodyPr/>
-          <a:p/>
+          <a:p>
+            <a:pPr/>
+            <a:endParaRPr/>
+          </a:p>
         </p:txBody>
       </p:sp>
       <p:sp>
@@ -3541,7 +3577,10 @@
         </p:spPr>
         <p:txBody>
           <a:bodyPr/>
-          <a:p/>
+          <a:p>
+            <a:pPr/>
+            <a:endParaRPr/>
+          </a:p>
         </p:txBody>
       </p:sp>
       <p:sp>
@@ -3894,7 +3933,10 @@
         </p:spPr>
         <p:txBody>
           <a:bodyPr/>
-          <a:p/>
+          <a:p>
+            <a:pPr/>
+            <a:endParaRPr/>
+          </a:p>
         </p:txBody>
       </p:sp>
       <p:sp>
@@ -4454,7 +4496,7 @@
   <p:cSld>
     <p:spTree>
       <p:nvGrpSpPr>
-        <p:cNvPr id="100" name="" descr="&lt;Slide style={{ width: 1280, height: 720, background: '#FFFFFF', padding: 0, position: 'relative', fontFamily: 'PingFang SC' }}&gt;&#10;&#10;  &lt;Box style={{ position: 'absolute', top: 0, left: 0, width: 1280, height: 64, background: '#1E4FA8' }} /&gt;&#10;  &lt;Text style={{ position: 'absolute', left: 76, top: 21, fontSize: 15, color: '#C9D8EF', letterSpacing: 1 }}&gt;知迹 · 答辩汇报&lt;/Text&gt;&#10;  &lt;Text style={{ position: 'absolute', left: 1010, top: 21, width: 194, textAlign: 'right', fontSize: 15, color: '#C9D8EF' }}&gt;赛道十三 · 智慧教育&lt;/Text&gt;&#10;&#10;  &lt;Box style={{ position: 'absolute', left: 76, top: 96, width: 1128 }}&gt;&#10;    &lt;Text style={{ fontSize: 34, fontWeight: 'bold', color: '#0E3F8C' }}&gt;一条五步闭环，每一步都留下数据&lt;/Text&gt;&#10;    &lt;Text style={{ fontSize: 16, color: '#4A5568', marginTop: 10 }}&gt;闭环的关键不是步骤多，而是每一环都往库里留东西——下一轮从这些东西开始&lt;/Text&gt;&#10;  &lt;/Box&gt;&#10;&#10;  &lt;Box style={{ position: 'absolute', left: 76, top: 192, width: 1128, height: 234 }}&gt;&#10;&#10;    &lt;Box style={{ position: 'absolute', left: 154, top: 57, width: 122, height: 2, background: '#1E4FA8' }} /&gt;&#10;    &lt;Box style={{ position: 'absolute', left: 384, top: 57, width: 122, height: 2, background: '#1E4FA8' }} /&gt;&#10;    &lt;Box style={{ position: 'absolute', left: 614, top: 57, width: 122, height: 2, background: '#1E4FA8' }} /&gt;&#10;    &lt;Box style={{ position: 'absolute', left: 844, top: 57, width: 122, height: 2, background: '#1E4FA8' }} /&gt;&#10;&#10;    &lt;Box style={{ position: 'absolute', left: 46, top: 4, width: 108, height: 108, borderRadius: 54, background: '#E8EFF8', border: '1.4px solid #1E4FA8', justifyContent: 'center', alignItems: 'center' }}&gt;&#10;      &lt;Text style={{ fontSize: 20, fontWeight: 'bold', color: '#0E3F8C' }}&gt;资料&lt;/Text&gt;&#10;    &lt;/Box&gt;&#10;    &lt;Box style={{ position: 'absolute', left: 276, top: 4, width: 108, height: 108, borderRadius: 54, background: '#E8EFF8', border: '1.4px solid #1E4FA8', justifyContent: 'center', alignItems: 'center' }}&gt;&#10;      &lt;Text style={{ fontSize: 20, fontWeight: 'bold', color: '#0E3F8C' }}&gt;检索&lt;/Text&gt;&#10;    &lt;/Box&gt;&#10;    &lt;Box style={{ position: 'absolute', left: 506, top: 4, width: 108, height: 108, borderRadius: 54, background: '#1E4FA8', border: '1.4px solid #1E4FA8', justifyContent: 'center', alignItems: 'center' }}&gt;&#10;      &lt;Text style={{ fontSize: 20, fontWeight: 'bold', color: '#FFFFFF' }}&gt;出题&lt;/Text&gt;&#10;    &lt;/Box&gt;&#10;    &lt;Box style={{ position: 'absolute', left: 736, top: 4, width: 108, height: 108, borderRadius: 54, background: '#E8EFF8', border: '1.4px solid #1E4FA8', justifyContent: 'center', alignItems: 'center' }}&gt;&#10;      &lt;Text style={{ fontSize: 20, fontWeight: 'bold', color: '#0E3F8C' }}&gt;复习&lt;/Text&gt;&#10;    &lt;/Box&gt;&#10;    &lt;Box style={{ position: 'absolute', left: 966, top: 4, width: 108, height: 108, borderRadius: 54, background: '#E8EFF8', border: '1.4px solid #1E4FA8', justifyContent: 'center', alignItems: 'center' }}&gt;&#10;      &lt;Text style={{ fontSize: 17, fontWeight: 'bold', color: '#0E3F8C' }}&gt;掌握度&lt;/Text&gt;&#10;    &lt;/Box&gt;&#10;&#10;    &lt;Text style={{ position: 'absolute', left: 15, top: 122, width: 170, textAlign: 'center', fontSize: 15, fontWeight: 'bold', color: '#1A2230' }}&gt;多格式资料入库&lt;/Text&gt;&#10;    &lt;Text style={{ position: 'absolute', left: 15, top: 146, width: 170, textAlign: 'center', fontSize: 13.5, color: '#8B97A8' }}&gt;片段 · 页码 · 出处&lt;/Text&gt;&#10;&#10;    &lt;Text style={{ position: 'absolute', left: 245, top: 122, width: 170, textAlign: 'center', fontSize: 15, fontWeight: 'bold', color: '#1A2230' }}&gt;四路召回融合&lt;/Text&gt;&#10;    &lt;Text style={{ position: 'absolute', left: 245, top: 146, width: 170, textAlign: 'center', fontSize: 13.5, color: '#8B97A8' }}&gt;命中片段 · 引用&lt;/Text&gt;&#10;&#10;    &lt;Text style={{ position: 'absolute', left: 475, top: 122, width: 170, textAlign: 'center', fontSize: 15, fontWeight: 'bold', color: '#1A2230' }}&gt;按错因出变式题&lt;/Text&gt;&#10;    &lt;Text style={{ position: 'absolute', left: 475, top: 146, width: 170, textAlign: 'center', fontSize: 13.5, color: '#8B97A8' }}&gt;题干 · 参考答案&lt;/Text&gt;&#10;&#10;    &lt;Text style={{ position: 'absolute', left: 705, top: 122, width: 170, textAlign: 'center', fontSize: 15, fontWeight: 'bold', color: '#1A2230' }}&gt;作答与四档自评&lt;/Text&gt;&#10;    &lt;Text style={{ position: 'absolute', left: 705, top: 146, width: 170, textAlign: 'center', fontSize: 13.5, color: '#8B97A8' }}&gt;自评 · 下次复习时间&lt;/Text&gt;&#10;&#10;    &lt;Text style={{ position: 'absolute', left: 935, top: 122, width: 170, textAlign: 'center', fontSize: 15, fontWeight: 'bold', color: '#1A2230' }}&gt;学科掌握度画像&lt;/Text&gt;&#10;    &lt;Text style={{ position: 'absolute', left: 935, top: 146, width: 170, textAlign: 'center', fontSize: 13.5, color: '#8B97A8' }}&gt;掌握度 · 薄弱学科&lt;/Text&gt;&#10;&#10;    &lt;Box style={{ position: 'absolute', left: 0, top: 180, width: 1128, height: 46, background: '#F0F5FC', borderRadius: 6, justifyContent: 'center', alignItems: 'center' }}&gt;&#10;      &lt;Text style={{ fontSize: 15, color: '#1E4FA8' }}&gt;&#10;        掌握度回到薄弱学科，下一轮从薄弱处开始 —— 这就是闭环成立的地方&#10;      &lt;/Text&gt;&#10;    &lt;/Box&gt;&#10;&#10;  &lt;/Box&gt;&#10;&#10;  &lt;Box style={{ position: 'absolute', left: 76, top: 456, width: 1128, height: 200, background: '#F7F9FC', borderRadius: 8, flexDirection: 'row', alignItems: 'center', paddingLeft: 28, paddingRight: 28 }}&gt;&#10;&#10;    &lt;Box style={{ width: 320, flexDirection: 'column' }}&gt;&#10;      &lt;Text style={{ fontSize: 18, fontWeight: 'bold', color: '#0E3F8C' }}&gt;产物落库&lt;/Text&gt;&#10;      &lt;Text style={{ fontSize: 14.5, color: '#4A5568', lineHeight: 1.7, marginTop: 8 }}&gt;&#10;        每次检索留下带页码的片段，每次出题留下题干与详解，每次自评留下排期与掌握度。&#10;      &lt;/Text&gt;&#10;    &lt;/Box&gt;&#10;&#10;    &lt;Box style={{ width: 1, height: 104, background: '#D6DCE5', marginLeft: 22, marginRight: 22 }} /&gt;&#10;&#10;    &lt;Box style={{ width: 320, flexDirection: 'column' }}&gt;&#10;      &lt;Text style={{ fontSize: 18, fontWeight: 'bold', color: '#0E3F8C' }}&gt;产物可复用&lt;/Text&gt;&#10;      &lt;Text style={{ fontSize: 14.5, color: '#4A5568', lineHeight: 1.7, marginTop: 8 }}&gt;&#10;        片段能再被检索，题能再派变式题，排期能按自评重排——旧数据一直有用。&#10;      &lt;/Text&gt;&#10;    &lt;/Box&gt;&#10;&#10;    &lt;Box style={{ width: 1, height: 104, background: '#D6DCE5', marginLeft: 22, marginRight: 22 }} /&gt;&#10;&#10;    &lt;Box style={{ width: 320, flexDirection: 'column' }}&gt;&#10;      &lt;Text style={{ fontSize: 18, fontWeight: 'bold', color: '#0E3F8C' }}&gt;复用降成本&lt;/Text&gt;&#10;      &lt;Text style={{ fontSize: 14.5, color: '#4A5568', lineHeight: 1.7, marginTop: 8 }}&gt;&#10;        第二轮复习不必从零开始，只补薄弱处；时间花在不会的地方，而不是抄一遍笔记。&#10;      &lt;/Text&gt;&#10;    &lt;/Box&gt;&#10;&#10;  &lt;/Box&gt;&#10;&#10;  &lt;Box style={{ position: 'absolute', left: 76, bottom: 24, width: 1128, height: 22, flexDirection: 'row', alignItems: 'center', justifyContent: 'space-between' }}&gt;&#10;    &lt;Text style={{ fontSize: 13, color: '#8B97A8' }}&gt;知迹 · 基于大模型智能体的 AI 教育学习系统&lt;/Text&gt;&#10;    &lt;Text style={{ fontSize: 14, fontWeight: 'bold', color: '#0E3F8C' }}&gt;03 / 10&lt;/Text&gt;&#10;  &lt;/Box&gt;&#10;&#10;&lt;/Slide&gt;&#10;"/>
+        <p:cNvPr id="100" name=""/>
         <p:cNvGrpSpPr/>
         <p:nvPr/>
       </p:nvGrpSpPr>
@@ -4487,7 +4529,10 @@
         </p:spPr>
         <p:txBody>
           <a:bodyPr/>
-          <a:p/>
+          <a:p>
+            <a:pPr/>
+            <a:endParaRPr/>
+          </a:p>
         </p:txBody>
       </p:sp>
       <p:sp>
@@ -4511,7 +4556,10 @@
         </p:spPr>
         <p:txBody>
           <a:bodyPr/>
-          <a:p/>
+          <a:p>
+            <a:pPr/>
+            <a:endParaRPr/>
+          </a:p>
         </p:txBody>
       </p:sp>
       <p:sp>
@@ -4715,7 +4763,10 @@
         </p:spPr>
         <p:txBody>
           <a:bodyPr/>
-          <a:p/>
+          <a:p>
+            <a:pPr/>
+            <a:endParaRPr/>
+          </a:p>
         </p:txBody>
       </p:sp>
       <p:sp>
@@ -4739,7 +4790,10 @@
         </p:spPr>
         <p:txBody>
           <a:bodyPr/>
-          <a:p/>
+          <a:p>
+            <a:pPr/>
+            <a:endParaRPr/>
+          </a:p>
         </p:txBody>
       </p:sp>
       <p:sp>
@@ -4763,7 +4817,10 @@
         </p:spPr>
         <p:txBody>
           <a:bodyPr/>
-          <a:p/>
+          <a:p>
+            <a:pPr/>
+            <a:endParaRPr/>
+          </a:p>
         </p:txBody>
       </p:sp>
       <p:sp>
@@ -4787,7 +4844,10 @@
         </p:spPr>
         <p:txBody>
           <a:bodyPr/>
-          <a:p/>
+          <a:p>
+            <a:pPr/>
+            <a:endParaRPr/>
+          </a:p>
         </p:txBody>
       </p:sp>
       <p:sp>
@@ -4818,7 +4878,10 @@
         </p:spPr>
         <p:txBody>
           <a:bodyPr/>
-          <a:p/>
+          <a:p>
+            <a:pPr/>
+            <a:endParaRPr/>
+          </a:p>
         </p:txBody>
       </p:sp>
       <p:sp>
@@ -4884,7 +4947,10 @@
         </p:spPr>
         <p:txBody>
           <a:bodyPr/>
-          <a:p/>
+          <a:p>
+            <a:pPr/>
+            <a:endParaRPr/>
+          </a:p>
         </p:txBody>
       </p:sp>
       <p:sp>
@@ -4950,7 +5016,10 @@
         </p:spPr>
         <p:txBody>
           <a:bodyPr/>
-          <a:p/>
+          <a:p>
+            <a:pPr/>
+            <a:endParaRPr/>
+          </a:p>
         </p:txBody>
       </p:sp>
       <p:sp>
@@ -5016,7 +5085,10 @@
         </p:spPr>
         <p:txBody>
           <a:bodyPr/>
-          <a:p/>
+          <a:p>
+            <a:pPr/>
+            <a:endParaRPr/>
+          </a:p>
         </p:txBody>
       </p:sp>
       <p:sp>
@@ -5082,7 +5154,10 @@
         </p:spPr>
         <p:txBody>
           <a:bodyPr/>
-          <a:p/>
+          <a:p>
+            <a:pPr/>
+            <a:endParaRPr/>
+          </a:p>
         </p:txBody>
       </p:sp>
       <p:sp>
@@ -5613,7 +5688,10 @@
         </p:spPr>
         <p:txBody>
           <a:bodyPr/>
-          <a:p/>
+          <a:p>
+            <a:pPr/>
+            <a:endParaRPr/>
+          </a:p>
         </p:txBody>
       </p:sp>
       <p:sp>
@@ -5694,7 +5772,10 @@
         </p:spPr>
         <p:txBody>
           <a:bodyPr/>
-          <a:p/>
+          <a:p>
+            <a:pPr/>
+            <a:endParaRPr/>
+          </a:p>
         </p:txBody>
       </p:sp>
       <p:sp>
@@ -5790,7 +5871,10 @@
         </p:spPr>
         <p:txBody>
           <a:bodyPr/>
-          <a:p/>
+          <a:p>
+            <a:pPr/>
+            <a:endParaRPr/>
+          </a:p>
         </p:txBody>
       </p:sp>
       <p:sp>
@@ -5886,7 +5970,10 @@
         </p:spPr>
         <p:txBody>
           <a:bodyPr/>
-          <a:p/>
+          <a:p>
+            <a:pPr/>
+            <a:endParaRPr/>
+          </a:p>
         </p:txBody>
       </p:sp>
       <p:sp>
@@ -6081,7 +6168,7 @@
   <p:cSld>
     <p:spTree>
       <p:nvGrpSpPr>
-        <p:cNvPr id="144" name="" descr="&lt;Slide style={{ width: 1280, height: 720, background: '#FFFFFF', padding: 0, position: 'relative', fontFamily: 'PingFang SC' }}&gt;&#10;&#10;  &lt;Box style={{ position: 'absolute', top: 0, left: 0, width: 1280, height: 64, background: '#1E4FA8' }} /&gt;&#10;  &lt;Text style={{ position: 'absolute', left: 76, top: 21, fontSize: 15, color: '#C9D8EF', letterSpacing: 1 }}&gt;知迹 · 答辩汇报&lt;/Text&gt;&#10;  &lt;Text style={{ position: 'absolute', left: 1010, top: 21, width: 194, textAlign: 'right', fontSize: 15, color: '#C9D8EF' }}&gt;赛道十三 · 智慧教育&lt;/Text&gt;&#10;&#10;  &lt;Box style={{ position: 'absolute', left: 76, top: 96, width: 1128 }}&gt;&#10;    &lt;Text style={{ fontSize: 34, fontWeight: 'bold', color: '#0E3F8C' }}&gt;四层依赖只朝内，一个回合画成图&lt;/Text&gt;&#10;    &lt;Text style={{ fontSize: 16, color: '#4A5568', marginTop: 10 }}&gt;架构决定可维护性，状态图决定可解释性——这两件事都要能指着图讲&lt;/Text&gt;&#10;  &lt;/Box&gt;&#10;&#10;  &lt;Box style={{ position: 'absolute', left: 76, top: 190, width: 680, height: 466, flexDirection: 'column' }}&gt;&#10;&#10;    &lt;Text style={{ fontSize: 14, color: '#3D7BD9', letterSpacing: 1.5 }}&gt;分层 · 依赖只朝内&lt;/Text&gt;&#10;&#10;    &lt;Box style={{ flexDirection: 'column', marginTop: 14, gap: 8 }}&gt;&#10;&#10;      &lt;Box style={{ width: 680, height: 58, background: '#F0F5FC', borderRadius: 6, borderLeft: '4px solid #1E4FA8', flexDirection: 'row', alignItems: 'center', paddingLeft: 16, paddingRight: 16, gap: 14 }}&gt;&#10;        &lt;Text style={{ fontSize: 15, fontWeight: 'bold', color: '#1E4FA8', width: 108 }}&gt;interfaces&lt;/Text&gt;&#10;        &lt;Text style={{ fontSize: 14, color: '#4A5568', width: 520 }}&gt;FastAPI + SSE 接口层（组合根，依赖全部）&lt;/Text&gt;&#10;      &lt;/Box&gt;&#10;&#10;      &lt;Box style={{ width: 620, height: 58, background: '#F0F5FC', borderRadius: 6, borderLeft: '4px solid #1E4FA8', flexDirection: 'row', alignItems: 'center', paddingLeft: 16, paddingRight: 16, gap: 14 }}&gt;&#10;        &lt;Text style={{ fontSize: 15, fontWeight: 'bold', color: '#1E4FA8', width: 108 }}&gt;application&lt;/Text&gt;&#10;        &lt;Text style={{ fontSize: 14, color: '#4A5568', width: 460 }}&gt;用例编排 · 端口 Protocol · LangGraph 图&lt;/Text&gt;&#10;      &lt;/Box&gt;&#10;&#10;      &lt;Box style={{ width: 560, height: 58, background: '#E8EFF8', borderRadius: 6, borderLeft: '4px solid #1E4FA8', flexDirection: 'row', alignItems: 'center', paddingLeft: 16, paddingRight: 16, gap: 14 }}&gt;&#10;        &lt;Text style={{ fontSize: 15, fontWeight: 'bold', color: '#1E4FA8', width: 108 }}&gt;domain&lt;/Text&gt;&#10;        &lt;Text style={{ fontSize: 14, color: '#4A5568', width: 400 }}&gt;纯函数：路由 · 切块 · RRF · 排期 · 护栏&lt;/Text&gt;&#10;      &lt;/Box&gt;&#10;&#10;      &lt;Box style={{ width: 500, height: 58, background: '#F7F9FC', borderRadius: 6, borderLeft: '4px solid #3D7BD9', flexDirection: 'row', alignItems: 'center', paddingLeft: 16, paddingRight: 16, gap: 14 }}&gt;&#10;        &lt;Text style={{ fontSize: 15, fontWeight: 'bold', color: '#3D7BD9', width: 108 }}&gt;infrastructure&lt;/Text&gt;&#10;        &lt;Text style={{ fontSize: 14, color: '#4A5568', width: 340 }}&gt;SQLite · LLM · Embedding · 文件解析&lt;/Text&gt;&#10;      &lt;/Box&gt;&#10;&#10;    &lt;/Box&gt;&#10;&#10;    &lt;Text style={{ fontSize: 14, color: '#3D7BD9', letterSpacing: 1.5, marginTop: 18 }}&gt;回合 · 显式状态图&lt;/Text&gt;&#10;&#10;    &lt;Box style={{ flexDirection: 'row', alignItems: 'center', marginTop: 14, gap: 0 }}&gt;&#10;&#10;      &lt;Box style={{ flexDirection: 'column', alignItems: 'center', width: 80 }}&gt;&#10;        &lt;Box style={{ width: 80, height: 72, borderRadius: 6, background: '#FFFFFF', border: '1.4px solid #D6DCE5', justifyContent: 'center', alignItems: 'center' }}&gt;&#10;          &lt;Text style={{ fontSize: 15, fontWeight: 'bold', color: '#4A5568' }}&gt;START&lt;/Text&gt;&#10;        &lt;/Box&gt;&#10;        &lt;Text style={{ fontSize: 12.5, color: '#8B97A8', marginTop: 6 }}&gt;用户提问&lt;/Text&gt;&#10;      &lt;/Box&gt;&#10;&#10;      &lt;Box style={{ width: 34, height: 2, background: '#3D7BD9' }} /&gt;&#10;&#10;      &lt;Box style={{ flexDirection: 'column', alignItems: 'center', width: 80 }}&gt;&#10;        &lt;Box style={{ width: 80, height: 72, borderRadius: 6, background: '#E8EFF8', border: '1.4px solid #1E4FA8', justifyContent: 'center', alignItems: 'center' }}&gt;&#10;          &lt;Text style={{ fontSize: 15, fontWeight: 'bold', color: '#0E3F8C' }}&gt;route&lt;/Text&gt;&#10;        &lt;/Box&gt;&#10;        &lt;Text style={{ fontSize: 12.5, color: '#8B97A8', marginTop: 6 }}&gt;意图路由&lt;/Text&gt;&#10;      &lt;/Box&gt;&#10;&#10;      &lt;Box style={{ width: 34, height: 2, background: '#3D7BD9' }} /&gt;&#10;&#10;      &lt;Box style={{ flexDirection: 'column', alignItems: 'center', width: 80 }}&gt;&#10;        &lt;Box style={{ width: 80, height: 72, borderRadius: 6, background: '#E8EFF8', border: '1.4px solid #1E4FA8', justifyContent: 'center', alignItems: 'center' }}&gt;&#10;          &lt;Text style={{ fontSize: 15, fontWeight: 'bold', color: '#0E3F8C' }}&gt;plan&lt;/Text&gt;&#10;        &lt;/Box&gt;&#10;        &lt;Text style={{ fontSize: 12.5, color: '#8B97A8', marginTop: 6 }}&gt;复杂才规划&lt;/Text&gt;&#10;      &lt;/Box&gt;&#10;&#10;      &lt;Box style={{ width: 34, height: 2, background: '#3D7BD9' }} /&gt;&#10;&#10;      &lt;Box style={{ flexDirection: 'column', alignItems: 'center', width: 80 }}&gt;&#10;        &lt;Box style={{ width: 80, height: 72, borderRadius: 6, background: '#1E4FA8', border: '1.4px solid #1E4FA8', justifyContent: 'center', alignItems: 'center' }}&gt;&#10;          &lt;Text style={{ fontSize: 15, fontWeight: 'bold', color: '#FFFFFF' }}&gt;agent&lt;/Text&gt;&#10;        &lt;/Box&gt;&#10;        &lt;Text style={{ fontSize: 12.5, color: '#8B97A8', marginTop: 6 }}&gt;模型推理&lt;/Text&gt;&#10;      &lt;/Box&gt;&#10;&#10;      &lt;Box style={{ width: 34, height: 2, background: '#3D7BD9' }} /&gt;&#10;&#10;      &lt;Box style={{ flexDirection: 'column', alignItems: 'center', width: 80 }}&gt;&#10;        &lt;Box style={{ width: 80, height: 72, borderRadius: 6, background: '#F0F5FC', border: '1.4px solid #3D7BD9', justifyContent: 'center', alignItems: 'center' }}&gt;&#10;          &lt;Text style={{ fontSize: 15, fontWeight: 'bold', color: '#1E4FA8' }}&gt;tools&lt;/Text&gt;&#10;        &lt;/Box&gt;&#10;        &lt;Text style={{ fontSize: 12.5, color: '#8B97A8', marginTop: 6 }}&gt;工具循环&lt;/Text&gt;&#10;      &lt;/Box&gt;&#10;&#10;      &lt;Box style={{ width: 34, height: 2, background: '#3D7BD9' }} /&gt;&#10;&#10;      &lt;Box style={{ flexDirection: 'column', alignItems: 'center', width: 80 }}&gt;&#10;        &lt;Box style={{ width: 80, height: 72, borderRadius: 6, background: '#FFFFFF', border: '1.4px solid #D6DCE5', justifyContent: 'center', alignItems: 'center' }}&gt;&#10;          &lt;Text style={{ fontSize: 15, fontWeight: 'bold', color: '#4A5568' }}&gt;END&lt;/Text&gt;&#10;        &lt;/Box&gt;&#10;        &lt;Text style={{ fontSize: 12.5, color: '#8B97A8', marginTop: 6 }}&gt;回答落库&lt;/Text&gt;&#10;      &lt;/Box&gt;&#10;&#10;    &lt;/Box&gt;&#10;&#10;  &lt;/Box&gt;&#10;&#10;  &lt;Box style={{ position: 'absolute', left: 800, top: 190, width: 404, height: 466, flexDirection: 'column', gap: 16 }}&gt;&#10;&#10;    &lt;Box style={{ flexDirection: 'column', height: 142, background: '#F7F9FC', borderRadius: 8, padding: 18 }}&gt;&#10;      &lt;Text style={{ fontSize: 17, fontWeight: 'bold', color: '#0E3F8C' }}&gt;为什么分四层&lt;/Text&gt;&#10;      &lt;Text style={{ fontSize: 14, color: '#4A5568', lineHeight: 1.7, marginTop: 8 }}&gt;&#10;        domain 只依赖标准库，检索权重与排期规则能在没有网络、没有模型的情况下被单元测试。&#10;      &lt;/Text&gt;&#10;    &lt;/Box&gt;&#10;&#10;    &lt;Box style={{ flexDirection: 'column', height: 142, background: '#F7F9FC', borderRadius: 8, padding: 18 }}&gt;&#10;      &lt;Text style={{ fontSize: 17, fontWeight: 'bold', color: '#0E3F8C' }}&gt;为什么画成图&lt;/Text&gt;&#10;      &lt;Text style={{ fontSize: 14, color: '#4A5568', lineHeight: 1.7, marginTop: 8 }}&gt;&#10;        状态图让&quot;这一步在做什么&quot;可以被指着讲；每个节点有检查点，能断点续跑，也能在写操作前暂停等人确认。&#10;      &lt;/Text&gt;&#10;    &lt;/Box&gt;&#10;&#10;    &lt;Box style={{ flexDirection: 'column', height: 142, background: '#0E3F8C', borderRadius: 8, padding: 18 }}&gt;&#10;      &lt;Text style={{ fontSize: 17, fontWeight: 'bold', color: '#FFFFFF' }}&gt;所以它可被审阅&lt;/Text&gt;&#10;      &lt;Text style={{ fontSize: 14, color: '#C9D8EF', lineHeight: 1.7, marginTop: 8 }}&gt;&#10;        流程、分支与中断点都在图里，不在某个函数的 if 里——这是可解释性的前提，不是装饰。&#10;      &lt;/Text&gt;&#10;    &lt;/Box&gt;&#10;&#10;  &lt;/Box&gt;&#10;&#10;  &lt;Box style={{ position: 'absolute', left: 76, bottom: 24, width: 1128, height: 22, flexDirection: 'row', alignItems: 'center', justifyContent: 'space-between' }}&gt;&#10;    &lt;Text style={{ fontSize: 13, color: '#8B97A8' }}&gt;知迹 · 基于大模型智能体的 AI 教育学习系统&lt;/Text&gt;&#10;    &lt;Text style={{ fontSize: 14, fontWeight: 'bold', color: '#0E3F8C' }}&gt;04 / 10&lt;/Text&gt;&#10;  &lt;/Box&gt;&#10;&#10;&lt;/Slide&gt;&#10;"/>
+        <p:cNvPr id="144" name=""/>
         <p:cNvGrpSpPr/>
         <p:nvPr/>
       </p:nvGrpSpPr>
@@ -6114,7 +6201,10 @@
         </p:spPr>
         <p:txBody>
           <a:bodyPr/>
-          <a:p/>
+          <a:p>
+            <a:pPr/>
+            <a:endParaRPr/>
+          </a:p>
         </p:txBody>
       </p:sp>
       <p:sp>
@@ -6138,7 +6228,10 @@
         </p:spPr>
         <p:txBody>
           <a:bodyPr/>
-          <a:p/>
+          <a:p>
+            <a:pPr/>
+            <a:endParaRPr/>
+          </a:p>
         </p:txBody>
       </p:sp>
       <p:sp>
@@ -6399,7 +6492,10 @@
         </p:spPr>
         <p:txBody>
           <a:bodyPr/>
-          <a:p/>
+          <a:p>
+            <a:pPr/>
+            <a:endParaRPr/>
+          </a:p>
         </p:txBody>
       </p:sp>
       <p:sp>
@@ -6456,7 +6552,10 @@
         </p:spPr>
         <p:txBody>
           <a:bodyPr/>
-          <a:p/>
+          <a:p>
+            <a:pPr/>
+            <a:endParaRPr/>
+          </a:p>
         </p:txBody>
       </p:sp>
       <p:sp>
@@ -6562,7 +6661,10 @@
         </p:spPr>
         <p:txBody>
           <a:bodyPr/>
-          <a:p/>
+          <a:p>
+            <a:pPr/>
+            <a:endParaRPr/>
+          </a:p>
         </p:txBody>
       </p:sp>
       <p:sp>
@@ -6619,7 +6721,10 @@
         </p:spPr>
         <p:txBody>
           <a:bodyPr/>
-          <a:p/>
+          <a:p>
+            <a:pPr/>
+            <a:endParaRPr/>
+          </a:p>
         </p:txBody>
       </p:sp>
       <p:sp>
@@ -6755,7 +6860,10 @@
         </p:spPr>
         <p:txBody>
           <a:bodyPr/>
-          <a:p/>
+          <a:p>
+            <a:pPr/>
+            <a:endParaRPr/>
+          </a:p>
         </p:txBody>
       </p:sp>
       <p:sp>
@@ -6812,7 +6920,10 @@
         </p:spPr>
         <p:txBody>
           <a:bodyPr/>
-          <a:p/>
+          <a:p>
+            <a:pPr/>
+            <a:endParaRPr/>
+          </a:p>
         </p:txBody>
       </p:sp>
       <p:sp>
@@ -6968,7 +7079,10 @@
         </p:spPr>
         <p:txBody>
           <a:bodyPr/>
-          <a:p/>
+          <a:p>
+            <a:pPr/>
+            <a:endParaRPr/>
+          </a:p>
         </p:txBody>
       </p:sp>
       <p:sp>
@@ -7025,7 +7139,10 @@
         </p:spPr>
         <p:txBody>
           <a:bodyPr/>
-          <a:p/>
+          <a:p>
+            <a:pPr/>
+            <a:endParaRPr/>
+          </a:p>
         </p:txBody>
       </p:sp>
       <p:sp>
@@ -7191,7 +7308,10 @@
         </p:spPr>
         <p:txBody>
           <a:bodyPr/>
-          <a:p/>
+          <a:p>
+            <a:pPr/>
+            <a:endParaRPr/>
+          </a:p>
         </p:txBody>
       </p:sp>
       <p:sp>
@@ -7285,7 +7405,10 @@
         </p:spPr>
         <p:txBody>
           <a:bodyPr/>
-          <a:p/>
+          <a:p>
+            <a:pPr/>
+            <a:endParaRPr/>
+          </a:p>
         </p:txBody>
       </p:sp>
       <p:sp>
@@ -7316,7 +7439,10 @@
         </p:spPr>
         <p:txBody>
           <a:bodyPr/>
-          <a:p/>
+          <a:p>
+            <a:pPr/>
+            <a:endParaRPr/>
+          </a:p>
         </p:txBody>
       </p:sp>
       <p:sp>
@@ -7410,7 +7536,10 @@
         </p:spPr>
         <p:txBody>
           <a:bodyPr/>
-          <a:p/>
+          <a:p>
+            <a:pPr/>
+            <a:endParaRPr/>
+          </a:p>
         </p:txBody>
       </p:sp>
       <p:sp>
@@ -7441,7 +7570,10 @@
         </p:spPr>
         <p:txBody>
           <a:bodyPr/>
-          <a:p/>
+          <a:p>
+            <a:pPr/>
+            <a:endParaRPr/>
+          </a:p>
         </p:txBody>
       </p:sp>
       <p:sp>
@@ -7535,7 +7667,10 @@
         </p:spPr>
         <p:txBody>
           <a:bodyPr/>
-          <a:p/>
+          <a:p>
+            <a:pPr/>
+            <a:endParaRPr/>
+          </a:p>
         </p:txBody>
       </p:sp>
       <p:sp>
@@ -7566,7 +7701,10 @@
         </p:spPr>
         <p:txBody>
           <a:bodyPr/>
-          <a:p/>
+          <a:p>
+            <a:pPr/>
+            <a:endParaRPr/>
+          </a:p>
         </p:txBody>
       </p:sp>
       <p:sp>
@@ -7660,7 +7798,10 @@
         </p:spPr>
         <p:txBody>
           <a:bodyPr/>
-          <a:p/>
+          <a:p>
+            <a:pPr/>
+            <a:endParaRPr/>
+          </a:p>
         </p:txBody>
       </p:sp>
       <p:sp>
@@ -7691,7 +7832,10 @@
         </p:spPr>
         <p:txBody>
           <a:bodyPr/>
-          <a:p/>
+          <a:p>
+            <a:pPr/>
+            <a:endParaRPr/>
+          </a:p>
         </p:txBody>
       </p:sp>
       <p:sp>
@@ -7785,7 +7929,10 @@
         </p:spPr>
         <p:txBody>
           <a:bodyPr/>
-          <a:p/>
+          <a:p>
+            <a:pPr/>
+            <a:endParaRPr/>
+          </a:p>
         </p:txBody>
       </p:sp>
       <p:sp>
@@ -7816,7 +7963,10 @@
         </p:spPr>
         <p:txBody>
           <a:bodyPr/>
-          <a:p/>
+          <a:p>
+            <a:pPr/>
+            <a:endParaRPr/>
+          </a:p>
         </p:txBody>
       </p:sp>
       <p:sp>
@@ -7912,7 +8062,10 @@
         </p:spPr>
         <p:txBody>
           <a:bodyPr/>
-          <a:p/>
+          <a:p>
+            <a:pPr/>
+            <a:endParaRPr/>
+          </a:p>
         </p:txBody>
       </p:sp>
       <p:sp>
@@ -8020,7 +8173,10 @@
         </p:spPr>
         <p:txBody>
           <a:bodyPr/>
-          <a:p/>
+          <a:p>
+            <a:pPr/>
+            <a:endParaRPr/>
+          </a:p>
         </p:txBody>
       </p:sp>
       <p:sp>
@@ -8158,7 +8314,10 @@
         </p:spPr>
         <p:txBody>
           <a:bodyPr/>
-          <a:p/>
+          <a:p>
+            <a:pPr/>
+            <a:endParaRPr/>
+          </a:p>
         </p:txBody>
       </p:sp>
       <p:sp>
@@ -8373,7 +8532,7 @@
   <p:cSld>
     <p:spTree>
       <p:nvGrpSpPr>
-        <p:cNvPr id="203" name="" descr="&lt;Slide style={{ width: 1280, height: 720, background: '#FFFFFF', padding: 0, position: 'relative', fontFamily: 'PingFang SC' }}&gt;&#10;&#10;  &lt;Box style={{ position: 'absolute', top: 0, left: 0, width: 1280, height: 64, background: '#1E4FA8' }} /&gt;&#10;  &lt;Text style={{ position: 'absolute', left: 76, top: 21, fontSize: 15, color: '#C9D8EF', letterSpacing: 1 }}&gt;知迹 · 答辩汇报&lt;/Text&gt;&#10;  &lt;Text style={{ position: 'absolute', left: 1010, top: 21, width: 194, textAlign: 'right', fontSize: 15, color: '#C9D8EF' }}&gt;赛道十三 · 智慧教育&lt;/Text&gt;&#10;&#10;  &lt;Box style={{ position: 'absolute', left: 76, top: 96, width: 1128 }}&gt;&#10;    &lt;Text style={{ fontSize: 34, fontWeight: 'bold', color: '#0E3F8C' }}&gt;六个功能，一条主线&lt;/Text&gt;&#10;    &lt;Text style={{ fontSize: 16, color: '#4A5568', marginTop: 10 }}&gt;不是并列的功能清单——每一个都在把&quot;今天的碎片&quot;变成&quot;期末能练的题&quot;&lt;/Text&gt;&#10;  &lt;/Box&gt;&#10;&#10;  &lt;Box style={{ position: 'absolute', left: 76, top: 190, width: 296, height: 462, flexDirection: 'column' }}&gt;&#10;&#10;    &lt;Text style={{ fontSize: 14, color: '#3D7BD9', letterSpacing: 1.5 }}&gt;主线&lt;/Text&gt;&#10;&#10;    &lt;Text style={{ fontSize: 24, fontWeight: 'bold', color: '#0E3F8C', lineHeight: 1.45, marginTop: 12 }}&gt;&#10;      沉淀 → 复习&#10;    &lt;/Text&gt;&#10;&#10;    &lt;Text style={{ fontSize: 14.5, color: '#4A5568', lineHeight: 1.75, marginTop: 10 }}&gt;&#10;      所有功能都服务这一个方向；没有一个是&quot;顺便加的&quot;。&#10;    &lt;/Text&gt;&#10;&#10;    &lt;Box style={{ flexDirection: 'column', marginTop: 22, gap: 16 }}&gt;&#10;&#10;      &lt;Box style={{ flexDirection: 'column', borderLeft: '2px solid #3D7BD9', paddingLeft: 12 }}&gt;&#10;        &lt;Text style={{ fontSize: 14, fontWeight: 'bold', color: '#1A2230' }}&gt;资料 → 片段&lt;/Text&gt;&#10;        &lt;Text style={{ fontSize: 13, color: '#8B97A8', lineHeight: 1.6, marginTop: 4 }}&gt;秒传 · 懒解析 · 按页切块&lt;/Text&gt;&#10;      &lt;/Box&gt;&#10;&#10;      &lt;Box style={{ flexDirection: 'column', borderLeft: '2px solid #3D7BD9', paddingLeft: 12 }}&gt;&#10;        &lt;Text style={{ fontSize: 14, fontWeight: 'bold', color: '#1A2230' }}&gt;片段 → 题&lt;/Text&gt;&#10;        &lt;Text style={{ fontSize: 13, color: '#8B97A8', lineHeight: 1.6, marginTop: 4 }}&gt;错因驱动 · 变式题 · 详解&lt;/Text&gt;&#10;      &lt;/Box&gt;&#10;&#10;      &lt;Box style={{ flexDirection: 'column', borderLeft: '2px solid #3D7BD9', paddingLeft: 12 }}&gt;&#10;        &lt;Text style={{ fontSize: 14, fontWeight: 'bold', color: '#1A2230' }}&gt;题 → 掌握度&lt;/Text&gt;&#10;        &lt;Text style={{ fontSize: 13, color: '#8B97A8', lineHeight: 1.6, marginTop: 4 }}&gt;自评 · 间隔重复 · 薄弱学科&lt;/Text&gt;&#10;      &lt;/Box&gt;&#10;&#10;    &lt;/Box&gt;&#10;&#10;    &lt;Box style={{ marginTop: 20, background: '#F7F9FC', borderRadius: 8, padding: 14, flexDirection: 'column', gap: 8 }}&gt;&#10;      &lt;Box style={{ flexDirection: 'row', alignItems: 'center', gap: 8 }}&gt;&#10;        &lt;Text style={{ fontSize: 18, fontWeight: 'bold', color: '#1E4FA8' }}&gt;7&lt;/Text&gt;&#10;        &lt;Text style={{ fontSize: 13, color: '#4A5568' }}&gt;个功能页面&lt;/Text&gt;&#10;      &lt;/Box&gt;&#10;      &lt;Box style={{ flexDirection: 'row', alignItems: 'center', gap: 8 }}&gt;&#10;        &lt;Text style={{ fontSize: 18, fontWeight: 'bold', color: '#1E4FA8' }}&gt;1&lt;/Text&gt;&#10;        &lt;Text style={{ fontSize: 13, color: '#4A5568' }}&gt;个 SQLite 文件承载全部数据&lt;/Text&gt;&#10;      &lt;/Box&gt;&#10;    &lt;/Box&gt;&#10;&#10;  &lt;/Box&gt;&#10;&#10;  &lt;Box style={{ position: 'absolute', left: 412, top: 190, width: 792, height: 470, flexDirection: 'column', justifyContent: 'space-between' }}&gt;&#10;&#10;    &lt;Box style={{ flexDirection: 'row', alignItems: 'center', height: 64, background: '#F9FAFC', borderRadius: 6, paddingLeft: 14, paddingRight: 16 }}&gt;&#10;      &lt;Box style={{ width: 32, height: 32, borderRadius: 6, background: '#1E4FA8', justifyContent: 'center', alignItems: 'center' }}&gt;&#10;        &lt;Text style={{ fontSize: 15, fontWeight: 'bold', color: '#FFFFFF' }}&gt;1&lt;/Text&gt;&#10;      &lt;/Box&gt;&#10;      &lt;Text style={{ fontSize: 17, fontWeight: 'bold', color: '#1A2230', width: 208, marginLeft: 14 }}&gt;多格式资料入库&lt;/Text&gt;&#10;      &lt;Text style={{ fontSize: 14.5, color: '#4A5568', width: 500 }}&gt;PDF / Word / PPT / Excel 秒传，解析后按页切块&lt;/Text&gt;&#10;    &lt;/Box&gt;&#10;&#10;    &lt;Box style={{ flexDirection: 'row', alignItems: 'center', height: 64, background: '#FFFFFF', borderRadius: 6, paddingLeft: 14, paddingRight: 16, marginTop: 6 }}&gt;&#10;      &lt;Box style={{ width: 32, height: 32, borderRadius: 6, background: '#1E4FA8', justifyContent: 'center', alignItems: 'center' }}&gt;&#10;        &lt;Text style={{ fontSize: 15, fontWeight: 'bold', color: '#FFFFFF' }}&gt;2&lt;/Text&gt;&#10;      &lt;/Box&gt;&#10;      &lt;Text style={{ fontSize: 17, fontWeight: 'bold', color: '#1A2230', width: 208, marginLeft: 14 }}&gt;溯源问答&lt;/Text&gt;&#10;      &lt;Text style={{ fontSize: 14.5, color: '#4A5568', width: 500 }}&gt;四路召回 + RRF 融合，回答标注出自哪份资料哪一页&lt;/Text&gt;&#10;    &lt;/Box&gt;&#10;&#10;    &lt;Box style={{ flexDirection: 'row', alignItems: 'center', height: 64, background: '#F9FAFC', borderRadius: 6, paddingLeft: 14, paddingRight: 16, marginTop: 6 }}&gt;&#10;      &lt;Box style={{ width: 32, height: 32, borderRadius: 6, background: '#1E4FA8', justifyContent: 'center', alignItems: 'center' }}&gt;&#10;        &lt;Text style={{ fontSize: 15, fontWeight: 'bold', color: '#FFFFFF' }}&gt;3&lt;/Text&gt;&#10;      &lt;/Box&gt;&#10;      &lt;Text style={{ fontSize: 17, fontWeight: 'bold', color: '#1A2230', width: 208, marginLeft: 14 }}&gt;图片板书入库&lt;/Text&gt;&#10;      &lt;Text style={{ fontSize: 14.5, color: '#4A5568', width: 500 }}&gt;拍照的板书由多模态模型转写成文字后入库，可被检索&lt;/Text&gt;&#10;    &lt;/Box&gt;&#10;&#10;    &lt;Box style={{ flexDirection: 'row', alignItems: 'center', height: 64, background: '#FFFFFF', borderRadius: 6, paddingLeft: 14, paddingRight: 16, marginTop: 6 }}&gt;&#10;      &lt;Box style={{ width: 32, height: 32, borderRadius: 6, background: '#1E4FA8', justifyContent: 'center', alignItems: 'center' }}&gt;&#10;        &lt;Text style={{ fontSize: 15, fontWeight: 'bold', color: '#FFFFFF' }}&gt;4&lt;/Text&gt;&#10;      &lt;/Box&gt;&#10;      &lt;Text style={{ fontSize: 17, fontWeight: 'bold', color: '#1A2230', width: 208, marginLeft: 14 }}&gt;错题按类型归档&lt;/Text&gt;&#10;      &lt;Text style={{ fontSize: 14.5, color: '#4A5568', width: 500 }}&gt;概念混淆 / 步骤遗漏 / 条件误读 / 计算失误 / 表述不清&lt;/Text&gt;&#10;    &lt;/Box&gt;&#10;&#10;    &lt;Box style={{ flexDirection: 'row', alignItems: 'center', height: 64, background: '#F9FAFC', borderRadius: 6, paddingLeft: 14, paddingRight: 16, marginTop: 6 }}&gt;&#10;      &lt;Box style={{ width: 32, height: 32, borderRadius: 6, background: '#1E4FA8', justifyContent: 'center', alignItems: 'center' }}&gt;&#10;        &lt;Text style={{ fontSize: 15, fontWeight: 'bold', color: '#FFFFFF' }}&gt;5&lt;/Text&gt;&#10;      &lt;/Box&gt;&#10;      &lt;Text style={{ fontSize: 17, fontWeight: 'bold', color: '#1A2230', width: 208, marginLeft: 14 }}&gt;变式题与详解&lt;/Text&gt;&#10;      &lt;Text style={{ fontSize: 14.5, color: '#4A5568', width: 500 }}&gt;由错因生成新题，作答后可看参考答案与关键步骤&lt;/Text&gt;&#10;    &lt;/Box&gt;&#10;&#10;    &lt;Box style={{ flexDirection: 'row', alignItems: 'center', height: 64, background: '#FFFFFF', borderRadius: 6, paddingLeft: 14, paddingRight: 16, marginTop: 6 }}&gt;&#10;      &lt;Box style={{ width: 32, height: 32, borderRadius: 6, background: '#1E4FA8', justifyContent: 'center', alignItems: 'center' }}&gt;&#10;        &lt;Text style={{ fontSize: 15, fontWeight: 'bold', color: '#FFFFFF' }}&gt;6&lt;/Text&gt;&#10;      &lt;/Box&gt;&#10;      &lt;Text style={{ fontSize: 17, fontWeight: 'bold', color: '#1A2230', width: 208, marginLeft: 14 }}&gt;今日复习与日程&lt;/Text&gt;&#10;      &lt;Text style={{ fontSize: 14.5, color: '#4A5568', width: 500 }}&gt;到期题 / 薄弱学科 / 近期误区，再加&quot;什么时候做&quot;&lt;/Text&gt;&#10;    &lt;/Box&gt;&#10;&#10;    &lt;Box style={{ flexDirection: 'row', alignItems: 'center', height: 36, background: '#0E3F8C', borderRadius: 6, marginTop: 8, paddingLeft: 16 }}&gt;&#10;      &lt;Text style={{ fontSize: 14.5, color: '#FFFFFF' }}&gt;&#10;        六项功能共用一套数据：片段、题、掌握度——不是六个各自为政的小工具&#10;      &lt;/Text&gt;&#10;    &lt;/Box&gt;&#10;&#10;  &lt;/Box&gt;&#10;&#10;  &lt;Box style={{ position: 'absolute', left: 76, bottom: 24, width: 1128, height: 22, flexDirection: 'row', alignItems: 'center', justifyContent: 'space-between' }}&gt;&#10;    &lt;Text style={{ fontSize: 13, color: '#8B97A8' }}&gt;知迹 · 基于大模型智能体的 AI 教育学习系统&lt;/Text&gt;&#10;    &lt;Text style={{ fontSize: 14, fontWeight: 'bold', color: '#0E3F8C' }}&gt;05 / 10&lt;/Text&gt;&#10;  &lt;/Box&gt;&#10;&#10;&lt;/Slide&gt;&#10;"/>
+        <p:cNvPr id="203" name=""/>
         <p:cNvGrpSpPr/>
         <p:nvPr/>
       </p:nvGrpSpPr>
@@ -8406,7 +8565,10 @@
         </p:spPr>
         <p:txBody>
           <a:bodyPr/>
-          <a:p/>
+          <a:p>
+            <a:pPr/>
+            <a:endParaRPr/>
+          </a:p>
         </p:txBody>
       </p:sp>
       <p:sp>
@@ -8430,7 +8592,10 @@
         </p:spPr>
         <p:txBody>
           <a:bodyPr/>
-          <a:p/>
+          <a:p>
+            <a:pPr/>
+            <a:endParaRPr/>
+          </a:p>
         </p:txBody>
       </p:sp>
       <p:sp>
@@ -8887,7 +9052,10 @@
         </p:spPr>
         <p:txBody>
           <a:bodyPr/>
-          <a:p/>
+          <a:p>
+            <a:pPr/>
+            <a:endParaRPr/>
+          </a:p>
         </p:txBody>
       </p:sp>
       <p:sp>
@@ -9057,7 +9225,10 @@
         </p:spPr>
         <p:txBody>
           <a:bodyPr/>
-          <a:p/>
+          <a:p>
+            <a:pPr/>
+            <a:endParaRPr/>
+          </a:p>
         </p:txBody>
       </p:sp>
       <p:sp>
@@ -9227,7 +9398,10 @@
         </p:spPr>
         <p:txBody>
           <a:bodyPr/>
-          <a:p/>
+          <a:p>
+            <a:pPr/>
+            <a:endParaRPr/>
+          </a:p>
         </p:txBody>
       </p:sp>
       <p:sp>
@@ -9383,7 +9557,10 @@
         </p:spPr>
         <p:txBody>
           <a:bodyPr/>
-          <a:p/>
+          <a:p>
+            <a:pPr/>
+            <a:endParaRPr/>
+          </a:p>
         </p:txBody>
       </p:sp>
       <p:sp>
@@ -9569,7 +9746,10 @@
         </p:spPr>
         <p:txBody>
           <a:bodyPr/>
-          <a:p/>
+          <a:p>
+            <a:pPr/>
+            <a:endParaRPr/>
+          </a:p>
         </p:txBody>
       </p:sp>
       <p:sp>
@@ -9595,7 +9775,10 @@
         </p:spPr>
         <p:txBody>
           <a:bodyPr/>
-          <a:p/>
+          <a:p>
+            <a:pPr/>
+            <a:endParaRPr/>
+          </a:p>
         </p:txBody>
       </p:sp>
       <p:sp>
@@ -9736,7 +9919,10 @@
         </p:spPr>
         <p:txBody>
           <a:bodyPr/>
-          <a:p/>
+          <a:p>
+            <a:pPr/>
+            <a:endParaRPr/>
+          </a:p>
         </p:txBody>
       </p:sp>
       <p:sp>
@@ -9762,7 +9948,10 @@
         </p:spPr>
         <p:txBody>
           <a:bodyPr/>
-          <a:p/>
+          <a:p>
+            <a:pPr/>
+            <a:endParaRPr/>
+          </a:p>
         </p:txBody>
       </p:sp>
       <p:sp>
@@ -9913,7 +10102,10 @@
         </p:spPr>
         <p:txBody>
           <a:bodyPr/>
-          <a:p/>
+          <a:p>
+            <a:pPr/>
+            <a:endParaRPr/>
+          </a:p>
         </p:txBody>
       </p:sp>
       <p:sp>
@@ -9939,7 +10131,10 @@
         </p:spPr>
         <p:txBody>
           <a:bodyPr/>
-          <a:p/>
+          <a:p>
+            <a:pPr/>
+            <a:endParaRPr/>
+          </a:p>
         </p:txBody>
       </p:sp>
       <p:sp>
@@ -10070,7 +10265,10 @@
         </p:spPr>
         <p:txBody>
           <a:bodyPr/>
-          <a:p/>
+          <a:p>
+            <a:pPr/>
+            <a:endParaRPr/>
+          </a:p>
         </p:txBody>
       </p:sp>
       <p:sp>
@@ -10096,7 +10294,10 @@
         </p:spPr>
         <p:txBody>
           <a:bodyPr/>
-          <a:p/>
+          <a:p>
+            <a:pPr/>
+            <a:endParaRPr/>
+          </a:p>
         </p:txBody>
       </p:sp>
       <p:sp>
@@ -10307,7 +10508,10 @@
         </p:spPr>
         <p:txBody>
           <a:bodyPr/>
-          <a:p/>
+          <a:p>
+            <a:pPr/>
+            <a:endParaRPr/>
+          </a:p>
         </p:txBody>
       </p:sp>
       <p:sp>
@@ -10333,7 +10537,10 @@
         </p:spPr>
         <p:txBody>
           <a:bodyPr/>
-          <a:p/>
+          <a:p>
+            <a:pPr/>
+            <a:endParaRPr/>
+          </a:p>
         </p:txBody>
       </p:sp>
       <p:sp>
@@ -10464,7 +10671,10 @@
         </p:spPr>
         <p:txBody>
           <a:bodyPr/>
-          <a:p/>
+          <a:p>
+            <a:pPr/>
+            <a:endParaRPr/>
+          </a:p>
         </p:txBody>
       </p:sp>
       <p:sp>
@@ -10490,7 +10700,10 @@
         </p:spPr>
         <p:txBody>
           <a:bodyPr/>
-          <a:p/>
+          <a:p>
+            <a:pPr/>
+            <a:endParaRPr/>
+          </a:p>
         </p:txBody>
       </p:sp>
       <p:sp>
@@ -10691,7 +10904,10 @@
         </p:spPr>
         <p:txBody>
           <a:bodyPr/>
-          <a:p/>
+          <a:p>
+            <a:pPr/>
+            <a:endParaRPr/>
+          </a:p>
         </p:txBody>
       </p:sp>
       <p:sp>
@@ -10849,7 +11065,7 @@
   <p:cSld>
     <p:spTree>
       <p:nvGrpSpPr>
-        <p:cNvPr id="261" name="" descr="&lt;Slide style={{ width: 1280, height: 720, background: '#FFFFFF', padding: 0, position: 'relative', fontFamily: 'PingFang SC' }}&gt;&#10;&#10;  &lt;Box style={{ position: 'absolute', top: 0, left: 0, width: 1280, height: 64, background: '#1E4FA8' }} /&gt;&#10;  &lt;Text style={{ position: 'absolute', left: 76, top: 21, fontSize: 15, color: '#C9D8EF', letterSpacing: 1 }}&gt;知迹 · 答辩汇报&lt;/Text&gt;&#10;  &lt;Text style={{ position: 'absolute', left: 1010, top: 21, width: 194, textAlign: 'right', fontSize: 15, color: '#C9D8EF' }}&gt;赛道十三 · 智慧教育&lt;/Text&gt;&#10;&#10;  &lt;Box style={{ position: 'absolute', left: 76, top: 96, width: 1128 }}&gt;&#10;    &lt;Text style={{ fontSize: 34, fontWeight: 'bold', color: '#0E3F8C' }}&gt;三条承诺，写在执行层而不是提示词里&lt;/Text&gt;&#10;    &lt;Text style={{ fontSize: 16, color: '#4A5568', marginTop: 10 }}&gt;最小权限、人在环、可评测——每一条都能指出对应的代码位置，而不是一句口号&lt;/Text&gt;&#10;  &lt;/Box&gt;&#10;&#10;  &lt;Box style={{ position: 'absolute', left: 76, top: 196, width: 648, height: 458, flexDirection: 'column' }}&gt;&#10;&#10;    &lt;Box style={{ flexDirection: 'column', height: 146 }}&gt;&#10;      &lt;Box style={{ flexDirection: 'row', alignItems: 'center', gap: 10 }}&gt;&#10;        &lt;Box style={{ width: 26, height: 26, borderRadius: 5, background: '#1E4FA8', justifyContent: 'center', alignItems: 'center' }}&gt;&#10;          &lt;Text style={{ fontSize: 13, fontWeight: 'bold', color: '#FFFFFF' }}&gt;1&lt;/Text&gt;&#10;        &lt;/Box&gt;&#10;        &lt;Text style={{ fontSize: 19, fontWeight: 'bold', color: '#1A2230' }}&gt;工具最小权限，做两层&lt;/Text&gt;&#10;      &lt;/Box&gt;&#10;      &lt;Text style={{ fontSize: 14.5, color: '#4A5568', lineHeight: 1.75, marginTop: 10 }}&gt;&#10;        schema 层决定&quot;模型看得见哪些工具&quot;，执行层再决定&quot;能不能真的跑&quot;：练习 agent 只读、进度 agent 无工具、写操作一律拒绝。&#10;      &lt;/Text&gt;&#10;      &lt;Text style={{ fontSize: 13.5, color: '#8B97A8', lineHeight: 1.7, marginTop: 6 }}&gt;&#10;        只做一层都会失效：模型会反复尝试，或说出被禁工具名后失败。&#10;      &lt;/Text&gt;&#10;    &lt;/Box&gt;&#10;&#10;    &lt;Box style={{ flexDirection: 'column', height: 146, marginTop: 10 }}&gt;&#10;      &lt;Box style={{ flexDirection: 'row', alignItems: 'center', gap: 10 }}&gt;&#10;        &lt;Box style={{ width: 26, height: 26, borderRadius: 5, background: '#1E4FA8', justifyContent: 'center', alignItems: 'center' }}&gt;&#10;          &lt;Text style={{ fontSize: 13, fontWeight: 'bold', color: '#FFFFFF' }}&gt;2&lt;/Text&gt;&#10;        &lt;/Box&gt;&#10;        &lt;Text style={{ fontSize: 19, fontWeight: 'bold', color: '#1A2230' }}&gt;人在环：写操作先暂停&lt;/Text&gt;&#10;      &lt;/Box&gt;&#10;      &lt;Text style={{ fontSize: 14.5, color: '#4A5568', lineHeight: 1.75, marginTop: 10 }}&gt;&#10;        模型要落库时，图在 interrupt 节点暂停；用户点确认后用 Command 从检查点恢复，才真正写入&quot;记住 / 错题&quot;这类数据。&#10;      &lt;/Text&gt;&#10;      &lt;Text style={{ fontSize: 13.5, color: '#8B97A8', lineHeight: 1.7, marginTop: 6 }}&gt;&#10;        不确认就不恢复，流程结构上保证不落库。&#10;      &lt;/Text&gt;&#10;    &lt;/Box&gt;&#10;&#10;    &lt;Box style={{ flexDirection: 'column', height: 146, marginTop: 10 }}&gt;&#10;      &lt;Box style={{ flexDirection: 'row', alignItems: 'center', gap: 10 }}&gt;&#10;        &lt;Box style={{ width: 26, height: 26, borderRadius: 5, background: '#1E4FA8', justifyContent: 'center', alignItems: 'center' }}&gt;&#10;          &lt;Text style={{ fontSize: 13, fontWeight: 'bold', color: '#FFFFFF' }}&gt;3&lt;/Text&gt;&#10;        &lt;/Box&gt;&#10;        &lt;Text style={{ fontSize: 19, fontWeight: 'bold', color: '#1A2230' }}&gt;可评测：有考卷也有门禁&lt;/Text&gt;&#10;      &lt;/Box&gt;&#10;      &lt;Text style={{ fontSize: 14.5, color: '#4A5568', lineHeight: 1.75, marginTop: 10 }}&gt;&#10;        检索 9 题、意图 15 句，各有固定考卷与基线 JSON；改动后重跑，掉出容差命令即返回非零，可直接进 CI。&#10;      &lt;/Text&gt;&#10;      &lt;Text style={{ fontSize: 13.5, color: '#8B97A8', lineHeight: 1.7, marginTop: 6 }}&gt;&#10;        把靠感觉判断，变成靠数字判断。&#10;      &lt;/Text&gt;&#10;    &lt;/Box&gt;&#10;&#10;  &lt;/Box&gt;&#10;&#10;  &lt;Box style={{ position: 'absolute', left: 764, top: 196, width: 440, height: 458, flexDirection: 'column' }}&gt;&#10;&#10;    &lt;Box style={{ background: '#0E3F8C', borderRadius: 8, padding: 22, height: 200, flexDirection: 'column', justifyContent: 'space-between' }}&gt;&#10;      &lt;Text style={{ fontSize: 14, color: '#8FB2E0', letterSpacing: 1.5 }}&gt;为什么值得讲&lt;/Text&gt;&#10;      &lt;Text style={{ fontSize: 19, fontWeight: 'bold', color: '#FFFFFF', lineHeight: 1.55 }}&gt;&#10;        这三条是&quot;产品承诺&quot;，因为它们在执行层强制，而不是写在提示词里。&#10;      &lt;/Text&gt;&#10;      &lt;Text style={{ fontSize: 13.5, color: '#B9CCE8', lineHeight: 1.6 }}&gt;&#10;        提示词可以被绕过，代码路径不能。&#10;      &lt;/Text&gt;&#10;    &lt;/Box&gt;&#10;&#10;    &lt;Box style={{ flexDirection: 'column', marginTop: 16, gap: 12 }}&gt;&#10;&#10;      &lt;Box style={{ flexDirection: 'column', borderLeft: '2px solid #3D7BD9', paddingLeft: 12 }}&gt;&#10;        &lt;Text style={{ fontSize: 14.5, fontWeight: 'bold', color: '#1A2230' }}&gt;权限&lt;/Text&gt;&#10;        &lt;Text style={{ fontSize: 13.5, color: '#4A5568', lineHeight: 1.65, marginTop: 4 }}&gt;角色 → 可见工具 → 是否放行，三列可查&lt;/Text&gt;&#10;      &lt;/Box&gt;&#10;&#10;      &lt;Box style={{ flexDirection: 'column', borderLeft: '2px solid #3D7BD9', paddingLeft: 12 }}&gt;&#10;        &lt;Text style={{ fontSize: 14.5, fontWeight: 'bold', color: '#1A2230' }}&gt;中断&lt;/Text&gt;&#10;        &lt;Text style={{ fontSize: 13.5, color: '#4A5568', lineHeight: 1.65, marginTop: 4 }}&gt;图里的节点，能在回合过程中停下等人&lt;/Text&gt;&#10;      &lt;/Box&gt;&#10;&#10;      &lt;Box style={{ flexDirection: 'column', borderLeft: '2px solid #3D7BD9', paddingLeft: 12 }}&gt;&#10;        &lt;Text style={{ fontSize: 14.5, fontWeight: 'bold', color: '#1A2230' }}&gt;门禁&lt;/Text&gt;&#10;        &lt;Text style={{ fontSize: 13.5, color: '#4A5568', lineHeight: 1.65, marginTop: 4 }}&gt;两份 JSON 基线，掉分即失败，不是看一眼&lt;/Text&gt;&#10;      &lt;/Box&gt;&#10;&#10;      &lt;Box style={{ flexDirection: 'column', borderLeft: '2px solid #3D7BD9', paddingLeft: 12 }}&gt;&#10;        &lt;Text style={{ fontSize: 14.5, fontWeight: 'bold', color: '#1A2230' }}&gt;痕迹&lt;/Text&gt;&#10;        &lt;Text style={{ fontSize: 13.5, color: '#4A5568', lineHeight: 1.65, marginTop: 4 }}&gt;每个回合有 trace，失败可归因到具体环节&lt;/Text&gt;&#10;      &lt;/Box&gt;&#10;&#10;    &lt;/Box&gt;&#10;&#10;  &lt;/Box&gt;&#10;&#10;  &lt;Box style={{ position: 'absolute', left: 76, bottom: 24, width: 1128, height: 22, flexDirection: 'row', alignItems: 'center', justifyContent: 'space-between' }}&gt;&#10;    &lt;Text style={{ fontSize: 13, color: '#8B97A8' }}&gt;知迹 · 基于大模型智能体的 AI 教育学习系统&lt;/Text&gt;&#10;    &lt;Text style={{ fontSize: 14, fontWeight: 'bold', color: '#0E3F8C' }}&gt;06 / 10&lt;/Text&gt;&#10;  &lt;/Box&gt;&#10;&#10;&lt;/Slide&gt;&#10;"/>
+        <p:cNvPr id="261" name="" descr="&lt;Slide style={{ width: 1280, height: 720, background: '#FFFFFF', padding: 0, position: 'relative', fontFamily: 'PingFang SC' }}&gt;&#10;&#10;  &lt;Box style={{ position: 'absolute', top: 0, left: 0, width: 1280, height: 64, background: '#1E4FA8' }} /&gt;&#10;  &lt;Text style={{ position: 'absolute', left: 76, top: 21, fontSize: 15, color: '#C9D8EF', letterSpacing: 1 }}&gt;知迹 · 答辩汇报&lt;/Text&gt;&#10;  &lt;Text style={{ position: 'absolute', left: 1010, top: 21, width: 194, textAlign: 'right', fontSize: 15, color: '#C9D8EF' }}&gt;赛道十三 · 智慧教育&lt;/Text&gt;&#10;&#10;  &lt;Box style={{ position: 'absolute', left: 76, top: 96, width: 1128 }}&gt;&#10;    &lt;Text style={{ fontSize: 34, fontWeight: 'bold', color: '#0E3F8C' }}&gt;三条承诺，写在执行层而不是提示词里&lt;/Text&gt;&#10;    &lt;Text style={{ fontSize: 16, color: '#4A5568', marginTop: 10 }}&gt;最小权限、人在环、可评测——每一条都能指出对应的代码位置，而不是一句口号&lt;/Text&gt;&#10;  &lt;/Box&gt;&#10;&#10;  &lt;Box style={{ position: 'absolute', left: 76, top: 196, width: 648, height: 458, flexDirection: 'column' }}&gt;&#10;&#10;    &lt;Box style={{ flexDirection: 'column', height: 146 }}&gt;&#10;      &lt;Box style={{ flexDirection: 'row', alignItems: 'center', gap: 10 }}&gt;&#10;        &lt;Box style={{ width: 26, height: 26, borderRadius: 5, background: '#1E4FA8', justifyContent: 'center', alignItems: 'center' }}&gt;&#10;          &lt;Text style={{ fontSize: 13, fontWeight: 'bold', color: '#FFFFFF' }}&gt;1&lt;/Text&gt;&#10;        &lt;/Box&gt;&#10;        &lt;Text style={{ fontSize: 19, fontWeight: 'bold', color: '#1A2230' }}&gt;工具最小权限，做两层&lt;/Text&gt;&#10;      &lt;/Box&gt;&#10;      &lt;Text style={{ fontSize: 14.5, color: '#4A5568', lineHeight: 1.75, marginTop: 10 }}&gt;&#10;        schema 层决定&quot;模型看得见哪些工具&quot;，执行层再决定&quot;能不能真的跑&quot;：练习 agent 只读、进度 agent 无工具、写操作一律拒绝。&#10;      &lt;/Text&gt;&#10;      &lt;Text style={{ fontSize: 13.5, color: '#8B97A8', lineHeight: 1.7, marginTop: 6 }}&gt;&#10;        只做一层都会失效：模型会反复尝试，或说出被禁工具名后失败。&#10;      &lt;/Text&gt;&#10;    &lt;/Box&gt;&#10;&#10;    &lt;Box style={{ flexDirection: 'column', height: 146, marginTop: 10 }}&gt;&#10;      &lt;Box style={{ flexDirection: 'row', alignItems: 'center', gap: 10 }}&gt;&#10;        &lt;Box style={{ width: 26, height: 26, borderRadius: 5, background: '#1E4FA8', justifyContent: 'center', alignItems: 'center' }}&gt;&#10;          &lt;Text style={{ fontSize: 13, fontWeight: 'bold', color: '#FFFFFF' }}&gt;2&lt;/Text&gt;&#10;        &lt;/Box&gt;&#10;        &lt;Text style={{ fontSize: 19, fontWeight: 'bold', color: '#1A2230' }}&gt;人在环：写操作先暂停&lt;/Text&gt;&#10;      &lt;/Box&gt;&#10;      &lt;Text style={{ fontSize: 14.5, color: '#4A5568', lineHeight: 1.75, marginTop: 10 }}&gt;&#10;        模型要落库时，图在 interrupt 节点暂停；用户点确认后用 Command 从检查点恢复，才真正写入&quot;记住 / 错题&quot;这类数据。&#10;      &lt;/Text&gt;&#10;      &lt;Text style={{ fontSize: 13.5, color: '#8B97A8', lineHeight: 1.7, marginTop: 6 }}&gt;&#10;        不确认就不恢复，流程结构上保证不落库。&#10;      &lt;/Text&gt;&#10;    &lt;/Box&gt;&#10;&#10;    &lt;Box style={{ flexDirection: 'column', height: 146, marginTop: 10 }}&gt;&#10;      &lt;Box style={{ flexDirection: 'row', alignItems: 'center', gap: 10 }}&gt;&#10;        &lt;Box style={{ width: 26, height: 26, borderRadius: 5, background: '#1E4FA8', justifyContent: 'center', alignItems: 'center' }}&gt;&#10;          &lt;Text style={{ fontSize: 13, fontWeight: 'bold', color: '#FFFFFF' }}&gt;3&lt;/Text&gt;&#10;        &lt;/Box&gt;&#10;        &lt;Text style={{ fontSize: 19, fontWeight: 'bold', color: '#1A2230' }}&gt;可评测：有考卷也有门禁&lt;/Text&gt;&#10;      &lt;/Box&gt;&#10;      &lt;Text style={{ fontSize: 14.5, color: '#4A5568', lineHeight: 1.75, marginTop: 10 }}&gt;&#10;        检索 35 题、意图 15 句，各有固定考卷与基线 JSON；改动后重跑，掉出容差命令即返回非零，可直接进 CI。&#10;      &lt;/Text&gt;&#10;      &lt;Text style={{ fontSize: 13.5, color: '#8B97A8', lineHeight: 1.7, marginTop: 6 }}&gt;&#10;        把靠感觉判断，变成靠数字判断。&#10;      &lt;/Text&gt;&#10;    &lt;/Box&gt;&#10;&#10;  &lt;/Box&gt;&#10;&#10;  &lt;Box style={{ position: 'absolute', left: 764, top: 196, width: 440, height: 458, flexDirection: 'column' }}&gt;&#10;&#10;    &lt;Box style={{ background: '#0E3F8C', borderRadius: 8, padding: 22, height: 200, flexDirection: 'column', justifyContent: 'space-between' }}&gt;&#10;      &lt;Text style={{ fontSize: 14, color: '#8FB2E0', letterSpacing: 1.5 }}&gt;为什么值得讲&lt;/Text&gt;&#10;      &lt;Text style={{ fontSize: 19, fontWeight: 'bold', color: '#FFFFFF', lineHeight: 1.55 }}&gt;&#10;        这三条是&quot;产品承诺&quot;，因为它们在执行层强制，而不是写在提示词里。&#10;      &lt;/Text&gt;&#10;      &lt;Text style={{ fontSize: 13.5, color: '#B9CCE8', lineHeight: 1.6 }}&gt;&#10;        提示词可以被绕过，代码路径不能。&#10;      &lt;/Text&gt;&#10;    &lt;/Box&gt;&#10;&#10;    &lt;Box style={{ flexDirection: 'column', marginTop: 16, gap: 12 }}&gt;&#10;&#10;      &lt;Box style={{ flexDirection: 'column', borderLeft: '2px solid #3D7BD9', paddingLeft: 12 }}&gt;&#10;        &lt;Text style={{ fontSize: 14.5, fontWeight: 'bold', color: '#1A2230' }}&gt;权限&lt;/Text&gt;&#10;        &lt;Text style={{ fontSize: 13.5, color: '#4A5568', lineHeight: 1.65, marginTop: 4 }}&gt;角色 → 可见工具 → 是否放行，三列可查&lt;/Text&gt;&#10;      &lt;/Box&gt;&#10;&#10;      &lt;Box style={{ flexDirection: 'column', borderLeft: '2px solid #3D7BD9', paddingLeft: 12 }}&gt;&#10;        &lt;Text style={{ fontSize: 14.5, fontWeight: 'bold', color: '#1A2230' }}&gt;中断&lt;/Text&gt;&#10;        &lt;Text style={{ fontSize: 13.5, color: '#4A5568', lineHeight: 1.65, marginTop: 4 }}&gt;图里的节点，能在回合过程中停下等人&lt;/Text&gt;&#10;      &lt;/Box&gt;&#10;&#10;      &lt;Box style={{ flexDirection: 'column', borderLeft: '2px solid #3D7BD9', paddingLeft: 12 }}&gt;&#10;        &lt;Text style={{ fontSize: 14.5, fontWeight: 'bold', color: '#1A2230' }}&gt;门禁&lt;/Text&gt;&#10;        &lt;Text style={{ fontSize: 13.5, color: '#4A5568', lineHeight: 1.65, marginTop: 4 }}&gt;两份 JSON 基线，掉分即失败，不是看一眼&lt;/Text&gt;&#10;      &lt;/Box&gt;&#10;&#10;      &lt;Box style={{ flexDirection: 'column', borderLeft: '2px solid #3D7BD9', paddingLeft: 12 }}&gt;&#10;        &lt;Text style={{ fontSize: 14.5, fontWeight: 'bold', color: '#1A2230' }}&gt;痕迹&lt;/Text&gt;&#10;        &lt;Text style={{ fontSize: 13.5, color: '#4A5568', lineHeight: 1.65, marginTop: 4 }}&gt;每个回合有 trace，失败可归因到具体环节&lt;/Text&gt;&#10;      &lt;/Box&gt;&#10;&#10;    &lt;/Box&gt;&#10;&#10;  &lt;/Box&gt;&#10;&#10;  &lt;Box style={{ position: 'absolute', left: 76, bottom: 24, width: 1128, height: 22, flexDirection: 'row', alignItems: 'center', justifyContent: 'space-between' }}&gt;&#10;    &lt;Text style={{ fontSize: 13, color: '#8B97A8' }}&gt;知迹 · 基于大模型智能体的 AI 教育学习系统&lt;/Text&gt;&#10;    &lt;Text style={{ fontSize: 14, fontWeight: 'bold', color: '#0E3F8C' }}&gt;06 / 10&lt;/Text&gt;&#10;  &lt;/Box&gt;&#10;&#10;&lt;/Slide&gt;&#10;"/>
         <p:cNvGrpSpPr/>
         <p:nvPr/>
       </p:nvGrpSpPr>
@@ -11792,7 +12008,7 @@
                 <a:latin typeface="PingFang SC"/>
                 <a:ea typeface="PingFang SC"/>
               </a:rPr>
-              <a:t xml:space="preserve"> 9 </a:t>
+              <a:t xml:space="preserve"> 35 </a:t>
             </a:r>
             <a:r>
               <a:rPr lang="zh-CN" sz="1088">
@@ -12716,7 +12932,7 @@
   <p:cSld>
     <p:spTree>
       <p:nvGrpSpPr>
-        <p:cNvPr id="301" name="" descr="&lt;Slide style={{ width: 1280, height: 720, background: '#FFFFFF', padding: 0, position: 'relative', fontFamily: 'PingFang SC' }}&gt;&#10;&#10;  &lt;Box style={{ position: 'absolute', top: 0, left: 0, width: 1280, height: 64, background: '#1E4FA8' }} /&gt;&#10;  &lt;Text style={{ position: 'absolute', left: 76, top: 21, fontSize: 15, color: '#C9D8EF', letterSpacing: 1 }}&gt;知迹 · 答辩汇报&lt;/Text&gt;&#10;  &lt;Text style={{ position: 'absolute', left: 1010, top: 21, width: 194, textAlign: 'right', fontSize: 15, color: '#C9D8EF' }}&gt;赛道十三 · 智慧教育&lt;/Text&gt;&#10;&#10;  &lt;Box style={{ position: 'absolute', left: 76, top: 96, width: 1128 }}&gt;&#10;    &lt;Text style={{ fontSize: 34, fontWeight: 'bold', color: '#0E3F8C' }}&gt;可评测，所以可改进&lt;/Text&gt;&#10;    &lt;Text style={{ fontSize: 16, color: '#4A5568', marginTop: 10 }}&gt;数字的意义不在满分，而在&quot;有固定考卷和基线门禁&quot;——改动会掉分，掉分会被发现&lt;/Text&gt;&#10;  &lt;/Box&gt;&#10;&#10;  &lt;Box style={{ position: 'absolute', left: 76, top: 188, width: 1128, height: 176, flexDirection: 'row' }}&gt;&#10;&#10;    &lt;Box style={{ width: 258, flexDirection: 'column', justifyContent: 'flex-end' }}&gt;&#10;      &lt;Box style={{ flexDirection: 'row', alignItems: 'flex-end', gap: 8 }}&gt;&#10;        &lt;Text style={{ fontSize: 84, fontWeight: 'bold', color: '#1E4FA8', lineHeight: 1 }}&gt;279&lt;/Text&gt;&#10;        &lt;Text style={{ fontSize: 18, color: '#4A5568', paddingBottom: 10 }}&gt;项&lt;/Text&gt;&#10;      &lt;/Box&gt;&#10;      &lt;Text style={{ fontSize: 15, fontWeight: 'bold', color: '#1A2230', marginTop: 10 }}&gt;自动化测试&lt;/Text&gt;&#10;      &lt;Text style={{ fontSize: 13, color: '#8B97A8', marginTop: 4 }}&gt;全程离线 · 零 API 消耗&lt;/Text&gt;&#10;    &lt;/Box&gt;&#10;&#10;    &lt;Box style={{ width: 1, height: 140, background: '#E5E7EB', marginLeft: 26, marginRight: 26 }} /&gt;&#10;&#10;    &lt;Box style={{ width: 232, flexDirection: 'column', justifyContent: 'flex-end' }}&gt;&#10;      &lt;Text style={{ fontSize: 84, fontWeight: 'bold', color: '#1E4FA8', lineHeight: 1 }}&gt;1.0&lt;/Text&gt;&#10;      &lt;Text style={{ fontSize: 15, fontWeight: 'bold', color: '#1A2230', marginTop: 10 }}&gt;检索 Hit@3 与 MRR&lt;/Text&gt;&#10;      &lt;Text style={{ fontSize: 13, color: '#8B97A8', marginTop: 4 }}&gt;评测集 9 题&lt;/Text&gt;&#10;    &lt;/Box&gt;&#10;&#10;    &lt;Box style={{ width: 1, height: 140, background: '#E5E7EB', marginLeft: 26, marginRight: 26 }} /&gt;&#10;&#10;    &lt;Box style={{ width: 232, flexDirection: 'column', justifyContent: 'flex-end' }}&gt;&#10;      &lt;Text style={{ fontSize: 84, fontWeight: 'bold', color: '#1E4FA8', lineHeight: 1 }}&gt;1.0&lt;/Text&gt;&#10;      &lt;Text style={{ fontSize: 15, fontWeight: 'bold', color: '#1A2230', marginTop: 10 }}&gt;意图分类准确率&lt;/Text&gt;&#10;      &lt;Text style={{ fontSize: 13, color: '#8B97A8', marginTop: 4 }}&gt;评测集 15 句&lt;/Text&gt;&#10;    &lt;/Box&gt;&#10;&#10;    &lt;Box style={{ width: 1, height: 140, background: '#E5E7EB', marginLeft: 26, marginRight: 26 }} /&gt;&#10;&#10;    &lt;Box style={{ width: 232, flexDirection: 'column', justifyContent: 'flex-end' }}&gt;&#10;      &lt;Text style={{ fontSize: 84, fontWeight: 'bold', color: '#1E4FA8', lineHeight: 1 }}&gt;0&lt;/Text&gt;&#10;      &lt;Text style={{ fontSize: 15, fontWeight: 'bold', color: '#1A2230', marginTop: 10 }}&gt;测试期外部调用&lt;/Text&gt;&#10;      &lt;Text style={{ fontSize: 13, color: '#8B97A8', marginTop: 4 }}&gt;Mock 模型，可离线跑&lt;/Text&gt;&#10;    &lt;/Box&gt;&#10;&#10;  &lt;/Box&gt;&#10;&#10;  &lt;Box style={{ position: 'absolute', left: 76, top: 392, width: 1128, height: 262, flexDirection: 'row', gap: 20 }}&gt;&#10;&#10;    &lt;Box style={{ width: 554, flexDirection: 'column', background: '#F7F9FC', borderRadius: 8, padding: 22 }}&gt;&#10;      &lt;Text style={{ fontSize: 14, color: '#3D7BD9', letterSpacing: 1.5 }}&gt;这些数字说明什么&lt;/Text&gt;&#10;      &lt;Text style={{ fontSize: 16, color: '#1A2230', lineHeight: 1.8, marginTop: 12 }}&gt;&#10;        满分本身不稀奇——真题只有 9 道与 15 句。真正有意义的是：它是一份**可复跑的考卷**。改检索权重、改意图规则、换模型，重跑一次就知道有没有变差。&#10;      &lt;/Text&gt;&#10;      &lt;Text style={{ fontSize: 14, color: '#4A5568', lineHeight: 1.75, marginTop: 12 }}&gt;&#10;        掉出容差时命令返回非零，因此它能进 CI——把&quot;感觉变笨了&quot;变成一个会让流水线变红的数字。&#10;      &lt;/Text&gt;&#10;    &lt;/Box&gt;&#10;&#10;    &lt;Box style={{ width: 554, flexDirection: 'column', background: '#0E3F8C', borderRadius: 8, padding: 22 }}&gt;&#10;      &lt;Text style={{ fontSize: 14, color: '#8FB2E0', letterSpacing: 1.5 }}&gt;门禁怎么跑&lt;/Text&gt;&#10;      &lt;Box style={{ flexDirection: 'column', marginTop: 14, gap: 10 }}&gt;&#10;        &lt;Text style={{ fontSize: 14.5, color: '#FFFFFF', lineHeight: 1.6 }}&gt;1　两份 JSON 考卷：检索题 + 意图句&lt;/Text&gt;&#10;        &lt;Text style={{ fontSize: 14.5, color: '#FFFFFF', lineHeight: 1.6 }}&gt;2　一份基线：记录当前 Hit@3 / MRR / 准确率&lt;/Text&gt;&#10;        &lt;Text style={{ fontSize: 14.5, color: '#FFFFFF', lineHeight: 1.6 }}&gt;3　改完代码重跑，与基线比差&lt;/Text&gt;&#10;        &lt;Text style={{ fontSize: 14.5, color: '#FFFFFF', lineHeight: 1.6 }}&gt;4　超出容差 → 命令非零退出，拦住提交&lt;/Text&gt;&#10;      &lt;/Box&gt;&#10;      &lt;Text style={{ fontSize: 13, color: '#8FB2E0', lineHeight: 1.6, marginTop: 12 }}&gt;&#10;        另外每个回合有 trace，失败能归因到具体环节，而不是&quot;模型不行&quot;。&#10;      &lt;/Text&gt;&#10;    &lt;/Box&gt;&#10;&#10;  &lt;/Box&gt;&#10;&#10;  &lt;Box style={{ position: 'absolute', left: 76, bottom: 24, width: 1128, height: 22, flexDirection: 'row', alignItems: 'center', justifyContent: 'space-between' }}&gt;&#10;    &lt;Text style={{ fontSize: 13, color: '#8B97A8' }}&gt;知迹 · 基于大模型智能体的 AI 教育学习系统&lt;/Text&gt;&#10;    &lt;Text style={{ fontSize: 14, fontWeight: 'bold', color: '#0E3F8C' }}&gt;07 / 10&lt;/Text&gt;&#10;  &lt;/Box&gt;&#10;&#10;&lt;/Slide&gt;&#10;"/>
+        <p:cNvPr id="301" name="" descr="&lt;Slide style={{ width: 1280, height: 720, background: '#FFFFFF', padding: 0, position: 'relative', fontFamily: 'PingFang SC' }}&gt;&#10;&#10;  &lt;Box style={{ position: 'absolute', top: 0, left: 0, width: 1280, height: 64, background: '#1E4FA8' }} /&gt;&#10;  &lt;Text style={{ position: 'absolute', left: 76, top: 21, fontSize: 15, color: '#C9D8EF', letterSpacing: 1 }}&gt;知迹 · 答辩汇报&lt;/Text&gt;&#10;  &lt;Text style={{ position: 'absolute', left: 1010, top: 21, width: 194, textAlign: 'right', fontSize: 15, color: '#C9D8EF' }}&gt;赛道十三 · 智慧教育&lt;/Text&gt;&#10;&#10;  &lt;Box style={{ position: 'absolute', left: 76, top: 96, width: 1128 }}&gt;&#10;    &lt;Text style={{ fontSize: 34, fontWeight: 'bold', color: '#0E3F8C' }}&gt;可评测，所以可改进&lt;/Text&gt;&#10;    &lt;Text style={{ fontSize: 16, color: '#4A5568', marginTop: 10 }}&gt;数字的意义不在满分，而在&quot;有固定考卷和基线门禁&quot;——改动会掉分，掉分会被发现&lt;/Text&gt;&#10;  &lt;/Box&gt;&#10;&#10;  &lt;Box style={{ position: 'absolute', left: 76, top: 188, width: 1128, height: 176, flexDirection: 'row' }}&gt;&#10;&#10;    &lt;Box style={{ width: 258, flexDirection: 'column', justifyContent: 'flex-end' }}&gt;&#10;      &lt;Box style={{ flexDirection: 'row', alignItems: 'flex-end', gap: 8 }}&gt;&#10;        &lt;Text style={{ fontSize: 84, fontWeight: 'bold', color: '#1E4FA8', lineHeight: 1 }}&gt;284&lt;/Text&gt;&#10;        &lt;Text style={{ fontSize: 18, color: '#4A5568', paddingBottom: 10 }}&gt;项&lt;/Text&gt;&#10;      &lt;/Box&gt;&#10;      &lt;Text style={{ fontSize: 15, fontWeight: 'bold', color: '#1A2230', marginTop: 10 }}&gt;自动化测试&lt;/Text&gt;&#10;      &lt;Text style={{ fontSize: 13, color: '#8B97A8', marginTop: 4 }}&gt;全程离线 · 零 API 消耗&lt;/Text&gt;&#10;    &lt;/Box&gt;&#10;&#10;    &lt;Box style={{ width: 1, height: 140, background: '#E5E7EB', marginLeft: 26, marginRight: 26 }} /&gt;&#10;&#10;    &lt;Box style={{ width: 232, flexDirection: 'column', justifyContent: 'flex-end' }}&gt;&#10;      &lt;Text style={{ fontSize: 84, fontWeight: 'bold', color: '#1E4FA8', lineHeight: 1 }}&gt;1.0&lt;/Text&gt;&#10;      &lt;Text style={{ fontSize: 15, fontWeight: 'bold', color: '#1A2230', marginTop: 10 }}&gt;检索 Hit@3 与 MRR&lt;/Text&gt;&#10;      &lt;Text style={{ fontSize: 13, color: '#8B97A8', marginTop: 4 }}&gt;评测集 35 题&lt;/Text&gt;&#10;    &lt;/Box&gt;&#10;&#10;    &lt;Box style={{ width: 1, height: 140, background: '#E5E7EB', marginLeft: 26, marginRight: 26 }} /&gt;&#10;&#10;    &lt;Box style={{ width: 232, flexDirection: 'column', justifyContent: 'flex-end' }}&gt;&#10;      &lt;Text style={{ fontSize: 84, fontWeight: 'bold', color: '#1E4FA8', lineHeight: 1 }}&gt;1.0&lt;/Text&gt;&#10;      &lt;Text style={{ fontSize: 15, fontWeight: 'bold', color: '#1A2230', marginTop: 10 }}&gt;意图分类准确率&lt;/Text&gt;&#10;      &lt;Text style={{ fontSize: 13, color: '#8B97A8', marginTop: 4 }}&gt;评测集 15 句&lt;/Text&gt;&#10;    &lt;/Box&gt;&#10;&#10;    &lt;Box style={{ width: 1, height: 140, background: '#E5E7EB', marginLeft: 26, marginRight: 26 }} /&gt;&#10;&#10;    &lt;Box style={{ width: 232, flexDirection: 'column', justifyContent: 'flex-end' }}&gt;&#10;      &lt;Text style={{ fontSize: 84, fontWeight: 'bold', color: '#1E4FA8', lineHeight: 1 }}&gt;0&lt;/Text&gt;&#10;      &lt;Text style={{ fontSize: 15, fontWeight: 'bold', color: '#1A2230', marginTop: 10 }}&gt;测试期外部调用&lt;/Text&gt;&#10;      &lt;Text style={{ fontSize: 13, color: '#8B97A8', marginTop: 4 }}&gt;Mock 模型，可离线跑&lt;/Text&gt;&#10;    &lt;/Box&gt;&#10;&#10;  &lt;/Box&gt;&#10;&#10;  &lt;Box style={{ position: 'absolute', left: 76, top: 392, width: 1128, height: 262, flexDirection: 'row', gap: 20 }}&gt;&#10;&#10;    &lt;Box style={{ width: 554, flexDirection: 'column', background: '#F7F9FC', borderRadius: 8, padding: 22 }}&gt;&#10;      &lt;Text style={{ fontSize: 14, color: '#3D7BD9', letterSpacing: 1.5 }}&gt;这些数字说明什么&lt;/Text&gt;&#10;      &lt;Text style={{ fontSize: 16, color: '#1A2230', lineHeight: 1.8, marginTop: 12 }}&gt;&#10;        满分本身不稀奇——真题只有 9 道与 15 句。真正有意义的是：它是一份**可复跑的考卷**。改检索权重、改意图规则、换模型，重跑一次就知道有没有变差。&#10;      &lt;/Text&gt;&#10;      &lt;Text style={{ fontSize: 14, color: '#4A5568', lineHeight: 1.75, marginTop: 12 }}&gt;&#10;        掉出容差时命令返回非零，因此它能进 CI——把&quot;感觉变笨了&quot;变成一个会让流水线变红的数字。&#10;      &lt;/Text&gt;&#10;    &lt;/Box&gt;&#10;&#10;    &lt;Box style={{ width: 554, flexDirection: 'column', background: '#0E3F8C', borderRadius: 8, padding: 22 }}&gt;&#10;      &lt;Text style={{ fontSize: 14, color: '#8FB2E0', letterSpacing: 1.5 }}&gt;门禁怎么跑&lt;/Text&gt;&#10;      &lt;Box style={{ flexDirection: 'column', marginTop: 14, gap: 10 }}&gt;&#10;        &lt;Text style={{ fontSize: 14.5, color: '#FFFFFF', lineHeight: 1.6 }}&gt;1　两份 JSON 考卷：检索题 + 意图句&lt;/Text&gt;&#10;        &lt;Text style={{ fontSize: 14.5, color: '#FFFFFF', lineHeight: 1.6 }}&gt;2　一份基线：记录当前 Hit@3 / MRR / 准确率&lt;/Text&gt;&#10;        &lt;Text style={{ fontSize: 14.5, color: '#FFFFFF', lineHeight: 1.6 }}&gt;3　改完代码重跑，与基线比差&lt;/Text&gt;&#10;        &lt;Text style={{ fontSize: 14.5, color: '#FFFFFF', lineHeight: 1.6 }}&gt;4　超出容差 → 命令非零退出，拦住提交&lt;/Text&gt;&#10;      &lt;/Box&gt;&#10;      &lt;Text style={{ fontSize: 13, color: '#8FB2E0', lineHeight: 1.6, marginTop: 12 }}&gt;&#10;        另外每个回合有 trace，失败能归因到具体环节，而不是&quot;模型不行&quot;。&#10;      &lt;/Text&gt;&#10;    &lt;/Box&gt;&#10;&#10;  &lt;/Box&gt;&#10;&#10;  &lt;Box style={{ position: 'absolute', left: 76, bottom: 24, width: 1128, height: 22, flexDirection: 'row', alignItems: 'center', justifyContent: 'space-between' }}&gt;&#10;    &lt;Text style={{ fontSize: 13, color: '#8B97A8' }}&gt;知迹 · 基于大模型智能体的 AI 教育学习系统&lt;/Text&gt;&#10;    &lt;Text style={{ fontSize: 14, fontWeight: 'bold', color: '#0E3F8C' }}&gt;07 / 10&lt;/Text&gt;&#10;  &lt;/Box&gt;&#10;&#10;&lt;/Slide&gt;&#10;"/>
         <p:cNvGrpSpPr/>
         <p:nvPr/>
       </p:nvGrpSpPr>
@@ -13005,7 +13221,7 @@
         <p:spPr>
           <a:xfrm rot="0" flipH="0" flipV="0">
             <a:off x="723900" y="2047875"/>
-            <a:ext cx="1409700" cy="962025"/>
+            <a:ext cx="1447800" cy="962025"/>
           </a:xfrm>
           <a:prstGeom prst="rect"/>
         </p:spPr>
@@ -13025,7 +13241,7 @@
                 <a:latin typeface="PingFang SC"/>
                 <a:ea typeface="PingFang SC"/>
               </a:rPr>
-              <a:t>279</a:t>
+              <a:t>284</a:t>
             </a:r>
             <a:endParaRPr/>
           </a:p>
@@ -13039,7 +13255,7 @@
         </p:nvSpPr>
         <p:spPr>
           <a:xfrm rot="0" flipH="0" flipV="0">
-            <a:off x="2209800" y="2705100"/>
+            <a:off x="2247900" y="2705100"/>
             <a:ext cx="171450" cy="304800"/>
           </a:xfrm>
           <a:prstGeom prst="rect"/>
@@ -13339,7 +13555,7 @@
                 <a:latin typeface="PingFang SC"/>
                 <a:ea typeface="PingFang SC"/>
               </a:rPr>
-              <a:t xml:space="preserve"> 9 </a:t>
+              <a:t xml:space="preserve"> 35 </a:t>
             </a:r>
             <a:r>
               <a:rPr lang="zh-CN" sz="975">
@@ -14454,7 +14670,7 @@
   <p:cSld>
     <p:spTree>
       <p:nvGrpSpPr>
-        <p:cNvPr id="337" name="" descr="&lt;Slide style={{ width: 1280, height: 720, background: '#FFFFFF', padding: 0, position: 'relative', fontFamily: 'PingFang SC' }}&gt;&#10;&#10;  &lt;Box style={{ position: 'absolute', top: 0, left: 0, width: 1280, height: 64, background: '#1E4FA8' }} /&gt;&#10;  &lt;Text style={{ position: 'absolute', left: 76, top: 21, fontSize: 15, color: '#C9D8EF', letterSpacing: 1 }}&gt;知迹 · 答辩汇报&lt;/Text&gt;&#10;  &lt;Text style={{ position: 'absolute', left: 1010, top: 21, width: 194, textAlign: 'right', fontSize: 15, color: '#C9D8EF' }}&gt;赛道十三 · 智慧教育&lt;/Text&gt;&#10;&#10;  &lt;Box style={{ position: 'absolute', left: 76, top: 96, width: 1128 }}&gt;&#10;    &lt;Text style={{ fontSize: 34, fontWeight: 'bold', color: '#0E3F8C' }}&gt;八个模块，决定它是系统还是原型&lt;/Text&gt;&#10;    &lt;Text style={{ fontSize: 16, color: '#4A5568', marginTop: 10 }}&gt;这些不是&quot;有更好&quot;，而是&quot;缺一项就不算能交付的工程系统&quot;&lt;/Text&gt;&#10;  &lt;/Box&gt;&#10;&#10;  &lt;Box style={{ position: 'absolute', left: 76, top: 196, width: 296, height: 458, flexDirection: 'column' }}&gt;&#10;&#10;    &lt;Text style={{ fontSize: 14, color: '#3D7BD9', letterSpacing: 1.5 }}&gt;工程完整度&lt;/Text&gt;&#10;&#10;    &lt;Text style={{ fontSize: 22, fontWeight: 'bold', color: '#0E3F8C', lineHeight: 1.5, marginTop: 12 }}&gt;&#10;      缺一项，\n就退回原型&#10;    &lt;/Text&gt;&#10;&#10;    &lt;Text style={{ fontSize: 14, color: '#4A5568', lineHeight: 1.8, marginTop: 12 }}&gt;&#10;      只做一个能跑的对话循环，半天就够；难的是让它出错时不炸、花钱有上限、变差了能发现。下面八项各自解决一个问题。&#10;    &lt;/Text&gt;&#10;&#10;    &lt;Box style={{ flexDirection: 'column', marginTop: 20, background: '#F7F9FC', borderRadius: 8, padding: 16, gap: 8 }}&gt;&#10;      &lt;Text style={{ fontSize: 13, color: '#4A5568', lineHeight: 1.6 }}&gt;全部八项都有对应测试&lt;/Text&gt;&#10;      &lt;Text style={{ fontSize: 13, color: '#4A5568', lineHeight: 1.6 }}&gt;共 279 项，离线可跑&lt;/Text&gt;&#10;    &lt;/Box&gt;&#10;&#10;  &lt;/Box&gt;&#10;&#10;  &lt;Box style={{ position: 'absolute', left: 412, top: 196, width: 380, height: 458, flexDirection: 'column' }}&gt;&#10;&#10;    &lt;Box style={{ flexDirection: 'column', height: 106 }}&gt;&#10;      &lt;Box style={{ flexDirection: 'row', alignItems: 'center', gap: 8 }}&gt;&#10;        &lt;Text style={{ fontSize: 13, fontWeight: 'bold', color: '#1E4FA8' }}&gt;01&lt;/Text&gt;&#10;        &lt;Text style={{ fontSize: 16, fontWeight: 'bold', color: '#1A2230' }}&gt;输入输出护栏&lt;/Text&gt;&#10;      &lt;/Box&gt;&#10;      &lt;Text style={{ fontSize: 13, color: '#4A5568', lineHeight: 1.6, marginTop: 8 }}&gt;输入拦越界与提示词注入，输出拦空回答与系统提示词泄漏。&lt;/Text&gt;&#10;    &lt;/Box&gt;&#10;&#10;    &lt;Box style={{ flexDirection: 'column', height: 106, marginTop: 8 }}&gt;&#10;      &lt;Box style={{ flexDirection: 'row', alignItems: 'center', gap: 8 }}&gt;&#10;        &lt;Text style={{ fontSize: 13, fontWeight: 'bold', color: '#1E4FA8' }}&gt;02&lt;/Text&gt;&#10;        &lt;Text style={{ fontSize: 16, fontWeight: 'bold', color: '#1A2230' }}&gt;工具超时与重试&lt;/Text&gt;&#10;      &lt;/Box&gt;&#10;      &lt;Text style={{ fontSize: 13, color: '#4A5568', lineHeight: 1.6, marginTop: 8 }}&gt;单次超时；只对可重试错误做有限退避，失败转成工具消息而不炸回合。&lt;/Text&gt;&#10;    &lt;/Box&gt;&#10;&#10;    &lt;Box style={{ flexDirection: 'column', height: 106, marginTop: 8 }}&gt;&#10;      &lt;Box style={{ flexDirection: 'row', alignItems: 'center', gap: 8 }}&gt;&#10;        &lt;Text style={{ fontSize: 13, fontWeight: 'bold', color: '#1E4FA8' }}&gt;03&lt;/Text&gt;&#10;        &lt;Text style={{ fontSize: 16, fontWeight: 'bold', color: '#1A2230' }}&gt;上下文压缩&lt;/Text&gt;&#10;      &lt;/Box&gt;&#10;      &lt;Text style={{ fontSize: 13, color: '#4A5568', lineHeight: 1.6, marginTop: 8 }}&gt;历史过长时从整轮边界裁剪，绝不拆散&quot;调用—结果&quot;的配对。&lt;/Text&gt;&#10;    &lt;/Box&gt;&#10;&#10;    &lt;Box style={{ flexDirection: 'column', height: 106, marginTop: 8 }}&gt;&#10;      &lt;Box style={{ flexDirection: 'row', alignItems: 'center', gap: 8 }}&gt;&#10;        &lt;Text style={{ fontSize: 13, fontWeight: 'bold', color: '#1E4FA8' }}&gt;04&lt;/Text&gt;&#10;        &lt;Text style={{ fontSize: 16, fontWeight: 'bold', color: '#1A2230' }}&gt;模型路由与预算&lt;/Text&gt;&#10;      &lt;/Box&gt;&#10;      &lt;Text style={{ fontSize: 13, color: '#4A5568', lineHeight: 1.6, marginTop: 8 }}&gt;按意图与复杂度选档；token 记账，当日超预算直接阻止真实调用。&lt;/Text&gt;&#10;    &lt;/Box&gt;&#10;&#10;  &lt;/Box&gt;&#10;&#10;  &lt;Box style={{ position: 'absolute', left: 828, top: 196, width: 380, height: 458, flexDirection: 'column' }}&gt;&#10;&#10;    &lt;Box style={{ flexDirection: 'column', height: 106 }}&gt;&#10;      &lt;Box style={{ flexDirection: 'row', alignItems: 'center', gap: 8 }}&gt;&#10;        &lt;Text style={{ fontSize: 13, fontWeight: 'bold', color: '#1E4FA8' }}&gt;05&lt;/Text&gt;&#10;        &lt;Text style={{ fontSize: 16, fontWeight: 'bold', color: '#1A2230' }}&gt;MCP 客户端&lt;/Text&gt;&#10;      &lt;/Box&gt;&#10;      &lt;Text style={{ fontSize: 13, color: '#4A5568', lineHeight: 1.6, marginTop: 8 }}&gt;自写 stdio JSON-RPC，能启动外部 server、发现工具并注册进工具表。&lt;/Text&gt;&#10;    &lt;/Box&gt;&#10;&#10;    &lt;Box style={{ flexDirection: 'column', height: 106, marginTop: 8 }}&gt;&#10;      &lt;Box style={{ flexDirection: 'row', alignItems: 'center', gap: 8 }}&gt;&#10;        &lt;Text style={{ fontSize: 13, fontWeight: 'bold', color: '#1E4FA8' }}&gt;06&lt;/Text&gt;&#10;        &lt;Text style={{ fontSize: 16, fontWeight: 'bold', color: '#1A2230' }}&gt;检查点与续跑&lt;/Text&gt;&#10;      &lt;/Box&gt;&#10;      &lt;Text style={{ fontSize: 13, color: '#4A5568', lineHeight: 1.6, marginTop: 8 }}&gt;会话可断点续跑；它同时也是&quot;写操作先暂停&quot;能成立的前提。&lt;/Text&gt;&#10;    &lt;/Box&gt;&#10;&#10;    &lt;Box style={{ flexDirection: 'column', height: 106, marginTop: 8 }}&gt;&#10;      &lt;Box style={{ flexDirection: 'row', alignItems: 'center', gap: 8 }}&gt;&#10;        &lt;Text style={{ fontSize: 13, fontWeight: 'bold', color: '#1E4FA8' }}&gt;07&lt;/Text&gt;&#10;        &lt;Text style={{ fontSize: 16, fontWeight: 'bold', color: '#1A2230' }}&gt;回合诊断&lt;/Text&gt;&#10;      &lt;/Box&gt;&#10;      &lt;Text style={{ fontSize: 13, color: '#4A5568', lineHeight: 1.6, marginTop: 8 }}&gt;每个回合留 trace，失败可归因到路由、检索、工具还是生成。&lt;/Text&gt;&#10;    &lt;/Box&gt;&#10;&#10;    &lt;Box style={{ flexDirection: 'column', height: 106, marginTop: 8 }}&gt;&#10;      &lt;Box style={{ flexDirection: 'row', alignItems: 'center', gap: 8 }}&gt;&#10;        &lt;Text style={{ fontSize: 13, fontWeight: 'bold', color: '#1E4FA8' }}&gt;08&lt;/Text&gt;&#10;        &lt;Text style={{ fontSize: 16, fontWeight: 'bold', color: '#1A2230' }}&gt;评测门禁&lt;/Text&gt;&#10;      &lt;/Box&gt;&#10;      &lt;Text style={{ fontSize: 13, color: '#4A5568', lineHeight: 1.6, marginTop: 8 }}&gt;两份考卷 + 基线；改完重跑，掉出容差即返回非零，拦住提交。&lt;/Text&gt;&#10;    &lt;/Box&gt;&#10;&#10;  &lt;/Box&gt;&#10;&#10;  &lt;Box style={{ position: 'absolute', left: 76, bottom: 24, width: 1128, height: 22, flexDirection: 'row', alignItems: 'center', justifyContent: 'space-between' }}&gt;&#10;    &lt;Text style={{ fontSize: 13, color: '#8B97A8' }}&gt;知迹 · 基于大模型智能体的 AI 教育学习系统&lt;/Text&gt;&#10;    &lt;Text style={{ fontSize: 14, fontWeight: 'bold', color: '#0E3F8C' }}&gt;08 / 10&lt;/Text&gt;&#10;  &lt;/Box&gt;&#10;&#10;&lt;/Slide&gt;&#10;"/>
+        <p:cNvPr id="337" name="" descr="&lt;Slide style={{ width: 1280, height: 720, background: '#FFFFFF', padding: 0, position: 'relative', fontFamily: 'PingFang SC' }}&gt;&#10;&#10;  &lt;Box style={{ position: 'absolute', top: 0, left: 0, width: 1280, height: 64, background: '#1E4FA8' }} /&gt;&#10;  &lt;Text style={{ position: 'absolute', left: 76, top: 21, fontSize: 15, color: '#C9D8EF', letterSpacing: 1 }}&gt;知迹 · 答辩汇报&lt;/Text&gt;&#10;  &lt;Text style={{ position: 'absolute', left: 1010, top: 21, width: 194, textAlign: 'right', fontSize: 15, color: '#C9D8EF' }}&gt;赛道十三 · 智慧教育&lt;/Text&gt;&#10;&#10;  &lt;Box style={{ position: 'absolute', left: 76, top: 96, width: 1128 }}&gt;&#10;    &lt;Text style={{ fontSize: 34, fontWeight: 'bold', color: '#0E3F8C' }}&gt;八个模块，决定它是系统还是原型&lt;/Text&gt;&#10;    &lt;Text style={{ fontSize: 16, color: '#4A5568', marginTop: 10 }}&gt;这些不是&quot;有更好&quot;，而是&quot;缺一项就不算能交付的工程系统&quot;&lt;/Text&gt;&#10;  &lt;/Box&gt;&#10;&#10;  &lt;Box style={{ position: 'absolute', left: 76, top: 196, width: 296, height: 458, flexDirection: 'column' }}&gt;&#10;&#10;    &lt;Text style={{ fontSize: 14, color: '#3D7BD9', letterSpacing: 1.5 }}&gt;工程完整度&lt;/Text&gt;&#10;&#10;    &lt;Text style={{ fontSize: 22, fontWeight: 'bold', color: '#0E3F8C', lineHeight: 1.5, marginTop: 12 }}&gt;&#10;      缺一项，\n就退回原型&#10;    &lt;/Text&gt;&#10;&#10;    &lt;Text style={{ fontSize: 14, color: '#4A5568', lineHeight: 1.8, marginTop: 12 }}&gt;&#10;      只做一个能跑的对话循环，半天就够；难的是让它出错时不炸、花钱有上限、变差了能发现。下面八项各自解决一个问题。&#10;    &lt;/Text&gt;&#10;&#10;    &lt;Box style={{ flexDirection: 'column', marginTop: 20, background: '#F7F9FC', borderRadius: 8, padding: 18, gap: 10 }}&gt;&#10;      &lt;Text style={{ fontSize: 13, color: '#4A5568', lineHeight: 1.65 }}&gt;全部八项都有对应测试，共 284 项，离线可跑。&lt;/Text&gt;&#10;      &lt;Text style={{ fontSize: 13, color: '#4A5568', lineHeight: 1.65 }}&gt;而且它们互相咬合：没有检查点就做不了人在环，没有权限双层就谈不上可评测。&lt;/Text&gt;&#10;      &lt;Text style={{ fontSize: 13, color: '#4A5568', lineHeight: 1.65 }}&gt;所以这不是八个模块的清单，是一套依赖关系。&lt;/Text&gt;&#10;    &lt;/Box&gt;&#10;&#10;  &lt;/Box&gt;&#10;&#10;  &lt;Box style={{ position: 'absolute', left: 412, top: 196, width: 380, height: 458, flexDirection: 'column' }}&gt;&#10;&#10;    &lt;Box style={{ flexDirection: 'column', height: 106 }}&gt;&#10;      &lt;Box style={{ flexDirection: 'row', alignItems: 'center', gap: 8 }}&gt;&#10;        &lt;Text style={{ fontSize: 13, fontWeight: 'bold', color: '#1E4FA8' }}&gt;01&lt;/Text&gt;&#10;        &lt;Text style={{ fontSize: 16, fontWeight: 'bold', color: '#1A2230' }}&gt;输入输出护栏&lt;/Text&gt;&#10;      &lt;/Box&gt;&#10;      &lt;Text style={{ fontSize: 13, color: '#4A5568', lineHeight: 1.6, marginTop: 8 }}&gt;输入拦越界与提示词注入，输出拦空回答与系统提示词泄漏。&lt;/Text&gt;&#10;    &lt;/Box&gt;&#10;&#10;    &lt;Box style={{ flexDirection: 'column', height: 106, marginTop: 8 }}&gt;&#10;      &lt;Box style={{ flexDirection: 'row', alignItems: 'center', gap: 8 }}&gt;&#10;        &lt;Text style={{ fontSize: 13, fontWeight: 'bold', color: '#1E4FA8' }}&gt;02&lt;/Text&gt;&#10;        &lt;Text style={{ fontSize: 16, fontWeight: 'bold', color: '#1A2230' }}&gt;工具超时与重试&lt;/Text&gt;&#10;      &lt;/Box&gt;&#10;      &lt;Text style={{ fontSize: 13, color: '#4A5568', lineHeight: 1.6, marginTop: 8 }}&gt;单次超时；只对可重试错误做有限退避，失败转成工具消息而不炸回合。&lt;/Text&gt;&#10;    &lt;/Box&gt;&#10;&#10;    &lt;Box style={{ flexDirection: 'column', height: 106, marginTop: 8 }}&gt;&#10;      &lt;Box style={{ flexDirection: 'row', alignItems: 'center', gap: 8 }}&gt;&#10;        &lt;Text style={{ fontSize: 13, fontWeight: 'bold', color: '#1E4FA8' }}&gt;03&lt;/Text&gt;&#10;        &lt;Text style={{ fontSize: 16, fontWeight: 'bold', color: '#1A2230' }}&gt;上下文压缩&lt;/Text&gt;&#10;      &lt;/Box&gt;&#10;      &lt;Text style={{ fontSize: 13, color: '#4A5568', lineHeight: 1.6, marginTop: 8 }}&gt;历史过长时从整轮边界裁剪，绝不拆散&quot;调用—结果&quot;的配对。&lt;/Text&gt;&#10;    &lt;/Box&gt;&#10;&#10;    &lt;Box style={{ flexDirection: 'column', height: 106, marginTop: 8 }}&gt;&#10;      &lt;Box style={{ flexDirection: 'row', alignItems: 'center', gap: 8 }}&gt;&#10;        &lt;Text style={{ fontSize: 13, fontWeight: 'bold', color: '#1E4FA8' }}&gt;04&lt;/Text&gt;&#10;        &lt;Text style={{ fontSize: 16, fontWeight: 'bold', color: '#1A2230' }}&gt;模型路由与预算&lt;/Text&gt;&#10;      &lt;/Box&gt;&#10;      &lt;Text style={{ fontSize: 13, color: '#4A5568', lineHeight: 1.6, marginTop: 8 }}&gt;按意图与复杂度选档；token 记账，当日超预算直接阻止真实调用。&lt;/Text&gt;&#10;    &lt;/Box&gt;&#10;&#10;  &lt;/Box&gt;&#10;&#10;  &lt;Box style={{ position: 'absolute', left: 828, top: 196, width: 380, height: 458, flexDirection: 'column' }}&gt;&#10;&#10;    &lt;Box style={{ flexDirection: 'column', height: 106 }}&gt;&#10;      &lt;Box style={{ flexDirection: 'row', alignItems: 'center', gap: 8 }}&gt;&#10;        &lt;Text style={{ fontSize: 13, fontWeight: 'bold', color: '#1E4FA8' }}&gt;05&lt;/Text&gt;&#10;        &lt;Text style={{ fontSize: 16, fontWeight: 'bold', color: '#1A2230' }}&gt;MCP 客户端&lt;/Text&gt;&#10;      &lt;/Box&gt;&#10;      &lt;Text style={{ fontSize: 13, color: '#4A5568', lineHeight: 1.6, marginTop: 8 }}&gt;自写 stdio JSON-RPC，能启动外部 server、发现工具并注册进工具表。&lt;/Text&gt;&#10;    &lt;/Box&gt;&#10;&#10;    &lt;Box style={{ flexDirection: 'column', height: 106, marginTop: 8 }}&gt;&#10;      &lt;Box style={{ flexDirection: 'row', alignItems: 'center', gap: 8 }}&gt;&#10;        &lt;Text style={{ fontSize: 13, fontWeight: 'bold', color: '#1E4FA8' }}&gt;06&lt;/Text&gt;&#10;        &lt;Text style={{ fontSize: 16, fontWeight: 'bold', color: '#1A2230' }}&gt;检查点与续跑&lt;/Text&gt;&#10;      &lt;/Box&gt;&#10;      &lt;Text style={{ fontSize: 13, color: '#4A5568', lineHeight: 1.6, marginTop: 8 }}&gt;会话可断点续跑；它同时也是&quot;写操作先暂停&quot;能成立的前提。&lt;/Text&gt;&#10;    &lt;/Box&gt;&#10;&#10;    &lt;Box style={{ flexDirection: 'column', height: 106, marginTop: 8 }}&gt;&#10;      &lt;Box style={{ flexDirection: 'row', alignItems: 'center', gap: 8 }}&gt;&#10;        &lt;Text style={{ fontSize: 13, fontWeight: 'bold', color: '#1E4FA8' }}&gt;07&lt;/Text&gt;&#10;        &lt;Text style={{ fontSize: 16, fontWeight: 'bold', color: '#1A2230' }}&gt;回合诊断&lt;/Text&gt;&#10;      &lt;/Box&gt;&#10;      &lt;Text style={{ fontSize: 13, color: '#4A5568', lineHeight: 1.6, marginTop: 8 }}&gt;每个回合留 trace，失败可归因到路由、检索、工具还是生成。&lt;/Text&gt;&#10;    &lt;/Box&gt;&#10;&#10;    &lt;Box style={{ flexDirection: 'column', height: 106, marginTop: 8 }}&gt;&#10;      &lt;Box style={{ flexDirection: 'row', alignItems: 'center', gap: 8 }}&gt;&#10;        &lt;Text style={{ fontSize: 13, fontWeight: 'bold', color: '#1E4FA8' }}&gt;08&lt;/Text&gt;&#10;        &lt;Text style={{ fontSize: 16, fontWeight: 'bold', color: '#1A2230' }}&gt;评测门禁&lt;/Text&gt;&#10;      &lt;/Box&gt;&#10;      &lt;Text style={{ fontSize: 13, color: '#4A5568', lineHeight: 1.6, marginTop: 8 }}&gt;两份考卷 + 基线；改完重跑，掉出容差即返回非零，拦住提交。&lt;/Text&gt;&#10;    &lt;/Box&gt;&#10;&#10;  &lt;/Box&gt;&#10;&#10;  &lt;Box style={{ position: 'absolute', left: 76, bottom: 24, width: 1128, height: 22, flexDirection: 'row', alignItems: 'center', justifyContent: 'space-between' }}&gt;&#10;    &lt;Text style={{ fontSize: 13, color: '#8B97A8' }}&gt;知迹 · 基于大模型智能体的 AI 教育学习系统&lt;/Text&gt;&#10;    &lt;Text style={{ fontSize: 14, fontWeight: 'bold', color: '#0E3F8C' }}&gt;08 / 10&lt;/Text&gt;&#10;  &lt;/Box&gt;&#10;&#10;&lt;/Slide&gt;&#10;"/>
         <p:cNvGrpSpPr/>
         <p:nvPr/>
       </p:nvGrpSpPr>
@@ -14881,11 +15097,11 @@
         <p:spPr>
           <a:xfrm rot="0" flipH="0" flipV="0">
             <a:off x="723900" y="4076700"/>
-            <a:ext cx="2819400" cy="857250"/>
+            <a:ext cx="2819400" cy="2019300"/>
           </a:xfrm>
           <a:prstGeom prst="roundRect">
             <a:avLst>
-              <a:gd name="adj" fmla="val 8889"/>
+              <a:gd name="adj" fmla="val 3774"/>
             </a:avLst>
           </a:prstGeom>
           <a:solidFill>
@@ -14906,273 +15122,8 @@
         </p:nvSpPr>
         <p:spPr>
           <a:xfrm rot="0" flipH="0" flipV="0">
-            <a:off x="876300" y="4229100"/>
-            <a:ext cx="2514600" cy="238125"/>
-          </a:xfrm>
-          <a:prstGeom prst="rect"/>
-        </p:spPr>
-        <p:txBody>
-          <a:bodyPr wrap="none" lIns="0" tIns="0" rIns="0" bIns="0"/>
-          <a:p>
-            <a:pPr>
-              <a:lnSpc>
-                <a:spcPct val="160000"/>
-              </a:lnSpc>
-            </a:pPr>
-            <a:r>
-              <a:rPr lang="zh-CN" sz="975">
-                <a:solidFill>
-                  <a:srgbClr val="4A5568"/>
-                </a:solidFill>
-                <a:latin typeface="PingFang SC"/>
-                <a:ea typeface="PingFang SC"/>
-              </a:rPr>
-              <a:t>全部八项都有对应测试</a:t>
-            </a:r>
-            <a:endParaRPr/>
-          </a:p>
-        </p:txBody>
-      </p:sp>
-      <p:sp>
-        <p:nvSpPr>
-          <p:cNvPr id="349" name="" descr="{&quot;isTemplate&quot;:true,&quot;type&quot;:&quot;text&quot;}"/>
-          <p:cNvSpPr txBox="1"/>
-          <p:nvPr/>
-        </p:nvSpPr>
-        <p:spPr>
-          <a:xfrm rot="0" flipH="0" flipV="0">
-            <a:off x="876300" y="4543425"/>
-            <a:ext cx="2514600" cy="238125"/>
-          </a:xfrm>
-          <a:prstGeom prst="rect"/>
-        </p:spPr>
-        <p:txBody>
-          <a:bodyPr wrap="none" lIns="0" tIns="0" rIns="0" bIns="0"/>
-          <a:p>
-            <a:pPr>
-              <a:lnSpc>
-                <a:spcPct val="160000"/>
-              </a:lnSpc>
-            </a:pPr>
-            <a:r>
-              <a:rPr lang="zh-CN" sz="975">
-                <a:solidFill>
-                  <a:srgbClr val="4A5568"/>
-                </a:solidFill>
-                <a:latin typeface="PingFang SC"/>
-                <a:ea typeface="PingFang SC"/>
-              </a:rPr>
-              <a:t>共</a:t>
-            </a:r>
-            <a:r>
-              <a:rPr lang="en-US" sz="975">
-                <a:solidFill>
-                  <a:srgbClr val="4A5568"/>
-                </a:solidFill>
-                <a:latin typeface="PingFang SC"/>
-                <a:ea typeface="PingFang SC"/>
-              </a:rPr>
-              <a:t xml:space="preserve"> 279 </a:t>
-            </a:r>
-            <a:r>
-              <a:rPr lang="zh-CN" sz="975">
-                <a:solidFill>
-                  <a:srgbClr val="4A5568"/>
-                </a:solidFill>
-                <a:latin typeface="PingFang SC"/>
-                <a:ea typeface="PingFang SC"/>
-              </a:rPr>
-              <a:t>项，离线可跑</a:t>
-            </a:r>
-            <a:endParaRPr/>
-          </a:p>
-        </p:txBody>
-      </p:sp>
-      <p:sp>
-        <p:nvSpPr>
-          <p:cNvPr id="350" name="" descr="{&quot;isTemplate&quot;:true,&quot;type&quot;:&quot;text&quot;}"/>
-          <p:cNvSpPr txBox="1"/>
-          <p:nvPr/>
-        </p:nvSpPr>
-        <p:spPr>
-          <a:xfrm rot="0" flipH="0" flipV="0">
-            <a:off x="3924300" y="1885950"/>
-            <a:ext cx="133350" cy="152400"/>
-          </a:xfrm>
-          <a:prstGeom prst="rect"/>
-        </p:spPr>
-        <p:txBody>
-          <a:bodyPr wrap="none" lIns="0" tIns="0" rIns="0" bIns="0"/>
-          <a:p>
-            <a:pPr>
-              <a:lnSpc>
-                <a:spcPct val="100000"/>
-              </a:lnSpc>
-            </a:pPr>
-            <a:r>
-              <a:rPr lang="en-US" sz="975" b="1">
-                <a:solidFill>
-                  <a:srgbClr val="1E4FA8"/>
-                </a:solidFill>
-                <a:latin typeface="PingFang SC"/>
-                <a:ea typeface="PingFang SC"/>
-              </a:rPr>
-              <a:t>01</a:t>
-            </a:r>
-            <a:endParaRPr/>
-          </a:p>
-        </p:txBody>
-      </p:sp>
-      <p:sp>
-        <p:nvSpPr>
-          <p:cNvPr id="351" name="" descr="{&quot;isTemplate&quot;:true,&quot;type&quot;:&quot;text&quot;}"/>
-          <p:cNvSpPr txBox="1"/>
-          <p:nvPr/>
-        </p:nvSpPr>
-        <p:spPr>
-          <a:xfrm rot="0" flipH="0" flipV="0">
-            <a:off x="4133850" y="1866900"/>
-            <a:ext cx="914400" cy="190500"/>
-          </a:xfrm>
-          <a:prstGeom prst="rect"/>
-        </p:spPr>
-        <p:txBody>
-          <a:bodyPr wrap="none" lIns="0" tIns="0" rIns="0" bIns="0"/>
-          <a:p>
-            <a:pPr>
-              <a:lnSpc>
-                <a:spcPct val="100000"/>
-              </a:lnSpc>
-            </a:pPr>
-            <a:r>
-              <a:rPr lang="zh-CN" sz="1200" b="1">
-                <a:solidFill>
-                  <a:srgbClr val="1A2230"/>
-                </a:solidFill>
-                <a:latin typeface="PingFang SC"/>
-                <a:ea typeface="PingFang SC"/>
-              </a:rPr>
-              <a:t>输入输出护栏</a:t>
-            </a:r>
-            <a:endParaRPr/>
-          </a:p>
-        </p:txBody>
-      </p:sp>
-      <p:sp>
-        <p:nvSpPr>
-          <p:cNvPr id="352" name="" descr="{&quot;isTemplate&quot;:true,&quot;type&quot;:&quot;text&quot;}"/>
-          <p:cNvSpPr txBox="1"/>
-          <p:nvPr/>
-        </p:nvSpPr>
-        <p:spPr>
-          <a:xfrm rot="0" flipH="0" flipV="0">
-            <a:off x="3924300" y="2133600"/>
-            <a:ext cx="3619500" cy="238125"/>
-          </a:xfrm>
-          <a:prstGeom prst="rect"/>
-        </p:spPr>
-        <p:txBody>
-          <a:bodyPr wrap="none" lIns="0" tIns="0" rIns="0" bIns="0"/>
-          <a:p>
-            <a:pPr>
-              <a:lnSpc>
-                <a:spcPct val="160000"/>
-              </a:lnSpc>
-            </a:pPr>
-            <a:r>
-              <a:rPr lang="zh-CN" sz="975">
-                <a:solidFill>
-                  <a:srgbClr val="4A5568"/>
-                </a:solidFill>
-                <a:latin typeface="PingFang SC"/>
-                <a:ea typeface="PingFang SC"/>
-              </a:rPr>
-              <a:t>输入拦越界与提示词注入，输出拦空回答与系统提示词泄漏。</a:t>
-            </a:r>
-            <a:endParaRPr/>
-          </a:p>
-        </p:txBody>
-      </p:sp>
-      <p:sp>
-        <p:nvSpPr>
-          <p:cNvPr id="353" name="" descr="{&quot;isTemplate&quot;:true,&quot;type&quot;:&quot;text&quot;}"/>
-          <p:cNvSpPr txBox="1"/>
-          <p:nvPr/>
-        </p:nvSpPr>
-        <p:spPr>
-          <a:xfrm rot="0" flipH="0" flipV="0">
-            <a:off x="3924300" y="2971800"/>
-            <a:ext cx="152400" cy="152400"/>
-          </a:xfrm>
-          <a:prstGeom prst="rect"/>
-        </p:spPr>
-        <p:txBody>
-          <a:bodyPr wrap="none" lIns="0" tIns="0" rIns="0" bIns="0"/>
-          <a:p>
-            <a:pPr>
-              <a:lnSpc>
-                <a:spcPct val="100000"/>
-              </a:lnSpc>
-            </a:pPr>
-            <a:r>
-              <a:rPr lang="en-US" sz="975" b="1">
-                <a:solidFill>
-                  <a:srgbClr val="1E4FA8"/>
-                </a:solidFill>
-                <a:latin typeface="PingFang SC"/>
-                <a:ea typeface="PingFang SC"/>
-              </a:rPr>
-              <a:t>02</a:t>
-            </a:r>
-            <a:endParaRPr/>
-          </a:p>
-        </p:txBody>
-      </p:sp>
-      <p:sp>
-        <p:nvSpPr>
-          <p:cNvPr id="354" name="" descr="{&quot;isTemplate&quot;:true,&quot;type&quot;:&quot;text&quot;}"/>
-          <p:cNvSpPr txBox="1"/>
-          <p:nvPr/>
-        </p:nvSpPr>
-        <p:spPr>
-          <a:xfrm rot="0" flipH="0" flipV="0">
-            <a:off x="4152900" y="2952750"/>
-            <a:ext cx="1066800" cy="190500"/>
-          </a:xfrm>
-          <a:prstGeom prst="rect"/>
-        </p:spPr>
-        <p:txBody>
-          <a:bodyPr wrap="none" lIns="0" tIns="0" rIns="0" bIns="0"/>
-          <a:p>
-            <a:pPr>
-              <a:lnSpc>
-                <a:spcPct val="100000"/>
-              </a:lnSpc>
-            </a:pPr>
-            <a:r>
-              <a:rPr lang="zh-CN" sz="1200" b="1">
-                <a:solidFill>
-                  <a:srgbClr val="1A2230"/>
-                </a:solidFill>
-                <a:latin typeface="PingFang SC"/>
-                <a:ea typeface="PingFang SC"/>
-              </a:rPr>
-              <a:t>工具超时与重试</a:t>
-            </a:r>
-            <a:endParaRPr/>
-          </a:p>
-        </p:txBody>
-      </p:sp>
-      <p:sp>
-        <p:nvSpPr>
-          <p:cNvPr id="355" name="" descr="{&quot;isTemplate&quot;:true,&quot;type&quot;:&quot;text&quot;}"/>
-          <p:cNvSpPr txBox="1"/>
-          <p:nvPr/>
-        </p:nvSpPr>
-        <p:spPr>
-          <a:xfrm rot="0" flipH="0" flipV="0">
-            <a:off x="3924300" y="3219450"/>
-            <a:ext cx="3619500" cy="476250"/>
+            <a:off x="895350" y="4248150"/>
+            <a:ext cx="2476500" cy="495300"/>
           </a:xfrm>
           <a:prstGeom prst="rect"/>
         </p:spPr>
@@ -15183,7 +15134,7 @@
           <a:p>
             <a:pPr>
               <a:lnSpc>
-                <a:spcPct val="160000"/>
+                <a:spcPct val="165000"/>
               </a:lnSpc>
             </a:pPr>
             <a:r>
@@ -15194,103 +15145,18 @@
                 <a:latin typeface="PingFang SC"/>
                 <a:ea typeface="PingFang SC"/>
               </a:rPr>
-              <a:t>单次超时；只对可重试错误做有限退避，失败转成工具消息而不炸回合。</a:t>
-            </a:r>
-            <a:endParaRPr/>
-          </a:p>
-        </p:txBody>
-      </p:sp>
-      <p:sp>
-        <p:nvSpPr>
-          <p:cNvPr id="356" name="" descr="{&quot;isTemplate&quot;:true,&quot;type&quot;:&quot;text&quot;}"/>
-          <p:cNvSpPr txBox="1"/>
-          <p:nvPr/>
-        </p:nvSpPr>
-        <p:spPr>
-          <a:xfrm rot="0" flipH="0" flipV="0">
-            <a:off x="3924300" y="4057650"/>
-            <a:ext cx="152400" cy="152400"/>
-          </a:xfrm>
-          <a:prstGeom prst="rect"/>
-        </p:spPr>
-        <p:txBody>
-          <a:bodyPr wrap="none" lIns="0" tIns="0" rIns="0" bIns="0"/>
-          <a:p>
-            <a:pPr>
-              <a:lnSpc>
-                <a:spcPct val="100000"/>
-              </a:lnSpc>
-            </a:pPr>
-            <a:r>
-              <a:rPr lang="en-US" sz="975" b="1">
-                <a:solidFill>
-                  <a:srgbClr val="1E4FA8"/>
-                </a:solidFill>
-                <a:latin typeface="PingFang SC"/>
-                <a:ea typeface="PingFang SC"/>
-              </a:rPr>
-              <a:t>03</a:t>
-            </a:r>
-            <a:endParaRPr/>
-          </a:p>
-        </p:txBody>
-      </p:sp>
-      <p:sp>
-        <p:nvSpPr>
-          <p:cNvPr id="357" name="" descr="{&quot;isTemplate&quot;:true,&quot;type&quot;:&quot;text&quot;}"/>
-          <p:cNvSpPr txBox="1"/>
-          <p:nvPr/>
-        </p:nvSpPr>
-        <p:spPr>
-          <a:xfrm rot="0" flipH="0" flipV="0">
-            <a:off x="4152900" y="4038600"/>
-            <a:ext cx="762000" cy="190500"/>
-          </a:xfrm>
-          <a:prstGeom prst="rect"/>
-        </p:spPr>
-        <p:txBody>
-          <a:bodyPr wrap="none" lIns="0" tIns="0" rIns="0" bIns="0"/>
-          <a:p>
-            <a:pPr>
-              <a:lnSpc>
-                <a:spcPct val="100000"/>
-              </a:lnSpc>
-            </a:pPr>
-            <a:r>
-              <a:rPr lang="zh-CN" sz="1200" b="1">
-                <a:solidFill>
-                  <a:srgbClr val="1A2230"/>
-                </a:solidFill>
-                <a:latin typeface="PingFang SC"/>
-                <a:ea typeface="PingFang SC"/>
-              </a:rPr>
-              <a:t>上下文压缩</a:t>
-            </a:r>
-            <a:endParaRPr/>
-          </a:p>
-        </p:txBody>
-      </p:sp>
-      <p:sp>
-        <p:nvSpPr>
-          <p:cNvPr id="358" name="" descr="{&quot;isTemplate&quot;:true,&quot;type&quot;:&quot;text&quot;}"/>
-          <p:cNvSpPr txBox="1"/>
-          <p:nvPr/>
-        </p:nvSpPr>
-        <p:spPr>
-          <a:xfrm rot="0" flipH="0" flipV="0">
-            <a:off x="3924300" y="4305300"/>
-            <a:ext cx="3619500" cy="238125"/>
-          </a:xfrm>
-          <a:prstGeom prst="rect"/>
-        </p:spPr>
-        <p:txBody>
-          <a:bodyPr wrap="none" lIns="0" tIns="0" rIns="0" bIns="0"/>
-          <a:p>
-            <a:pPr>
-              <a:lnSpc>
-                <a:spcPct val="160000"/>
-              </a:lnSpc>
-            </a:pPr>
+              <a:t>全部八项都有对应测试，共</a:t>
+            </a:r>
+            <a:r>
+              <a:rPr lang="en-US" sz="975">
+                <a:solidFill>
+                  <a:srgbClr val="4A5568"/>
+                </a:solidFill>
+                <a:latin typeface="PingFang SC"/>
+                <a:ea typeface="PingFang SC"/>
+              </a:rPr>
+              <a:t xml:space="preserve"> 284 </a:t>
+            </a:r>
             <a:r>
               <a:rPr lang="zh-CN" sz="975">
                 <a:solidFill>
@@ -15299,132 +15165,22 @@
                 <a:latin typeface="PingFang SC"/>
                 <a:ea typeface="PingFang SC"/>
               </a:rPr>
-              <a:t>历史过长时从整轮边界裁剪，绝不拆散</a:t>
-            </a:r>
-            <a:r>
-              <a:rPr lang="en-US" sz="975">
-                <a:solidFill>
-                  <a:srgbClr val="4A5568"/>
-                </a:solidFill>
-                <a:latin typeface="PingFang SC"/>
-                <a:ea typeface="PingFang SC"/>
-              </a:rPr>
-              <a:t>"</a:t>
-            </a:r>
-            <a:r>
-              <a:rPr lang="zh-CN" sz="975">
-                <a:solidFill>
-                  <a:srgbClr val="4A5568"/>
-                </a:solidFill>
-                <a:latin typeface="PingFang SC"/>
-                <a:ea typeface="PingFang SC"/>
-              </a:rPr>
-              <a:t>调用—结果</a:t>
-            </a:r>
-            <a:r>
-              <a:rPr lang="en-US" sz="975">
-                <a:solidFill>
-                  <a:srgbClr val="4A5568"/>
-                </a:solidFill>
-                <a:latin typeface="PingFang SC"/>
-                <a:ea typeface="PingFang SC"/>
-              </a:rPr>
-              <a:t>"</a:t>
-            </a:r>
-            <a:r>
-              <a:rPr lang="zh-CN" sz="975">
-                <a:solidFill>
-                  <a:srgbClr val="4A5568"/>
-                </a:solidFill>
-                <a:latin typeface="PingFang SC"/>
-                <a:ea typeface="PingFang SC"/>
-              </a:rPr>
-              <a:t>的配对。</a:t>
-            </a:r>
-            <a:endParaRPr/>
-          </a:p>
-        </p:txBody>
-      </p:sp>
-      <p:sp>
-        <p:nvSpPr>
-          <p:cNvPr id="359" name="" descr="{&quot;isTemplate&quot;:true,&quot;type&quot;:&quot;text&quot;}"/>
-          <p:cNvSpPr txBox="1"/>
-          <p:nvPr/>
-        </p:nvSpPr>
-        <p:spPr>
-          <a:xfrm rot="0" flipH="0" flipV="0">
-            <a:off x="3924300" y="5143500"/>
-            <a:ext cx="152400" cy="152400"/>
-          </a:xfrm>
-          <a:prstGeom prst="rect"/>
-        </p:spPr>
-        <p:txBody>
-          <a:bodyPr wrap="none" lIns="0" tIns="0" rIns="0" bIns="0"/>
-          <a:p>
-            <a:pPr>
-              <a:lnSpc>
-                <a:spcPct val="100000"/>
-              </a:lnSpc>
-            </a:pPr>
-            <a:r>
-              <a:rPr lang="en-US" sz="975" b="1">
-                <a:solidFill>
-                  <a:srgbClr val="1E4FA8"/>
-                </a:solidFill>
-                <a:latin typeface="PingFang SC"/>
-                <a:ea typeface="PingFang SC"/>
-              </a:rPr>
-              <a:t>04</a:t>
-            </a:r>
-            <a:endParaRPr/>
-          </a:p>
-        </p:txBody>
-      </p:sp>
-      <p:sp>
-        <p:nvSpPr>
-          <p:cNvPr id="360" name="" descr="{&quot;isTemplate&quot;:true,&quot;type&quot;:&quot;text&quot;}"/>
-          <p:cNvSpPr txBox="1"/>
-          <p:nvPr/>
-        </p:nvSpPr>
-        <p:spPr>
-          <a:xfrm rot="0" flipH="0" flipV="0">
-            <a:off x="4152900" y="5124450"/>
-            <a:ext cx="1066800" cy="190500"/>
-          </a:xfrm>
-          <a:prstGeom prst="rect"/>
-        </p:spPr>
-        <p:txBody>
-          <a:bodyPr wrap="none" lIns="0" tIns="0" rIns="0" bIns="0"/>
-          <a:p>
-            <a:pPr>
-              <a:lnSpc>
-                <a:spcPct val="100000"/>
-              </a:lnSpc>
-            </a:pPr>
-            <a:r>
-              <a:rPr lang="zh-CN" sz="1200" b="1">
-                <a:solidFill>
-                  <a:srgbClr val="1A2230"/>
-                </a:solidFill>
-                <a:latin typeface="PingFang SC"/>
-                <a:ea typeface="PingFang SC"/>
-              </a:rPr>
-              <a:t>模型路由与预算</a:t>
-            </a:r>
-            <a:endParaRPr/>
-          </a:p>
-        </p:txBody>
-      </p:sp>
-      <p:sp>
-        <p:nvSpPr>
-          <p:cNvPr id="361" name="" descr="{&quot;isTemplate&quot;:true,&quot;type&quot;:&quot;text&quot;}"/>
-          <p:cNvSpPr txBox="1"/>
-          <p:nvPr/>
-        </p:nvSpPr>
-        <p:spPr>
-          <a:xfrm rot="0" flipH="0" flipV="0">
-            <a:off x="3924300" y="5391150"/>
-            <a:ext cx="3619500" cy="476250"/>
+              <a:t>项，离线可跑。</a:t>
+            </a:r>
+            <a:endParaRPr/>
+          </a:p>
+        </p:txBody>
+      </p:sp>
+      <p:sp>
+        <p:nvSpPr>
+          <p:cNvPr id="349" name="" descr="{&quot;isTemplate&quot;:true,&quot;type&quot;:&quot;text&quot;}"/>
+          <p:cNvSpPr txBox="1"/>
+          <p:nvPr/>
+        </p:nvSpPr>
+        <p:spPr>
+          <a:xfrm rot="0" flipH="0" flipV="0">
+            <a:off x="895350" y="4838700"/>
+            <a:ext cx="2476500" cy="495300"/>
           </a:xfrm>
           <a:prstGeom prst="rect"/>
         </p:spPr>
@@ -15435,7 +15191,7 @@
           <a:p>
             <a:pPr>
               <a:lnSpc>
-                <a:spcPct val="160000"/>
+                <a:spcPct val="165000"/>
               </a:lnSpc>
             </a:pPr>
             <a:r>
@@ -15446,122 +15202,22 @@
                 <a:latin typeface="PingFang SC"/>
                 <a:ea typeface="PingFang SC"/>
               </a:rPr>
-              <a:t>按意图与复杂度选档；</a:t>
-            </a:r>
-            <a:r>
-              <a:rPr lang="en-US" sz="975">
-                <a:solidFill>
-                  <a:srgbClr val="4A5568"/>
-                </a:solidFill>
-                <a:latin typeface="PingFang SC"/>
-                <a:ea typeface="PingFang SC"/>
-              </a:rPr>
-              <a:t xml:space="preserve">token </a:t>
-            </a:r>
-            <a:r>
-              <a:rPr lang="zh-CN" sz="975">
-                <a:solidFill>
-                  <a:srgbClr val="4A5568"/>
-                </a:solidFill>
-                <a:latin typeface="PingFang SC"/>
-                <a:ea typeface="PingFang SC"/>
-              </a:rPr>
-              <a:t>记账，当日超预算直接阻止真实调用。</a:t>
-            </a:r>
-            <a:endParaRPr/>
-          </a:p>
-        </p:txBody>
-      </p:sp>
-      <p:sp>
-        <p:nvSpPr>
-          <p:cNvPr id="362" name="" descr="{&quot;isTemplate&quot;:true,&quot;type&quot;:&quot;text&quot;}"/>
-          <p:cNvSpPr txBox="1"/>
-          <p:nvPr/>
-        </p:nvSpPr>
-        <p:spPr>
-          <a:xfrm rot="0" flipH="0" flipV="0">
-            <a:off x="7886700" y="1885950"/>
-            <a:ext cx="152400" cy="152400"/>
-          </a:xfrm>
-          <a:prstGeom prst="rect"/>
-        </p:spPr>
-        <p:txBody>
-          <a:bodyPr wrap="none" lIns="0" tIns="0" rIns="0" bIns="0"/>
-          <a:p>
-            <a:pPr>
-              <a:lnSpc>
-                <a:spcPct val="100000"/>
-              </a:lnSpc>
-            </a:pPr>
-            <a:r>
-              <a:rPr lang="en-US" sz="975" b="1">
-                <a:solidFill>
-                  <a:srgbClr val="1E4FA8"/>
-                </a:solidFill>
-                <a:latin typeface="PingFang SC"/>
-                <a:ea typeface="PingFang SC"/>
-              </a:rPr>
-              <a:t>05</a:t>
-            </a:r>
-            <a:endParaRPr/>
-          </a:p>
-        </p:txBody>
-      </p:sp>
-      <p:sp>
-        <p:nvSpPr>
-          <p:cNvPr id="363" name="" descr="{&quot;isTemplate&quot;:true,&quot;type&quot;:&quot;text&quot;}"/>
-          <p:cNvSpPr txBox="1"/>
-          <p:nvPr/>
-        </p:nvSpPr>
-        <p:spPr>
-          <a:xfrm rot="0" flipH="0" flipV="0">
-            <a:off x="8115300" y="1866900"/>
-            <a:ext cx="857250" cy="190500"/>
-          </a:xfrm>
-          <a:prstGeom prst="rect"/>
-        </p:spPr>
-        <p:txBody>
-          <a:bodyPr wrap="none" lIns="0" tIns="0" rIns="0" bIns="0"/>
-          <a:p>
-            <a:pPr>
-              <a:lnSpc>
-                <a:spcPct val="100000"/>
-              </a:lnSpc>
-            </a:pPr>
-            <a:r>
-              <a:rPr lang="en-US" sz="1200" b="1">
-                <a:solidFill>
-                  <a:srgbClr val="1A2230"/>
-                </a:solidFill>
-                <a:latin typeface="PingFang SC"/>
-                <a:ea typeface="PingFang SC"/>
-              </a:rPr>
-              <a:t xml:space="preserve">MCP </a:t>
-            </a:r>
-            <a:r>
-              <a:rPr lang="zh-CN" sz="1200" b="1">
-                <a:solidFill>
-                  <a:srgbClr val="1A2230"/>
-                </a:solidFill>
-                <a:latin typeface="PingFang SC"/>
-                <a:ea typeface="PingFang SC"/>
-              </a:rPr>
-              <a:t>客户端</a:t>
-            </a:r>
-            <a:endParaRPr/>
-          </a:p>
-        </p:txBody>
-      </p:sp>
-      <p:sp>
-        <p:nvSpPr>
-          <p:cNvPr id="364" name="" descr="{&quot;isTemplate&quot;:true,&quot;type&quot;:&quot;text&quot;}"/>
-          <p:cNvSpPr txBox="1"/>
-          <p:nvPr/>
-        </p:nvSpPr>
-        <p:spPr>
-          <a:xfrm rot="0" flipH="0" flipV="0">
-            <a:off x="7886700" y="2133600"/>
-            <a:ext cx="3619500" cy="476250"/>
+              <a:t>而且它们互相咬合：没有检查点就做不了人在环，没有权限双层就谈不上可评测。</a:t>
+            </a:r>
+            <a:endParaRPr/>
+          </a:p>
+        </p:txBody>
+      </p:sp>
+      <p:sp>
+        <p:nvSpPr>
+          <p:cNvPr id="350" name="" descr="{&quot;isTemplate&quot;:true,&quot;type&quot;:&quot;text&quot;}"/>
+          <p:cNvSpPr txBox="1"/>
+          <p:nvPr/>
+        </p:nvSpPr>
+        <p:spPr>
+          <a:xfrm rot="0" flipH="0" flipV="0">
+            <a:off x="895350" y="5429250"/>
+            <a:ext cx="2476500" cy="495300"/>
           </a:xfrm>
           <a:prstGeom prst="rect"/>
         </p:spPr>
@@ -15572,6 +15228,111 @@
           <a:p>
             <a:pPr>
               <a:lnSpc>
+                <a:spcPct val="165000"/>
+              </a:lnSpc>
+            </a:pPr>
+            <a:r>
+              <a:rPr lang="zh-CN" sz="975">
+                <a:solidFill>
+                  <a:srgbClr val="4A5568"/>
+                </a:solidFill>
+                <a:latin typeface="PingFang SC"/>
+                <a:ea typeface="PingFang SC"/>
+              </a:rPr>
+              <a:t>所以这不是八个模块的清单，是一套依赖关系。</a:t>
+            </a:r>
+            <a:endParaRPr/>
+          </a:p>
+        </p:txBody>
+      </p:sp>
+      <p:sp>
+        <p:nvSpPr>
+          <p:cNvPr id="351" name="" descr="{&quot;isTemplate&quot;:true,&quot;type&quot;:&quot;text&quot;}"/>
+          <p:cNvSpPr txBox="1"/>
+          <p:nvPr/>
+        </p:nvSpPr>
+        <p:spPr>
+          <a:xfrm rot="0" flipH="0" flipV="0">
+            <a:off x="3924300" y="1885950"/>
+            <a:ext cx="133350" cy="152400"/>
+          </a:xfrm>
+          <a:prstGeom prst="rect"/>
+        </p:spPr>
+        <p:txBody>
+          <a:bodyPr wrap="none" lIns="0" tIns="0" rIns="0" bIns="0"/>
+          <a:p>
+            <a:pPr>
+              <a:lnSpc>
+                <a:spcPct val="100000"/>
+              </a:lnSpc>
+            </a:pPr>
+            <a:r>
+              <a:rPr lang="en-US" sz="975" b="1">
+                <a:solidFill>
+                  <a:srgbClr val="1E4FA8"/>
+                </a:solidFill>
+                <a:latin typeface="PingFang SC"/>
+                <a:ea typeface="PingFang SC"/>
+              </a:rPr>
+              <a:t>01</a:t>
+            </a:r>
+            <a:endParaRPr/>
+          </a:p>
+        </p:txBody>
+      </p:sp>
+      <p:sp>
+        <p:nvSpPr>
+          <p:cNvPr id="352" name="" descr="{&quot;isTemplate&quot;:true,&quot;type&quot;:&quot;text&quot;}"/>
+          <p:cNvSpPr txBox="1"/>
+          <p:nvPr/>
+        </p:nvSpPr>
+        <p:spPr>
+          <a:xfrm rot="0" flipH="0" flipV="0">
+            <a:off x="4133850" y="1866900"/>
+            <a:ext cx="914400" cy="190500"/>
+          </a:xfrm>
+          <a:prstGeom prst="rect"/>
+        </p:spPr>
+        <p:txBody>
+          <a:bodyPr wrap="none" lIns="0" tIns="0" rIns="0" bIns="0"/>
+          <a:p>
+            <a:pPr>
+              <a:lnSpc>
+                <a:spcPct val="100000"/>
+              </a:lnSpc>
+            </a:pPr>
+            <a:r>
+              <a:rPr lang="zh-CN" sz="1200" b="1">
+                <a:solidFill>
+                  <a:srgbClr val="1A2230"/>
+                </a:solidFill>
+                <a:latin typeface="PingFang SC"/>
+                <a:ea typeface="PingFang SC"/>
+              </a:rPr>
+              <a:t>输入输出护栏</a:t>
+            </a:r>
+            <a:endParaRPr/>
+          </a:p>
+        </p:txBody>
+      </p:sp>
+      <p:sp>
+        <p:nvSpPr>
+          <p:cNvPr id="353" name="" descr="{&quot;isTemplate&quot;:true,&quot;type&quot;:&quot;text&quot;}"/>
+          <p:cNvSpPr txBox="1"/>
+          <p:nvPr/>
+        </p:nvSpPr>
+        <p:spPr>
+          <a:xfrm rot="0" flipH="0" flipV="0">
+            <a:off x="3924300" y="2133600"/>
+            <a:ext cx="3619500" cy="238125"/>
+          </a:xfrm>
+          <a:prstGeom prst="rect"/>
+        </p:spPr>
+        <p:txBody>
+          <a:bodyPr wrap="none" lIns="0" tIns="0" rIns="0" bIns="0"/>
+          <a:p>
+            <a:pPr>
+              <a:lnSpc>
                 <a:spcPct val="160000"/>
               </a:lnSpc>
             </a:pPr>
@@ -15583,6 +15344,502 @@
                 <a:latin typeface="PingFang SC"/>
                 <a:ea typeface="PingFang SC"/>
               </a:rPr>
+              <a:t>输入拦越界与提示词注入，输出拦空回答与系统提示词泄漏。</a:t>
+            </a:r>
+            <a:endParaRPr/>
+          </a:p>
+        </p:txBody>
+      </p:sp>
+      <p:sp>
+        <p:nvSpPr>
+          <p:cNvPr id="354" name="" descr="{&quot;isTemplate&quot;:true,&quot;type&quot;:&quot;text&quot;}"/>
+          <p:cNvSpPr txBox="1"/>
+          <p:nvPr/>
+        </p:nvSpPr>
+        <p:spPr>
+          <a:xfrm rot="0" flipH="0" flipV="0">
+            <a:off x="3924300" y="2971800"/>
+            <a:ext cx="152400" cy="152400"/>
+          </a:xfrm>
+          <a:prstGeom prst="rect"/>
+        </p:spPr>
+        <p:txBody>
+          <a:bodyPr wrap="none" lIns="0" tIns="0" rIns="0" bIns="0"/>
+          <a:p>
+            <a:pPr>
+              <a:lnSpc>
+                <a:spcPct val="100000"/>
+              </a:lnSpc>
+            </a:pPr>
+            <a:r>
+              <a:rPr lang="en-US" sz="975" b="1">
+                <a:solidFill>
+                  <a:srgbClr val="1E4FA8"/>
+                </a:solidFill>
+                <a:latin typeface="PingFang SC"/>
+                <a:ea typeface="PingFang SC"/>
+              </a:rPr>
+              <a:t>02</a:t>
+            </a:r>
+            <a:endParaRPr/>
+          </a:p>
+        </p:txBody>
+      </p:sp>
+      <p:sp>
+        <p:nvSpPr>
+          <p:cNvPr id="355" name="" descr="{&quot;isTemplate&quot;:true,&quot;type&quot;:&quot;text&quot;}"/>
+          <p:cNvSpPr txBox="1"/>
+          <p:nvPr/>
+        </p:nvSpPr>
+        <p:spPr>
+          <a:xfrm rot="0" flipH="0" flipV="0">
+            <a:off x="4152900" y="2952750"/>
+            <a:ext cx="1066800" cy="190500"/>
+          </a:xfrm>
+          <a:prstGeom prst="rect"/>
+        </p:spPr>
+        <p:txBody>
+          <a:bodyPr wrap="none" lIns="0" tIns="0" rIns="0" bIns="0"/>
+          <a:p>
+            <a:pPr>
+              <a:lnSpc>
+                <a:spcPct val="100000"/>
+              </a:lnSpc>
+            </a:pPr>
+            <a:r>
+              <a:rPr lang="zh-CN" sz="1200" b="1">
+                <a:solidFill>
+                  <a:srgbClr val="1A2230"/>
+                </a:solidFill>
+                <a:latin typeface="PingFang SC"/>
+                <a:ea typeface="PingFang SC"/>
+              </a:rPr>
+              <a:t>工具超时与重试</a:t>
+            </a:r>
+            <a:endParaRPr/>
+          </a:p>
+        </p:txBody>
+      </p:sp>
+      <p:sp>
+        <p:nvSpPr>
+          <p:cNvPr id="356" name="" descr="{&quot;isTemplate&quot;:true,&quot;type&quot;:&quot;text&quot;}"/>
+          <p:cNvSpPr txBox="1"/>
+          <p:nvPr/>
+        </p:nvSpPr>
+        <p:spPr>
+          <a:xfrm rot="0" flipH="0" flipV="0">
+            <a:off x="3924300" y="3219450"/>
+            <a:ext cx="3619500" cy="476250"/>
+          </a:xfrm>
+          <a:prstGeom prst="rect"/>
+        </p:spPr>
+        <p:txBody>
+          <a:bodyPr wrap="square" lIns="0" tIns="0" rIns="0" bIns="0">
+            <a:normAutofit/>
+          </a:bodyPr>
+          <a:p>
+            <a:pPr>
+              <a:lnSpc>
+                <a:spcPct val="160000"/>
+              </a:lnSpc>
+            </a:pPr>
+            <a:r>
+              <a:rPr lang="zh-CN" sz="975">
+                <a:solidFill>
+                  <a:srgbClr val="4A5568"/>
+                </a:solidFill>
+                <a:latin typeface="PingFang SC"/>
+                <a:ea typeface="PingFang SC"/>
+              </a:rPr>
+              <a:t>单次超时；只对可重试错误做有限退避，失败转成工具消息而不炸回合。</a:t>
+            </a:r>
+            <a:endParaRPr/>
+          </a:p>
+        </p:txBody>
+      </p:sp>
+      <p:sp>
+        <p:nvSpPr>
+          <p:cNvPr id="357" name="" descr="{&quot;isTemplate&quot;:true,&quot;type&quot;:&quot;text&quot;}"/>
+          <p:cNvSpPr txBox="1"/>
+          <p:nvPr/>
+        </p:nvSpPr>
+        <p:spPr>
+          <a:xfrm rot="0" flipH="0" flipV="0">
+            <a:off x="3924300" y="4057650"/>
+            <a:ext cx="152400" cy="152400"/>
+          </a:xfrm>
+          <a:prstGeom prst="rect"/>
+        </p:spPr>
+        <p:txBody>
+          <a:bodyPr wrap="none" lIns="0" tIns="0" rIns="0" bIns="0"/>
+          <a:p>
+            <a:pPr>
+              <a:lnSpc>
+                <a:spcPct val="100000"/>
+              </a:lnSpc>
+            </a:pPr>
+            <a:r>
+              <a:rPr lang="en-US" sz="975" b="1">
+                <a:solidFill>
+                  <a:srgbClr val="1E4FA8"/>
+                </a:solidFill>
+                <a:latin typeface="PingFang SC"/>
+                <a:ea typeface="PingFang SC"/>
+              </a:rPr>
+              <a:t>03</a:t>
+            </a:r>
+            <a:endParaRPr/>
+          </a:p>
+        </p:txBody>
+      </p:sp>
+      <p:sp>
+        <p:nvSpPr>
+          <p:cNvPr id="358" name="" descr="{&quot;isTemplate&quot;:true,&quot;type&quot;:&quot;text&quot;}"/>
+          <p:cNvSpPr txBox="1"/>
+          <p:nvPr/>
+        </p:nvSpPr>
+        <p:spPr>
+          <a:xfrm rot="0" flipH="0" flipV="0">
+            <a:off x="4152900" y="4038600"/>
+            <a:ext cx="762000" cy="190500"/>
+          </a:xfrm>
+          <a:prstGeom prst="rect"/>
+        </p:spPr>
+        <p:txBody>
+          <a:bodyPr wrap="none" lIns="0" tIns="0" rIns="0" bIns="0"/>
+          <a:p>
+            <a:pPr>
+              <a:lnSpc>
+                <a:spcPct val="100000"/>
+              </a:lnSpc>
+            </a:pPr>
+            <a:r>
+              <a:rPr lang="zh-CN" sz="1200" b="1">
+                <a:solidFill>
+                  <a:srgbClr val="1A2230"/>
+                </a:solidFill>
+                <a:latin typeface="PingFang SC"/>
+                <a:ea typeface="PingFang SC"/>
+              </a:rPr>
+              <a:t>上下文压缩</a:t>
+            </a:r>
+            <a:endParaRPr/>
+          </a:p>
+        </p:txBody>
+      </p:sp>
+      <p:sp>
+        <p:nvSpPr>
+          <p:cNvPr id="359" name="" descr="{&quot;isTemplate&quot;:true,&quot;type&quot;:&quot;text&quot;}"/>
+          <p:cNvSpPr txBox="1"/>
+          <p:nvPr/>
+        </p:nvSpPr>
+        <p:spPr>
+          <a:xfrm rot="0" flipH="0" flipV="0">
+            <a:off x="3924300" y="4305300"/>
+            <a:ext cx="3619500" cy="238125"/>
+          </a:xfrm>
+          <a:prstGeom prst="rect"/>
+        </p:spPr>
+        <p:txBody>
+          <a:bodyPr wrap="none" lIns="0" tIns="0" rIns="0" bIns="0"/>
+          <a:p>
+            <a:pPr>
+              <a:lnSpc>
+                <a:spcPct val="160000"/>
+              </a:lnSpc>
+            </a:pPr>
+            <a:r>
+              <a:rPr lang="zh-CN" sz="975">
+                <a:solidFill>
+                  <a:srgbClr val="4A5568"/>
+                </a:solidFill>
+                <a:latin typeface="PingFang SC"/>
+                <a:ea typeface="PingFang SC"/>
+              </a:rPr>
+              <a:t>历史过长时从整轮边界裁剪，绝不拆散</a:t>
+            </a:r>
+            <a:r>
+              <a:rPr lang="en-US" sz="975">
+                <a:solidFill>
+                  <a:srgbClr val="4A5568"/>
+                </a:solidFill>
+                <a:latin typeface="PingFang SC"/>
+                <a:ea typeface="PingFang SC"/>
+              </a:rPr>
+              <a:t>"</a:t>
+            </a:r>
+            <a:r>
+              <a:rPr lang="zh-CN" sz="975">
+                <a:solidFill>
+                  <a:srgbClr val="4A5568"/>
+                </a:solidFill>
+                <a:latin typeface="PingFang SC"/>
+                <a:ea typeface="PingFang SC"/>
+              </a:rPr>
+              <a:t>调用—结果</a:t>
+            </a:r>
+            <a:r>
+              <a:rPr lang="en-US" sz="975">
+                <a:solidFill>
+                  <a:srgbClr val="4A5568"/>
+                </a:solidFill>
+                <a:latin typeface="PingFang SC"/>
+                <a:ea typeface="PingFang SC"/>
+              </a:rPr>
+              <a:t>"</a:t>
+            </a:r>
+            <a:r>
+              <a:rPr lang="zh-CN" sz="975">
+                <a:solidFill>
+                  <a:srgbClr val="4A5568"/>
+                </a:solidFill>
+                <a:latin typeface="PingFang SC"/>
+                <a:ea typeface="PingFang SC"/>
+              </a:rPr>
+              <a:t>的配对。</a:t>
+            </a:r>
+            <a:endParaRPr/>
+          </a:p>
+        </p:txBody>
+      </p:sp>
+      <p:sp>
+        <p:nvSpPr>
+          <p:cNvPr id="360" name="" descr="{&quot;isTemplate&quot;:true,&quot;type&quot;:&quot;text&quot;}"/>
+          <p:cNvSpPr txBox="1"/>
+          <p:nvPr/>
+        </p:nvSpPr>
+        <p:spPr>
+          <a:xfrm rot="0" flipH="0" flipV="0">
+            <a:off x="3924300" y="5143500"/>
+            <a:ext cx="152400" cy="152400"/>
+          </a:xfrm>
+          <a:prstGeom prst="rect"/>
+        </p:spPr>
+        <p:txBody>
+          <a:bodyPr wrap="none" lIns="0" tIns="0" rIns="0" bIns="0"/>
+          <a:p>
+            <a:pPr>
+              <a:lnSpc>
+                <a:spcPct val="100000"/>
+              </a:lnSpc>
+            </a:pPr>
+            <a:r>
+              <a:rPr lang="en-US" sz="975" b="1">
+                <a:solidFill>
+                  <a:srgbClr val="1E4FA8"/>
+                </a:solidFill>
+                <a:latin typeface="PingFang SC"/>
+                <a:ea typeface="PingFang SC"/>
+              </a:rPr>
+              <a:t>04</a:t>
+            </a:r>
+            <a:endParaRPr/>
+          </a:p>
+        </p:txBody>
+      </p:sp>
+      <p:sp>
+        <p:nvSpPr>
+          <p:cNvPr id="361" name="" descr="{&quot;isTemplate&quot;:true,&quot;type&quot;:&quot;text&quot;}"/>
+          <p:cNvSpPr txBox="1"/>
+          <p:nvPr/>
+        </p:nvSpPr>
+        <p:spPr>
+          <a:xfrm rot="0" flipH="0" flipV="0">
+            <a:off x="4152900" y="5124450"/>
+            <a:ext cx="1066800" cy="190500"/>
+          </a:xfrm>
+          <a:prstGeom prst="rect"/>
+        </p:spPr>
+        <p:txBody>
+          <a:bodyPr wrap="none" lIns="0" tIns="0" rIns="0" bIns="0"/>
+          <a:p>
+            <a:pPr>
+              <a:lnSpc>
+                <a:spcPct val="100000"/>
+              </a:lnSpc>
+            </a:pPr>
+            <a:r>
+              <a:rPr lang="zh-CN" sz="1200" b="1">
+                <a:solidFill>
+                  <a:srgbClr val="1A2230"/>
+                </a:solidFill>
+                <a:latin typeface="PingFang SC"/>
+                <a:ea typeface="PingFang SC"/>
+              </a:rPr>
+              <a:t>模型路由与预算</a:t>
+            </a:r>
+            <a:endParaRPr/>
+          </a:p>
+        </p:txBody>
+      </p:sp>
+      <p:sp>
+        <p:nvSpPr>
+          <p:cNvPr id="362" name="" descr="{&quot;isTemplate&quot;:true,&quot;type&quot;:&quot;text&quot;}"/>
+          <p:cNvSpPr txBox="1"/>
+          <p:nvPr/>
+        </p:nvSpPr>
+        <p:spPr>
+          <a:xfrm rot="0" flipH="0" flipV="0">
+            <a:off x="3924300" y="5391150"/>
+            <a:ext cx="3619500" cy="476250"/>
+          </a:xfrm>
+          <a:prstGeom prst="rect"/>
+        </p:spPr>
+        <p:txBody>
+          <a:bodyPr wrap="square" lIns="0" tIns="0" rIns="0" bIns="0">
+            <a:normAutofit/>
+          </a:bodyPr>
+          <a:p>
+            <a:pPr>
+              <a:lnSpc>
+                <a:spcPct val="160000"/>
+              </a:lnSpc>
+            </a:pPr>
+            <a:r>
+              <a:rPr lang="zh-CN" sz="975">
+                <a:solidFill>
+                  <a:srgbClr val="4A5568"/>
+                </a:solidFill>
+                <a:latin typeface="PingFang SC"/>
+                <a:ea typeface="PingFang SC"/>
+              </a:rPr>
+              <a:t>按意图与复杂度选档；</a:t>
+            </a:r>
+            <a:r>
+              <a:rPr lang="en-US" sz="975">
+                <a:solidFill>
+                  <a:srgbClr val="4A5568"/>
+                </a:solidFill>
+                <a:latin typeface="PingFang SC"/>
+                <a:ea typeface="PingFang SC"/>
+              </a:rPr>
+              <a:t xml:space="preserve">token </a:t>
+            </a:r>
+            <a:r>
+              <a:rPr lang="zh-CN" sz="975">
+                <a:solidFill>
+                  <a:srgbClr val="4A5568"/>
+                </a:solidFill>
+                <a:latin typeface="PingFang SC"/>
+                <a:ea typeface="PingFang SC"/>
+              </a:rPr>
+              <a:t>记账，当日超预算直接阻止真实调用。</a:t>
+            </a:r>
+            <a:endParaRPr/>
+          </a:p>
+        </p:txBody>
+      </p:sp>
+      <p:sp>
+        <p:nvSpPr>
+          <p:cNvPr id="363" name="" descr="{&quot;isTemplate&quot;:true,&quot;type&quot;:&quot;text&quot;}"/>
+          <p:cNvSpPr txBox="1"/>
+          <p:nvPr/>
+        </p:nvSpPr>
+        <p:spPr>
+          <a:xfrm rot="0" flipH="0" flipV="0">
+            <a:off x="7886700" y="1885950"/>
+            <a:ext cx="152400" cy="152400"/>
+          </a:xfrm>
+          <a:prstGeom prst="rect"/>
+        </p:spPr>
+        <p:txBody>
+          <a:bodyPr wrap="none" lIns="0" tIns="0" rIns="0" bIns="0"/>
+          <a:p>
+            <a:pPr>
+              <a:lnSpc>
+                <a:spcPct val="100000"/>
+              </a:lnSpc>
+            </a:pPr>
+            <a:r>
+              <a:rPr lang="en-US" sz="975" b="1">
+                <a:solidFill>
+                  <a:srgbClr val="1E4FA8"/>
+                </a:solidFill>
+                <a:latin typeface="PingFang SC"/>
+                <a:ea typeface="PingFang SC"/>
+              </a:rPr>
+              <a:t>05</a:t>
+            </a:r>
+            <a:endParaRPr/>
+          </a:p>
+        </p:txBody>
+      </p:sp>
+      <p:sp>
+        <p:nvSpPr>
+          <p:cNvPr id="364" name="" descr="{&quot;isTemplate&quot;:true,&quot;type&quot;:&quot;text&quot;}"/>
+          <p:cNvSpPr txBox="1"/>
+          <p:nvPr/>
+        </p:nvSpPr>
+        <p:spPr>
+          <a:xfrm rot="0" flipH="0" flipV="0">
+            <a:off x="8115300" y="1866900"/>
+            <a:ext cx="857250" cy="190500"/>
+          </a:xfrm>
+          <a:prstGeom prst="rect"/>
+        </p:spPr>
+        <p:txBody>
+          <a:bodyPr wrap="none" lIns="0" tIns="0" rIns="0" bIns="0"/>
+          <a:p>
+            <a:pPr>
+              <a:lnSpc>
+                <a:spcPct val="100000"/>
+              </a:lnSpc>
+            </a:pPr>
+            <a:r>
+              <a:rPr lang="en-US" sz="1200" b="1">
+                <a:solidFill>
+                  <a:srgbClr val="1A2230"/>
+                </a:solidFill>
+                <a:latin typeface="PingFang SC"/>
+                <a:ea typeface="PingFang SC"/>
+              </a:rPr>
+              <a:t xml:space="preserve">MCP </a:t>
+            </a:r>
+            <a:r>
+              <a:rPr lang="zh-CN" sz="1200" b="1">
+                <a:solidFill>
+                  <a:srgbClr val="1A2230"/>
+                </a:solidFill>
+                <a:latin typeface="PingFang SC"/>
+                <a:ea typeface="PingFang SC"/>
+              </a:rPr>
+              <a:t>客户端</a:t>
+            </a:r>
+            <a:endParaRPr/>
+          </a:p>
+        </p:txBody>
+      </p:sp>
+      <p:sp>
+        <p:nvSpPr>
+          <p:cNvPr id="365" name="" descr="{&quot;isTemplate&quot;:true,&quot;type&quot;:&quot;text&quot;}"/>
+          <p:cNvSpPr txBox="1"/>
+          <p:nvPr/>
+        </p:nvSpPr>
+        <p:spPr>
+          <a:xfrm rot="0" flipH="0" flipV="0">
+            <a:off x="7886700" y="2133600"/>
+            <a:ext cx="3619500" cy="476250"/>
+          </a:xfrm>
+          <a:prstGeom prst="rect"/>
+        </p:spPr>
+        <p:txBody>
+          <a:bodyPr wrap="square" lIns="0" tIns="0" rIns="0" bIns="0">
+            <a:normAutofit/>
+          </a:bodyPr>
+          <a:p>
+            <a:pPr>
+              <a:lnSpc>
+                <a:spcPct val="160000"/>
+              </a:lnSpc>
+            </a:pPr>
+            <a:r>
+              <a:rPr lang="zh-CN" sz="975">
+                <a:solidFill>
+                  <a:srgbClr val="4A5568"/>
+                </a:solidFill>
+                <a:latin typeface="PingFang SC"/>
+                <a:ea typeface="PingFang SC"/>
+              </a:rPr>
               <a:t>自写</a:t>
             </a:r>
             <a:r>
@@ -15631,7 +15888,7 @@
       </p:sp>
       <p:sp>
         <p:nvSpPr>
-          <p:cNvPr id="365" name="" descr="{&quot;isTemplate&quot;:true,&quot;type&quot;:&quot;text&quot;}"/>
+          <p:cNvPr id="366" name="" descr="{&quot;isTemplate&quot;:true,&quot;type&quot;:&quot;text&quot;}"/>
           <p:cNvSpPr txBox="1"/>
           <p:nvPr/>
         </p:nvSpPr>
@@ -15666,7 +15923,7 @@
       </p:sp>
       <p:sp>
         <p:nvSpPr>
-          <p:cNvPr id="366" name="" descr="{&quot;isTemplate&quot;:true,&quot;type&quot;:&quot;text&quot;}"/>
+          <p:cNvPr id="367" name="" descr="{&quot;isTemplate&quot;:true,&quot;type&quot;:&quot;text&quot;}"/>
           <p:cNvSpPr txBox="1"/>
           <p:nvPr/>
         </p:nvSpPr>
@@ -15701,7 +15958,7 @@
       </p:sp>
       <p:sp>
         <p:nvSpPr>
-          <p:cNvPr id="367" name="" descr="{&quot;isTemplate&quot;:true,&quot;type&quot;:&quot;text&quot;}"/>
+          <p:cNvPr id="368" name="" descr="{&quot;isTemplate&quot;:true,&quot;type&quot;:&quot;text&quot;}"/>
           <p:cNvSpPr txBox="1"/>
           <p:nvPr/>
         </p:nvSpPr>
@@ -15776,7 +16033,7 @@
       </p:sp>
       <p:sp>
         <p:nvSpPr>
-          <p:cNvPr id="368" name="" descr="{&quot;isTemplate&quot;:true,&quot;type&quot;:&quot;text&quot;}"/>
+          <p:cNvPr id="369" name="" descr="{&quot;isTemplate&quot;:true,&quot;type&quot;:&quot;text&quot;}"/>
           <p:cNvSpPr txBox="1"/>
           <p:nvPr/>
         </p:nvSpPr>
@@ -15811,7 +16068,7 @@
       </p:sp>
       <p:sp>
         <p:nvSpPr>
-          <p:cNvPr id="369" name="" descr="{&quot;isTemplate&quot;:true,&quot;type&quot;:&quot;text&quot;}"/>
+          <p:cNvPr id="370" name="" descr="{&quot;isTemplate&quot;:true,&quot;type&quot;:&quot;text&quot;}"/>
           <p:cNvSpPr txBox="1"/>
           <p:nvPr/>
         </p:nvSpPr>
@@ -15846,7 +16103,7 @@
       </p:sp>
       <p:sp>
         <p:nvSpPr>
-          <p:cNvPr id="370" name="" descr="{&quot;isTemplate&quot;:true,&quot;type&quot;:&quot;text&quot;}"/>
+          <p:cNvPr id="371" name="" descr="{&quot;isTemplate&quot;:true,&quot;type&quot;:&quot;text&quot;}"/>
           <p:cNvSpPr txBox="1"/>
           <p:nvPr/>
         </p:nvSpPr>
@@ -15901,7 +16158,7 @@
       </p:sp>
       <p:sp>
         <p:nvSpPr>
-          <p:cNvPr id="371" name="" descr="{&quot;isTemplate&quot;:true,&quot;type&quot;:&quot;text&quot;}"/>
+          <p:cNvPr id="372" name="" descr="{&quot;isTemplate&quot;:true,&quot;type&quot;:&quot;text&quot;}"/>
           <p:cNvSpPr txBox="1"/>
           <p:nvPr/>
         </p:nvSpPr>
@@ -15936,7 +16193,7 @@
       </p:sp>
       <p:sp>
         <p:nvSpPr>
-          <p:cNvPr id="372" name="" descr="{&quot;isTemplate&quot;:true,&quot;type&quot;:&quot;text&quot;}"/>
+          <p:cNvPr id="373" name="" descr="{&quot;isTemplate&quot;:true,&quot;type&quot;:&quot;text&quot;}"/>
           <p:cNvSpPr txBox="1"/>
           <p:nvPr/>
         </p:nvSpPr>
@@ -15971,7 +16228,7 @@
       </p:sp>
       <p:sp>
         <p:nvSpPr>
-          <p:cNvPr id="373" name="" descr="{&quot;isTemplate&quot;:true,&quot;type&quot;:&quot;text&quot;}"/>
+          <p:cNvPr id="374" name="" descr="{&quot;isTemplate&quot;:true,&quot;type&quot;:&quot;text&quot;}"/>
           <p:cNvSpPr txBox="1"/>
           <p:nvPr/>
         </p:nvSpPr>
@@ -16026,7 +16283,7 @@
       </p:sp>
       <p:sp>
         <p:nvSpPr>
-          <p:cNvPr id="374" name="" descr="{&quot;isTemplate&quot;:true,&quot;type&quot;:&quot;text&quot;}"/>
+          <p:cNvPr id="375" name="" descr="{&quot;isTemplate&quot;:true,&quot;type&quot;:&quot;text&quot;}"/>
           <p:cNvSpPr txBox="1"/>
           <p:nvPr/>
         </p:nvSpPr>
@@ -16101,7 +16358,7 @@
       </p:sp>
       <p:sp>
         <p:nvSpPr>
-          <p:cNvPr id="375" name="" descr="{&quot;isTemplate&quot;:true,&quot;type&quot;:&quot;text&quot;}"/>
+          <p:cNvPr id="376" name="" descr="{&quot;isTemplate&quot;:true,&quot;type&quot;:&quot;text&quot;}"/>
           <p:cNvSpPr txBox="1"/>
           <p:nvPr/>
         </p:nvSpPr>
@@ -16144,7 +16401,7 @@
   <p:cSld>
     <p:spTree>
       <p:nvGrpSpPr>
-        <p:cNvPr id="376" name="" descr="&lt;Slide style={{ width: 1280, height: 720, background: '#FFFFFF', padding: 0, position: 'relative', fontFamily: 'PingFang SC' }}&gt;&#10;&#10;  &lt;Box style={{ position: 'absolute', top: 0, left: 0, width: 1280, height: 64, background: '#1E4FA8' }} /&gt;&#10;  &lt;Text style={{ position: 'absolute', left: 76, top: 21, fontSize: 15, color: '#C9D8EF', letterSpacing: 1 }}&gt;知迹 · 答辩汇报&lt;/Text&gt;&#10;  &lt;Text style={{ position: 'absolute', left: 1010, top: 21, width: 194, textAlign: 'right', fontSize: 15, color: '#C9D8EF' }}&gt;赛道十三 · 智慧教育&lt;/Text&gt;&#10;&#10;  &lt;Box style={{ position: 'absolute', left: 76, top: 96, width: 1128 }}&gt;&#10;    &lt;Text style={{ fontSize: 34, fontWeight: 'bold', color: '#0E3F8C' }}&gt;不是示意图，是真实运行的界面&lt;/Text&gt;&#10;    &lt;Text style={{ fontSize: 16, color: '#4A5568', marginTop: 10 }}&gt;七个页面都在跑；引用能落到具体页码，才算&quot;有据可查&quot;&lt;/Text&gt;&#10;  &lt;/Box&gt;&#10;&#10;  &lt;Box style={{ position: 'absolute', left: 76, top: 190, width: 780, height: 352, border: '1px solid #D6DCE5', borderRadius: 6, overflow: 'hidden' }}&gt;&#10;    &lt;Image src=&quot;assets/ui-knowledge.png&quot; style={{ width: 778, height: 350, objectFit: 'cover' }} /&gt;&#10;  &lt;/Box&gt;&#10;&#10;  &lt;Box style={{ position: 'absolute', left: 880, top: 190, width: 324, height: 352, flexDirection: 'column' }}&gt;&#10;&#10;    &lt;Box style={{ flexDirection: 'column', height: 112 }}&gt;&#10;      &lt;Box style={{ flexDirection: 'row', alignItems: 'center', gap: 8 }}&gt;&#10;        &lt;Box style={{ width: 22, height: 22, borderRadius: 4, background: '#1E4FA8', justifyContent: 'center', alignItems: 'center' }}&gt;&#10;          &lt;Text style={{ fontSize: 11, fontWeight: 'bold', color: '#FFFFFF' }}&gt;1&lt;/Text&gt;&#10;        &lt;/Box&gt;&#10;        &lt;Text style={{ fontSize: 16, fontWeight: 'bold', color: '#1A2230' }}&gt;三栏阅读页&lt;/Text&gt;&#10;      &lt;/Box&gt;&#10;      &lt;Text style={{ fontSize: 13.5, color: '#4A5568', lineHeight: 1.65, marginTop: 8 }}&gt;&#10;        左目录树、中正文、右 AI 助手与大纲；大纲跟着滚动高亮，长文档不迷路。&#10;      &lt;/Text&gt;&#10;    &lt;/Box&gt;&#10;&#10;    &lt;Box style={{ flexDirection: 'column', height: 112, marginTop: 8 }}&gt;&#10;      &lt;Box style={{ flexDirection: 'row', alignItems: 'center', gap: 8 }}&gt;&#10;        &lt;Box style={{ width: 22, height: 22, borderRadius: 4, background: '#1E4FA8', justifyContent: 'center', alignItems: 'center' }}&gt;&#10;          &lt;Text style={{ fontSize: 11, fontWeight: 'bold', color: '#FFFFFF' }}&gt;2&lt;/Text&gt;&#10;        &lt;/Box&gt;&#10;        &lt;Text style={{ fontSize: 16, fontWeight: 'bold', color: '#1A2230' }}&gt;引用落到页&lt;/Text&gt;&#10;      &lt;/Box&gt;&#10;      &lt;Text style={{ fontSize: 13.5, color: '#4A5568', lineHeight: 1.65, marginTop: 8 }}&gt;&#10;        PDF 与 PPT 按页切块，出处带「第 N 页」；原件能内联预览，也能下载。&#10;      &lt;/Text&gt;&#10;    &lt;/Box&gt;&#10;&#10;    &lt;Box style={{ flexDirection: 'column', height: 112, marginTop: 8 }}&gt;&#10;      &lt;Box style={{ flexDirection: 'row', alignItems: 'center', gap: 8 }}&gt;&#10;        &lt;Box style={{ width: 22, height: 22, borderRadius: 4, background: '#1E4FA8', justifyContent: 'center', alignItems: 'center' }}&gt;&#10;          &lt;Text style={{ fontSize: 11, fontWeight: 'bold', color: '#FFFFFF' }}&gt;3&lt;/Text&gt;&#10;        &lt;/Box&gt;&#10;        &lt;Text style={{ fontSize: 16, fontWeight: 'bold', color: '#1A2230' }}&gt;作答后看详解&lt;/Text&gt;&#10;      &lt;/Box&gt;&#10;      &lt;Text style={{ fontSize: 13.5, color: '#4A5568', lineHeight: 1.65, marginTop: 8 }}&gt;&#10;        复习卡里写完思路可看参考答案与关键步骤，再四档自评。&#10;      &lt;/Text&gt;&#10;    &lt;/Box&gt;&#10;&#10;  &lt;/Box&gt;&#10;&#10;  &lt;Box style={{ position: 'absolute', left: 76, top: 572, width: 1128, height: 84, background: '#F7F9FC', borderRadius: 8, flexDirection: 'row', alignItems: 'center', paddingLeft: 24, paddingRight: 24 }}&gt;&#10;&#10;    &lt;Box style={{ width: 330, flexDirection: 'column' }}&gt;&#10;      &lt;Text style={{ fontSize: 13, color: '#8B97A8' }}&gt;演示库规模&lt;/Text&gt;&#10;      &lt;Text style={{ fontSize: 15, fontWeight: 'bold', color: '#1A2230', marginTop: 4 }}&gt;7 个学科库 · 24 份资料&lt;/Text&gt;&#10;    &lt;/Box&gt;&#10;&#10;    &lt;Box style={{ width: 1, height: 44, background: '#D6DCE5', marginLeft: 20, marginRight: 20 }} /&gt;&#10;&#10;    &lt;Box style={{ width: 330, flexDirection: 'column' }}&gt;&#10;      &lt;Text style={{ fontSize: 13, color: '#8B97A8' }}&gt;检索片段&lt;/Text&gt;&#10;      &lt;Text style={{ fontSize: 15, fontWeight: 'bold', color: '#1A2230', marginTop: 4 }}&gt;46 个片段，全部带出处&lt;/Text&gt;&#10;    &lt;/Box&gt;&#10;&#10;    &lt;Box style={{ width: 1, height: 44, background: '#D6DCE5', marginLeft: 20, marginRight: 20 }} /&gt;&#10;&#10;    &lt;Box style={{ width: 330, flexDirection: 'column' }}&gt;&#10;      &lt;Text style={{ fontSize: 13, color: '#8B97A8' }}&gt;资料类型&lt;/Text&gt;&#10;      &lt;Text style={{ fontSize: 15, fontWeight: 'bold', color: '#1A2230', marginTop: 4 }}&gt;PDF / Word / PPT / 图片&lt;/Text&gt;&#10;    &lt;/Box&gt;&#10;&#10;  &lt;/Box&gt;&#10;&#10;  &lt;Box style={{ position: 'absolute', left: 76, bottom: 24, width: 1128, height: 22, flexDirection: 'row', alignItems: 'center', justifyContent: 'space-between' }}&gt;&#10;    &lt;Text style={{ fontSize: 13, color: '#8B97A8' }}&gt;知迹 · 基于大模型智能体的 AI 教育学习系统&lt;/Text&gt;&#10;    &lt;Text style={{ fontSize: 14, fontWeight: 'bold', color: '#0E3F8C' }}&gt;09 / 10&lt;/Text&gt;&#10;  &lt;/Box&gt;&#10;&#10;&lt;/Slide&gt;&#10;"/>
+        <p:cNvPr id="377" name=""/>
         <p:cNvGrpSpPr/>
         <p:nvPr/>
       </p:nvGrpSpPr>
@@ -16158,7 +16415,7 @@
       </p:grpSpPr>
       <p:sp>
         <p:nvSpPr>
-          <p:cNvPr id="377" name=""/>
+          <p:cNvPr id="378" name=""/>
           <p:cNvSpPr/>
           <p:nvPr/>
         </p:nvSpPr>
@@ -16177,12 +16434,15 @@
         </p:spPr>
         <p:txBody>
           <a:bodyPr/>
-          <a:p/>
-        </p:txBody>
-      </p:sp>
-      <p:sp>
-        <p:nvSpPr>
-          <p:cNvPr id="378" name=""/>
+          <a:p>
+            <a:pPr/>
+            <a:endParaRPr/>
+          </a:p>
+        </p:txBody>
+      </p:sp>
+      <p:sp>
+        <p:nvSpPr>
+          <p:cNvPr id="379" name=""/>
           <p:cNvSpPr/>
           <p:nvPr/>
         </p:nvSpPr>
@@ -16201,12 +16461,15 @@
         </p:spPr>
         <p:txBody>
           <a:bodyPr/>
-          <a:p/>
-        </p:txBody>
-      </p:sp>
-      <p:sp>
-        <p:nvSpPr>
-          <p:cNvPr id="379" name="" descr="{&quot;isTemplate&quot;:true,&quot;type&quot;:&quot;text&quot;}"/>
+          <a:p>
+            <a:pPr/>
+            <a:endParaRPr/>
+          </a:p>
+        </p:txBody>
+      </p:sp>
+      <p:sp>
+        <p:nvSpPr>
+          <p:cNvPr id="380" name="" descr="{&quot;isTemplate&quot;:true,&quot;type&quot;:&quot;text&quot;}"/>
           <p:cNvSpPr txBox="1"/>
           <p:nvPr/>
         </p:nvSpPr>
@@ -16261,7 +16524,7 @@
       </p:sp>
       <p:sp>
         <p:nvSpPr>
-          <p:cNvPr id="380" name="" descr="{&quot;isTemplate&quot;:true,&quot;type&quot;:&quot;text&quot;}"/>
+          <p:cNvPr id="381" name="" descr="{&quot;isTemplate&quot;:true,&quot;type&quot;:&quot;text&quot;}"/>
           <p:cNvSpPr txBox="1"/>
           <p:nvPr/>
         </p:nvSpPr>
@@ -16316,7 +16579,7 @@
       </p:sp>
       <p:sp>
         <p:nvSpPr>
-          <p:cNvPr id="381" name="" descr="{&quot;isTemplate&quot;:true,&quot;type&quot;:&quot;text&quot;}"/>
+          <p:cNvPr id="382" name="" descr="{&quot;isTemplate&quot;:true,&quot;type&quot;:&quot;text&quot;}"/>
           <p:cNvSpPr txBox="1"/>
           <p:nvPr/>
         </p:nvSpPr>
@@ -16351,7 +16614,7 @@
       </p:sp>
       <p:sp>
         <p:nvSpPr>
-          <p:cNvPr id="382" name="" descr="{&quot;isTemplate&quot;:true,&quot;type&quot;:&quot;text&quot;}"/>
+          <p:cNvPr id="383" name="" descr="{&quot;isTemplate&quot;:true,&quot;type&quot;:&quot;text&quot;}"/>
           <p:cNvSpPr txBox="1"/>
           <p:nvPr/>
         </p:nvSpPr>
@@ -16416,7 +16679,7 @@
       </p:sp>
       <p:sp>
         <p:nvSpPr>
-          <p:cNvPr id="383" name=""/>
+          <p:cNvPr id="384" name=""/>
           <p:cNvSpPr/>
           <p:nvPr/>
         </p:nvSpPr>
@@ -16439,12 +16702,15 @@
         </p:spPr>
         <p:txBody>
           <a:bodyPr/>
-          <a:p/>
+          <a:p>
+            <a:pPr/>
+            <a:endParaRPr/>
+          </a:p>
         </p:txBody>
       </p:sp>
       <p:pic>
         <p:nvPicPr>
-          <p:cNvPr id="384" name=""/>
+          <p:cNvPr id="385" name=""/>
           <p:cNvPicPr>
             <a:picLocks noChangeAspect="1"/>
           </p:cNvPicPr>
@@ -16504,7 +16770,7 @@
       </p:pic>
       <p:sp>
         <p:nvSpPr>
-          <p:cNvPr id="385" name=""/>
+          <p:cNvPr id="386" name=""/>
           <p:cNvSpPr/>
           <p:nvPr/>
         </p:nvSpPr>
@@ -16525,12 +16791,15 @@
         </p:spPr>
         <p:txBody>
           <a:bodyPr/>
-          <a:p/>
-        </p:txBody>
-      </p:sp>
-      <p:sp>
-        <p:nvSpPr>
-          <p:cNvPr id="386" name="" descr="{&quot;isTemplate&quot;:true,&quot;type&quot;:&quot;text&quot;}"/>
+          <a:p>
+            <a:pPr/>
+            <a:endParaRPr/>
+          </a:p>
+        </p:txBody>
+      </p:sp>
+      <p:sp>
+        <p:nvSpPr>
+          <p:cNvPr id="387" name="" descr="{&quot;isTemplate&quot;:true,&quot;type&quot;:&quot;text&quot;}"/>
           <p:cNvSpPr txBox="1"/>
           <p:nvPr/>
         </p:nvSpPr>
@@ -16565,7 +16834,7 @@
       </p:sp>
       <p:sp>
         <p:nvSpPr>
-          <p:cNvPr id="387" name="" descr="{&quot;isTemplate&quot;:true,&quot;type&quot;:&quot;text&quot;}"/>
+          <p:cNvPr id="388" name="" descr="{&quot;isTemplate&quot;:true,&quot;type&quot;:&quot;text&quot;}"/>
           <p:cNvSpPr txBox="1"/>
           <p:nvPr/>
         </p:nvSpPr>
@@ -16600,7 +16869,7 @@
       </p:sp>
       <p:sp>
         <p:nvSpPr>
-          <p:cNvPr id="388" name="" descr="{&quot;isTemplate&quot;:true,&quot;type&quot;:&quot;text&quot;}"/>
+          <p:cNvPr id="389" name="" descr="{&quot;isTemplate&quot;:true,&quot;type&quot;:&quot;text&quot;}"/>
           <p:cNvSpPr txBox="1"/>
           <p:nvPr/>
         </p:nvSpPr>
@@ -16657,7 +16926,7 @@
       </p:sp>
       <p:sp>
         <p:nvSpPr>
-          <p:cNvPr id="389" name=""/>
+          <p:cNvPr id="390" name=""/>
           <p:cNvSpPr/>
           <p:nvPr/>
         </p:nvSpPr>
@@ -16678,12 +16947,15 @@
         </p:spPr>
         <p:txBody>
           <a:bodyPr/>
-          <a:p/>
-        </p:txBody>
-      </p:sp>
-      <p:sp>
-        <p:nvSpPr>
-          <p:cNvPr id="390" name="" descr="{&quot;isTemplate&quot;:true,&quot;type&quot;:&quot;text&quot;}"/>
+          <a:p>
+            <a:pPr/>
+            <a:endParaRPr/>
+          </a:p>
+        </p:txBody>
+      </p:sp>
+      <p:sp>
+        <p:nvSpPr>
+          <p:cNvPr id="391" name="" descr="{&quot;isTemplate&quot;:true,&quot;type&quot;:&quot;text&quot;}"/>
           <p:cNvSpPr txBox="1"/>
           <p:nvPr/>
         </p:nvSpPr>
@@ -16718,7 +16990,7 @@
       </p:sp>
       <p:sp>
         <p:nvSpPr>
-          <p:cNvPr id="391" name="" descr="{&quot;isTemplate&quot;:true,&quot;type&quot;:&quot;text&quot;}"/>
+          <p:cNvPr id="392" name="" descr="{&quot;isTemplate&quot;:true,&quot;type&quot;:&quot;text&quot;}"/>
           <p:cNvSpPr txBox="1"/>
           <p:nvPr/>
         </p:nvSpPr>
@@ -16753,7 +17025,7 @@
       </p:sp>
       <p:sp>
         <p:nvSpPr>
-          <p:cNvPr id="392" name="" descr="{&quot;isTemplate&quot;:true,&quot;type&quot;:&quot;text&quot;}"/>
+          <p:cNvPr id="393" name="" descr="{&quot;isTemplate&quot;:true,&quot;type&quot;:&quot;text&quot;}"/>
           <p:cNvSpPr txBox="1"/>
           <p:nvPr/>
         </p:nvSpPr>
@@ -16840,7 +17112,7 @@
       </p:sp>
       <p:sp>
         <p:nvSpPr>
-          <p:cNvPr id="393" name=""/>
+          <p:cNvPr id="394" name=""/>
           <p:cNvSpPr/>
           <p:nvPr/>
         </p:nvSpPr>
@@ -16861,12 +17133,15 @@
         </p:spPr>
         <p:txBody>
           <a:bodyPr/>
-          <a:p/>
-        </p:txBody>
-      </p:sp>
-      <p:sp>
-        <p:nvSpPr>
-          <p:cNvPr id="394" name="" descr="{&quot;isTemplate&quot;:true,&quot;type&quot;:&quot;text&quot;}"/>
+          <a:p>
+            <a:pPr/>
+            <a:endParaRPr/>
+          </a:p>
+        </p:txBody>
+      </p:sp>
+      <p:sp>
+        <p:nvSpPr>
+          <p:cNvPr id="395" name="" descr="{&quot;isTemplate&quot;:true,&quot;type&quot;:&quot;text&quot;}"/>
           <p:cNvSpPr txBox="1"/>
           <p:nvPr/>
         </p:nvSpPr>
@@ -16901,7 +17176,7 @@
       </p:sp>
       <p:sp>
         <p:nvSpPr>
-          <p:cNvPr id="395" name="" descr="{&quot;isTemplate&quot;:true,&quot;type&quot;:&quot;text&quot;}"/>
+          <p:cNvPr id="396" name="" descr="{&quot;isTemplate&quot;:true,&quot;type&quot;:&quot;text&quot;}"/>
           <p:cNvSpPr txBox="1"/>
           <p:nvPr/>
         </p:nvSpPr>
@@ -16936,7 +17211,7 @@
       </p:sp>
       <p:sp>
         <p:nvSpPr>
-          <p:cNvPr id="396" name="" descr="{&quot;isTemplate&quot;:true,&quot;type&quot;:&quot;text&quot;}"/>
+          <p:cNvPr id="397" name="" descr="{&quot;isTemplate&quot;:true,&quot;type&quot;:&quot;text&quot;}"/>
           <p:cNvSpPr txBox="1"/>
           <p:nvPr/>
         </p:nvSpPr>
@@ -16973,7 +17248,7 @@
       </p:sp>
       <p:sp>
         <p:nvSpPr>
-          <p:cNvPr id="397" name=""/>
+          <p:cNvPr id="398" name=""/>
           <p:cNvSpPr/>
           <p:nvPr/>
         </p:nvSpPr>
@@ -16994,12 +17269,15 @@
         </p:spPr>
         <p:txBody>
           <a:bodyPr/>
-          <a:p/>
-        </p:txBody>
-      </p:sp>
-      <p:sp>
-        <p:nvSpPr>
-          <p:cNvPr id="398" name="" descr="{&quot;isTemplate&quot;:true,&quot;type&quot;:&quot;text&quot;}"/>
+          <a:p>
+            <a:pPr/>
+            <a:endParaRPr/>
+          </a:p>
+        </p:txBody>
+      </p:sp>
+      <p:sp>
+        <p:nvSpPr>
+          <p:cNvPr id="399" name="" descr="{&quot;isTemplate&quot;:true,&quot;type&quot;:&quot;text&quot;}"/>
           <p:cNvSpPr txBox="1"/>
           <p:nvPr/>
         </p:nvSpPr>
@@ -17034,7 +17312,7 @@
       </p:sp>
       <p:sp>
         <p:nvSpPr>
-          <p:cNvPr id="399" name="" descr="{&quot;isTemplate&quot;:true,&quot;type&quot;:&quot;text&quot;}"/>
+          <p:cNvPr id="400" name="" descr="{&quot;isTemplate&quot;:true,&quot;type&quot;:&quot;text&quot;}"/>
           <p:cNvSpPr txBox="1"/>
           <p:nvPr/>
         </p:nvSpPr>
@@ -17099,7 +17377,7 @@
       </p:sp>
       <p:sp>
         <p:nvSpPr>
-          <p:cNvPr id="400" name=""/>
+          <p:cNvPr id="401" name=""/>
           <p:cNvSpPr/>
           <p:nvPr/>
         </p:nvSpPr>
@@ -17118,12 +17396,15 @@
         </p:spPr>
         <p:txBody>
           <a:bodyPr/>
-          <a:p/>
-        </p:txBody>
-      </p:sp>
-      <p:sp>
-        <p:nvSpPr>
-          <p:cNvPr id="401" name="" descr="{&quot;isTemplate&quot;:true,&quot;type&quot;:&quot;text&quot;}"/>
+          <a:p>
+            <a:pPr/>
+            <a:endParaRPr/>
+          </a:p>
+        </p:txBody>
+      </p:sp>
+      <p:sp>
+        <p:nvSpPr>
+          <p:cNvPr id="402" name="" descr="{&quot;isTemplate&quot;:true,&quot;type&quot;:&quot;text&quot;}"/>
           <p:cNvSpPr txBox="1"/>
           <p:nvPr/>
         </p:nvSpPr>
@@ -17158,7 +17439,7 @@
       </p:sp>
       <p:sp>
         <p:nvSpPr>
-          <p:cNvPr id="402" name="" descr="{&quot;isTemplate&quot;:true,&quot;type&quot;:&quot;text&quot;}"/>
+          <p:cNvPr id="403" name="" descr="{&quot;isTemplate&quot;:true,&quot;type&quot;:&quot;text&quot;}"/>
           <p:cNvSpPr txBox="1"/>
           <p:nvPr/>
         </p:nvSpPr>
@@ -17203,7 +17484,7 @@
       </p:sp>
       <p:sp>
         <p:nvSpPr>
-          <p:cNvPr id="403" name=""/>
+          <p:cNvPr id="404" name=""/>
           <p:cNvSpPr/>
           <p:nvPr/>
         </p:nvSpPr>
@@ -17222,12 +17503,15 @@
         </p:spPr>
         <p:txBody>
           <a:bodyPr/>
-          <a:p/>
-        </p:txBody>
-      </p:sp>
-      <p:sp>
-        <p:nvSpPr>
-          <p:cNvPr id="404" name="" descr="{&quot;isTemplate&quot;:true,&quot;type&quot;:&quot;text&quot;}"/>
+          <a:p>
+            <a:pPr/>
+            <a:endParaRPr/>
+          </a:p>
+        </p:txBody>
+      </p:sp>
+      <p:sp>
+        <p:nvSpPr>
+          <p:cNvPr id="405" name="" descr="{&quot;isTemplate&quot;:true,&quot;type&quot;:&quot;text&quot;}"/>
           <p:cNvSpPr txBox="1"/>
           <p:nvPr/>
         </p:nvSpPr>
@@ -17262,7 +17546,7 @@
       </p:sp>
       <p:sp>
         <p:nvSpPr>
-          <p:cNvPr id="405" name="" descr="{&quot;isTemplate&quot;:true,&quot;type&quot;:&quot;text&quot;}"/>
+          <p:cNvPr id="406" name="" descr="{&quot;isTemplate&quot;:true,&quot;type&quot;:&quot;text&quot;}"/>
           <p:cNvSpPr txBox="1"/>
           <p:nvPr/>
         </p:nvSpPr>
@@ -17307,7 +17591,7 @@
       </p:sp>
       <p:sp>
         <p:nvSpPr>
-          <p:cNvPr id="406" name="" descr="{&quot;isTemplate&quot;:true,&quot;type&quot;:&quot;text&quot;}"/>
+          <p:cNvPr id="407" name="" descr="{&quot;isTemplate&quot;:true,&quot;type&quot;:&quot;text&quot;}"/>
           <p:cNvSpPr txBox="1"/>
           <p:nvPr/>
         </p:nvSpPr>
@@ -17382,7 +17666,7 @@
       </p:sp>
       <p:sp>
         <p:nvSpPr>
-          <p:cNvPr id="407" name="" descr="{&quot;isTemplate&quot;:true,&quot;type&quot;:&quot;text&quot;}"/>
+          <p:cNvPr id="408" name="" descr="{&quot;isTemplate&quot;:true,&quot;type&quot;:&quot;text&quot;}"/>
           <p:cNvSpPr txBox="1"/>
           <p:nvPr/>
         </p:nvSpPr>

--- a/docs/作品集/参赛/知迹答辩/知迹答辩.pptx
+++ b/docs/作品集/参赛/知迹答辩/知迹答辩.pptx
@@ -551,7 +551,7 @@
 
 <file path=ppt/slides/slide1.xml><?xml version="1.0" encoding="utf-8"?>
 <p:sld xmlns:p="http://schemas.openxmlformats.org/presentationml/2006/main" xmlns:a="http://schemas.openxmlformats.org/drawingml/2006/main">
-  <p:cSld>
+  <p:cSld name="01 封面｜核心命题：把一次学习回合做成可恢复、可拦截、可度量的状态图">
     <p:spTree>
       <p:nvGrpSpPr>
         <p:cNvPr id="1" name="" descr="&lt;Slide style={{ width: 1280, height: 720, background: '#0E3F8C', padding: 0, position: 'relative', overflow: 'hidden', fontFamily: 'PingFang SC' }}&gt;&#10;&#10;  &lt;Box style={{ position: 'absolute', top: 0, left: 0, width: 1280, height: 6, background: '#3D7BD9' }} /&gt;&#10;&#10;  &lt;Box style={{ position: 'absolute', left: 76, top: 92, width: 640, flexDirection: 'column' }}&gt;&#10;&#10;    &lt;Text style={{ fontSize: 15, color: '#8FB2E0', letterSpacing: 1.2 }}&gt;&#10;      全国大学生数字媒体科技作品及创意竞赛 · 赛道十三 · 智慧教育与智能软件类&#10;    &lt;/Text&gt;&#10;&#10;    &lt;Text style={{ fontSize: 96, fontWeight: 'bold', color: '#FFFFFF', letterSpacing: 8, marginTop: 14 }}&gt;&#10;      知迹&#10;    &lt;/Text&gt;&#10;&#10;    &lt;Text style={{ fontSize: 24, color: '#FFFFFF', letterSpacing: 0.6, marginTop: 10 }}&gt;&#10;      面向大学生的 AI 学习私教与智能复习系统&#10;    &lt;/Text&gt;&#10;&#10;    &lt;Box style={{ width: 96, height: 2, background: '#3D7BD9', marginTop: 20 }} /&gt;&#10;&#10;    &lt;Text style={{ fontSize: 15.5, color: '#B9CCE8', marginTop: 20, lineHeight: 1.75 }}&gt;&#10;      核心命题：把一次学习回合做成一张可恢复、可拦截、可度量的状态图——而不是一个不可控的聊天框。&#10;    &lt;/Text&gt;&#10;&#10;    &lt;Text style={{ fontSize: 13.5, color: '#8FB2E0', marginTop: 24, lineHeight: 1.8 }}&gt;&#10;      技术栈　Python 3.12 · LangGraph · FastAPI + SSE&#10;      &lt;br /&gt;&#10;      　　　　　SQLite（FTS5 + 向量）· Next.js 16 · React 19 · MCP&#10;    &lt;/Text&gt;&#10;&#10;  &lt;/Box&gt;&#10;&#10;  &lt;Box style={{ position: 'absolute', left: 764, top: 92, width: 440, height: 356, background: 'rgba(255, 255, 255, 0.07)', borderRadius: 8, padding: 22, flexDirection: 'column' }}&gt;&#10;&#10;    &lt;Text style={{ fontSize: 14, color: '#8FB2E0', letterSpacing: 1.2 }}&gt;本次汇报回答三个问题&lt;/Text&gt;&#10;&#10;    &lt;Box style={{ flexDirection: 'column', marginTop: 18, gap: 20 }}&gt;&#10;&#10;      &lt;Box style={{ flexDirection: 'row', gap: 12 }}&gt;&#10;        &lt;Text style={{ fontSize: 20, fontWeight: 'bold', color: '#3D7BD9', width: 24 }}&gt;01&lt;/Text&gt;&#10;        &lt;Text style={{ fontSize: 15, color: '#FFFFFF', lineHeight: 1.6, width: 340 }}&gt;它解决的是什么问题？为什么值得做？&lt;/Text&gt;&#10;      &lt;/Box&gt;&#10;&#10;      &lt;Box style={{ flexDirection: 'row', gap: 12 }}&gt;&#10;        &lt;Text style={{ fontSize: 20, fontWeight: 'bold', color: '#3D7BD9', width: 24 }}&gt;02&lt;/Text&gt;&#10;        &lt;Text style={{ fontSize: 15, color: '#FFFFFF', lineHeight: 1.6, width: 340 }}&gt;怎么保证它不失控、不乱改数据？&lt;/Text&gt;&#10;      &lt;/Box&gt;&#10;&#10;      &lt;Box style={{ flexDirection: 'row', gap: 12 }}&gt;&#10;        &lt;Text style={{ fontSize: 20, fontWeight: 'bold', color: '#3D7BD9', width: 24 }}&gt;03&lt;/Text&gt;&#10;        &lt;Text style={{ fontSize: 15, color: '#FFFFFF', lineHeight: 1.6, width: 340 }}&gt;做到了哪一步？哪些还没做到？&lt;/Text&gt;&#10;      &lt;/Box&gt;&#10;&#10;    &lt;/Box&gt;&#10;&#10;    &lt;Text style={{ fontSize: 13, color: '#8FB2E0', lineHeight: 1.7, marginTop: 18 }}&gt;&#10;      全文结论先行：第 2 页给出三条结论，后续每页只负责证明其中一条。&#10;    &lt;/Text&gt;&#10;&#10;  &lt;/Box&gt;&#10;&#10;  &lt;Box style={{ position: 'absolute', left: 76, top: 504, width: 1128, height: 104, flexDirection: 'row', alignItems: 'center', borderTop: '1px solid rgba(255, 255, 255, 0.18)', paddingTop: 16 }}&gt;&#10;&#10;    &lt;Box style={{ width: 262, flexDirection: 'column' }}&gt;&#10;      &lt;Text style={{ fontSize: 30, fontWeight: 'bold', color: '#FFFFFF', lineHeight: 1 }}&gt;284&lt;/Text&gt;&#10;      &lt;Text style={{ fontSize: 13, color: '#B9CCE8', marginTop: 6 }}&gt;自动化测试（离线）&lt;/Text&gt;&#10;    &lt;/Box&gt;&#10;&#10;    &lt;Box style={{ width: 262, flexDirection: 'column' }}&gt;&#10;      &lt;Text style={{ fontSize: 30, fontWeight: 'bold', color: '#FFFFFF', lineHeight: 1 }}&gt;35&lt;/Text&gt;&#10;      &lt;Text style={{ fontSize: 13, color: '#B9CCE8', marginTop: 6 }}&gt;检索评测题（21 篇语料）&lt;/Text&gt;&#10;    &lt;/Box&gt;&#10;&#10;    &lt;Box style={{ width: 262, flexDirection: 'column' }}&gt;&#10;      &lt;Text style={{ fontSize: 30, fontWeight: 'bold', color: '#FFFFFF', lineHeight: 1 }}&gt;7&lt;/Text&gt;&#10;      &lt;Text style={{ fontSize: 13, color: '#B9CCE8', marginTop: 6 }}&gt;功能页面（全部可用）&lt;/Text&gt;&#10;    &lt;/Box&gt;&#10;&#10;    &lt;Box style={{ width: 262, flexDirection: 'column' }}&gt;&#10;      &lt;Text style={{ fontSize: 30, fontWeight: 'bold', color: '#FFFFFF', lineHeight: 1 }}&gt;1&lt;/Text&gt;&#10;      &lt;Text style={{ fontSize: 13, color: '#B9CCE8', marginTop: 6 }}&gt;个 SQLite 文件承载全部数据&lt;/Text&gt;&#10;    &lt;/Box&gt;&#10;&#10;  &lt;/Box&gt;&#10;&#10;  &lt;Box style={{ position: 'absolute', bottom: 0, left: 0, width: 1280, height: 56, background: 'rgba(255, 255, 255, 0.07)', flexDirection: 'row', alignItems: 'center', justifyContent: 'space-between', paddingLeft: 76, paddingRight: 76 }}&gt;&#10;    &lt;Text style={{ fontSize: 14, color: '#C9D8EF' }}&gt;汇报人：项目团队　|　指导教师：待填&lt;/Text&gt;&#10;    &lt;Text style={{ fontSize: 14, color: '#C9D8EF' }}&gt;2026 年 10 月&lt;/Text&gt;&#10;  &lt;/Box&gt;&#10;&#10;&lt;/Slide&gt;&#10;"/>
@@ -1257,29 +1257,8 @@
                 <a:latin typeface="PingFang SC"/>
                 <a:ea typeface="PingFang SC"/>
               </a:rPr>
-              <a:t>全文结论先行：第</a:t>
-            </a:r>
-            <a:r>
-              <a:rPr lang="en-US" sz="975">
-                <a:solidFill>
-                  <a:srgbClr val="8FB2E0"/>
-                </a:solidFill>
-                <a:latin typeface="PingFang SC"/>
-                <a:ea typeface="PingFang SC"/>
-              </a:rPr>
-              <a:t xml:space="preserve"> 2 </a:t>
-            </a:r>
-            <a:r>
-              <a:rPr lang="zh-CN" sz="975">
-                <a:solidFill>
-                  <a:srgbClr val="8FB2E0"/>
-                </a:solidFill>
-                <a:latin typeface="PingFang SC"/>
-                <a:ea typeface="PingFang SC"/>
-              </a:rPr>
-              <a:t>页给出三条结论，后续每页只负责证明其中一条。</a:t>
-            </a:r>
-            <a:endParaRPr/>
+              <a:t>全文结论先行：第 2 页给出三条结论，后面每页只证明一条。</a:t>
+            </a:r>
           </a:p>
         </p:txBody>
       </p:sp>
@@ -1798,7 +1777,7 @@
 
 <file path=ppt/slides/slide10.xml><?xml version="1.0" encoding="utf-8"?>
 <p:sld xmlns:p="http://schemas.openxmlformats.org/presentationml/2006/main" xmlns:a="http://schemas.openxmlformats.org/drawingml/2006/main">
-  <p:cSld>
+  <p:cSld name="10 边界｜六项能力：两项达标、三项部分达成、一项未做">
     <p:spTree>
       <p:nvGrpSpPr>
         <p:cNvPr id="31" name="" descr="&lt;Slide style={{ width: 1280, height: 720, background: '#FFFFFF', padding: 0, position: 'relative', fontFamily: 'PingFang SC' }}&gt;&#10;&#10;  &lt;Box style={{ position: 'absolute', top: 0, left: 0, width: 1280, height: 64, background: '#1E4FA8' }} /&gt;&#10;  &lt;Text style={{ position: 'absolute', left: 76, top: 21, fontSize: 15, color: '#C9D8EF', letterSpacing: 1 }}&gt;知迹 · 答辩汇报&lt;/Text&gt;&#10;  &lt;Text style={{ position: 'absolute', left: 1010, top: 21, width: 194, textAlign: 'right', fontSize: 15, color: '#C9D8EF' }}&gt;05 · 边界与下一步&lt;/Text&gt;&#10;&#10;  &lt;Box style={{ position: 'absolute', left: 76, top: 92, width: 1128 }}&gt;&#10;    &lt;Text style={{ fontSize: 31, fontWeight: 'bold', color: '#0E3F8C' }}&gt;六项能力：两项达标、三项部分达成、一项未做&lt;/Text&gt;&#10;    &lt;Text style={{ fontSize: 15.5, color: '#4A5568', marginTop: 10 }}&gt;主动列出未达标项与判据，便于评审核对；不以「已完成」口径描述半成品&lt;/Text&gt;&#10;  &lt;/Box&gt;&#10;&#10;  &lt;Box style={{ position: 'absolute', left: 76, top: 186, width: 1128, height: 34, flexDirection: 'row', alignItems: 'center', background: '#F0F5FC', borderRadius: 6, paddingLeft: 14 }}&gt;&#10;    &lt;Text style={{ fontSize: 12.5, fontWeight: 'bold', color: '#0E3F8C', width: 420 }}&gt;能力项&lt;/Text&gt;&#10;    &lt;Text style={{ fontSize: 12.5, fontWeight: 'bold', color: '#0E3F8C', width: 110 }}&gt;状态&lt;/Text&gt;&#10;    &lt;Text style={{ fontSize: 12.5, fontWeight: 'bold', color: '#0E3F8C', width: 555 }}&gt;依据 / 尚缺什么&lt;/Text&gt;&#10;  &lt;/Box&gt;&#10;&#10;  &lt;Box style={{ position: 'absolute', left: 76, top: 224, width: 1128, height: 336, flexDirection: 'column' }}&gt;&#10;&#10;    &lt;Box style={{ flexDirection: 'row', height: 56, alignItems: 'center', borderBottom: '1px solid #E5E7EB', paddingLeft: 14 }}&gt;&#10;      &lt;Text style={{ fontSize: 13.5, color: '#1A2230', width: 420 }}&gt;中断可恢复&lt;/Text&gt;&#10;      &lt;Text style={{ fontSize: 13.5, fontWeight: 'bold', color: '#1E4FA8', width: 110 }}&gt;达标&lt;/Text&gt;&#10;      &lt;Text style={{ fontSize: 12.5, color: '#4A5568', width: 555 }}&gt;状态图 + 检查点 + 中断恢复，均有回归测试&lt;/Text&gt;&#10;    &lt;/Box&gt;&#10;&#10;    &lt;Box style={{ flexDirection: 'row', height: 56, alignItems: 'center', borderBottom: '1px solid #E5E7EB', paddingLeft: 14 }}&gt;&#10;      &lt;Text style={{ fontSize: 13.5, color: '#1A2230', width: 420 }}&gt;检索准确性 / 可追溯&lt;/Text&gt;&#10;      &lt;Text style={{ fontSize: 13.5, fontWeight: 'bold', color: '#1E4FA8', width: 110 }}&gt;达标&lt;/Text&gt;&#10;      &lt;Text style={{ fontSize: 12.5, color: '#4A5568', width: 555 }}&gt;35 题考卷；接真实向量 35/35；引用精确到页&lt;/Text&gt;&#10;    &lt;/Box&gt;&#10;&#10;    &lt;Box style={{ flexDirection: 'row', height: 56, alignItems: 'center', borderBottom: '1px solid #E5E7EB', paddingLeft: 14 }}&gt;&#10;      &lt;Text style={{ fontSize: 13.5, color: '#1A2230', width: 420 }}&gt;工具执行治理&lt;/Text&gt;&#10;      &lt;Text style={{ fontSize: 13.5, fontWeight: 'bold', color: '#BA7517', width: 110 }}&gt;部分&lt;/Text&gt;&#10;      &lt;Text style={{ fontSize: 12.5, color: '#4A5568', width: 555 }}&gt;有双层权限与超时兜底；缺按参数 / 按资源的细粒度约束&lt;/Text&gt;&#10;    &lt;/Box&gt;&#10;&#10;    &lt;Box style={{ flexDirection: 'row', height: 56, alignItems: 'center', borderBottom: '1px solid #E5E7EB', paddingLeft: 14 }}&gt;&#10;      &lt;Text style={{ fontSize: 13.5, color: '#1A2230', width: 420 }}&gt;长上下文管理&lt;/Text&gt;&#10;      &lt;Text style={{ fontSize: 13.5, fontWeight: 'bold', color: '#BA7517', width: 110 }}&gt;部分&lt;/Text&gt;&#10;      &lt;Text style={{ fontSize: 12.5, color: '#4A5568', width: 555 }}&gt;有抽取式摘要与预算控制；缺关键事实外置成结构化笔记&lt;/Text&gt;&#10;    &lt;/Box&gt;&#10;&#10;    &lt;Box style={{ flexDirection: 'row', height: 56, alignItems: 'center', borderBottom: '1px solid #E5E7EB', paddingLeft: 14 }}&gt;&#10;      &lt;Text style={{ fontSize: 13.5, color: '#1A2230', width: 420 }}&gt;长期记忆&lt;/Text&gt;&#10;      &lt;Text style={{ fontSize: 13.5, fontWeight: 'bold', color: '#BA7517', width: 110 }}&gt;部分&lt;/Text&gt;&#10;      &lt;Text style={{ fontSize: 12.5, color: '#4A5568', width: 555 }}&gt;按课程隔离、写入前确认；缺过期、替换与删除机制&lt;/Text&gt;&#10;    &lt;/Box&gt;&#10;&#10;    &lt;Box style={{ flexDirection: 'row', height: 56, alignItems: 'center', paddingLeft: 14 }}&gt;&#10;      &lt;Text style={{ fontSize: 13.5, color: '#1A2230', width: 420 }}&gt;任务级成功率评测&lt;/Text&gt;&#10;      &lt;Text style={{ fontSize: 13.5, fontWeight: 'bold', color: '#D9534F', width: 110 }}&gt;未做&lt;/Text&gt;&#10;      &lt;Text style={{ fontSize: 12.5, color: '#4A5568', width: 555 }}&gt;现有考卷只测「找到没 / 分类对不对」，不测「本次会话是否达成目标」&lt;/Text&gt;&#10;    &lt;/Box&gt;&#10;&#10;  &lt;/Box&gt;&#10;&#10;  &lt;Box style={{ position: 'absolute', left: 76, top: 576, width: 1128, height: 46, background: '#0E3F8C', borderRadius: 8, justifyContent: 'center', alignItems: 'center' }}&gt;&#10;    &lt;Text style={{ fontSize: 13.5, color: '#FFFFFF' }}&gt;&#10;      下一步优先级：① 任务级成功率评测（先有尺子）② 记忆生命周期 ③ 更难的检索考卷；均可在现有门禁内验证&#10;    &lt;/Text&gt;&#10;  &lt;/Box&gt;&#10;&#10;  &lt;Box style={{ position: 'absolute', left: 76, bottom: 24, width: 1128, height: 22, flexDirection: 'row', alignItems: 'center', justifyContent: 'space-between' }}&gt;&#10;    &lt;Text style={{ fontSize: 13, color: '#8B97A8' }}&gt;知迹 · 基于大模型智能体的 AI 教育学习系统&lt;/Text&gt;&#10;    &lt;Text style={{ fontSize: 14, fontWeight: 'bold', color: '#0E3F8C' }}&gt;10 / 11&lt;/Text&gt;&#10;  &lt;/Box&gt;&#10;&#10;&lt;/Slide&gt;&#10;"/>
@@ -3380,7 +3359,7 @@
 
 <file path=ppt/slides/slide11.xml><?xml version="1.0" encoding="utf-8"?>
 <p:sld xmlns:p="http://schemas.openxmlformats.org/presentationml/2006/main" xmlns:a="http://schemas.openxmlformats.org/drawingml/2006/main">
-  <p:cSld>
+  <p:cSld name="11 收束｜让 AI 帮上忙靠的是每一步都留痕、可拦、可复算">
     <p:spTree>
       <p:nvGrpSpPr>
         <p:cNvPr id="69" name="" descr="&lt;Slide style={{ width: 1280, height: 720, background: '#0E3F8C', padding: 0, position: 'relative', overflow: 'hidden', fontFamily: 'PingFang SC' }}&gt;&#10;&#10;  &lt;Box style={{ position: 'absolute', top: 0, left: 0, width: 1280, height: 6, background: '#3D7BD9' }} /&gt;&#10;&#10;  &lt;Box style={{ position: 'absolute', left: 76, top: 88, width: 1060, flexDirection: 'column' }}&gt;&#10;    &lt;Text style={{ fontSize: 15, color: '#8FB2E0', letterSpacing: 1.2 }}&gt;结论&lt;/Text&gt;&#10;    &lt;Text style={{ fontSize: 32, fontWeight: 'bold', color: '#FFFFFF', lineHeight: 1.6, marginTop: 14 }}&gt;&#10;      让 AI 真正帮上忙，靠的不是它多聪明，而是它每一步都留痕、能被拦住、也能被复算。&#10;    &lt;/Text&gt;&#10;    &lt;Box style={{ width: 96, height: 2, background: '#3D7BD9', marginTop: 20 }} /&gt;&#10;  &lt;/Box&gt;&#10;&#10;  &lt;Box style={{ position: 'absolute', left: 76, top: 288, width: 1128, height: 186, flexDirection: 'row' }}&gt;&#10;&#10;    &lt;Box style={{ width: 336, height: 186, flexDirection: 'column', borderTop: '2px solid #3D7BD9', paddingTop: 14 }}&gt;&#10;      &lt;Text style={{ fontSize: 13, color: '#8FB2E0' }}&gt;下一步 · 一&lt;/Text&gt;&#10;      &lt;Text style={{ fontSize: 19, fontWeight: 'bold', color: '#FFFFFF', marginTop: 8 }}&gt;测「这轮有没有用」&lt;/Text&gt;&#10;      &lt;Text style={{ fontSize: 13.5, color: '#B9CCE8', lineHeight: 1.7, marginTop: 10 }}&gt;&#10;        从「找到没」升级到「一次完整使用有没有达成目标」，这才是用户真正关心的。&#10;      &lt;/Text&gt;&#10;    &lt;/Box&gt;&#10;&#10;    &lt;Box style={{ width: 60 }} /&gt;&#10;&#10;    &lt;Box style={{ width: 336, height: 186, flexDirection: 'column', borderTop: '2px solid #3D7BD9', paddingTop: 14 }}&gt;&#10;      &lt;Text style={{ fontSize: 13, color: '#8FB2E0' }}&gt;下一步 · 二&lt;/Text&gt;&#10;      &lt;Text style={{ fontSize: 19, fontWeight: 'bold', color: '#FFFFFF', marginTop: 8 }}&gt;让记忆能忘掉&lt;/Text&gt;&#10;      &lt;Text style={{ fontSize: 13.5, color: '#B9CCE8', lineHeight: 1.7, marginTop: 10 }}&gt;&#10;        记住的东西要能改、能删、过期会失效——不然会一直用错的旧偏好回答你。&#10;      &lt;/Text&gt;&#10;    &lt;/Box&gt;&#10;&#10;    &lt;Box style={{ width: 60 }} /&gt;&#10;&#10;    &lt;Box style={{ width: 336, height: 186, flexDirection: 'column', borderTop: '2px solid #3D7BD9', paddingTop: 14 }}&gt;&#10;      &lt;Text style={{ fontSize: 13, color: '#8FB2E0' }}&gt;下一步 · 三&lt;/Text&gt;&#10;      &lt;Text style={{ fontSize: 19, fontWeight: 'bold', color: '#FFFFFF', marginTop: 8 }}&gt;把题出得更难&lt;/Text&gt;&#10;      &lt;Text style={{ fontSize: 13.5, color: '#B9CCE8', lineHeight: 1.7, marginTop: 10 }}&gt;&#10;        现在的考卷太容易，考不出差别；题不难，后面改什么都看不出好坏。&#10;      &lt;/Text&gt;&#10;    &lt;/Box&gt;&#10;&#10;  &lt;/Box&gt;&#10;&#10;  &lt;Box style={{ position: 'absolute', left: 76, top: 502, width: 1128, height: 44, flexDirection: 'row', alignItems: 'center' }}&gt;&#10;    &lt;Text style={{ fontSize: 17, color: '#FFFFFF' }}&gt;谢谢，欢迎提问&lt;/Text&gt;&#10;    &lt;Text style={{ fontSize: 13.5, color: '#8FB2E0', paddingLeft: 24 }}&gt;下面三项均可在仓库复跑&lt;/Text&gt;&#10;  &lt;/Box&gt;&#10;&#10;  &lt;Box style={{ position: 'absolute', left: 76, top: 556, width: 1128, height: 88, background: 'rgba(255, 255, 255, 0.07)', borderRadius: 8, flexDirection: 'row', alignItems: 'center', paddingLeft: 24 }}&gt;&#10;&#10;    &lt;Box style={{ width: 300, flexDirection: 'column' }}&gt;&#10;      &lt;Text style={{ fontSize: 22, fontWeight: 'bold', color: '#FFFFFF' }}&gt;284 项&lt;/Text&gt;&#10;      &lt;Text style={{ fontSize: 12.5, color: '#B9CCE8', marginTop: 4 }}&gt;自动化测试，离线可跑&lt;/Text&gt;&#10;    &lt;/Box&gt;&#10;&#10;    &lt;Box style={{ width: 1, height: 46, background: '#3D7BD9', marginLeft: 12, marginRight: 22 }} /&gt;&#10;&#10;    &lt;Box style={{ width: 300, flexDirection: 'column' }}&gt;&#10;      &lt;Text style={{ fontSize: 22, fontWeight: 'bold', color: '#FFFFFF' }}&gt;35 道&lt;/Text&gt;&#10;      &lt;Text style={{ fontSize: 12.5, color: '#B9CCE8', marginTop: 4 }}&gt;检索题，接真模型全对&lt;/Text&gt;&#10;    &lt;/Box&gt;&#10;&#10;    &lt;Box style={{ width: 1, height: 46, background: '#3D7BD9', marginLeft: 12, marginRight: 22 }} /&gt;&#10;&#10;    &lt;Box style={{ width: 300, flexDirection: 'column' }}&gt;&#10;      &lt;Text style={{ fontSize: 22, fontWeight: 'bold', color: '#FFFFFF' }}&gt;7 个&lt;/Text&gt;&#10;      &lt;Text style={{ fontSize: 12.5, color: '#B9CCE8', marginTop: 4 }}&gt;功能页面，全部可用&lt;/Text&gt;&#10;    &lt;/Box&gt;&#10;&#10;  &lt;/Box&gt;&#10;&#10;  &lt;Box style={{ position: 'absolute', bottom: 0, left: 0, width: 1280, height: 56, background: 'rgba(255, 255, 255, 0.07)', flexDirection: 'row', alignItems: 'center', justifyContent: 'space-between', paddingLeft: 76, paddingRight: 76 }}&gt;&#10;    &lt;Text style={{ fontSize: 14, color: '#C9D8EF' }}&gt;知迹 · 基于大模型智能体的 AI 教育学习系统&lt;/Text&gt;&#10;    &lt;Text style={{ fontSize: 14, color: '#C9D8EF' }}&gt;11 / 11&lt;/Text&gt;&#10;  &lt;/Box&gt;&#10;&#10;&lt;/Slide&gt;&#10;"/>
@@ -4589,7 +4568,7 @@
 
 <file path=ppt/slides/slide2.xml><?xml version="1.0" encoding="utf-8"?>
 <p:sld xmlns:p="http://schemas.openxmlformats.org/presentationml/2006/main" xmlns:a="http://schemas.openxmlformats.org/drawingml/2006/main">
-  <p:cSld>
+  <p:cSld name="02 摘要｜三项工程约束，把「能答」变成「可交付」">
     <p:spTree>
       <p:nvGrpSpPr>
         <p:cNvPr id="101" name="" descr="&lt;Slide style={{ width: 1280, height: 720, background: '#FFFFFF', padding: 0, position: 'relative', fontFamily: 'PingFang SC' }}&gt;&#10;&#10;  &lt;Box style={{ position: 'absolute', top: 0, left: 0, width: 1280, height: 64, background: '#1E4FA8' }} /&gt;&#10;  &lt;Text style={{ position: 'absolute', left: 76, top: 21, fontSize: 15, color: '#C9D8EF', letterSpacing: 1 }}&gt;知迹 · 答辩汇报&lt;/Text&gt;&#10;  &lt;Text style={{ position: 'absolute', left: 1010, top: 21, width: 194, textAlign: 'right', fontSize: 15, color: '#C9D8EF' }}&gt;导览与结论&lt;/Text&gt;&#10;&#10;  &lt;Box style={{ position: 'absolute', left: 76, top: 92, width: 1128 }}&gt;&#10;    &lt;Text style={{ fontSize: 31, fontWeight: 'bold', color: '#0E3F8C' }}&gt;三项工程约束，把「能答」变成「可交付」&lt;/Text&gt;&#10;    &lt;Text style={{ fontSize: 15.5, color: '#4A5568', marginTop: 10 }}&gt;本页是全文摘要：读完这一页即可掌握结论，后面每页只负责证明其中一条&lt;/Text&gt;&#10;  &lt;/Box&gt;&#10;&#10;  &lt;Box style={{ position: 'absolute', left: 76, top: 186, width: 460, height: 388, flexDirection: 'column' }}&gt;&#10;&#10;    &lt;Text style={{ fontSize: 13.5, color: '#3D7BD9', letterSpacing: 1.5 }}&gt;汇报路线（5 段）&lt;/Text&gt;&#10;&#10;    &lt;Box style={{ flexDirection: 'column', marginTop: 12 }}&gt;&#10;&#10;      &lt;Box style={{ flexDirection: 'row', height: 68, alignItems: 'flex-start', borderBottom: '1px solid #E5E7EB', paddingTop: 12 }}&gt;&#10;        &lt;Text style={{ fontSize: 13, fontWeight: 'bold', color: '#1E4FA8', width: 34 }}&gt;01&lt;/Text&gt;&#10;        &lt;Box style={{ flexDirection: 'column', width: 340 }}&gt;&#10;          &lt;Text style={{ fontSize: 15, fontWeight: 'bold', color: '#1A2230' }}&gt;背景与目标&lt;/Text&gt;&#10;          &lt;Text style={{ fontSize: 12.5, color: '#8B97A8', marginTop: 4 }}&gt;问题在哪、要做到什么&lt;/Text&gt;&#10;        &lt;/Box&gt;&#10;        &lt;Text style={{ fontSize: 12.5, color: '#8B97A8', width: 60, textAlign: 'right' }}&gt;p3&lt;/Text&gt;&#10;      &lt;/Box&gt;&#10;&#10;      &lt;Box style={{ flexDirection: 'row', height: 68, alignItems: 'flex-start', borderBottom: '1px solid #E5E7EB', paddingTop: 12 }}&gt;&#10;        &lt;Text style={{ fontSize: 13, fontWeight: 'bold', color: '#1E4FA8', width: 34 }}&gt;02&lt;/Text&gt;&#10;        &lt;Box style={{ flexDirection: 'column', width: 340 }}&gt;&#10;          &lt;Text style={{ fontSize: 15, fontWeight: 'bold', color: '#1A2230' }}&gt;技术选型与架构&lt;/Text&gt;&#10;          &lt;Text style={{ fontSize: 12.5, color: '#8B97A8', marginTop: 4 }}&gt;为什么选这些、怎么搭&lt;/Text&gt;&#10;        &lt;/Box&gt;&#10;        &lt;Text style={{ fontSize: 12.5, color: '#8B97A8', width: 60, textAlign: 'right' }}&gt;p4–5&lt;/Text&gt;&#10;      &lt;/Box&gt;&#10;&#10;      &lt;Box style={{ flexDirection: 'row', height: 68, alignItems: 'flex-start', borderBottom: '1px solid #E5E7EB', paddingTop: 12 }}&gt;&#10;        &lt;Text style={{ fontSize: 13, fontWeight: 'bold', color: '#1E4FA8', width: 34 }}&gt;03&lt;/Text&gt;&#10;        &lt;Box style={{ flexDirection: 'column', width: 340 }}&gt;&#10;          &lt;Text style={{ fontSize: 15, fontWeight: 'bold', color: '#1A2230' }}&gt;三项关键实现&lt;/Text&gt;&#10;          &lt;Text style={{ fontSize: 12.5, color: '#8B97A8', marginTop: 4 }}&gt;检索 / 可恢复 / 可度量&lt;/Text&gt;&#10;        &lt;/Box&gt;&#10;        &lt;Text style={{ fontSize: 12.5, color: '#8B97A8', width: 60, textAlign: 'right' }}&gt;p6–8&lt;/Text&gt;&#10;      &lt;/Box&gt;&#10;&#10;      &lt;Box style={{ flexDirection: 'row', height: 68, alignItems: 'flex-start', borderBottom: '1px solid #E5E7EB', paddingTop: 12 }}&gt;&#10;        &lt;Text style={{ fontSize: 13, fontWeight: 'bold', color: '#1E4FA8', width: 34 }}&gt;04&lt;/Text&gt;&#10;        &lt;Box style={{ flexDirection: 'column', width: 340 }}&gt;&#10;          &lt;Text style={{ fontSize: 15, fontWeight: 'bold', color: '#1A2230' }}&gt;实际使用与指标&lt;/Text&gt;&#10;          &lt;Text style={{ fontSize: 12.5, color: '#8B97A8', marginTop: 4 }}&gt;真实界面与实测数据&lt;/Text&gt;&#10;        &lt;/Box&gt;&#10;        &lt;Text style={{ fontSize: 12.5, color: '#8B97A8', width: 60, textAlign: 'right' }}&gt;p9–10&lt;/Text&gt;&#10;      &lt;/Box&gt;&#10;&#10;      &lt;Box style={{ flexDirection: 'row', height: 68, alignItems: 'flex-start', paddingTop: 12 }}&gt;&#10;        &lt;Text style={{ fontSize: 13, fontWeight: 'bold', color: '#1E4FA8', width: 34 }}&gt;05&lt;/Text&gt;&#10;        &lt;Box style={{ flexDirection: 'column', width: 340 }}&gt;&#10;          &lt;Text style={{ fontSize: 15, fontWeight: 'bold', color: '#1A2230' }}&gt;边界与下一步&lt;/Text&gt;&#10;          &lt;Text style={{ fontSize: 12.5, color: '#8B97A8', marginTop: 4 }}&gt;没做什么、接着做什么&lt;/Text&gt;&#10;        &lt;/Box&gt;&#10;        &lt;Text style={{ fontSize: 12.5, color: '#8B97A8', width: 60, textAlign: 'right' }}&gt;p11&lt;/Text&gt;&#10;      &lt;/Box&gt;&#10;&#10;    &lt;/Box&gt;&#10;&#10;  &lt;/Box&gt;&#10;&#10;  &lt;Box style={{ position: 'absolute', left: 588, top: 186, width: 616, height: 388, flexDirection: 'column' }}&gt;&#10;&#10;    &lt;Text style={{ fontSize: 13.5, color: '#3D7BD9', letterSpacing: 1.5 }}&gt;三条结论&lt;/Text&gt;&#10;&#10;    &lt;Box style={{ flexDirection: 'column', marginTop: 12 }}&gt;&#10;&#10;      &lt;Box style={{ flexDirection: 'column', height: 116, borderLeft: '3px solid #1E4FA8', paddingLeft: 14, paddingTop: 10 }}&gt;&#10;        &lt;Text style={{ fontSize: 15.5, fontWeight: 'bold', color: '#1A2230', lineHeight: 1.5 }}&gt;&#10;          一、把回合画成状态图，是「可恢复」与「可拦截」的共同前提&#10;        &lt;/Text&gt;&#10;        &lt;Text style={{ fontSize: 13, color: '#4A5568', lineHeight: 1.65, marginTop: 8 }}&gt;&#10;          四个失败点（断线 / 工具失败 / 忘事 / 越权写）各有对应机制，不是靠提示词嘱咐。见 p6–8。&#10;        &lt;/Text&gt;&#10;      &lt;/Box&gt;&#10;&#10;      &lt;Box style={{ flexDirection: 'column', height: 116, borderLeft: '3px solid #1E4FA8', paddingLeft: 14, paddingTop: 10 }}&gt;&#10;        &lt;Text style={{ fontSize: 15.5, fontWeight: 'bold', color: '#1A2230', lineHeight: 1.5 }}&gt;&#10;          二、四路召回 + 名次融合，补上了中文短词与同义异名的漏召回&#10;        &lt;/Text&gt;&#10;        &lt;Text style={{ fontSize: 13, color: '#4A5568', lineHeight: 1.65, marginTop: 8 }}&gt;&#10;          35 题里 34 题首次命中；接真实向量模型 35 题全中，且引用可落到「第 N 页」。见 p6。&#10;        &lt;/Text&gt;&#10;      &lt;/Box&gt;&#10;&#10;      &lt;Box style={{ flexDirection: 'column', height: 116, borderLeft: '3px solid #1E4FA8', paddingLeft: 14, paddingTop: 10 }}&gt;&#10;        &lt;Text style={{ fontSize: 15.5, fontWeight: 'bold', color: '#1A2230', lineHeight: 1.5 }}&gt;&#10;          三、质量不靠感觉：284 项测试与 0.05 容差构成自动拦截&#10;        &lt;/Text&gt;&#10;        &lt;Text style={{ fontSize: 13, color: '#4A5568', lineHeight: 1.65, marginTop: 8 }}&gt;&#10;          每次改动跑同一套考卷，掉出容差即命令非零退出，可直接接入提交前检查。见 p8。&#10;        &lt;/Text&gt;&#10;      &lt;/Box&gt;&#10;&#10;    &lt;/Box&gt;&#10;&#10;  &lt;/Box&gt;&#10;&#10;  &lt;Box style={{ position: 'absolute', left: 76, top: 580, width: 1128, height: 48, background: '#0E3F8C', borderRadius: 8, justifyContent: 'center', alignItems: 'center' }}&gt;&#10;    &lt;Text style={{ fontSize: 14.5, color: '#FFFFFF' }}&gt;&#10;      叙述方式：结论先行 → 逐项举证 → 主动说明边界；标题连起来读，即为完整论证&#10;    &lt;/Text&gt;&#10;  &lt;/Box&gt;&#10;&#10;  &lt;Box style={{ position: 'absolute', left: 76, bottom: 24, width: 1128, height: 22, flexDirection: 'row', alignItems: 'center', justifyContent: 'space-between' }}&gt;&#10;    &lt;Text style={{ fontSize: 13, color: '#8B97A8' }}&gt;知迹 · 基于大模型智能体的 AI 教育学习系统&lt;/Text&gt;&#10;    &lt;Text style={{ fontSize: 14, fontWeight: 'bold', color: '#0E3F8C' }}&gt;02 / 12&lt;/Text&gt;&#10;  &lt;/Box&gt;&#10;&#10;&lt;/Slide&gt;&#10;"/>
@@ -6600,7 +6579,7 @@
 
 <file path=ppt/slides/slide3.xml><?xml version="1.0" encoding="utf-8"?>
 <p:sld xmlns:p="http://schemas.openxmlformats.org/presentationml/2006/main" xmlns:a="http://schemas.openxmlformats.org/drawingml/2006/main">
-  <p:cSld>
+  <p:cSld name="03 背景｜三个时刻的共性缺口：产出无法复用，复习成本被迫翻倍">
     <p:spTree>
       <p:nvGrpSpPr>
         <p:cNvPr id="147" name="" descr="&lt;Slide style={{ width: 1280, height: 720, background: '#FFFFFF', padding: 0, position: 'relative', fontFamily: 'PingFang SC' }}&gt;&#10;&#10;  &lt;Box style={{ position: 'absolute', top: 0, left: 0, width: 1280, height: 64, background: '#1E4FA8' }} /&gt;&#10;  &lt;Text style={{ position: 'absolute', left: 76, top: 21, fontSize: 15, color: '#C9D8EF', letterSpacing: 1 }}&gt;知迹 · 答辩汇报&lt;/Text&gt;&#10;  &lt;Text style={{ position: 'absolute', left: 1010, top: 21, width: 194, textAlign: 'right', fontSize: 15, color: '#C9D8EF' }}&gt;01 · 背景与目标&lt;/Text&gt;&#10;&#10;  &lt;Box style={{ position: 'absolute', left: 76, top: 92, width: 1128 }}&gt;&#10;    &lt;Text style={{ fontSize: 31, fontWeight: 'bold', color: '#0E3F8C' }}&gt;三个时刻的共性缺口：产出无法复用，复习成本被迫翻倍&lt;/Text&gt;&#10;    &lt;Text style={{ fontSize: 15.5, color: '#4A5568', marginTop: 10 }}&gt;问题不在「有没有工具」，而在「用完即弃」——讲义、结论、错因都没有留下可再用的形态&lt;/Text&gt;&#10;  &lt;/Box&gt;&#10;&#10;  &lt;Box style={{ position: 'absolute', left: 76, top: 190, width: 596, height: 396, flexDirection: 'column' }}&gt;&#10;&#10;    &lt;Text style={{ fontSize: 13.5, color: '#3D7BD9', letterSpacing: 1.5 }}&gt;现状观察（一学期时间轴）&lt;/Text&gt;&#10;&#10;    &lt;Box style={{ flexDirection: 'column', marginTop: 10 }}&gt;&#10;      &lt;Box style={{ flexDirection: 'column', height: 118, borderLeft: '3px solid #1E4FA8', paddingLeft: 14, paddingTop: 8 }}&gt;&#10;        &lt;Text style={{ fontSize: 17, fontWeight: 'bold', color: '#1A2230' }}&gt;上课中：讲义散在三处&lt;/Text&gt;&#10;        &lt;Text style={{ fontSize: 13.5, color: '#4A5568', lineHeight: 1.65, marginTop: 6 }}&gt;&#10;          课程平台、聊天记录、手机相册各存一半；同一页内容要翻三个地方才能凑齐。&#10;        &lt;/Text&gt;&#10;        &lt;Text style={{ fontSize: 12.5, color: '#8B97A8', marginTop: 6 }}&gt;产出状态：不可检索&lt;/Text&gt;&#10;      &lt;/Box&gt;&#10;&#10;      &lt;Box style={{ flexDirection: 'column', height: 118, borderLeft: '3px solid #1E4FA8', paddingLeft: 14, paddingTop: 8 }}&gt;&#10;        &lt;Text style={{ fontSize: 17, fontWeight: 'bold', color: '#1A2230' }}&gt;写作业：结论留在对话里&lt;/Text&gt;&#10;        &lt;Text style={{ fontSize: 13.5, color: '#4A5568', lineHeight: 1.65, marginTop: 6 }}&gt;&#10;          问完就走，答案没有进入任何可检索的结构；同类问题下次从零再问一遍。&#10;        &lt;/Text&gt;&#10;        &lt;Text style={{ fontSize: 12.5, color: '#8B97A8', marginTop: 6 }}&gt;产出状态：不可复用&lt;/Text&gt;&#10;      &lt;/Box&gt;&#10;&#10;      &lt;Box style={{ flexDirection: 'column', height: 118, borderLeft: '3px solid #D9534F', paddingLeft: 14, paddingTop: 8 }}&gt;&#10;        &lt;Text style={{ fontSize: 17, fontWeight: 'bold', color: '#D9534F' }}&gt;期末：资料在、题没有&lt;/Text&gt;&#10;        &lt;Text style={{ fontSize: 13.5, color: '#4A5568', lineHeight: 1.65, marginTop: 6 }}&gt;&#10;          只能重读讲义、重翻记录；练习量不足，薄弱点无法被定位。&#10;        &lt;/Text&gt;&#10;        &lt;Text style={{ fontSize: 12.5, color: '#8B97A8', marginTop: 6 }}&gt;产出状态：不可练&lt;/Text&gt;&#10;      &lt;/Box&gt;&#10;    &lt;/Box&gt;&#10;&#10;  &lt;/Box&gt;&#10;&#10;  &lt;Box style={{ position: 'absolute', left: 712, top: 190, width: 492, height: 396, flexDirection: 'column' }}&gt;&#10;&#10;    &lt;Text style={{ fontSize: 13.5, color: '#3D7BD9', letterSpacing: 1.5 }}&gt;由此定义四个可验证目标&lt;/Text&gt;&#10;&#10;    &lt;Box style={{ flexDirection: 'column', marginTop: 10 }}&gt;&#10;&#10;      &lt;Box style={{ flexDirection: 'column', height: 88, borderBottom: '1px solid #E5E7EB', paddingTop: 8 }}&gt;&#10;        &lt;Text style={{ fontSize: 14.5, fontWeight: 'bold', color: '#1A2230' }}&gt;G1　中断后可无损续跑&lt;/Text&gt;&#10;        &lt;Text style={{ fontSize: 12.5, color: '#4A5568', lineHeight: 1.6, marginTop: 6 }}&gt;判据：关页 / 断网后重新进入，能从未完成处继续&lt;/Text&gt;&#10;      &lt;/Box&gt;&#10;&#10;      &lt;Box style={{ flexDirection: 'column', height: 88, borderBottom: '1px solid #E5E7EB', paddingTop: 8 }}&gt;&#10;        &lt;Text style={{ fontSize: 14.5, fontWeight: 'bold', color: '#1A2230' }}&gt;G2　答案可追溯到具体页&lt;/Text&gt;&#10;        &lt;Text style={{ fontSize: 12.5, color: '#4A5568', lineHeight: 1.6, marginTop: 6 }}&gt;判据：引用带「第 N 页」，原件可打开核对&lt;/Text&gt;&#10;      &lt;/Box&gt;&#10;&#10;      &lt;Box style={{ flexDirection: 'column', height: 88, borderBottom: '1px solid #E5E7EB', paddingTop: 8 }}&gt;&#10;        &lt;Text style={{ fontSize: 14.5, fontWeight: 'bold', color: '#1A2230' }}&gt;G3　数据不被越权修改&lt;/Text&gt;&#10;        &lt;Text style={{ fontSize: 12.5, color: '#4A5568', lineHeight: 1.6, marginTop: 6 }}&gt;判据：所有写操作在执行层被拦，且在用户确认后落库&lt;/Text&gt;&#10;      &lt;/Box&gt;&#10;&#10;      &lt;Box style={{ flexDirection: 'column', height: 88, paddingTop: 8 }}&gt;&#10;        &lt;Text style={{ fontSize: 14.5, fontWeight: 'bold', color: '#1A2230' }}&gt;G4　改动好坏可被量化&lt;/Text&gt;&#10;        &lt;Text style={{ fontSize: 12.5, color: '#4A5568', lineHeight: 1.6, marginTop: 6 }}&gt;判据：固定考卷 + 基线，掉分自动拦截&lt;/Text&gt;&#10;      &lt;/Box&gt;&#10;&#10;    &lt;/Box&gt;&#10;&#10;  &lt;/Box&gt;&#10;&#10;  &lt;Box style={{ position: 'absolute', left: 76, top: 600, width: 1128, height: 46, background: '#F0F5FC', borderRadius: 8, justifyContent: 'center', alignItems: 'center' }}&gt;&#10;    &lt;Text style={{ fontSize: 14, color: '#1E4FA8' }}&gt;&#10;      四个目标与后文一一对应：G1 → p7，G2 → p6 与 p9，G3 → p7，G4 → p8 与 p10&#10;    &lt;/Text&gt;&#10;  &lt;/Box&gt;&#10;&#10;  &lt;Box style={{ position: 'absolute', left: 76, bottom: 24, width: 1128, height: 22, flexDirection: 'row', alignItems: 'center', justifyContent: 'space-between' }}&gt;&#10;    &lt;Text style={{ fontSize: 13, color: '#8B97A8' }}&gt;知迹 · 基于大模型智能体的 AI 教育学习系统&lt;/Text&gt;&#10;    &lt;Text style={{ fontSize: 14, fontWeight: 'bold', color: '#0E3F8C' }}&gt;03 / 12&lt;/Text&gt;&#10;  &lt;/Box&gt;&#10;&#10;&lt;/Slide&gt;&#10;"/>
@@ -8126,7 +8105,7 @@
 
 <file path=ppt/slides/slide4.xml><?xml version="1.0" encoding="utf-8"?>
 <p:sld xmlns:p="http://schemas.openxmlformats.org/presentationml/2006/main" xmlns:a="http://schemas.openxmlformats.org/drawingml/2006/main">
-  <p:cSld>
+  <p:cSld name="04 技术选型｜选型原则是零运维、可离线、可评测，不是追新">
     <p:spTree>
       <p:nvGrpSpPr>
         <p:cNvPr id="183" name="" descr="&lt;Slide style={{ width: 1280, height: 720, background: '#FFFFFF', padding: 0, position: 'relative', fontFamily: 'PingFang SC' }}&gt;&#10;&#10;  &lt;Box style={{ position: 'absolute', top: 0, left: 0, width: 1280, height: 64, background: '#1E4FA8' }} /&gt;&#10;  &lt;Text style={{ position: 'absolute', left: 76, top: 21, fontSize: 15, color: '#C9D8EF', letterSpacing: 1 }}&gt;知迹 · 答辩汇报&lt;/Text&gt;&#10;  &lt;Text style={{ position: 'absolute', left: 1010, top: 21, width: 194, textAlign: 'right', fontSize: 15, color: '#C9D8EF' }}&gt;02 · 技术选型与架构&lt;/Text&gt;&#10;&#10;  &lt;Box style={{ position: 'absolute', left: 76, top: 92, width: 1128 }}&gt;&#10;    &lt;Text style={{ fontSize: 31, fontWeight: 'bold', color: '#0E3F8C' }}&gt;选型原则是「零运维、可离线、可评测」，不是追新&lt;/Text&gt;&#10;    &lt;Text style={{ fontSize: 15.5, color: '#4A5568', marginTop: 10 }}&gt;每一层都写清「承担什么」与「为什么不用更常见的替代方案」，便于评审追问&lt;/Text&gt;&#10;  &lt;/Box&gt;&#10;&#10;  &lt;Box style={{ position: 'absolute', left: 76, top: 186, width: 1128, height: 40, flexDirection: 'row', alignItems: 'center', background: '#1E4FA8', borderRadius: 6, paddingLeft: 14 }}&gt;&#10;    &lt;Text style={{ fontSize: 13, fontWeight: 'bold', color: '#FFFFFF', width: 130 }}&gt;层次&lt;/Text&gt;&#10;    &lt;Text style={{ fontSize: 13, fontWeight: 'bold', color: '#FFFFFF', width: 250 }}&gt;选型&lt;/Text&gt;&#10;    &lt;Text style={{ fontSize: 13, fontWeight: 'bold', color: '#FFFFFF', width: 320 }}&gt;承担什么&lt;/Text&gt;&#10;    &lt;Text style={{ fontSize: 13, fontWeight: 'bold', color: '#FFFFFF', width: 390 }}&gt;为什么不选更常见的替代方案&lt;/Text&gt;&#10;  &lt;/Box&gt;&#10;&#10;  &lt;Box style={{ position: 'absolute', left: 76, top: 230, width: 1128, height: 354, flexDirection: 'column' }}&gt;&#10;&#10;    &lt;Box style={{ flexDirection: 'row', height: 58, alignItems: 'center', borderBottom: '1px solid #E5E7EB', paddingLeft: 14 }}&gt;&#10;      &lt;Text style={{ fontSize: 13.5, color: '#1A2230', width: 130 }}&gt;编排&lt;/Text&gt;&#10;      &lt;Text style={{ fontSize: 13.5, fontWeight: 'bold', color: '#1E4FA8', width: 250 }}&gt;LangGraph 显式状态图&lt;/Text&gt;&#10;      &lt;Text style={{ fontSize: 13, color: '#4A5568', width: 320 }}&gt;回合路由、工具循环、检查点、中断恢复&lt;/Text&gt;&#10;      &lt;Text style={{ fontSize: 13, color: '#4A5568', width: 390 }}&gt;自研状态机要重复实现断点与中断，成本更高&lt;/Text&gt;&#10;    &lt;/Box&gt;&#10;&#10;    &lt;Box style={{ flexDirection: 'row', height: 58, alignItems: 'center', borderBottom: '1px solid #E5E7EB', paddingLeft: 14 }}&gt;&#10;      &lt;Text style={{ fontSize: 13.5, color: '#1A2230', width: 130 }}&gt;服务&lt;/Text&gt;&#10;      &lt;Text style={{ fontSize: 13.5, fontWeight: 'bold', color: '#1E4FA8', width: 250 }}&gt;FastAPI + SSE&lt;/Text&gt;&#10;      &lt;Text style={{ fontSize: 13, color: '#4A5568', width: 320 }}&gt;流式下发步骤、回传人工确认结果&lt;/Text&gt;&#10;      &lt;Text style={{ fontSize: 13, color: '#4A5568', width: 390 }}&gt;同步框架难以做到「边算边推」，过程不可见&lt;/Text&gt;&#10;    &lt;/Box&gt;&#10;&#10;    &lt;Box style={{ flexDirection: 'row', height: 58, alignItems: 'center', borderBottom: '1px solid #E5E7EB', paddingLeft: 14 }}&gt;&#10;      &lt;Text style={{ fontSize: 13.5, color: '#1A2230', width: 130 }}&gt;存储&lt;/Text&gt;&#10;      &lt;Text style={{ fontSize: 13.5, fontWeight: 'bold', color: '#1E4FA8', width: 250 }}&gt;SQLite（FTS5 + 向量表）&lt;/Text&gt;&#10;      &lt;Text style={{ fontSize: 13, color: '#4A5568', width: 320 }}&gt;单文件承载全部业务数据与检索索引&lt;/Text&gt;&#10;      &lt;Text style={{ fontSize: 13, color: '#4A5568', width: 390 }}&gt;换 MySQL 会牺牲中文检索与离线演示，收益为零&lt;/Text&gt;&#10;    &lt;/Box&gt;&#10;&#10;    &lt;Box style={{ flexDirection: 'row', height: 58, alignItems: 'center', borderBottom: '1px solid #E5E7EB', paddingLeft: 14 }}&gt;&#10;      &lt;Text style={{ fontSize: 13.5, color: '#1A2230', width: 130 }}&gt;检索&lt;/Text&gt;&#10;      &lt;Text style={{ fontSize: 13.5, fontWeight: 'bold', color: '#1E4FA8', width: 250 }}&gt;trigram 全文 + 向量 + LIKE + 加权 RRF&lt;/Text&gt;&#10;      &lt;Text style={{ fontSize: 13, color: '#4A5568', width: 320 }}&gt;中文短词、同义异名、语义近似的多路覆盖&lt;/Text&gt;&#10;      &lt;Text style={{ fontSize: 13, color: '#4A5568', width: 390 }}&gt;纯向量会漏专有名词与两字词，纯关键词漏同义&lt;/Text&gt;&#10;    &lt;/Box&gt;&#10;&#10;    &lt;Box style={{ flexDirection: 'row', height: 58, alignItems: 'center', borderBottom: '1px solid #E5E7EB', paddingLeft: 14 }}&gt;&#10;      &lt;Text style={{ fontSize: 13.5, color: '#1A2230', width: 130 }}&gt;前端&lt;/Text&gt;&#10;      &lt;Text style={{ fontSize: 13.5, fontWeight: 'bold', color: '#1E4FA8', width: 250 }}&gt;Next.js 16（App Router）&lt;/Text&gt;&#10;      &lt;Text style={{ fontSize: 13, color: '#4A5568', width: 320 }}&gt;页面路由、流式渲染、交互态管理&lt;/Text&gt;&#10;      &lt;Text style={{ fontSize: 13, color: '#4A5568', width: 390 }}&gt;纯 SPA 处理流式与多页状态更绕&lt;/Text&gt;&#10;    &lt;/Box&gt;&#10;&#10;    &lt;Box style={{ flexDirection: 'row', height: 58, alignItems: 'center', paddingLeft: 14 }}&gt;&#10;      &lt;Text style={{ fontSize: 13.5, color: '#1A2230', width: 130 }}&gt;工具协议&lt;/Text&gt;&#10;      &lt;Text style={{ fontSize: 13.5, fontWeight: 'bold', color: '#1E4FA8', width: 250 }}&gt;MCP（自写 stdio 客户端）&lt;/Text&gt;&#10;      &lt;Text style={{ fontSize: 13, color: '#4A5568', width: 320 }}&gt;外部工具即插即用、跨宿主复用&lt;/Text&gt;&#10;      &lt;Text style={{ fontSize: 13, color: '#4A5568', width: 390 }}&gt;自研协议没有生态，也谈不上复用&lt;/Text&gt;&#10;    &lt;/Box&gt;&#10;&#10;  &lt;/Box&gt;&#10;&#10;  &lt;Box style={{ position: 'absolute', left: 76, top: 596, width: 1128, height: 46, background: '#F0F5FC', borderRadius: 8, justifyContent: 'center', alignItems: 'center' }}&gt;&#10;    &lt;Text style={{ fontSize: 14, color: '#1E4FA8' }}&gt;&#10;      结果：整条链路可在离线状态跑通（测试与评测零 API 消耗），这是能反复验证的前提&#10;    &lt;/Text&gt;&#10;  &lt;/Box&gt;&#10;&#10;  &lt;Box style={{ position: 'absolute', left: 76, bottom: 24, width: 1128, height: 22, flexDirection: 'row', alignItems: 'center', justifyContent: 'space-between' }}&gt;&#10;    &lt;Text style={{ fontSize: 13, color: '#8B97A8' }}&gt;知迹 · 基于大模型智能体的 AI 教育学习系统&lt;/Text&gt;&#10;    &lt;Text style={{ fontSize: 14, fontWeight: 'bold', color: '#0E3F8C' }}&gt;04 / 12&lt;/Text&gt;&#10;  &lt;/Box&gt;&#10;&#10;&lt;/Slide&gt;&#10;"/>
@@ -9963,7 +9942,7 @@
 
 <file path=ppt/slides/slide5.xml><?xml version="1.0" encoding="utf-8"?>
 <p:sld xmlns:p="http://schemas.openxmlformats.org/presentationml/2006/main" xmlns:a="http://schemas.openxmlformats.org/drawingml/2006/main">
-  <p:cSld>
+  <p:cSld name="05 架构｜依赖单向朝内、回合画成图">
     <p:spTree>
       <p:nvGrpSpPr>
         <p:cNvPr id="228" name="" descr="&lt;Slide style={{ width: 1280, height: 720, background: '#FFFFFF', padding: 0, position: 'relative', fontFamily: 'PingFang SC' }}&gt;&#10;&#10;  &lt;Box style={{ position: 'absolute', top: 0, left: 0, width: 1280, height: 64, background: '#1E4FA8' }} /&gt;&#10;  &lt;Text style={{ position: 'absolute', left: 76, top: 21, fontSize: 15, color: '#C9D8EF', letterSpacing: 1 }}&gt;知迹 · 答辩汇报&lt;/Text&gt;&#10;  &lt;Text style={{ position: 'absolute', left: 1010, top: 21, width: 194, textAlign: 'right', fontSize: 15, color: '#C9D8EF' }}&gt;02 · 技术选型与架构&lt;/Text&gt;&#10;&#10;  &lt;Box style={{ position: 'absolute', left: 76, top: 92, width: 1128 }}&gt;&#10;    &lt;Text style={{ fontSize: 31, fontWeight: 'bold', color: '#0E3F8C' }}&gt;依赖单向朝内、回合画成图：可维护性与可解释性同时成立&lt;/Text&gt;&#10;    &lt;Text style={{ fontSize: 15.5, color: '#4A5568', marginTop: 10 }}&gt;左：四层边界（谁可以依赖谁）；右：一次学习回合的四个节点（停在哪、从哪续）&lt;/Text&gt;&#10;  &lt;/Box&gt;&#10;&#10;  &lt;Box style={{ position: 'absolute', left: 76, top: 190, width: 640, height: 372, flexDirection: 'column' }}&gt;&#10;&#10;    &lt;Text style={{ fontSize: 13.5, color: '#3D7BD9', letterSpacing: 1.5 }}&gt;四层边界　依赖只朝内&lt;/Text&gt;&#10;&#10;    &lt;Box style={{ flexDirection: 'column', marginTop: 12, gap: 8 }}&gt;&#10;&#10;      &lt;Box style={{ width: 640, height: 54, background: '#F0F5FC', borderLeft: '4px solid #1E4FA8', flexDirection: 'row', alignItems: 'center', paddingLeft: 14, gap: 10 }}&gt;&#10;        &lt;Text style={{ fontSize: 14, fontWeight: 'bold', color: '#1E4FA8', width: 120 }}&gt;interfaces&lt;/Text&gt;&#10;        &lt;Text style={{ fontSize: 13, color: '#4A5568', width: 480 }}&gt;API 与流式接口（组合根，唯一允许依赖全部的一层）&lt;/Text&gt;&#10;      &lt;/Box&gt;&#10;&#10;      &lt;Box style={{ width: 590, height: 54, background: '#F0F5FC', borderLeft: '4px solid #1E4FA8', flexDirection: 'row', alignItems: 'center', paddingLeft: 14, gap: 10 }}&gt;&#10;        &lt;Text style={{ fontSize: 14, fontWeight: 'bold', color: '#1E4FA8', width: 120 }}&gt;application&lt;/Text&gt;&#10;        &lt;Text style={{ fontSize: 13, color: '#4A5568', width: 430 }}&gt;用例编排、端口定义、LangGraph 状态图&lt;/Text&gt;&#10;      &lt;/Box&gt;&#10;&#10;      &lt;Box style={{ width: 540, height: 54, background: '#E8EFF8', borderLeft: '4px solid #1E4FA8', flexDirection: 'row', alignItems: 'center', paddingLeft: 14, gap: 10 }}&gt;&#10;        &lt;Text style={{ fontSize: 14, fontWeight: 'bold', color: '#1E4FA8', width: 120 }}&gt;domain&lt;/Text&gt;&#10;        &lt;Text style={{ fontSize: 13, color: '#4A5568', width: 380 }}&gt;纯函数：路由、切块、融合排序、排期、护栏&lt;/Text&gt;&#10;      &lt;/Box&gt;&#10;&#10;      &lt;Box style={{ width: 490, height: 54, background: '#F7F9FC', borderLeft: '4px solid #3D7BD9', flexDirection: 'row', alignItems: 'center', paddingLeft: 14, gap: 10 }}&gt;&#10;        &lt;Text style={{ fontSize: 14, fontWeight: 'bold', color: '#3D7BD9', width: 120 }}&gt;infrastructure&lt;/Text&gt;&#10;        &lt;Text style={{ fontSize: 13, color: '#4A5568', width: 330 }}&gt;SQLite、模型调用、向量、文件解析&lt;/Text&gt;&#10;      &lt;/Box&gt;&#10;&#10;    &lt;/Box&gt;&#10;&#10;    &lt;Text style={{ fontSize: 13.5, color: '#4A5568', lineHeight: 1.7, marginTop: 16 }}&gt;&#10;      收益：领域层不依赖网络与模型，因此检索权重、排期规则可以在离线状态下被单测覆盖——284 项测试正是建立在这条边界上。&#10;    &lt;/Text&gt;&#10;&#10;  &lt;/Box&gt;&#10;&#10;  &lt;Box style={{ position: 'absolute', left: 756, top: 190, width: 448, height: 372, flexDirection: 'column' }}&gt;&#10;&#10;    &lt;Text style={{ fontSize: 13.5, color: '#3D7BD9', letterSpacing: 1.5 }}&gt;一次回合　四个节点&lt;/Text&gt;&#10;&#10;    &lt;Box style={{ flexDirection: 'column', marginTop: 12, gap: 6 }}&gt;&#10;&#10;      &lt;Box style={{ height: 56, background: '#F7F9FC', borderRadius: 6, flexDirection: 'row', alignItems: 'center', paddingLeft: 14, gap: 10 }}&gt;&#10;        &lt;Text style={{ fontSize: 13, fontWeight: 'bold', color: '#1E4FA8', width: 74 }}&gt;route&lt;/Text&gt;&#10;        &lt;Text style={{ fontSize: 13, color: '#4A5568', width: 330 }}&gt;判意图：讲解 / 练习 / 规划 / 检索 / 计算&lt;/Text&gt;&#10;      &lt;/Box&gt;&#10;&#10;      &lt;Box style={{ height: 56, background: '#F7F9FC', borderRadius: 6, flexDirection: 'row', alignItems: 'center', paddingLeft: 14, gap: 10 }}&gt;&#10;        &lt;Text style={{ fontSize: 13, fontWeight: 'bold', color: '#1E4FA8', width: 74 }}&gt;plan&lt;/Text&gt;&#10;        &lt;Text style={{ fontSize: 13, color: '#4A5568', width: 330 }}&gt;复杂任务才规划，简单请求直接进模型&lt;/Text&gt;&#10;      &lt;/Box&gt;&#10;&#10;      &lt;Box style={{ height: 56, background: '#E8EFF8', borderRadius: 6, flexDirection: 'row', alignItems: 'center', paddingLeft: 14, gap: 10 }}&gt;&#10;        &lt;Text style={{ fontSize: 13, fontWeight: 'bold', color: '#1E4FA8', width: 74 }}&gt;agent&lt;/Text&gt;&#10;        &lt;Text style={{ fontSize: 13, color: '#4A5568', width: 330 }}&gt;模型推理，决定调哪个工具&lt;/Text&gt;&#10;      &lt;/Box&gt;&#10;&#10;      &lt;Box style={{ height: 56, background: '#F0F5FC', borderRadius: 6, flexDirection: 'row', alignItems: 'center', paddingLeft: 14, gap: 10 }}&gt;&#10;        &lt;Text style={{ fontSize: 13, fontWeight: 'bold', color: '#1E4FA8', width: 74 }}&gt;tools&lt;/Text&gt;&#10;        &lt;Text style={{ fontSize: 13, color: '#4A5568', width: 330 }}&gt;执行工具、回填结果，可回到 agent&lt;/Text&gt;&#10;      &lt;/Box&gt;&#10;&#10;    &lt;/Box&gt;&#10;&#10;    &lt;Text style={{ fontSize: 13.5, color: '#4A5568', lineHeight: 1.7, marginTop: 14 }}&gt;&#10;      每个节点执行后都落一次检查点：这就是「关掉页面还能接着跑」与「写库前停下等你确认」共同的技术前提。&#10;    &lt;/Text&gt;&#10;&#10;  &lt;/Box&gt;&#10;&#10;  &lt;Box style={{ position: 'absolute', left: 76, top: 588, width: 1128, height: 46, background: '#0E3F8C', borderRadius: 8, justifyContent: 'center', alignItems: 'center' }}&gt;&#10;    &lt;Text style={{ fontSize: 14, color: '#FFFFFF' }}&gt;&#10;      评审关注点：为什么不分微服务？—— 单机单用户场景下，分层足以隔离变化，微服务只会增加部署与调试成本&#10;    &lt;/Text&gt;&#10;  &lt;/Box&gt;&#10;&#10;  &lt;Box style={{ position: 'absolute', left: 76, bottom: 24, width: 1128, height: 22, flexDirection: 'row', alignItems: 'center', justifyContent: 'space-between' }}&gt;&#10;    &lt;Text style={{ fontSize: 13, color: '#8B97A8' }}&gt;知迹 · 基于大模型智能体的 AI 教育学习系统&lt;/Text&gt;&#10;    &lt;Text style={{ fontSize: 14, fontWeight: 'bold', color: '#0E3F8C' }}&gt;05 / 11&lt;/Text&gt;&#10;  &lt;/Box&gt;&#10;&#10;&lt;/Slide&gt;&#10;"/>
@@ -11608,7 +11587,7 @@
 
 <file path=ppt/slides/slide6.xml><?xml version="1.0" encoding="utf-8"?>
 <p:sld xmlns:p="http://schemas.openxmlformats.org/presentationml/2006/main" xmlns:a="http://schemas.openxmlformats.org/drawingml/2006/main">
-  <p:cSld>
+  <p:cSld name="06 实现一｜四路召回补上中文短词与同义异名两类漏召回">
     <p:spTree>
       <p:nvGrpSpPr>
         <p:cNvPr id="271" name="" descr="&lt;Slide style={{ width: 1280, height: 720, background: '#FFFFFF', padding: 0, position: 'relative', fontFamily: 'PingFang SC' }}&gt;&#10;&#10;  &lt;Box style={{ position: 'absolute', top: 0, left: 0, width: 1280, height: 64, background: '#1E4FA8' }} /&gt;&#10;  &lt;Text style={{ position: 'absolute', left: 76, top: 21, fontSize: 15, color: '#C9D8EF', letterSpacing: 1 }}&gt;知迹 · 答辩汇报&lt;/Text&gt;&#10;  &lt;Text style={{ position: 'absolute', left: 1010, top: 21, width: 194, textAlign: 'right', fontSize: 15, color: '#C9D8EF' }}&gt;03 · 关键实现 ① 检索&lt;/Text&gt;&#10;&#10;  &lt;Box style={{ position: 'absolute', left: 76, top: 92, width: 1128 }}&gt;&#10;    &lt;Text style={{ fontSize: 31, fontWeight: 'bold', color: '#0E3F8C' }}&gt;四路召回同时补上「中文短词」与「同义异名」两类漏召回&lt;/Text&gt;&#10;    &lt;Text style={{ fontSize: 15.5, color: '#4A5568', marginTop: 10 }}&gt;四条通道不是堆料：每一条都对应一个实测过的漏召回场景，关掉任一条都能看到指标变化&lt;/Text&gt;&#10;  &lt;/Box&gt;&#10;&#10;  &lt;Box style={{ position: 'absolute', left: 76, top: 186, width: 1128, height: 150, flexDirection: 'row' }}&gt;&#10;&#10;    &lt;Box style={{ width: 256, flexDirection: 'column' }}&gt;&#10;      &lt;Text style={{ fontSize: 12.5, color: '#8B97A8' }}&gt;通道一&lt;/Text&gt;&#10;      &lt;Text style={{ fontSize: 16, fontWeight: 'bold', color: '#1A2230', marginTop: 6 }}&gt;原查询全文&lt;/Text&gt;&#10;      &lt;Text style={{ fontSize: 13, color: '#4A5568', lineHeight: 1.65, marginTop: 8 }}&gt;trigram 分词，中文也能命中&lt;/Text&gt;&#10;      &lt;Text style={{ fontSize: 12, color: '#D9534F', marginTop: 8 }}&gt;局限：错一个字就漏&lt;/Text&gt;&#10;    &lt;/Box&gt;&#10;&#10;    &lt;Box style={{ width: 1, height: 130, background: '#E5E7EB', marginLeft: 12, marginRight: 12 }} /&gt;&#10;&#10;    &lt;Box style={{ width: 256, flexDirection: 'column' }}&gt;&#10;      &lt;Text style={{ fontSize: 12.5, color: '#8B97A8' }}&gt;通道二&lt;/Text&gt;&#10;      &lt;Text style={{ fontSize: 16, fontWeight: 'bold', color: '#1A2230', marginTop: 6 }}&gt;同义 / 中英扩写&lt;/Text&gt;&#10;      &lt;Text style={{ fontSize: 13, color: '#4A5568', lineHeight: 1.65, marginTop: 8 }}&gt;本征值 → 特征值；queue → 队列&lt;/Text&gt;&#10;      &lt;Text style={{ fontSize: 12, color: '#D9534F', marginTop: 8 }}&gt;局限：靠词典，推断有噪声&lt;/Text&gt;&#10;    &lt;/Box&gt;&#10;&#10;    &lt;Box style={{ width: 1, height: 130, background: '#E5E7EB', marginLeft: 12, marginRight: 12 }} /&gt;&#10;&#10;    &lt;Box style={{ width: 256, flexDirection: 'column' }}&gt;&#10;      &lt;Text style={{ fontSize: 12.5, color: '#8B97A8' }}&gt;通道三&lt;/Text&gt;&#10;      &lt;Text style={{ fontSize: 16, fontWeight: 'bold', color: '#1A2230', marginTop: 6 }}&gt;两字词 LIKE&lt;/Text&gt;&#10;      &lt;Text style={{ fontSize: 13, color: '#4A5568', lineHeight: 1.65, marginTop: 8 }}&gt;「秩」「队列」进不了 trigram 索引&lt;/Text&gt;&#10;      &lt;Text style={{ fontSize: 12, color: '#D9534F', marginTop: 8 }}&gt;局限：按覆盖度排序，精度中等&lt;/Text&gt;&#10;    &lt;/Box&gt;&#10;&#10;    &lt;Box style={{ width: 1, height: 130, background: '#E5E7EB', marginLeft: 12, marginRight: 12 }} /&gt;&#10;&#10;    &lt;Box style={{ width: 256, flexDirection: 'column' }}&gt;&#10;      &lt;Text style={{ fontSize: 12.5, color: '#8B97A8' }}&gt;通道四&lt;/Text&gt;&#10;      &lt;Text style={{ fontSize: 16, fontWeight: 'bold', color: '#1A2230', marginTop: 6 }}&gt;向量语义&lt;/Text&gt;&#10;      &lt;Text style={{ fontSize: 13, color: '#4A5568', lineHeight: 1.65, marginTop: 8 }}&gt;字面全不同、意思相近仍可召回&lt;/Text&gt;&#10;      &lt;Text style={{ fontSize: 12, color: '#D9534F', marginTop: 8 }}&gt;局限：无真实模型时不可靠&lt;/Text&gt;&#10;    &lt;/Box&gt;&#10;&#10;  &lt;/Box&gt;&#10;&#10;  &lt;Box style={{ position: 'absolute', left: 76, top: 356, width: 1128, height: 92, flexDirection: 'row', gap: 20 }}&gt;&#10;&#10;    &lt;Box style={{ width: 554, flexDirection: 'column', borderLeft: '3px solid #1E4FA8', paddingLeft: 14 }}&gt;&#10;      &lt;Text style={{ fontSize: 15, fontWeight: 'bold', color: '#1A2230' }}&gt;融合：只按名次加权，不把分数硬加&lt;/Text&gt;&#10;      &lt;Text style={{ fontSize: 13, color: '#4A5568', lineHeight: 1.65, marginTop: 6 }}&gt;&#10;        关键词得分与余弦相似度单位不同，直接相加会让某一通道垄断结果。用加权名次融合（k=60），扩写通道降到 0.5。&#10;      &lt;/Text&gt;&#10;    &lt;/Box&gt;&#10;&#10;    &lt;Box style={{ width: 554, flexDirection: 'column', borderLeft: '3px solid #3D7BD9', paddingLeft: 14 }}&gt;&#10;      &lt;Text style={{ fontSize: 15, fontWeight: 'bold', color: '#1A2230' }}&gt;精排：融合后再按字面证据重排一次&lt;/Text&gt;&#10;      &lt;Text style={{ fontSize: 13, color: '#4A5568', lineHeight: 1.65, marginTop: 6 }}&gt;&#10;        原查询覆盖 0.50 / 扩写覆盖 0.15 / 标题命中 0.35；只调顺序，不增删候选。&#10;      &lt;/Text&gt;&#10;    &lt;/Box&gt;&#10;&#10;  &lt;/Box&gt;&#10;&#10;  &lt;Box style={{ position: 'absolute', left: 76, top: 466, width: 1128, height: 40, flexDirection: 'row', alignItems: 'center', background: '#1E4FA8', borderRadius: 6, paddingLeft: 14 }}&gt;&#10;    &lt;Text style={{ fontSize: 12.5, fontWeight: 'bold', color: '#FFFFFF', width: 300 }}&gt;消融口径（35 题 / 21 篇语料）&lt;/Text&gt;&#10;    &lt;Text style={{ fontSize: 12.5, fontWeight: 'bold', color: '#FFFFFF', width: 240 }}&gt;Hit@3&lt;/Text&gt;&#10;    &lt;Text style={{ fontSize: 12.5, fontWeight: 'bold', color: '#FFFFFF', width: 240 }}&gt;MRR&lt;/Text&gt;&#10;    &lt;Text style={{ fontSize: 12.5, fontWeight: 'bold', color: '#FFFFFF', width: 300 }}&gt;说明&lt;/Text&gt;&#10;  &lt;/Box&gt;&#10;&#10;  &lt;Box style={{ position: 'absolute', left: 76, top: 510, width: 1128, height: 108, flexDirection: 'column' }}&gt;&#10;&#10;    &lt;Box style={{ flexDirection: 'row', height: 52, alignItems: 'center', borderBottom: '1px solid #E5E7EB', paddingLeft: 14 }}&gt;&#10;      &lt;Text style={{ fontSize: 13.5, color: '#1A2230', width: 300 }}&gt;开启精排（当前默认）&lt;/Text&gt;&#10;      &lt;Text style={{ fontSize: 13.5, fontWeight: 'bold', color: '#1E4FA8', width: 240 }}&gt;0.9714&lt;/Text&gt;&#10;      &lt;Text style={{ fontSize: 13.5, fontWeight: 'bold', color: '#1E4FA8', width: 240 }}&gt;0.9714&lt;/Text&gt;&#10;      &lt;Text style={{ fontSize: 12.5, color: '#4A5568', width: 300 }}&gt;34 / 35 首次命中且全部排第 1&lt;/Text&gt;&#10;    &lt;/Box&gt;&#10;&#10;    &lt;Box style={{ flexDirection: 'row', height: 52, alignItems: 'center', paddingLeft: 14 }}&gt;&#10;      &lt;Text style={{ fontSize: 13.5, color: '#1A2230', width: 300 }}&gt;关闭精排（消融对照）&lt;/Text&gt;&#10;      &lt;Text style={{ fontSize: 13.5, color: '#4A5568', width: 240 }}&gt;0.9714&lt;/Text&gt;&#10;      &lt;Text style={{ fontSize: 13.5, color: '#D9534F', width: 240 }}&gt;0.9571&lt;/Text&gt;&#10;      &lt;Text style={{ fontSize: 12.5, color: '#4A5568', width: 300 }}&gt;命中数不变，排序质量下降&lt;/Text&gt;&#10;    &lt;/Box&gt;&#10;&#10;  &lt;/Box&gt;&#10;&#10;  &lt;Box style={{ position: 'absolute', left: 76, bottom: 24, width: 1128, height: 22, flexDirection: 'row', alignItems: 'center', justifyContent: 'space-between' }}&gt;&#10;    &lt;Text style={{ fontSize: 13, color: '#8B97A8' }}&gt;口径：确定性词面向量下测得；接真实向量模型时 35 题全中。第 N 页出处见 p9&lt;/Text&gt;&#10;    &lt;Text style={{ fontSize: 14, fontWeight: 'bold', color: '#0E3F8C' }}&gt;06 / 11&lt;/Text&gt;&#10;  &lt;/Box&gt;&#10;&#10;&lt;/Slide&gt;&#10;"/>
@@ -13588,7 +13567,7 @@
 
 <file path=ppt/slides/slide7.xml><?xml version="1.0" encoding="utf-8"?>
 <p:sld xmlns:p="http://schemas.openxmlformats.org/presentationml/2006/main" xmlns:a="http://schemas.openxmlformats.org/drawingml/2006/main">
-  <p:cSld>
+  <p:cSld name="07 实现二｜检查点负责接着跑，权限两层负责改不了">
     <p:spTree>
       <p:nvGrpSpPr>
         <p:cNvPr id="319" name="" descr="&lt;Slide style={{ width: 1280, height: 720, background: '#FFFFFF', padding: 0, position: 'relative', fontFamily: 'PingFang SC' }}&gt;&#10;&#10;  &lt;Box style={{ position: 'absolute', top: 0, left: 0, width: 1280, height: 64, background: '#1E4FA8' }} /&gt;&#10;  &lt;Text style={{ position: 'absolute', left: 76, top: 21, fontSize: 15, color: '#C9D8EF', letterSpacing: 1 }}&gt;知迹 · 答辩汇报&lt;/Text&gt;&#10;  &lt;Text style={{ position: 'absolute', left: 1010, top: 21, width: 194, textAlign: 'right', fontSize: 15, color: '#C9D8EF' }}&gt;03 · 关键实现 ② 执行边界&lt;/Text&gt;&#10;&#10;  &lt;Box style={{ position: 'absolute', left: 76, top: 92, width: 1128 }}&gt;&#10;    &lt;Text style={{ fontSize: 31, fontWeight: 'bold', color: '#0E3F8C' }}&gt;检查点负责「接着跑」，权限两层负责「改不了」&lt;/Text&gt;&#10;    &lt;Text style={{ fontSize: 15.5, color: '#4A5568', marginTop: 10 }}&gt;这两件事都落在执行层：不是提示词嘱咐，而是流程上过不去&lt;/Text&gt;&#10;  &lt;/Box&gt;&#10;&#10;  &lt;Box style={{ position: 'absolute', left: 76, top: 190, width: 560, height: 270, flexDirection: 'column' }}&gt;&#10;&#10;    &lt;Text style={{ fontSize: 13.5, color: '#3D7BD9', letterSpacing: 1.5 }}&gt;可恢复：三个必要件&lt;/Text&gt;&#10;&#10;    &lt;Box style={{ flexDirection: 'column', marginTop: 10 }}&gt;&#10;      &lt;Box style={{ flexDirection: 'column', height: 78, borderLeft: '3px solid #1E4FA8', paddingLeft: 12, paddingTop: 6 }}&gt;&#10;        &lt;Text style={{ fontSize: 15, fontWeight: 'bold', color: '#1A2230' }}&gt;检查点：每步结束落一次状态&lt;/Text&gt;&#10;        &lt;Text style={{ fontSize: 13, color: '#4A5568', lineHeight: 1.6, marginTop: 5 }}&gt;存在 SQLite，与消息一起持久化，进程重启也不丢&lt;/Text&gt;&#10;      &lt;/Box&gt;&#10;      &lt;Box style={{ flexDirection: 'column', height: 78, borderLeft: '3px solid #1E4FA8', paddingLeft: 12, paddingTop: 6 }}&gt;&#10;        &lt;Text style={{ fontSize: 15, fontWeight: 'bold', color: '#1A2230' }}&gt;中断：写操作前主动暂停&lt;/Text&gt;&#10;        &lt;Text style={{ fontSize: 13, color: '#4A5568', lineHeight: 1.6, marginTop: 5 }}&gt;图停在中断点，等待用户确认，而非直接执行&lt;/Text&gt;&#10;      &lt;/Box&gt;&#10;      &lt;Box style={{ flexDirection: 'column', height: 78, borderLeft: '3px solid #1E4FA8', paddingLeft: 12, paddingTop: 6 }}&gt;&#10;        &lt;Text style={{ fontSize: 15, fontWeight: 'bold', color: '#1A2230' }}&gt;恢复：从检查点继续&lt;/Text&gt;&#10;        &lt;Text style={{ fontSize: 13, color: '#4A5568', lineHeight: 1.6, marginTop: 5 }}&gt;确认后按原路径续跑，无需重放整段对话&lt;/Text&gt;&#10;      &lt;/Box&gt;&#10;    &lt;/Box&gt;&#10;&#10;  &lt;/Box&gt;&#10;&#10;  &lt;Box style={{ position: 'absolute', left: 700, top: 190, width: 504, height: 276, flexDirection: 'column' }}&gt;&#10;&#10;    &lt;Text style={{ fontSize: 13.5, color: '#3D7BD9', letterSpacing: 1.5 }}&gt;权限两层：看得见 ≠ 跑得动&lt;/Text&gt;&#10;&#10;    &lt;Box style={{ flexDirection: 'row', height: 34, alignItems: 'center', background: '#1E4FA8', borderRadius: 4, paddingLeft: 10, marginTop: 10 }}&gt;&#10;      &lt;Text style={{ fontSize: 12, fontWeight: 'bold', color: '#FFFFFF', width: 120 }}&gt;子角色&lt;/Text&gt;&#10;      &lt;Text style={{ fontSize: 12, fontWeight: 'bold', color: '#FFFFFF', width: 190 }}&gt;模型可见工具&lt;/Text&gt;&#10;      &lt;Text style={{ fontSize: 12, fontWeight: 'bold', color: '#FFFFFF', width: 160 }}&gt;执行层处置&lt;/Text&gt;&#10;    &lt;/Box&gt;&#10;&#10;    &lt;Box style={{ flexDirection: 'row', height: 52, alignItems: 'center', borderBottom: '1px solid #E5E7EB', paddingLeft: 10 }}&gt;&#10;      &lt;Text style={{ fontSize: 12.5, color: '#1A2230', width: 120 }}&gt;讲解 / 检索&lt;/Text&gt;&#10;      &lt;Text style={{ fontSize: 12.5, color: '#4A5568', width: 190 }}&gt;全部工具&lt;/Text&gt;&#10;      &lt;Text style={{ fontSize: 12.5, color: '#1E4FA8', width: 160 }}&gt;放行（写需确认）&lt;/Text&gt;&#10;    &lt;/Box&gt;&#10;&#10;    &lt;Box style={{ flexDirection: 'row', height: 52, alignItems: 'center', borderBottom: '1px solid #E5E7EB', paddingLeft: 10 }}&gt;&#10;      &lt;Text style={{ fontSize: 12.5, color: '#1A2230', width: 120 }}&gt;练习&lt;/Text&gt;&#10;      &lt;Text style={{ fontSize: 12.5, color: '#4A5568', width: 190 }}&gt;只读工具&lt;/Text&gt;&#10;      &lt;Text style={{ fontSize: 12.5, color: '#D9534F', width: 160 }}&gt;写操作直接拒绝&lt;/Text&gt;&#10;    &lt;/Box&gt;&#10;&#10;    &lt;Box style={{ flexDirection: 'row', height: 52, alignItems: 'center', paddingLeft: 10 }}&gt;&#10;      &lt;Text style={{ fontSize: 12.5, color: '#1A2230', width: 120 }}&gt;进度&lt;/Text&gt;&#10;      &lt;Text style={{ fontSize: 12.5, color: '#4A5568', width: 190 }}&gt;无工具&lt;/Text&gt;&#10;      &lt;Text style={{ fontSize: 12.5, color: '#D9534F', width: 160 }}&gt;一律拦截&lt;/Text&gt;&#10;    &lt;/Box&gt;&#10;&#10;    &lt;Text style={{ fontSize: 12.5, color: '#8B97A8', lineHeight: 1.6, marginTop: 8 }}&gt;&#10;      为什么必须两层：只遮列表，模型仍会说出被禁工具名而失败；只拦执行，模型会反复重试浪费轮数。&#10;    &lt;/Text&gt;&#10;&#10;  &lt;/Box&gt;&#10;&#10;  &lt;Box style={{ position: 'absolute', left: 76, top: 470, width: 1128, height: 82, background: '#F0F5FC', borderRadius: 8, flexDirection: 'row', alignItems: 'center', paddingLeft: 20, paddingRight: 20 }}&gt;&#10;&#10;    &lt;Text style={{ fontSize: 12.5, color: '#3D7BD9', width: 78 }}&gt;写操作&lt;/Text&gt;&#10;    &lt;Text style={{ fontSize: 13, color: '#1A2230', width: 150 }}&gt;模型发起落库&lt;/Text&gt;&#10;&#10;    &lt;Text style={{ fontSize: 13, color: '#3D7BD9', width: 30 }}&gt;→&lt;/Text&gt;&#10;    &lt;Text style={{ fontSize: 12.5, color: '#3D7BD9', width: 78 }}&gt;第 2 步&lt;/Text&gt;&#10;    &lt;Text style={{ fontSize: 13, color: '#1A2230', width: 190 }}&gt;图在中断点暂停&lt;/Text&gt;&#10;&#10;    &lt;Text style={{ fontSize: 13, color: '#3D7BD9', width: 30 }}&gt;→&lt;/Text&gt;&#10;    &lt;Text style={{ fontSize: 12.5, color: '#3D7BD9', width: 78 }}&gt;第 3 步&lt;/Text&gt;&#10;    &lt;Text style={{ fontSize: 13, color: '#1A2230', width: 190 }}&gt;用户点确认&lt;/Text&gt;&#10;&#10;    &lt;Text style={{ fontSize: 13, color: '#3D7BD9', width: 30 }}&gt;→&lt;/Text&gt;&#10;    &lt;Text style={{ fontSize: 12.5, color: '#3D7BD9', width: 78 }}&gt;第 4 步&lt;/Text&gt;&#10;    &lt;Text style={{ fontSize: 13, color: '#1A2230', width: 170 }}&gt;从检查点恢复并落库&lt;/Text&gt;&#10;&#10;  &lt;/Box&gt;&#10;&#10;  &lt;Box style={{ position: 'absolute', left: 76, top: 568, width: 1128, height: 46, background: '#0E3F8C', borderRadius: 8, justifyContent: 'center', alignItems: 'center' }}&gt;&#10;    &lt;Text style={{ fontSize: 14, color: '#FFFFFF' }}&gt;&#10;      证据：状态图 + 检查点 + 中断恢复均有回归测试；练习角色调用写工具时，执行层返回拒绝，数据未被修改&#10;    &lt;/Text&gt;&#10;  &lt;/Box&gt;&#10;&#10;  &lt;Box style={{ position: 'absolute', left: 76, bottom: 24, width: 1128, height: 22, flexDirection: 'row', alignItems: 'center', justifyContent: 'space-between' }}&gt;&#10;    &lt;Text style={{ fontSize: 13, color: '#8B97A8' }}&gt;知迹 · 基于大模型智能体的 AI 教育学习系统&lt;/Text&gt;&#10;    &lt;Text style={{ fontSize: 14, fontWeight: 'bold', color: '#0E3F8C' }}&gt;07 / 11&lt;/Text&gt;&#10;  &lt;/Box&gt;&#10;&#10;&lt;/Slide&gt;&#10;"/>
@@ -15553,7 +15532,7 @@
 
 <file path=ppt/slides/slide8.xml><?xml version="1.0" encoding="utf-8"?>
 <p:sld xmlns:p="http://schemas.openxmlformats.org/presentationml/2006/main" xmlns:a="http://schemas.openxmlformats.org/drawingml/2006/main">
-  <p:cSld>
+  <p:cSld name="08 实现三｜0.05 的容差把感觉变差变成命令失败">
     <p:spTree>
       <p:nvGrpSpPr>
         <p:cNvPr id="369" name="" descr="&lt;Slide style={{ width: 1280, height: 720, background: '#FFFFFF', padding: 0, position: 'relative', fontFamily: 'PingFang SC' }}&gt;&#10;&#10;  &lt;Box style={{ position: 'absolute', top: 0, left: 0, width: 1280, height: 64, background: '#1E4FA8' }} /&gt;&#10;  &lt;Text style={{ position: 'absolute', left: 76, top: 21, fontSize: 15, color: '#C9D8EF', letterSpacing: 1 }}&gt;知迹 · 答辩汇报&lt;/Text&gt;&#10;  &lt;Text style={{ position: 'absolute', left: 1010, top: 21, width: 194, textAlign: 'right', fontSize: 15, color: '#C9D8EF' }}&gt;03 · 关键实现 ③ 质量门禁&lt;/Text&gt;&#10;&#10;  &lt;Box style={{ position: 'absolute', left: 76, top: 92, width: 1128 }}&gt;&#10;    &lt;Text style={{ fontSize: 31, fontWeight: 'bold', color: '#0E3F8C' }}&gt;0.05 的容差，把「感觉变差」变成「命令失败」&lt;/Text&gt;&#10;    &lt;Text style={{ fontSize: 15.5, color: '#4A5568', marginTop: 10 }}&gt;三道门禁覆盖代码、检索、意图；每次改动跑同一份考卷，掉出容差即非零退出&lt;/Text&gt;&#10;  &lt;/Box&gt;&#10;&#10;  &lt;Box style={{ position: 'absolute', left: 76, top: 186, width: 1128, height: 36, flexDirection: 'row', alignItems: 'center', background: '#1E4FA8', borderRadius: 6, paddingLeft: 14 }}&gt;&#10;    &lt;Text style={{ fontSize: 12.5, fontWeight: 'bold', color: '#FFFFFF', width: 210 }}&gt;门禁&lt;/Text&gt;&#10;    &lt;Text style={{ fontSize: 12.5, fontWeight: 'bold', color: '#FFFFFF', width: 250 }}&gt;测什么&lt;/Text&gt;&#10;    &lt;Text style={{ fontSize: 12.5, fontWeight: 'bold', color: '#FFFFFF', width: 160 }}&gt;规模&lt;/Text&gt;&#10;    &lt;Text style={{ fontSize: 12.5, fontWeight: 'bold', color: '#FFFFFF', width: 480 }}&gt;不通过时&lt;/Text&gt;&#10;  &lt;/Box&gt;&#10;&#10;  &lt;Box style={{ position: 'absolute', left: 76, top: 226, width: 1128, height: 138, flexDirection: 'column' }}&gt;&#10;&#10;    &lt;Box style={{ flexDirection: 'row', height: 46, alignItems: 'center', borderBottom: '1px solid #E5E7EB', paddingLeft: 14 }}&gt;&#10;      &lt;Text style={{ fontSize: 13, fontWeight: 'bold', color: '#1A2230', width: 210 }}&gt;代码自测&lt;/Text&gt;&#10;      &lt;Text style={{ fontSize: 12.5, color: '#4A5568', width: 250 }}&gt;模块行为、级联删除、边界条件&lt;/Text&gt;&#10;      &lt;Text style={{ fontSize: 12.5, color: '#1E4FA8', width: 160 }}&gt;284 项&lt;/Text&gt;&#10;      &lt;Text style={{ fontSize: 12.5, color: '#4A5568', width: 480 }}&gt;断言失败即报错；全部离线，零 API 消耗&lt;/Text&gt;&#10;    &lt;/Box&gt;&#10;&#10;    &lt;Box style={{ flexDirection: 'row', height: 46, alignItems: 'center', borderBottom: '1px solid #E5E7EB', paddingLeft: 14 }}&gt;&#10;      &lt;Text style={{ fontSize: 13, fontWeight: 'bold', color: '#1A2230', width: 210 }}&gt;检索考卷&lt;/Text&gt;&#10;      &lt;Text style={{ fontSize: 12.5, color: '#4A5568', width: 250 }}&gt;命中率与排序质量（Hit@3 / MRR）&lt;/Text&gt;&#10;      &lt;Text style={{ fontSize: 12.5, color: '#1E4FA8', width: 160 }}&gt;35 题 / 21 篇&lt;/Text&gt;&#10;      &lt;Text style={{ fontSize: 12.5, color: '#4A5568', width: 480 }}&gt;掉出容差 0.05 → 命令返回 1，可接入提交前检查&lt;/Text&gt;&#10;    &lt;/Box&gt;&#10;&#10;    &lt;Box style={{ flexDirection: 'row', height: 46, alignItems: 'center', paddingLeft: 14 }}&gt;&#10;      &lt;Text style={{ fontSize: 13, fontWeight: 'bold', color: '#1A2230', width: 210 }}&gt;意图考卷&lt;/Text&gt;&#10;      &lt;Text style={{ fontSize: 12.5, color: '#4A5568', width: 250 }}&gt;分类准确率（讲解/练习/规划…）&lt;/Text&gt;&#10;      &lt;Text style={{ fontSize: 12.5, color: '#1E4FA8', width: 160 }}&gt;15 句&lt;/Text&gt;&#10;      &lt;Text style={{ fontSize: 12.5, color: '#4A5568', width: 480 }}&gt;同上；错分即视为回归&lt;/Text&gt;&#10;    &lt;/Box&gt;&#10;&#10;  &lt;/Box&gt;&#10;&#10;  &lt;Box style={{ position: 'absolute', left: 76, top: 380, width: 700, height: 168, flexDirection: 'column' }}&gt;&#10;&#10;    &lt;Text style={{ fontSize: 13.5, color: '#3D7BD9', letterSpacing: 1.5 }}&gt;当前实测结果（口径见页脚）&lt;/Text&gt;&#10;&#10;    &lt;Box style={{ flexDirection: 'row', marginTop: 12 }}&gt;&#10;&#10;      &lt;Box style={{ width: 160, flexDirection: 'column' }}&gt;&#10;        &lt;Text style={{ fontSize: 34, fontWeight: 'bold', color: '#1E4FA8', lineHeight: 1 }}&gt;0.9714&lt;/Text&gt;&#10;        &lt;Text style={{ fontSize: 12.5, color: '#4A5568', marginTop: 6 }}&gt;检索 Hit@3&lt;/Text&gt;&#10;      &lt;/Box&gt;&#10;&#10;      &lt;Box style={{ width: 160, flexDirection: 'column' }}&gt;&#10;        &lt;Text style={{ fontSize: 34, fontWeight: 'bold', color: '#1E4FA8', lineHeight: 1 }}&gt;0.9714&lt;/Text&gt;&#10;        &lt;Text style={{ fontSize: 12.5, color: '#4A5568', marginTop: 6 }}&gt;检索 MRR&lt;/Text&gt;&#10;      &lt;/Box&gt;&#10;&#10;      &lt;Box style={{ width: 160, flexDirection: 'column' }}&gt;&#10;        &lt;Text style={{ fontSize: 34, fontWeight: 'bold', color: '#1E4FA8', lineHeight: 1 }}&gt;1.0000&lt;/Text&gt;&#10;        &lt;Text style={{ fontSize: 12.5, color: '#4A5568', marginTop: 6 }}&gt;意图准确率&lt;/Text&gt;&#10;      &lt;/Box&gt;&#10;&#10;      &lt;Box style={{ width: 180, flexDirection: 'column' }}&gt;&#10;        &lt;Text style={{ fontSize: 34, fontWeight: 'bold', color: '#12A594', lineHeight: 1 }}&gt;35 / 35&lt;/Text&gt;&#10;        &lt;Text style={{ fontSize: 12.5, color: '#4A5568', marginTop: 6 }}&gt;接真实向量时&lt;/Text&gt;&#10;      &lt;/Box&gt;&#10;&#10;    &lt;/Box&gt;&#10;&#10;    &lt;Text style={{ fontSize: 12.5, color: '#4A5568', lineHeight: 1.7, marginTop: 14 }}&gt;&#10;      消融：关闭精排后 MRR 由 0.9714 降至 0.9571（命中数不变），说明该层改善的是排序而非召回。&#10;    &lt;/Text&gt;&#10;&#10;  &lt;/Box&gt;&#10;&#10;  &lt;Box style={{ position: 'absolute', left: 808, top: 380, width: 396, height: 168, flexDirection: 'column', borderLeft: '3px solid #D9534F', paddingLeft: 14 }}&gt;&#10;&#10;    &lt;Text style={{ fontSize: 15, fontWeight: 'bold', color: '#1A2230' }}&gt;为什么不用大模型判分&lt;/Text&gt;&#10;    &lt;Text style={{ fontSize: 12.5, color: '#4A5568', lineHeight: 1.75, marginTop: 8 }}&gt;&#10;      同一模型既写又评会共享盲区：它看不见的错误，复核时也看不见，甚至会把好答案改坏。&#10;      所以判据用「确定性比对」：命中的是哪一篇、分到的是哪一类，都能机器校验；模型的判断只用于人工抽检。&#10;    &lt;/Text&gt;&#10;&#10;  &lt;/Box&gt;&#10;&#10;  &lt;Box style={{ position: 'absolute', left: 76, top: 568, width: 1128, height: 46, background: '#0E3F8C', borderRadius: 8, justifyContent: 'center', alignItems: 'center' }}&gt;&#10;    &lt;Text style={{ fontSize: 13.5, color: '#FFFFFF' }}&gt;&#10;      口径：检索评测使用确定性词面向量（同一版本任何人复跑结果一致）；真实语义效果由接真模型的验证单独确认&#10;    &lt;/Text&gt;&#10;  &lt;/Box&gt;&#10;&#10;  &lt;Box style={{ position: 'absolute', left: 76, bottom: 24, width: 1128, height: 22, flexDirection: 'row', alignItems: 'center', justifyContent: 'space-between' }}&gt;&#10;    &lt;Text style={{ fontSize: 13, color: '#8B97A8' }}&gt;知迹 · 基于大模型智能体的 AI 教育学习系统&lt;/Text&gt;&#10;    &lt;Text style={{ fontSize: 14, fontWeight: 'bold', color: '#0E3F8C' }}&gt;08 / 11&lt;/Text&gt;&#10;  &lt;/Box&gt;&#10;&#10;&lt;/Slide&gt;&#10;"/>
@@ -17392,7 +17371,7 @@
 
 <file path=ppt/slides/slide9.xml><?xml version="1.0" encoding="utf-8"?>
 <p:sld xmlns:r="http://schemas.openxmlformats.org/officeDocument/2006/relationships" xmlns:p="http://schemas.openxmlformats.org/presentationml/2006/main" xmlns:a="http://schemas.openxmlformats.org/drawingml/2006/main">
-  <p:cSld>
+  <p:cSld name="09 实际使用｜四步走完一个学习周期：入库、溯源、记错因、到期复习">
     <p:spTree>
       <p:nvGrpSpPr>
         <p:cNvPr id="412" name="" descr="&lt;Slide style={{ width: 1280, height: 720, background: '#FFFFFF', padding: 0, position: 'relative', fontFamily: 'PingFang SC' }}&gt;&#10;&#10;  &lt;Box style={{ position: 'absolute', top: 0, left: 0, width: 1280, height: 64, background: '#1E4FA8' }} /&gt;&#10;  &lt;Text style={{ position: 'absolute', left: 76, top: 21, fontSize: 15, color: '#C9D8EF', letterSpacing: 1 }}&gt;知迹 · 答辩汇报&lt;/Text&gt;&#10;  &lt;Text style={{ position: 'absolute', left: 1010, top: 21, width: 194, textAlign: 'right', fontSize: 15, color: '#C9D8EF' }}&gt;04 · 实际使用与指标&lt;/Text&gt;&#10;&#10;  &lt;Box style={{ position: 'absolute', left: 76, top: 92, width: 1128 }}&gt;&#10;    &lt;Text style={{ fontSize: 31, fontWeight: 'bold', color: '#0E3F8C' }}&gt;四步走完一个学习周期：入库、溯源、记错因、到期复习&lt;/Text&gt;&#10;    &lt;Text style={{ fontSize: 15.5, color: '#4A5568', marginTop: 10 }}&gt;左图为系统真实界面（非设计稿）：7 个学科库、24 份资料、46 个可检索片段&lt;/Text&gt;&#10;  &lt;/Box&gt;&#10;&#10;  &lt;Box style={{ position: 'absolute', left: 76, top: 190, width: 640 }}&gt;&#10;    &lt;Box style={{ width: 640, height: 288, border: '1px solid #D6DCE5', borderRadius: 6, overflow: 'hidden' }}&gt;&#10;      &lt;Image src=&quot;assets/ui-knowledge.png&quot; style={{ width: 638, height: 286, objectFit: 'cover' }} /&gt;&#10;    &lt;/Box&gt;&#10;    &lt;Text style={{ fontSize: 12, color: '#8B97A8', marginTop: 8 }}&gt;&#10;      知识库页：左学科目录、中资料列表（PDF 与 Word 并列）、右可直接就着当前库提问&#10;    &lt;/Text&gt;&#10;  &lt;/Box&gt;&#10;&#10;  &lt;Box style={{ position: 'absolute', left: 748, top: 190, width: 456, height: 336, flexDirection: 'column' }}&gt;&#10;&#10;    &lt;Box style={{ flexDirection: 'column', height: 82, borderLeft: '3px solid #1E4FA8', paddingLeft: 12, paddingTop: 4 }}&gt;&#10;      &lt;Text style={{ fontSize: 14.5, fontWeight: 'bold', color: '#1A2230' }}&gt;一、讲义入库&lt;/Text&gt;&#10;      &lt;Text style={{ fontSize: 12.5, color: '#4A5568', lineHeight: 1.6, marginTop: 5 }}&gt;PDF / Word / PPT / Excel 秒传；板书照片经视觉转写后入库&lt;/Text&gt;&#10;    &lt;/Box&gt;&#10;&#10;    &lt;Box style={{ flexDirection: 'column', height: 82, borderLeft: '3px solid #1E4FA8', paddingLeft: 12, paddingTop: 4 }}&gt;&#10;      &lt;Text style={{ fontSize: 14.5, fontWeight: 'bold', color: '#1A2230' }}&gt;二、就着资料提问&lt;/Text&gt;&#10;      &lt;Text style={{ fontSize: 12.5, color: '#4A5568', lineHeight: 1.6, marginTop: 5 }}&gt;回答标注出自哪份资料、第几页；原件可内联打开核对&lt;/Text&gt;&#10;    &lt;/Box&gt;&#10;&#10;    &lt;Box style={{ flexDirection: 'column', height: 82, borderLeft: '3px solid #1E4FA8', paddingLeft: 12, paddingTop: 4 }}&gt;&#10;      &lt;Text style={{ fontSize: 14.5, fontWeight: 'bold', color: '#1A2230' }}&gt;三、错题按错因归档&lt;/Text&gt;&#10;      &lt;Text style={{ fontSize: 12.5, color: '#4A5568', lineHeight: 1.6, marginTop: 5 }}&gt;概念混淆 / 步骤遗漏 / 条件误读 / 计算失误 / 表述不清&lt;/Text&gt;&#10;    &lt;/Box&gt;&#10;&#10;    &lt;Box style={{ flexDirection: 'column', height: 82, borderLeft: '3px solid #3D7BD9', paddingLeft: 12, paddingTop: 4 }}&gt;&#10;      &lt;Text style={{ fontSize: 14.5, fontWeight: 'bold', color: '#1A2230' }}&gt;四、到期自动复盘&lt;/Text&gt;&#10;      &lt;Text style={{ fontSize: 12.5, color: '#4A5568', lineHeight: 1.6, marginTop: 5 }}&gt;今日复习只列到期题与薄弱学科；日程负责&quot;什么时候做&quot;&lt;/Text&gt;&#10;    &lt;/Box&gt;&#10;&#10;  &lt;/Box&gt;&#10;&#10;  &lt;Box style={{ position: 'absolute', left: 76, top: 500, width: 1128, height: 24, flexDirection: 'row', alignItems: 'center', background: '#F0F5FC', borderRadius: 6, paddingLeft: 14 }}&gt;&#10;    &lt;Text style={{ fontSize: 12.5, fontWeight: 'bold', color: '#1E4FA8', width: 220 }}&gt;演示数据规模&lt;/Text&gt;&#10;    &lt;Text style={{ fontSize: 12.5, color: '#4A5568', width: 280 }}&gt;7 个学科库 / 24 份资料&lt;/Text&gt;&#10;    &lt;Text style={{ fontSize: 12.5, color: '#4A5568', width: 280 }}&gt;46 个检索片段（全部带出处）&lt;/Text&gt;&#10;    &lt;Text style={{ fontSize: 12.5, color: '#4A5568', width: 320 }}&gt;5 门课程 / 7 条误区 / 3 条日程&lt;/Text&gt;&#10;  &lt;/Box&gt;&#10;&#10;  &lt;Box style={{ position: 'absolute', left: 76, top: 540, width: 1128, height: 70, flexDirection: 'row', gap: 20 }}&gt;&#10;&#10;    &lt;Box style={{ width: 554, flexDirection: 'column', borderLeft: '3px solid #1E4FA8', paddingLeft: 14 }}&gt;&#10;      &lt;Text style={{ fontSize: 13.5, fontWeight: 'bold', color: '#1A2230' }}&gt;可核验的出处&lt;/Text&gt;&#10;      &lt;Text style={{ fontSize: 12.5, color: '#4A5568', lineHeight: 1.65, marginTop: 5 }}&gt;&#10;        PDF 与 PPT 按页切块，引用精确到「第 N 页」——这是&quot;有据可查&quot;与&quot;看着像&quot;的分界。&#10;      &lt;/Text&gt;&#10;    &lt;/Box&gt;&#10;&#10;    &lt;Box style={{ width: 554, flexDirection: 'column', borderLeft: '3px solid #3D7BD9', paddingLeft: 14 }}&gt;&#10;      &lt;Text style={{ fontSize: 13.5, fontWeight: 'bold', color: '#1A2230' }}&gt;可复现的过程&lt;/Text&gt;&#10;      &lt;Text style={{ fontSize: 12.5, color: '#4A5568', lineHeight: 1.65, marginTop: 5 }}&gt;&#10;        每个回合的步骤流与工具调用都留痕，可回放、可归因，不依赖演讲者记忆。&#10;      &lt;/Text&gt;&#10;    &lt;/Box&gt;&#10;&#10;  &lt;/Box&gt;&#10;&#10;  &lt;Box style={{ position: 'absolute', left: 76, bottom: 24, width: 1128, height: 22, flexDirection: 'row', alignItems: 'center', justifyContent: 'space-between' }}&gt;&#10;    &lt;Text style={{ fontSize: 13, color: '#8B97A8' }}&gt;截图取自演示数据（zhiji-demo --reset 可重建同一份数据）&lt;/Text&gt;&#10;    &lt;Text style={{ fontSize: 14, fontWeight: 'bold', color: '#0E3F8C' }}&gt;09 / 11&lt;/Text&gt;&#10;  &lt;/Box&gt;&#10;&#10;&lt;/Slide&gt;&#10;"/>

--- a/docs/作品集/参赛/知迹答辩/知迹答辩.pptx
+++ b/docs/作品集/参赛/知迹答辩/知迹答辩.pptx
@@ -3090,7 +3090,7 @@
 
 <file path=ppt/slides/slide1.xml><?xml version="1.0" encoding="utf-8"?>
 <p:sld xmlns:a="http://schemas.openxmlformats.org/drawingml/2006/main" xmlns:p="http://schemas.openxmlformats.org/presentationml/2006/main" xmlns:r="http://schemas.openxmlformats.org/officeDocument/2006/relationships">
-  <p:cSld name="01 封面｜知迹：把一次学习回合做成可恢复、可拦截、可度量的状态图">
+  <p:cSld name="01 封面｜一次学习回合拆成四个节点，每步存档，写库前先问一句">
     <p:spTree>
       <p:nvGrpSpPr>
         <p:cNvPr id="1" name=""/>
@@ -3329,7 +3329,7 @@
                 <a:ea typeface="Songti SC"/>
                 <a:cs typeface="Songti SC"/>
               </a:rPr>
-              <a:t>核心命题：把一次学习回合做成一张可恢复、可拦截、可度量的状态图 —— 而不是不可控的聊天框</a:t>
+              <a:t>一次学习回合被拆成四个节点，每一步都存档；写进你的资料库之前，它会先问一句。</a:t>
             </a:r>
           </a:p>
         </p:txBody>
@@ -3677,7 +3677,7 @@
 
 <file path=ppt/slides/slide10.xml><?xml version="1.0" encoding="utf-8"?>
 <p:sld xmlns:a="http://schemas.openxmlformats.org/drawingml/2006/main" xmlns:p="http://schemas.openxmlformats.org/presentationml/2006/main" xmlns:r="http://schemas.openxmlformats.org/officeDocument/2006/relationships">
-  <p:cSld name="10 边界｜六项能力：两项达标、三项部分达成、一项未做">
+  <p:cSld name="10 边界｜六项能力：两项达标，三项一半，一项没做">
     <p:spTree>
       <p:nvGrpSpPr>
         <p:cNvPr id="1" name=""/>
@@ -3798,7 +3798,7 @@
                 <a:ea typeface="Songti SC"/>
                 <a:cs typeface="Songti SC"/>
               </a:rPr>
-              <a:t>六项能力：两项达标、三项部分达成、一项未做</a:t>
+              <a:t>六项能力：两项达标，三项只做了一半，一项没做</a:t>
             </a:r>
           </a:p>
         </p:txBody>
@@ -3909,7 +3909,7 @@
                 <a:ea typeface="Songti SC"/>
                 <a:cs typeface="Songti SC"/>
               </a:rPr>
-              <a:t>依据 / 尚缺什么</a:t>
+              <a:t>依据 / 还缺什么</a:t>
             </a:r>
           </a:p>
         </p:txBody>
@@ -4145,7 +4145,7 @@
                 <a:ea typeface="Songti SC"/>
                 <a:cs typeface="Songti SC"/>
               </a:rPr>
-              <a:t>检索准确性 / 可追溯</a:t>
+              <a:t>检索准确 / 可追溯</a:t>
             </a:r>
           </a:p>
         </p:txBody>
@@ -4337,7 +4337,7 @@
                 <a:ea typeface="Songti SC"/>
                 <a:cs typeface="Songti SC"/>
               </a:rPr>
-              <a:t>部分</a:t>
+              <a:t>一半</a:t>
             </a:r>
           </a:p>
         </p:txBody>
@@ -4492,7 +4492,7 @@
                 <a:ea typeface="Songti SC"/>
                 <a:cs typeface="Songti SC"/>
               </a:rPr>
-              <a:t>部分</a:t>
+              <a:t>一半</a:t>
             </a:r>
           </a:p>
         </p:txBody>
@@ -4647,7 +4647,7 @@
                 <a:ea typeface="Songti SC"/>
                 <a:cs typeface="Songti SC"/>
               </a:rPr>
-              <a:t>部分</a:t>
+              <a:t>一半</a:t>
             </a:r>
           </a:p>
         </p:txBody>
@@ -4802,7 +4802,7 @@
                 <a:ea typeface="Songti SC"/>
                 <a:cs typeface="Songti SC"/>
               </a:rPr>
-              <a:t>未做</a:t>
+              <a:t>没做</a:t>
             </a:r>
           </a:p>
         </p:txBody>
@@ -4839,7 +4839,7 @@
                 <a:ea typeface="Songti SC"/>
                 <a:cs typeface="Songti SC"/>
               </a:rPr>
-              <a:t>现有考卷只测「找到没 / 分类对不对」，不测「本次会话是否达成目标」</a:t>
+              <a:t>现有考卷只测「找到没」「分类对不对」，不测「这次会话有没有用」</a:t>
             </a:r>
           </a:p>
         </p:txBody>
@@ -4876,7 +4876,7 @@
                 <a:ea typeface="Songti SC"/>
                 <a:cs typeface="Songti SC"/>
               </a:rPr>
-              <a:t>下一步优先级：任务级成功率评测 → 记忆生命周期 → 更难的检索考卷；均可在现有门禁内验证</a:t>
+              <a:t>接下来按这个顺序补：任务级成功率评测 → 记忆的过期与删除 → 更难的检索考卷。三项都能在现有门禁里验证。</a:t>
             </a:r>
           </a:p>
         </p:txBody>
@@ -4928,7 +4928,7 @@
 
 <file path=ppt/slides/slide11.xml><?xml version="1.0" encoding="utf-8"?>
 <p:sld xmlns:a="http://schemas.openxmlformats.org/drawingml/2006/main" xmlns:p="http://schemas.openxmlformats.org/presentationml/2006/main" xmlns:r="http://schemas.openxmlformats.org/officeDocument/2006/relationships">
-  <p:cSld name="11 收束｜让 AI 帮上忙靠的是每一步都留痕、可拦、可复算">
+  <p:cSld name="11 收束｜真正做完的是三件事">
     <p:spTree>
       <p:nvGrpSpPr>
         <p:cNvPr id="1" name=""/>
@@ -5049,7 +5049,7 @@
                 <a:ea typeface="Songti SC"/>
                 <a:cs typeface="Songti SC"/>
               </a:rPr>
-              <a:t>让 AI 帮上忙，靠的不是它多聪明，而是每一步都留痕、能被拦住、也能被复算。</a:t>
+              <a:t>真正做完的是三件事：每一步留痕，越权拦得住，变差算得出来。</a:t>
             </a:r>
           </a:p>
         </p:txBody>
@@ -5130,7 +5130,7 @@
                 <a:ea typeface="Songti SC"/>
                 <a:cs typeface="Songti SC"/>
               </a:rPr>
-              <a:t>我们把它做成一个可交付的系统：能力有边界，缺口自己说出来，改动由指标说了算。</a:t>
+              <a:t>其余的还差着，已经写在上一页。我们把它做成一个能交付的系统：能做什么说清楚，缺什么也写在纸上。</a:t>
             </a:r>
           </a:p>
         </p:txBody>
@@ -5204,7 +5204,7 @@
                 <a:ea typeface="Songti SC"/>
                 <a:cs typeface="Songti SC"/>
               </a:rPr>
-              <a:t>从「找到没」升级到「一次会话是否达成目标」</a:t>
+              <a:t>从「找到没」升级到「这次会话有没有用」</a:t>
             </a:r>
           </a:p>
         </p:txBody>
@@ -5485,7 +5485,7 @@
 
 <file path=ppt/slides/slide2.xml><?xml version="1.0" encoding="utf-8"?>
 <p:sld xmlns:a="http://schemas.openxmlformats.org/drawingml/2006/main" xmlns:p="http://schemas.openxmlformats.org/presentationml/2006/main" xmlns:r="http://schemas.openxmlformats.org/officeDocument/2006/relationships">
-  <p:cSld name="02 目录｜五段路线，结论先行">
+  <p:cSld name="02 目录｜五段路线，第 3 页先给结论">
     <p:spTree>
       <p:nvGrpSpPr>
         <p:cNvPr id="1" name=""/>
@@ -5976,7 +5976,7 @@
                 <a:ea typeface="Songti SC"/>
                 <a:cs typeface="Songti SC"/>
               </a:rPr>
-              <a:t>结论先行：下一页给出三条结论，后面每页只负责证明其中一条</a:t>
+              <a:t>第 3 页先把结论摆出来，后面每一页只负责证明其中一条</a:t>
             </a:r>
           </a:p>
         </p:txBody>
@@ -5991,7 +5991,7 @@
 
 <file path=ppt/slides/slide3.xml><?xml version="1.0" encoding="utf-8"?>
 <p:sld xmlns:a="http://schemas.openxmlformats.org/drawingml/2006/main" xmlns:p="http://schemas.openxmlformats.org/presentationml/2006/main" xmlns:r="http://schemas.openxmlformats.org/officeDocument/2006/relationships">
-  <p:cSld name="03 背景｜三个时刻的共性缺口：产出无法复用，复习成本被迫翻倍">
+  <p:cSld name="03 背景｜三个时刻，同一个毛病：用过的东西留不下来">
     <p:spTree>
       <p:nvGrpSpPr>
         <p:cNvPr id="1" name=""/>
@@ -6112,7 +6112,7 @@
                 <a:ea typeface="Songti SC"/>
                 <a:cs typeface="Songti SC"/>
               </a:rPr>
-              <a:t>三个时刻的共性缺口：产出无法复用，复习成本被迫翻倍</a:t>
+              <a:t>三个时刻，同一个毛病：用过的东西留不下来</a:t>
             </a:r>
           </a:p>
         </p:txBody>
@@ -6230,7 +6230,7 @@
                 <a:ea typeface="Songti SC"/>
                 <a:cs typeface="Songti SC"/>
               </a:rPr>
-              <a:t>上课中 · 讲义散在三处</a:t>
+              <a:t>上课时，讲义散在三处</a:t>
             </a:r>
           </a:p>
         </p:txBody>
@@ -6267,7 +6267,7 @@
                 <a:ea typeface="Songti SC"/>
                 <a:cs typeface="Songti SC"/>
               </a:rPr>
-              <a:t>课程平台、聊天记录、手机相册各存一半，找一页要翻三个地方 → 不可检索</a:t>
+              <a:t>课程平台、聊天记录、手机相册各存一半，找一页要翻三个地方。检索不了。</a:t>
             </a:r>
           </a:p>
         </p:txBody>
@@ -6304,7 +6304,7 @@
                 <a:ea typeface="Songti SC"/>
                 <a:cs typeface="Songti SC"/>
               </a:rPr>
-              <a:t>写作业 · 问完就走</a:t>
+              <a:t>写作业，问一句就走</a:t>
             </a:r>
           </a:p>
         </p:txBody>
@@ -6341,7 +6341,7 @@
                 <a:ea typeface="Songti SC"/>
                 <a:cs typeface="Songti SC"/>
               </a:rPr>
-              <a:t>答案留在对话里，同类问题下次从零再问 → 不可复用</a:t>
+              <a:t>答案留在对话框里，同类问题下次还得从零问一遍。复用不了。</a:t>
             </a:r>
           </a:p>
         </p:txBody>
@@ -6378,7 +6378,7 @@
                 <a:ea typeface="Songti SC"/>
                 <a:cs typeface="Songti SC"/>
               </a:rPr>
-              <a:t>期末时 · 资料在、题没有</a:t>
+              <a:t>期末，资料在，题没有</a:t>
             </a:r>
           </a:p>
         </p:txBody>
@@ -6415,7 +6415,7 @@
                 <a:ea typeface="Songti SC"/>
                 <a:cs typeface="Songti SC"/>
               </a:rPr>
-              <a:t>只能重读讲义重翻记录，练习量不足 → 不可练</a:t>
+              <a:t>只能重读讲义、重翻记录，练的量不够。可练的题是空的。</a:t>
             </a:r>
           </a:p>
         </p:txBody>
@@ -6452,7 +6452,7 @@
                 <a:ea typeface="Songti SC"/>
                 <a:cs typeface="Songti SC"/>
               </a:rPr>
-              <a:t>由此定义四个可验证目标</a:t>
+              <a:t>我们把这件事拆成四个能验收的目标</a:t>
             </a:r>
           </a:p>
         </p:txBody>
@@ -6489,7 +6489,7 @@
                 <a:ea typeface="Songti SC"/>
                 <a:cs typeface="Songti SC"/>
               </a:rPr>
-              <a:t>G1　中断后可无损续跑</a:t>
+              <a:t>G1　中断后接着跑</a:t>
             </a:r>
           </a:p>
         </p:txBody>
@@ -6526,7 +6526,7 @@
                 <a:ea typeface="Songti SC"/>
                 <a:cs typeface="Songti SC"/>
               </a:rPr>
-              <a:t>关页或断网后，能从未完成处继续</a:t>
+              <a:t>关页或断网再回来，能从上次的进度继续</a:t>
             </a:r>
           </a:p>
         </p:txBody>
@@ -6563,7 +6563,7 @@
                 <a:ea typeface="Songti SC"/>
                 <a:cs typeface="Songti SC"/>
               </a:rPr>
-              <a:t>G2　答案可追溯到具体页</a:t>
+              <a:t>G2　答案能翻到页</a:t>
             </a:r>
           </a:p>
         </p:txBody>
@@ -6600,7 +6600,7 @@
                 <a:ea typeface="Songti SC"/>
                 <a:cs typeface="Songti SC"/>
               </a:rPr>
-              <a:t>引用带「第 N 页」，原件可打开核对</a:t>
+              <a:t>引用带「第 N 页」，原件点开就能核对</a:t>
             </a:r>
           </a:p>
         </p:txBody>
@@ -6637,7 +6637,7 @@
                 <a:ea typeface="Songti SC"/>
                 <a:cs typeface="Songti SC"/>
               </a:rPr>
-              <a:t>G3　数据不被越权修改</a:t>
+              <a:t>G3　数据不被乱改</a:t>
             </a:r>
           </a:p>
         </p:txBody>
@@ -6674,7 +6674,7 @@
                 <a:ea typeface="Songti SC"/>
                 <a:cs typeface="Songti SC"/>
               </a:rPr>
-              <a:t>写操作在执行层被拦，确认后才落库</a:t>
+              <a:t>写操作在执行层被拦，确认之后才落库</a:t>
             </a:r>
           </a:p>
         </p:txBody>
@@ -6711,7 +6711,7 @@
                 <a:ea typeface="Songti SC"/>
                 <a:cs typeface="Songti SC"/>
               </a:rPr>
-              <a:t>G4　改动好坏可被量化</a:t>
+              <a:t>G4　好坏算得出来</a:t>
             </a:r>
           </a:p>
         </p:txBody>
@@ -6748,7 +6748,7 @@
                 <a:ea typeface="Songti SC"/>
                 <a:cs typeface="Songti SC"/>
               </a:rPr>
-              <a:t>固定考卷 + 基线，掉分自动拦截</a:t>
+              <a:t>固定考卷加基线，掉分自动拦下</a:t>
             </a:r>
           </a:p>
         </p:txBody>
@@ -6785,7 +6785,7 @@
                 <a:ea typeface="Songti SC"/>
                 <a:cs typeface="Songti SC"/>
               </a:rPr>
-              <a:t>问题不在「有没有工具」，而在「用完即弃」：讲义、结论、错因都没留下可复用的形态</a:t>
+              <a:t>缺的不是工具，是把用过的东西留下来：讲义、结论、错因，停下来就还是「用过」。</a:t>
             </a:r>
           </a:p>
         </p:txBody>
@@ -6837,7 +6837,7 @@
 
 <file path=ppt/slides/slide4.xml><?xml version="1.0" encoding="utf-8"?>
 <p:sld xmlns:a="http://schemas.openxmlformats.org/drawingml/2006/main" xmlns:p="http://schemas.openxmlformats.org/presentationml/2006/main" xmlns:r="http://schemas.openxmlformats.org/officeDocument/2006/relationships">
-  <p:cSld name="04 技术选型｜零运维、可离线、可评测，不是追新">
+  <p:cSld name="04 技术选型｜只守三条：零运维、能离线、可评测">
     <p:spTree>
       <p:nvGrpSpPr>
         <p:cNvPr id="1" name=""/>
@@ -6958,7 +6958,7 @@
                 <a:ea typeface="Songti SC"/>
                 <a:cs typeface="Songti SC"/>
               </a:rPr>
-              <a:t>选型原则是零运维、可离线、可评测，不是追新</a:t>
+              <a:t>选型只守三条：零运维、能离线、可评测</a:t>
             </a:r>
           </a:p>
         </p:txBody>
@@ -7106,7 +7106,7 @@
                 <a:ea typeface="Songti SC"/>
                 <a:cs typeface="Songti SC"/>
               </a:rPr>
-              <a:t>为什么不选更常见的替代</a:t>
+              <a:t>没选什么，为什么</a:t>
             </a:r>
           </a:p>
         </p:txBody>
@@ -7298,7 +7298,7 @@
                 <a:ea typeface="Songti SC"/>
                 <a:cs typeface="Songti SC"/>
               </a:rPr>
-              <a:t>自研状态机要重复实现断点与中断</a:t>
+              <a:t>自研状态机，断点和中断还得自己写一遍</a:t>
             </a:r>
           </a:p>
         </p:txBody>
@@ -7490,7 +7490,7 @@
                 <a:ea typeface="Songti SC"/>
                 <a:cs typeface="Songti SC"/>
               </a:rPr>
-              <a:t>同步框架难以边算边推，过程不可见</a:t>
+              <a:t>同步框架边算边推做不到，过程也就看不见</a:t>
             </a:r>
           </a:p>
         </p:txBody>
@@ -7645,7 +7645,7 @@
                 <a:ea typeface="Songti SC"/>
                 <a:cs typeface="Songti SC"/>
               </a:rPr>
-              <a:t>单文件承载全部业务数据与检索索引</a:t>
+              <a:t>单文件装下全部业务数据与检索索引</a:t>
             </a:r>
           </a:p>
         </p:txBody>
@@ -7682,7 +7682,7 @@
                 <a:ea typeface="Songti SC"/>
                 <a:cs typeface="Songti SC"/>
               </a:rPr>
-              <a:t>换 MySQL 会牺牲中文检索与离线演示</a:t>
+              <a:t>换 MySQL 会牺牲中文检索和离线演示</a:t>
             </a:r>
           </a:p>
         </p:txBody>
@@ -7874,7 +7874,7 @@
                 <a:ea typeface="Songti SC"/>
                 <a:cs typeface="Songti SC"/>
               </a:rPr>
-              <a:t>纯向量漏专有名词与两字词</a:t>
+              <a:t>纯向量会漏掉专有名词和两字词</a:t>
             </a:r>
           </a:p>
         </p:txBody>
@@ -8066,7 +8066,7 @@
                 <a:ea typeface="Songti SC"/>
                 <a:cs typeface="Songti SC"/>
               </a:rPr>
-              <a:t>纯 SPA 处理流式与多页状态更绕</a:t>
+              <a:t>纯 SPA 处理流式和多页状态更绕</a:t>
             </a:r>
           </a:p>
         </p:txBody>
@@ -8295,7 +8295,7 @@
                 <a:ea typeface="Songti SC"/>
                 <a:cs typeface="Songti SC"/>
               </a:rPr>
-              <a:t>结果：整条链路可离线跑通，测试与评测零 API 消耗 —— 这是能反复验证的前提</a:t>
+              <a:t>这样整条链路都能离线跑通，测试和评测一次 API 都不花——这是能反复验证的前提。</a:t>
             </a:r>
           </a:p>
         </p:txBody>
@@ -8347,7 +8347,7 @@
 
 <file path=ppt/slides/slide5.xml><?xml version="1.0" encoding="utf-8"?>
 <p:sld xmlns:a="http://schemas.openxmlformats.org/drawingml/2006/main" xmlns:p="http://schemas.openxmlformats.org/presentationml/2006/main" xmlns:r="http://schemas.openxmlformats.org/officeDocument/2006/relationships">
-  <p:cSld name="05 架构｜依赖单向朝内、回合画成图">
+  <p:cSld name="05 架构｜依赖只朝内，回合画成图">
     <p:spTree>
       <p:nvGrpSpPr>
         <p:cNvPr id="1" name=""/>
@@ -8468,7 +8468,7 @@
                 <a:ea typeface="Songti SC"/>
                 <a:cs typeface="Songti SC"/>
               </a:rPr>
-              <a:t>依赖单向朝内、回合画成图</a:t>
+              <a:t>依赖只朝内，回合画成图</a:t>
             </a:r>
           </a:p>
         </p:txBody>
@@ -9215,7 +9215,7 @@
                 <a:ea typeface="Songti SC"/>
                 <a:cs typeface="Songti SC"/>
               </a:rPr>
-              <a:t>每个节点执行后都落一次检查点 —— 这既是「关掉页面还能接着跑」，也是「写库前停下问你」的共同前提</a:t>
+              <a:t>每跑完一个节点就存一次档。关掉页面还能接着跑、写库前先停下来问你，靠的都是这一点。</a:t>
             </a:r>
           </a:p>
         </p:txBody>
@@ -9267,7 +9267,7 @@
 
 <file path=ppt/slides/slide6.xml><?xml version="1.0" encoding="utf-8"?>
 <p:sld xmlns:a="http://schemas.openxmlformats.org/drawingml/2006/main" xmlns:p="http://schemas.openxmlformats.org/presentationml/2006/main" xmlns:r="http://schemas.openxmlformats.org/officeDocument/2006/relationships">
-  <p:cSld name="06 实现一｜四路召回补上中文短词与同义异名两类漏召回">
+  <p:cSld name="06 实现一｜四条一起找，把中文短词和同义异名都补上">
     <p:spTree>
       <p:nvGrpSpPr>
         <p:cNvPr id="1" name=""/>
@@ -9388,7 +9388,7 @@
                 <a:ea typeface="Songti SC"/>
                 <a:cs typeface="Songti SC"/>
               </a:rPr>
-              <a:t>四路召回同时补上「中文短词」与「同义异名」两类漏召回</a:t>
+              <a:t>四条一起找，把中文短词和同义异名都补上</a:t>
             </a:r>
           </a:p>
         </p:txBody>
@@ -10016,7 +10016,7 @@
                 <a:ea typeface="Songti SC"/>
                 <a:cs typeface="Songti SC"/>
               </a:rPr>
-              <a:t>局限：无真实模型时不可靠</a:t>
+              <a:t>局限：没有真实模型时不可靠</a:t>
             </a:r>
           </a:p>
         </p:txBody>
@@ -10053,7 +10053,7 @@
                 <a:ea typeface="Songti SC"/>
                 <a:cs typeface="Songti SC"/>
               </a:rPr>
-              <a:t>四条不是堆料：每条都对应一个实测过的漏召回场景。消融：关掉精排后 MRR 由 0.9714 降至 0.9571，命中数不变 —— 它改善的是排序，不是召回</a:t>
+              <a:t>这四条不是凑数，每条都对应一类真实漏掉的查询。关掉精排，MRR 从 0.9714 掉到 0.9571，命中数没变——它改善的是排序，不是召回。</a:t>
             </a:r>
           </a:p>
         </p:txBody>
@@ -10105,7 +10105,7 @@
 
 <file path=ppt/slides/slide7.xml><?xml version="1.0" encoding="utf-8"?>
 <p:sld xmlns:a="http://schemas.openxmlformats.org/drawingml/2006/main" xmlns:p="http://schemas.openxmlformats.org/presentationml/2006/main" xmlns:r="http://schemas.openxmlformats.org/officeDocument/2006/relationships">
-  <p:cSld name="07 实现二｜检查点负责接着跑，权限两层负责改不了">
+  <p:cSld name="07 实现二｜接着跑靠检查点，改不了靠两层权限">
     <p:spTree>
       <p:nvGrpSpPr>
         <p:cNvPr id="1" name=""/>
@@ -10226,7 +10226,7 @@
                 <a:ea typeface="Songti SC"/>
                 <a:cs typeface="Songti SC"/>
               </a:rPr>
-              <a:t>检查点负责「接着跑」，权限两层负责「改不了」</a:t>
+              <a:t>接着跑靠检查点，改不了靠两层权限</a:t>
             </a:r>
           </a:p>
         </p:txBody>
@@ -10640,7 +10640,7 @@
                 <a:ea typeface="Songti SC"/>
                 <a:cs typeface="Songti SC"/>
               </a:rPr>
-              <a:t>看得见全部工具 · 执行层放行，写操作仍需确认</a:t>
+              <a:t>看得见全部工具，执行层放行；写操作仍要确认</a:t>
             </a:r>
           </a:p>
         </p:txBody>
@@ -10714,7 +10714,7 @@
                 <a:ea typeface="Songti SC"/>
                 <a:cs typeface="Songti SC"/>
               </a:rPr>
-              <a:t>看得见只读工具 · 执行层直接拒绝写操作</a:t>
+              <a:t>看得见只读工具，执行层直接拒绝写操作</a:t>
             </a:r>
           </a:p>
         </p:txBody>
@@ -10788,7 +10788,7 @@
                 <a:ea typeface="Songti SC"/>
                 <a:cs typeface="Songti SC"/>
               </a:rPr>
-              <a:t>看不见任何工具 · 执行层一律拦截</a:t>
+              <a:t>看不见任何工具，执行层一律拦截</a:t>
             </a:r>
           </a:p>
         </p:txBody>
@@ -10825,7 +10825,7 @@
                 <a:ea typeface="Songti SC"/>
                 <a:cs typeface="Songti SC"/>
               </a:rPr>
-              <a:t>写操作流程：模型发起落库 → 图在中断点暂停 → 用户点确认 → 从检查点恢复并落库。两层权限缺一不可：只遮列表模型仍会说出被禁工具名而失败，只拦执行模型会反复重试</a:t>
+              <a:t>写库的流程是：模型要写 → 图停下来 → 人点确认 → 从检查点恢复再落库。两层权限都得有：只藏工具，模型仍会说出被禁的名字然后失败；只在执行时拦，模型会一遍遍重试。</a:t>
             </a:r>
           </a:p>
         </p:txBody>
@@ -10877,7 +10877,7 @@
 
 <file path=ppt/slides/slide8.xml><?xml version="1.0" encoding="utf-8"?>
 <p:sld xmlns:a="http://schemas.openxmlformats.org/drawingml/2006/main" xmlns:p="http://schemas.openxmlformats.org/presentationml/2006/main" xmlns:r="http://schemas.openxmlformats.org/officeDocument/2006/relationships">
-  <p:cSld name="08 实现三｜0.05 的容差把感觉变差变成命令失败">
+  <p:cSld name="08 实现三｜容差 0.05，掉出这个范围就算失败">
     <p:spTree>
       <p:nvGrpSpPr>
         <p:cNvPr id="1" name=""/>
@@ -10998,7 +10998,7 @@
                 <a:ea typeface="Songti SC"/>
                 <a:cs typeface="Songti SC"/>
               </a:rPr>
-              <a:t>0.05 的容差把「感觉变差」变成「命令失败」</a:t>
+              <a:t>容差 0.05，掉出这个范围就算失败</a:t>
             </a:r>
           </a:p>
         </p:txBody>
@@ -11375,8 +11375,7 @@
                 <a:ea typeface="Songti SC"/>
                 <a:cs typeface="Songti SC"/>
               </a:rPr>
-              <a:t>为什么不用大模型判分：同一模型既写又评会共享盲区 —— 它看不见的错误，复核时也看不见，甚至会把好答案改坏。
-所以判据全部用「确定性比对」：命中的是哪一篇、分到的是哪一类，机器都能校验；模型的判断只用于人工抽检。</a:t>
+              <a:t>判分没有交给大模型。同一模型既写又评，会共享同一批盲区：它第一次没看出来的错，复核时同样看不出来，还可能把本来对的答案改坏。所以判据都用能机器校验的方式——命中的是哪一篇、分到了哪一类。模型的意见只用在人工抽检上。</a:t>
             </a:r>
           </a:p>
         </p:txBody>
@@ -11465,7 +11464,7 @@
 
 <file path=ppt/slides/slide9.xml><?xml version="1.0" encoding="utf-8"?>
 <p:sld xmlns:a="http://schemas.openxmlformats.org/drawingml/2006/main" xmlns:p="http://schemas.openxmlformats.org/presentationml/2006/main" xmlns:r="http://schemas.openxmlformats.org/officeDocument/2006/relationships">
-  <p:cSld name="09 实际使用｜四步走完一个学习周期：入库、溯源、记错因、到期复习">
+  <p:cSld name="09 实际使用｜四步走完一个学习周期">
     <p:spTree>
       <p:nvGrpSpPr>
         <p:cNvPr id="1" name=""/>
@@ -11586,7 +11585,7 @@
                 <a:ea typeface="Songti SC"/>
                 <a:cs typeface="Songti SC"/>
               </a:rPr>
-              <a:t>四步走完一个学习周期：入库、溯源、记错因、到期复习</a:t>
+              <a:t>四步走完一个学习周期</a:t>
             </a:r>
           </a:p>
         </p:txBody>
@@ -11647,7 +11646,7 @@
                 <a:ea typeface="Songti SC"/>
                 <a:cs typeface="Songti SC"/>
               </a:rPr>
-              <a:t>知识库页实拍：左侧学科目录树，中间资料列表，右侧可直接就着当前库提问</a:t>
+              <a:t>知识库页实拍：左边是学科目录树，中间是资料列表，右侧可以直接就着当前这个库提问</a:t>
             </a:r>
           </a:p>
         </p:txBody>
@@ -11758,7 +11757,7 @@
                 <a:ea typeface="Songti SC"/>
                 <a:cs typeface="Songti SC"/>
               </a:rPr>
-              <a:t>PDF / Word / PPT / Excel 秒传，板书照片经视觉转写后入库</a:t>
+              <a:t>PDF / Word / PPT / Excel 秒传；板书照片经视觉转写后入库</a:t>
             </a:r>
           </a:p>
         </p:txBody>
@@ -11869,7 +11868,7 @@
                 <a:ea typeface="Songti SC"/>
                 <a:cs typeface="Songti SC"/>
               </a:rPr>
-              <a:t>回答标注出自哪份资料、第几页，原件可内联打开核对</a:t>
+              <a:t>回答标着出自哪份资料第几页，原件点开就能核对</a:t>
             </a:r>
           </a:p>
         </p:txBody>
@@ -12091,7 +12090,7 @@
                 <a:ea typeface="Songti SC"/>
                 <a:cs typeface="Songti SC"/>
               </a:rPr>
-              <a:t>今日复习只列到期题与薄弱学科，日程负责什么时候做</a:t>
+              <a:t>今日复习只列到期题和薄弱学科，日程管什么时候做</a:t>
             </a:r>
           </a:p>
         </p:txBody>
@@ -12128,7 +12127,7 @@
                 <a:ea typeface="Songti SC"/>
                 <a:cs typeface="Songti SC"/>
               </a:rPr>
-              <a:t>演示数据：7 个学科库 / 24 份资料 / 46 个可检索片段，全部带出处</a:t>
+              <a:t>演示数据：7 个学科库 / 24 份资料 / 46 个可检索片段，全部带出处。</a:t>
             </a:r>
           </a:p>
         </p:txBody>

--- a/docs/作品集/参赛/知迹答辩/知迹答辩.pptx
+++ b/docs/作品集/参赛/知迹答辩/知迹答辩.pptx
@@ -5976,7 +5976,7 @@
                 <a:ea typeface="Songti SC"/>
                 <a:cs typeface="Songti SC"/>
               </a:rPr>
-              <a:t>第 3 页先把结论摆出来，后面每一页只负责证明其中一条</a:t>
+              <a:t>全篇按问题、选型、实现、使用、边界五段推进，每页只讲一件事</a:t>
             </a:r>
           </a:p>
         </p:txBody>
@@ -5991,7 +5991,7 @@
 
 <file path=ppt/slides/slide3.xml><?xml version="1.0" encoding="utf-8"?>
 <p:sld xmlns:a="http://schemas.openxmlformats.org/drawingml/2006/main" xmlns:p="http://schemas.openxmlformats.org/presentationml/2006/main" xmlns:r="http://schemas.openxmlformats.org/officeDocument/2006/relationships">
-  <p:cSld name="03 背景｜三个时刻，同一个毛病：用过的东西留不下来">
+  <p:cSld name="03 背景｜资料不少，问题是用完就丢">
     <p:spTree>
       <p:nvGrpSpPr>
         <p:cNvPr id="1" name=""/>
@@ -6112,7 +6112,7 @@
                 <a:ea typeface="Songti SC"/>
                 <a:cs typeface="Songti SC"/>
               </a:rPr>
-              <a:t>三个时刻，同一个毛病：用过的东西留不下来</a:t>
+              <a:t>资料不少，问题是用完就丢</a:t>
             </a:r>
           </a:p>
         </p:txBody>
@@ -6193,7 +6193,7 @@
                 <a:ea typeface="Songti SC"/>
                 <a:cs typeface="Songti SC"/>
               </a:rPr>
-              <a:t>一学期里的三个时刻</a:t>
+              <a:t>三个卡点，都出在学习过程没有被记录</a:t>
             </a:r>
           </a:p>
         </p:txBody>
@@ -6230,7 +6230,7 @@
                 <a:ea typeface="Songti SC"/>
                 <a:cs typeface="Songti SC"/>
               </a:rPr>
-              <a:t>上课时，讲义散在三处</a:t>
+              <a:t>资料是死的，问题需要活的答案</a:t>
             </a:r>
           </a:p>
         </p:txBody>
@@ -6267,7 +6267,7 @@
                 <a:ea typeface="Songti SC"/>
                 <a:cs typeface="Songti SC"/>
               </a:rPr>
-              <a:t>课程平台、聊天记录、手机相册各存一半，找一页要翻三个地方。检索不了。</a:t>
+              <a:t>现有工具能问，但答完不知道它来自哪一页；PDF 与课件只能被翻，不能被提问。</a:t>
             </a:r>
           </a:p>
         </p:txBody>
@@ -6304,7 +6304,7 @@
                 <a:ea typeface="Songti SC"/>
                 <a:cs typeface="Songti SC"/>
               </a:rPr>
-              <a:t>写作业，问一句就走</a:t>
+              <a:t>错因是散的，复盘只能靠记忆</a:t>
             </a:r>
           </a:p>
         </p:txBody>
@@ -6341,7 +6341,7 @@
                 <a:ea typeface="Songti SC"/>
                 <a:cs typeface="Songti SC"/>
               </a:rPr>
-              <a:t>答案留在对话框里，同类问题下次还得从零问一遍。复用不了。</a:t>
+              <a:t>错题不分类、结论不落库，系统就不知道该练什么、该什么时候复习。</a:t>
             </a:r>
           </a:p>
         </p:txBody>
@@ -6378,7 +6378,7 @@
                 <a:ea typeface="Songti SC"/>
                 <a:cs typeface="Songti SC"/>
               </a:rPr>
-              <a:t>期末，资料在，题没有</a:t>
+              <a:t>过程是看不见的</a:t>
             </a:r>
           </a:p>
         </p:txBody>
@@ -6415,7 +6415,7 @@
                 <a:ea typeface="Songti SC"/>
                 <a:cs typeface="Songti SC"/>
               </a:rPr>
-              <a:t>只能重读讲义、重翻记录，练的量不够。可练的题是空的。</a:t>
+              <a:t>中断了、越权了、变差了，没有一处能查，只能靠「感觉还行」。</a:t>
             </a:r>
           </a:p>
         </p:txBody>
@@ -6489,7 +6489,7 @@
                 <a:ea typeface="Songti SC"/>
                 <a:cs typeface="Songti SC"/>
               </a:rPr>
-              <a:t>G1　中断后接着跑</a:t>
+              <a:t>G1　每一步都能恢复</a:t>
             </a:r>
           </a:p>
         </p:txBody>
@@ -6526,7 +6526,7 @@
                 <a:ea typeface="Songti SC"/>
                 <a:cs typeface="Songti SC"/>
               </a:rPr>
-              <a:t>关页或断网再回来，能从上次的进度继续</a:t>
+              <a:t>关页、断网、进程重启，都从上次的进度继续</a:t>
             </a:r>
           </a:p>
         </p:txBody>
@@ -6563,7 +6563,7 @@
                 <a:ea typeface="Songti SC"/>
                 <a:cs typeface="Songti SC"/>
               </a:rPr>
-              <a:t>G2　答案能翻到页</a:t>
+              <a:t>G2　每句结论都能翻回原文</a:t>
             </a:r>
           </a:p>
         </p:txBody>
@@ -6600,7 +6600,7 @@
                 <a:ea typeface="Songti SC"/>
                 <a:cs typeface="Songti SC"/>
               </a:rPr>
-              <a:t>引用带「第 N 页」，原件点开就能核对</a:t>
+              <a:t>引用精确到第 N 页，原件点开就能核对</a:t>
             </a:r>
           </a:p>
         </p:txBody>
@@ -6637,7 +6637,7 @@
                 <a:ea typeface="Songti SC"/>
                 <a:cs typeface="Songti SC"/>
               </a:rPr>
-              <a:t>G3　数据不被乱改</a:t>
+              <a:t>G3　每次写入都要经过确认</a:t>
             </a:r>
           </a:p>
         </p:txBody>
@@ -6711,7 +6711,7 @@
                 <a:ea typeface="Songti SC"/>
                 <a:cs typeface="Songti SC"/>
               </a:rPr>
-              <a:t>G4　好坏算得出来</a:t>
+              <a:t>G4　每次改动都能被判定</a:t>
             </a:r>
           </a:p>
         </p:txBody>
@@ -6748,7 +6748,7 @@
                 <a:ea typeface="Songti SC"/>
                 <a:cs typeface="Songti SC"/>
               </a:rPr>
-              <a:t>固定考卷加基线，掉分自动拦下</a:t>
+              <a:t>固定考卷加基线，掉出容差即拦下</a:t>
             </a:r>
           </a:p>
         </p:txBody>
@@ -6785,7 +6785,7 @@
                 <a:ea typeface="Songti SC"/>
                 <a:cs typeface="Songti SC"/>
               </a:rPr>
-              <a:t>缺的不是工具，是把用过的东西留下来：讲义、结论、错因，停下来就还是「用过」。</a:t>
+              <a:t>三个卡点分别落在后面三块：知识层的检索与出处、错因驱动的出题与复盘，以及让它靠得住的工程手段。</a:t>
             </a:r>
           </a:p>
         </p:txBody>

--- a/docs/作品集/参赛/知迹答辩/知迹答辩.pptx
+++ b/docs/作品集/参赛/知迹答辩/知迹答辩.pptx
@@ -5991,7 +5991,7 @@
 
 <file path=ppt/slides/slide3.xml><?xml version="1.0" encoding="utf-8"?>
 <p:sld xmlns:a="http://schemas.openxmlformats.org/drawingml/2006/main" xmlns:p="http://schemas.openxmlformats.org/presentationml/2006/main" xmlns:r="http://schemas.openxmlformats.org/officeDocument/2006/relationships">
-  <p:cSld name="03 背景｜资料不少，问题是用完就丢">
+  <p:cSld name="03 背景｜资料不少，问题是用完就丢（工具是一次性的）">
     <p:spTree>
       <p:nvGrpSpPr>
         <p:cNvPr id="1" name=""/>
@@ -6193,7 +6193,7 @@
                 <a:ea typeface="Songti SC"/>
                 <a:cs typeface="Songti SC"/>
               </a:rPr>
-              <a:t>三个卡点，都出在学习过程没有被记录</a:t>
+              <a:t>三个卡点，同一个根因</a:t>
             </a:r>
           </a:p>
         </p:txBody>
@@ -6267,7 +6267,7 @@
                 <a:ea typeface="Songti SC"/>
                 <a:cs typeface="Songti SC"/>
               </a:rPr>
-              <a:t>现有工具能问，但答完不知道它来自哪一页；PDF 与课件只能被翻，不能被提问。</a:t>
+              <a:t>讲义存进来就躺着，问的时候整篇翻；答出来的结论，说不出依据在第几页。</a:t>
             </a:r>
           </a:p>
         </p:txBody>
@@ -6785,7 +6785,7 @@
                 <a:ea typeface="Songti SC"/>
                 <a:cs typeface="Songti SC"/>
               </a:rPr>
-              <a:t>三个卡点分别落在后面三块：知识层的检索与出处、错因驱动的出题与复盘，以及让它靠得住的工程手段。</a:t>
+              <a:t>学习是连续的过程，工具却是一次性的。三个卡点分别落在后面三块：知识层的检索与出处、错因驱动的出题与复盘、让它靠得住的工程手段。</a:t>
             </a:r>
           </a:p>
         </p:txBody>

--- a/docs/作品集/参赛/知迹答辩/知迹答辩.pptx
+++ b/docs/作品集/参赛/知迹答辩/知迹答辩.pptx
@@ -4928,7 +4928,7 @@
 
 <file path=ppt/slides/slide11.xml><?xml version="1.0" encoding="utf-8"?>
 <p:sld xmlns:a="http://schemas.openxmlformats.org/drawingml/2006/main" xmlns:p="http://schemas.openxmlformats.org/presentationml/2006/main" xmlns:r="http://schemas.openxmlformats.org/officeDocument/2006/relationships">
-  <p:cSld name="11 收束｜真正做完的是三件事">
+  <p:cSld name="11 收束｜资料进去，题出来，复习排好">
     <p:spTree>
       <p:nvGrpSpPr>
         <p:cNvPr id="1" name=""/>
@@ -5049,7 +5049,7 @@
                 <a:ea typeface="Songti SC"/>
                 <a:cs typeface="Songti SC"/>
               </a:rPr>
-              <a:t>真正做完的是三件事：每一步留痕，越权拦得住，变差算得出来。</a:t>
+              <a:t>资料进去，题出来，复习排好——就这三件事。</a:t>
             </a:r>
           </a:p>
         </p:txBody>
@@ -5130,7 +5130,7 @@
                 <a:ea typeface="Songti SC"/>
                 <a:cs typeface="Songti SC"/>
               </a:rPr>
-              <a:t>其余的还差着，已经写在上一页。我们把它做成一个能交付的系统：能做什么说清楚，缺什么也写在纸上。</a:t>
+              <a:t>现在都能用。还在补的有三块，写在上一页：任务级评测、记忆的过期与删除、更难的题库。</a:t>
             </a:r>
           </a:p>
         </p:txBody>
@@ -5204,7 +5204,7 @@
                 <a:ea typeface="Songti SC"/>
                 <a:cs typeface="Songti SC"/>
               </a:rPr>
-              <a:t>从「找到没」升级到「这次会话有没有用」</a:t>
+              <a:t>从「找到没」升级到「这次复习有没有用」</a:t>
             </a:r>
           </a:p>
         </p:txBody>
@@ -5278,7 +5278,7 @@
                 <a:ea typeface="Songti SC"/>
                 <a:cs typeface="Songti SC"/>
               </a:rPr>
-              <a:t>能改、能删、过期会失效，不再用错旧偏好</a:t>
+              <a:t>记错的东西能改、能删、过期会失效</a:t>
             </a:r>
           </a:p>
         </p:txBody>
@@ -5315,7 +5315,7 @@
                 <a:ea typeface="Songti SC"/>
                 <a:cs typeface="Songti SC"/>
               </a:rPr>
-              <a:t>下一步 · 更难的考卷</a:t>
+              <a:t>下一步 · 更难的题库</a:t>
             </a:r>
           </a:p>
         </p:txBody>
@@ -5352,7 +5352,7 @@
                 <a:ea typeface="Songti SC"/>
                 <a:cs typeface="Songti SC"/>
               </a:rPr>
-              <a:t>题不难，后面改什么都看不出好坏</a:t>
+              <a:t>题太简单就看不出改动的好坏</a:t>
             </a:r>
           </a:p>
         </p:txBody>
@@ -5485,7 +5485,7 @@
 
 <file path=ppt/slides/slide2.xml><?xml version="1.0" encoding="utf-8"?>
 <p:sld xmlns:a="http://schemas.openxmlformats.org/drawingml/2006/main" xmlns:p="http://schemas.openxmlformats.org/presentationml/2006/main" xmlns:r="http://schemas.openxmlformats.org/officeDocument/2006/relationships">
-  <p:cSld name="02 目录｜五段路线，第 3 页先给结论">
+  <p:cSld name="02 目录｜做什么、怎么做、验证到什么程度、还差什么">
     <p:spTree>
       <p:nvGrpSpPr>
         <p:cNvPr id="1" name=""/>
@@ -5976,7 +5976,7 @@
                 <a:ea typeface="Songti SC"/>
                 <a:cs typeface="Songti SC"/>
               </a:rPr>
-              <a:t>全篇按问题、选型、实现、使用、边界五段推进，每页只讲一件事</a:t>
+              <a:t>全篇按做什么、怎么做、验证到什么程度、还差什么四段推进</a:t>
             </a:r>
           </a:p>
         </p:txBody>
@@ -5991,7 +5991,7 @@
 
 <file path=ppt/slides/slide3.xml><?xml version="1.0" encoding="utf-8"?>
 <p:sld xmlns:a="http://schemas.openxmlformats.org/drawingml/2006/main" xmlns:p="http://schemas.openxmlformats.org/presentationml/2006/main" xmlns:r="http://schemas.openxmlformats.org/officeDocument/2006/relationships">
-  <p:cSld name="03 背景｜资料不少，问题是用完就丢（工具是一次性的）">
+  <p:cSld name="03 它做什么｜整理资料，出题，复习——三件事连起来">
     <p:spTree>
       <p:nvGrpSpPr>
         <p:cNvPr id="1" name=""/>
@@ -6075,7 +6075,7 @@
                 <a:ea typeface="Songti SC"/>
                 <a:cs typeface="Songti SC"/>
               </a:rPr>
-              <a:t>01 背景与目标</a:t>
+              <a:t>01 它做什么</a:t>
             </a:r>
           </a:p>
         </p:txBody>
@@ -6112,7 +6112,7 @@
                 <a:ea typeface="Songti SC"/>
                 <a:cs typeface="Songti SC"/>
               </a:rPr>
-              <a:t>资料不少，问题是用完就丢</a:t>
+              <a:t>整理资料，出题，复习——三件事连起来</a:t>
             </a:r>
           </a:p>
         </p:txBody>
@@ -6193,7 +6193,7 @@
                 <a:ea typeface="Songti SC"/>
                 <a:cs typeface="Songti SC"/>
               </a:rPr>
-              <a:t>三个卡点，同一个根因</a:t>
+              <a:t>三步</a:t>
             </a:r>
           </a:p>
         </p:txBody>
@@ -6230,7 +6230,7 @@
                 <a:ea typeface="Songti SC"/>
                 <a:cs typeface="Songti SC"/>
               </a:rPr>
-              <a:t>资料是死的，问题需要活的答案</a:t>
+              <a:t>一、整理资料</a:t>
             </a:r>
           </a:p>
         </p:txBody>
@@ -6267,7 +6267,7 @@
                 <a:ea typeface="Songti SC"/>
                 <a:cs typeface="Songti SC"/>
               </a:rPr>
-              <a:t>讲义存进来就躺着，问的时候整篇翻；答出来的结论，说不出依据在第几页。</a:t>
+              <a:t>讲义、课件、笔记、错题照片传进来，按学科分好；PDF 能翻到第几页，拍照的板书也能转成文字。</a:t>
             </a:r>
           </a:p>
         </p:txBody>
@@ -6304,7 +6304,7 @@
                 <a:ea typeface="Songti SC"/>
                 <a:cs typeface="Songti SC"/>
               </a:rPr>
-              <a:t>错因是散的，复盘只能靠记忆</a:t>
+              <a:t>二、自动出题</a:t>
             </a:r>
           </a:p>
         </p:txBody>
@@ -6341,7 +6341,7 @@
                 <a:ea typeface="Songti SC"/>
                 <a:cs typeface="Songti SC"/>
               </a:rPr>
-              <a:t>错题不分类、结论不落库，系统就不知道该练什么、该什么时候复习。</a:t>
+              <a:t>按你传进来的资料出题；上次做错的方向会多出几道，不是凑一套。</a:t>
             </a:r>
           </a:p>
         </p:txBody>
@@ -6378,7 +6378,7 @@
                 <a:ea typeface="Songti SC"/>
                 <a:cs typeface="Songti SC"/>
               </a:rPr>
-              <a:t>过程是看不见的</a:t>
+              <a:t>三、结合知识库复习</a:t>
             </a:r>
           </a:p>
         </p:txBody>
@@ -6415,7 +6415,7 @@
                 <a:ea typeface="Songti SC"/>
                 <a:cs typeface="Songti SC"/>
               </a:rPr>
-              <a:t>中断了、越权了、变差了，没有一处能查，只能靠「感觉还行」。</a:t>
+              <a:t>今天该练哪几题，按掌握度和到期时间排好；复习时能翻回原文那一页。</a:t>
             </a:r>
           </a:p>
         </p:txBody>
@@ -6452,7 +6452,7 @@
                 <a:ea typeface="Songti SC"/>
                 <a:cs typeface="Songti SC"/>
               </a:rPr>
-              <a:t>我们把这件事拆成四个能验收的目标</a:t>
+              <a:t>做完之后是这样</a:t>
             </a:r>
           </a:p>
         </p:txBody>
@@ -6489,7 +6489,7 @@
                 <a:ea typeface="Songti SC"/>
                 <a:cs typeface="Songti SC"/>
               </a:rPr>
-              <a:t>G1　每一步都能恢复</a:t>
+              <a:t>找资料</a:t>
             </a:r>
           </a:p>
         </p:txBody>
@@ -6526,7 +6526,7 @@
                 <a:ea typeface="Songti SC"/>
                 <a:cs typeface="Songti SC"/>
               </a:rPr>
-              <a:t>关页、断网、进程重启，都从上次的进度继续</a:t>
+              <a:t>搜一句就定位到第几页</a:t>
             </a:r>
           </a:p>
         </p:txBody>
@@ -6563,7 +6563,7 @@
                 <a:ea typeface="Songti SC"/>
                 <a:cs typeface="Songti SC"/>
               </a:rPr>
-              <a:t>G2　每句结论都能翻回原文</a:t>
+              <a:t>出题</a:t>
             </a:r>
           </a:p>
         </p:txBody>
@@ -6600,7 +6600,7 @@
                 <a:ea typeface="Songti SC"/>
                 <a:cs typeface="Songti SC"/>
               </a:rPr>
-              <a:t>引用精确到第 N 页，原件点开就能核对</a:t>
+              <a:t>题从你的资料和错因里来，不是凑的</a:t>
             </a:r>
           </a:p>
         </p:txBody>
@@ -6637,7 +6637,7 @@
                 <a:ea typeface="Songti SC"/>
                 <a:cs typeface="Songti SC"/>
               </a:rPr>
-              <a:t>G3　每次写入都要经过确认</a:t>
+              <a:t>复习</a:t>
             </a:r>
           </a:p>
         </p:txBody>
@@ -6674,7 +6674,7 @@
                 <a:ea typeface="Songti SC"/>
                 <a:cs typeface="Songti SC"/>
               </a:rPr>
-              <a:t>写操作在执行层被拦，确认之后才落库</a:t>
+              <a:t>到期的自动排好，不用自己惦记</a:t>
             </a:r>
           </a:p>
         </p:txBody>
@@ -6711,7 +6711,7 @@
                 <a:ea typeface="Songti SC"/>
                 <a:cs typeface="Songti SC"/>
               </a:rPr>
-              <a:t>G4　每次改动都能被判定</a:t>
+              <a:t>不被乱改</a:t>
             </a:r>
           </a:p>
         </p:txBody>
@@ -6748,7 +6748,7 @@
                 <a:ea typeface="Songti SC"/>
                 <a:cs typeface="Songti SC"/>
               </a:rPr>
-              <a:t>固定考卷加基线，掉出容差即拦下</a:t>
+              <a:t>写进资料库前会先问你一句</a:t>
             </a:r>
           </a:p>
         </p:txBody>
@@ -6785,7 +6785,7 @@
                 <a:ea typeface="Songti SC"/>
                 <a:cs typeface="Songti SC"/>
               </a:rPr>
-              <a:t>学习是连续的过程，工具却是一次性的。三个卡点分别落在后面三块：知识层的检索与出处、错因驱动的出题与复盘、让它靠得住的工程手段。</a:t>
+              <a:t>后面几页讲的是支撑这三件事的做法：检索怎么保证找得准，过程怎么保证不丢，数据怎么保证不被模型改坏。</a:t>
             </a:r>
           </a:p>
         </p:txBody>

--- a/docs/作品集/参赛/知迹答辩/知迹答辩.pptx
+++ b/docs/作品集/参赛/知迹答辩/知迹答辩.pptx
@@ -3943,12 +3943,12 @@
         </p:nvSpPr>
         <p:spPr>
           <a:xfrm>
-            <a:off x="566928" y="1584045"/>
-            <a:ext cx="11057839" cy="969264"/>
+            <a:off x="566928" y="1565757"/>
+            <a:ext cx="11057839" cy="896112"/>
           </a:xfrm>
           <a:prstGeom prst="roundRect">
             <a:avLst>
-              <a:gd name="adj" fmla="val 5283"/>
+              <a:gd name="adj" fmla="val 5714"/>
             </a:avLst>
           </a:prstGeom>
           <a:solidFill>
@@ -3977,8 +3977,8 @@
         </p:nvSpPr>
         <p:spPr>
           <a:xfrm>
-            <a:off x="566928" y="1584045"/>
-            <a:ext cx="45720" cy="969264"/>
+            <a:off x="566928" y="1565757"/>
+            <a:ext cx="45720" cy="896112"/>
           </a:xfrm>
           <a:prstGeom prst="rect">
             <a:avLst/>
@@ -4007,8 +4007,8 @@
         </p:nvSpPr>
         <p:spPr>
           <a:xfrm>
-            <a:off x="822960" y="1712061"/>
-            <a:ext cx="10545775" cy="237744"/>
+            <a:off x="822960" y="1675485"/>
+            <a:ext cx="10545775" cy="219456"/>
           </a:xfrm>
           <a:prstGeom prst="rect">
             <a:avLst/>
@@ -4033,7 +4033,7 @@
               </a:spcAft>
             </a:pPr>
             <a:r>
-              <a:rPr sz="1350" b="1" i="0">
+              <a:rPr sz="1300" b="1" i="0">
                 <a:solidFill>
                   <a:srgbClr val="1A2B45"/>
                 </a:solidFill>
@@ -4053,8 +4053,8 @@
         </p:nvSpPr>
         <p:spPr>
           <a:xfrm>
-            <a:off x="822960" y="1986381"/>
-            <a:ext cx="10545775" cy="475488"/>
+            <a:off x="822960" y="1931517"/>
+            <a:ext cx="10545775" cy="438912"/>
           </a:xfrm>
           <a:prstGeom prst="rect">
             <a:avLst/>
@@ -4069,17 +4069,17 @@
           <a:p>
             <a:pPr algn="l">
               <a:lnSpc>
-                <a:spcPct val="134000"/>
-              </a:lnSpc>
-              <a:spcBef>
-                <a:spcPts val="0"/>
-              </a:spcBef>
-              <a:spcAft>
-                <a:spcPts val="600"/>
-              </a:spcAft>
-            </a:pPr>
-            <a:r>
-              <a:rPr sz="1200" b="0" i="0">
+                <a:spcPct val="132000"/>
+              </a:lnSpc>
+              <a:spcBef>
+                <a:spcPts val="0"/>
+              </a:spcBef>
+              <a:spcAft>
+                <a:spcPts val="600"/>
+              </a:spcAft>
+            </a:pPr>
+            <a:r>
+              <a:rPr sz="1150" b="0" i="0">
                 <a:solidFill>
                   <a:srgbClr val="58667C"/>
                 </a:solidFill>
@@ -4099,12 +4099,12 @@
         </p:nvSpPr>
         <p:spPr>
           <a:xfrm>
-            <a:off x="566928" y="2663037"/>
-            <a:ext cx="11057839" cy="969264"/>
+            <a:off x="566928" y="2553309"/>
+            <a:ext cx="11057839" cy="896112"/>
           </a:xfrm>
           <a:prstGeom prst="roundRect">
             <a:avLst>
-              <a:gd name="adj" fmla="val 5283"/>
+              <a:gd name="adj" fmla="val 5714"/>
             </a:avLst>
           </a:prstGeom>
           <a:solidFill>
@@ -4133,8 +4133,8 @@
         </p:nvSpPr>
         <p:spPr>
           <a:xfrm>
-            <a:off x="566928" y="2663037"/>
-            <a:ext cx="45720" cy="969264"/>
+            <a:off x="566928" y="2553309"/>
+            <a:ext cx="45720" cy="896112"/>
           </a:xfrm>
           <a:prstGeom prst="rect">
             <a:avLst/>
@@ -4163,8 +4163,8 @@
         </p:nvSpPr>
         <p:spPr>
           <a:xfrm>
-            <a:off x="822960" y="2791053"/>
-            <a:ext cx="10545775" cy="237744"/>
+            <a:off x="822960" y="2663037"/>
+            <a:ext cx="10545775" cy="219456"/>
           </a:xfrm>
           <a:prstGeom prst="rect">
             <a:avLst/>
@@ -4189,7 +4189,7 @@
               </a:spcAft>
             </a:pPr>
             <a:r>
-              <a:rPr sz="1350" b="1" i="0">
+              <a:rPr sz="1300" b="1" i="0">
                 <a:solidFill>
                   <a:srgbClr val="1A2B45"/>
                 </a:solidFill>
@@ -4209,8 +4209,8 @@
         </p:nvSpPr>
         <p:spPr>
           <a:xfrm>
-            <a:off x="822960" y="3065373"/>
-            <a:ext cx="10545775" cy="475488"/>
+            <a:off x="822960" y="2919069"/>
+            <a:ext cx="10545775" cy="438912"/>
           </a:xfrm>
           <a:prstGeom prst="rect">
             <a:avLst/>
@@ -4225,17 +4225,17 @@
           <a:p>
             <a:pPr algn="l">
               <a:lnSpc>
-                <a:spcPct val="134000"/>
-              </a:lnSpc>
-              <a:spcBef>
-                <a:spcPts val="0"/>
-              </a:spcBef>
-              <a:spcAft>
-                <a:spcPts val="600"/>
-              </a:spcAft>
-            </a:pPr>
-            <a:r>
-              <a:rPr sz="1200" b="0" i="0">
+                <a:spcPct val="132000"/>
+              </a:lnSpc>
+              <a:spcBef>
+                <a:spcPts val="0"/>
+              </a:spcBef>
+              <a:spcAft>
+                <a:spcPts val="600"/>
+              </a:spcAft>
+            </a:pPr>
+            <a:r>
+              <a:rPr sz="1150" b="0" i="0">
                 <a:solidFill>
                   <a:srgbClr val="58667C"/>
                 </a:solidFill>
@@ -4255,12 +4255,12 @@
         </p:nvSpPr>
         <p:spPr>
           <a:xfrm>
-            <a:off x="566928" y="3742029"/>
-            <a:ext cx="11057839" cy="969264"/>
+            <a:off x="566928" y="3540861"/>
+            <a:ext cx="11057839" cy="896112"/>
           </a:xfrm>
           <a:prstGeom prst="roundRect">
             <a:avLst>
-              <a:gd name="adj" fmla="val 5283"/>
+              <a:gd name="adj" fmla="val 5714"/>
             </a:avLst>
           </a:prstGeom>
           <a:solidFill>
@@ -4289,8 +4289,8 @@
         </p:nvSpPr>
         <p:spPr>
           <a:xfrm>
-            <a:off x="566928" y="3742029"/>
-            <a:ext cx="45720" cy="969264"/>
+            <a:off x="566928" y="3540861"/>
+            <a:ext cx="45720" cy="896112"/>
           </a:xfrm>
           <a:prstGeom prst="rect">
             <a:avLst/>
@@ -4319,8 +4319,8 @@
         </p:nvSpPr>
         <p:spPr>
           <a:xfrm>
-            <a:off x="822960" y="3870045"/>
-            <a:ext cx="10545775" cy="237744"/>
+            <a:off x="822960" y="3650589"/>
+            <a:ext cx="10545775" cy="219456"/>
           </a:xfrm>
           <a:prstGeom prst="rect">
             <a:avLst/>
@@ -4345,7 +4345,7 @@
               </a:spcAft>
             </a:pPr>
             <a:r>
-              <a:rPr sz="1350" b="1" i="0">
+              <a:rPr sz="1300" b="1" i="0">
                 <a:solidFill>
                   <a:srgbClr val="1A2B45"/>
                 </a:solidFill>
@@ -4365,8 +4365,8 @@
         </p:nvSpPr>
         <p:spPr>
           <a:xfrm>
-            <a:off x="822960" y="4144365"/>
-            <a:ext cx="10545775" cy="475488"/>
+            <a:off x="822960" y="3906621"/>
+            <a:ext cx="10545775" cy="438912"/>
           </a:xfrm>
           <a:prstGeom prst="rect">
             <a:avLst/>
@@ -4381,17 +4381,17 @@
           <a:p>
             <a:pPr algn="l">
               <a:lnSpc>
-                <a:spcPct val="134000"/>
-              </a:lnSpc>
-              <a:spcBef>
-                <a:spcPts val="0"/>
-              </a:spcBef>
-              <a:spcAft>
-                <a:spcPts val="600"/>
-              </a:spcAft>
-            </a:pPr>
-            <a:r>
-              <a:rPr sz="1200" b="0" i="0">
+                <a:spcPct val="132000"/>
+              </a:lnSpc>
+              <a:spcBef>
+                <a:spcPts val="0"/>
+              </a:spcBef>
+              <a:spcAft>
+                <a:spcPts val="600"/>
+              </a:spcAft>
+            </a:pPr>
+            <a:r>
+              <a:rPr sz="1150" b="0" i="0">
                 <a:solidFill>
                   <a:srgbClr val="58667C"/>
                 </a:solidFill>
@@ -4411,12 +4411,12 @@
         </p:nvSpPr>
         <p:spPr>
           <a:xfrm>
-            <a:off x="566928" y="4912461"/>
-            <a:ext cx="11057839" cy="1188720"/>
+            <a:off x="566928" y="4583277"/>
+            <a:ext cx="11057839" cy="1024128"/>
           </a:xfrm>
           <a:prstGeom prst="roundRect">
             <a:avLst>
-              <a:gd name="adj" fmla="val 4923"/>
+              <a:gd name="adj" fmla="val 5714"/>
             </a:avLst>
           </a:prstGeom>
           <a:solidFill>
@@ -4443,8 +4443,8 @@
         </p:nvSpPr>
         <p:spPr>
           <a:xfrm>
-            <a:off x="877824" y="5095341"/>
-            <a:ext cx="4572000" cy="365760"/>
+            <a:off x="877824" y="4729581"/>
+            <a:ext cx="4572000" cy="347472"/>
           </a:xfrm>
           <a:prstGeom prst="rect">
             <a:avLst/>
@@ -4469,7 +4469,7 @@
               </a:spcAft>
             </a:pPr>
             <a:r>
-              <a:rPr sz="2400" b="1" i="0">
+              <a:rPr sz="2200" b="1" i="0">
                 <a:solidFill>
                   <a:srgbClr val="FFFFFF"/>
                 </a:solidFill>
@@ -4489,7 +4489,7 @@
         </p:nvSpPr>
         <p:spPr>
           <a:xfrm>
-            <a:off x="877824" y="5534253"/>
+            <a:off x="877824" y="5113629"/>
             <a:ext cx="5486400" cy="237744"/>
           </a:xfrm>
           <a:prstGeom prst="rect">
@@ -4515,7 +4515,7 @@
               </a:spcAft>
             </a:pPr>
             <a:r>
-              <a:rPr sz="1300" b="1" i="0">
+              <a:rPr sz="1250" b="1" i="0">
                 <a:solidFill>
                   <a:srgbClr val="96CDB6"/>
                 </a:solidFill>
@@ -4535,8 +4535,8 @@
         </p:nvSpPr>
         <p:spPr>
           <a:xfrm>
-            <a:off x="7418527" y="5131917"/>
-            <a:ext cx="3895344" cy="731520"/>
+            <a:off x="7418527" y="4766157"/>
+            <a:ext cx="3895344" cy="694944"/>
           </a:xfrm>
           <a:prstGeom prst="rect">
             <a:avLst/>
@@ -4551,17 +4551,17 @@
           <a:p>
             <a:pPr algn="r">
               <a:lnSpc>
-                <a:spcPct val="150000"/>
-              </a:lnSpc>
-              <a:spcBef>
-                <a:spcPts val="0"/>
-              </a:spcBef>
-              <a:spcAft>
-                <a:spcPts val="600"/>
-              </a:spcAft>
-            </a:pPr>
-            <a:r>
-              <a:rPr sz="1200" b="0" i="0">
+                <a:spcPct val="146000"/>
+              </a:lnSpc>
+              <a:spcBef>
+                <a:spcPts val="0"/>
+              </a:spcBef>
+              <a:spcAft>
+                <a:spcPts val="600"/>
+              </a:spcAft>
+            </a:pPr>
+            <a:r>
+              <a:rPr sz="1150" b="0" i="0">
                 <a:solidFill>
                   <a:srgbClr val="CDDCF0"/>
                 </a:solidFill>
@@ -4574,17 +4574,17 @@
           <a:p>
             <a:pPr algn="r">
               <a:lnSpc>
-                <a:spcPct val="150000"/>
-              </a:lnSpc>
-              <a:spcBef>
-                <a:spcPts val="0"/>
-              </a:spcBef>
-              <a:spcAft>
-                <a:spcPts val="600"/>
-              </a:spcAft>
-            </a:pPr>
-            <a:r>
-              <a:rPr sz="1100" b="0" i="0">
+                <a:spcPct val="146000"/>
+              </a:lnSpc>
+              <a:spcBef>
+                <a:spcPts val="0"/>
+              </a:spcBef>
+              <a:spcAft>
+                <a:spcPts val="600"/>
+              </a:spcAft>
+            </a:pPr>
+            <a:r>
+              <a:rPr sz="1050" b="0" i="0">
                 <a:solidFill>
                   <a:srgbClr val="A5B9D4"/>
                 </a:solidFill>
@@ -5752,16 +5752,48 @@
         </p:nvSpPr>
         <p:spPr>
           <a:xfrm>
-            <a:off x="566928" y="4974336"/>
-            <a:ext cx="11057839" cy="1243584"/>
+            <a:off x="566928" y="6053328"/>
+            <a:ext cx="11057839" cy="420624"/>
           </a:xfrm>
           <a:prstGeom prst="roundRect">
             <a:avLst>
-              <a:gd name="adj" fmla="val 5294"/>
+              <a:gd name="adj" fmla="val 8695"/>
             </a:avLst>
           </a:prstGeom>
           <a:solidFill>
-            <a:srgbClr val="0E203D"/>
+            <a:srgbClr val="F3F7F5"/>
+          </a:solidFill>
+          <a:ln w="10160">
+            <a:solidFill>
+              <a:srgbClr val="CEDED8"/>
+            </a:solidFill>
+          </a:ln>
+          <a:effectLst/>
+        </p:spPr>
+        <p:txBody>
+          <a:bodyPr rtlCol="0" anchor="ctr"/>
+          <a:lstStyle/>
+          <a:p>
+            <a:pPr algn="ctr"/>
+          </a:p>
+        </p:txBody>
+      </p:sp>
+      <p:sp>
+        <p:nvSpPr>
+          <p:cNvPr id="32" name="Rectangle 31"/>
+          <p:cNvSpPr/>
+          <p:nvPr/>
+        </p:nvSpPr>
+        <p:spPr>
+          <a:xfrm>
+            <a:off x="566928" y="6053328"/>
+            <a:ext cx="41148" cy="420624"/>
+          </a:xfrm>
+          <a:prstGeom prst="rect">
+            <a:avLst/>
+          </a:prstGeom>
+          <a:solidFill>
+            <a:srgbClr val="1E856C"/>
           </a:solidFill>
           <a:ln>
             <a:noFill/>
@@ -5778,14 +5810,14 @@
       </p:sp>
       <p:sp>
         <p:nvSpPr>
-          <p:cNvPr id="32" name="TextBox 31"/>
-          <p:cNvSpPr txBox="1"/>
-          <p:nvPr/>
-        </p:nvSpPr>
-        <p:spPr>
-          <a:xfrm>
-            <a:off x="877824" y="5157216"/>
-            <a:ext cx="3657600" cy="274320"/>
+          <p:cNvPr id="33" name="TextBox 32"/>
+          <p:cNvSpPr txBox="1"/>
+          <p:nvPr/>
+        </p:nvSpPr>
+        <p:spPr>
+          <a:xfrm>
+            <a:off x="786384" y="6172200"/>
+            <a:ext cx="914400" cy="201168"/>
           </a:xfrm>
           <a:prstGeom prst="rect">
             <a:avLst/>
@@ -5810,9 +5842,9 @@
               </a:spcAft>
             </a:pPr>
             <a:r>
-              <a:rPr sz="1200" b="1" i="0">
-                <a:solidFill>
-                  <a:srgbClr val="96CDB6"/>
+              <a:rPr sz="1000" b="1" i="0">
+                <a:solidFill>
+                  <a:srgbClr val="1E6E5C"/>
                 </a:solidFill>
                 <a:latin typeface="Hiragino Sans GB"/>
                 <a:ea typeface="Hiragino Sans GB"/>
@@ -5824,14 +5856,14 @@
       </p:sp>
       <p:sp>
         <p:nvSpPr>
-          <p:cNvPr id="33" name="TextBox 32"/>
-          <p:cNvSpPr txBox="1"/>
-          <p:nvPr/>
-        </p:nvSpPr>
-        <p:spPr>
-          <a:xfrm>
-            <a:off x="877824" y="5449823"/>
-            <a:ext cx="6949440" cy="402336"/>
+          <p:cNvPr id="34" name="TextBox 33"/>
+          <p:cNvSpPr txBox="1"/>
+          <p:nvPr/>
+        </p:nvSpPr>
+        <p:spPr>
+          <a:xfrm>
+            <a:off x="1755648" y="6144768"/>
+            <a:ext cx="4572000" cy="237744"/>
           </a:xfrm>
           <a:prstGeom prst="rect">
             <a:avLst/>
@@ -5856,9 +5888,9 @@
               </a:spcAft>
             </a:pPr>
             <a:r>
-              <a:rPr sz="2200" b="1" i="0">
-                <a:solidFill>
-                  <a:srgbClr val="FFFFFF"/>
+              <a:rPr sz="1300" b="1" i="0">
+                <a:solidFill>
+                  <a:srgbClr val="182621"/>
                 </a:solidFill>
                 <a:latin typeface="Hiragino Sans GB"/>
                 <a:ea typeface="Hiragino Sans GB"/>
@@ -5870,14 +5902,14 @@
       </p:sp>
       <p:sp>
         <p:nvSpPr>
-          <p:cNvPr id="34" name="TextBox 33"/>
-          <p:cNvSpPr txBox="1"/>
-          <p:nvPr/>
-        </p:nvSpPr>
-        <p:spPr>
-          <a:xfrm>
-            <a:off x="877824" y="5852159"/>
-            <a:ext cx="7680960" cy="274320"/>
+          <p:cNvPr id="35" name="TextBox 34"/>
+          <p:cNvSpPr txBox="1"/>
+          <p:nvPr/>
+        </p:nvSpPr>
+        <p:spPr>
+          <a:xfrm>
+            <a:off x="6419088" y="6172200"/>
+            <a:ext cx="5022799" cy="201168"/>
           </a:xfrm>
           <a:prstGeom prst="rect">
             <a:avLst/>
@@ -5902,9 +5934,9 @@
               </a:spcAft>
             </a:pPr>
             <a:r>
-              <a:rPr sz="1250" b="0" i="0">
-                <a:solidFill>
-                  <a:srgbClr val="CDDCF0"/>
+              <a:rPr sz="1050" b="0" i="0">
+                <a:solidFill>
+                  <a:srgbClr val="3A4842"/>
                 </a:solidFill>
                 <a:latin typeface="Hiragino Sans GB"/>
                 <a:ea typeface="Hiragino Sans GB"/>
@@ -5916,46 +5948,14 @@
       </p:sp>
       <p:sp>
         <p:nvSpPr>
-          <p:cNvPr id="35" name="Rounded Rectangle 34"/>
-          <p:cNvSpPr/>
-          <p:nvPr/>
-        </p:nvSpPr>
-        <p:spPr>
-          <a:xfrm>
-            <a:off x="7967167" y="5248655"/>
-            <a:ext cx="3346704" cy="694944"/>
-          </a:xfrm>
-          <a:prstGeom prst="roundRect">
-            <a:avLst>
-              <a:gd name="adj" fmla="val 6315"/>
-            </a:avLst>
-          </a:prstGeom>
-          <a:solidFill>
-            <a:srgbClr val="162E52"/>
-          </a:solidFill>
-          <a:ln>
-            <a:noFill/>
-          </a:ln>
-          <a:effectLst/>
-        </p:spPr>
-        <p:txBody>
-          <a:bodyPr rtlCol="0" anchor="ctr"/>
-          <a:lstStyle/>
-          <a:p>
-            <a:pPr algn="ctr"/>
-          </a:p>
-        </p:txBody>
-      </p:sp>
-      <p:sp>
-        <p:nvSpPr>
           <p:cNvPr id="36" name="TextBox 35"/>
           <p:cNvSpPr txBox="1"/>
           <p:nvPr/>
         </p:nvSpPr>
         <p:spPr>
           <a:xfrm>
-            <a:off x="8113471" y="5394959"/>
-            <a:ext cx="3054096" cy="256032"/>
+            <a:off x="8973007" y="6172200"/>
+            <a:ext cx="2377440" cy="201168"/>
           </a:xfrm>
           <a:prstGeom prst="rect">
             <a:avLst/>
@@ -5980,9 +5980,9 @@
               </a:spcAft>
             </a:pPr>
             <a:r>
-              <a:rPr sz="1300" b="1" i="0">
-                <a:solidFill>
-                  <a:srgbClr val="CDDCF0"/>
+              <a:rPr sz="1050" b="1" i="0">
+                <a:solidFill>
+                  <a:srgbClr val="1E6E5C"/>
                 </a:solidFill>
                 <a:latin typeface="Hiragino Sans GB"/>
                 <a:ea typeface="Hiragino Sans GB"/>
@@ -7228,16 +7228,48 @@
         </p:nvSpPr>
         <p:spPr>
           <a:xfrm>
-            <a:off x="566928" y="5431536"/>
-            <a:ext cx="11057839" cy="676656"/>
+            <a:off x="566928" y="6089904"/>
+            <a:ext cx="11057839" cy="365760"/>
           </a:xfrm>
           <a:prstGeom prst="roundRect">
             <a:avLst>
-              <a:gd name="adj" fmla="val 7567"/>
+              <a:gd name="adj" fmla="val 10000"/>
             </a:avLst>
           </a:prstGeom>
           <a:solidFill>
-            <a:srgbClr val="0E203D"/>
+            <a:srgbClr val="F3F7F5"/>
+          </a:solidFill>
+          <a:ln w="10160">
+            <a:solidFill>
+              <a:srgbClr val="CEDED8"/>
+            </a:solidFill>
+          </a:ln>
+          <a:effectLst/>
+        </p:spPr>
+        <p:txBody>
+          <a:bodyPr rtlCol="0" anchor="ctr"/>
+          <a:lstStyle/>
+          <a:p>
+            <a:pPr algn="ctr"/>
+          </a:p>
+        </p:txBody>
+      </p:sp>
+      <p:sp>
+        <p:nvSpPr>
+          <p:cNvPr id="31" name="Rectangle 30"/>
+          <p:cNvSpPr/>
+          <p:nvPr/>
+        </p:nvSpPr>
+        <p:spPr>
+          <a:xfrm>
+            <a:off x="566928" y="6089904"/>
+            <a:ext cx="41148" cy="365760"/>
+          </a:xfrm>
+          <a:prstGeom prst="rect">
+            <a:avLst/>
+          </a:prstGeom>
+          <a:solidFill>
+            <a:srgbClr val="1E856C"/>
           </a:solidFill>
           <a:ln>
             <a:noFill/>
@@ -7254,44 +7286,14 @@
       </p:sp>
       <p:sp>
         <p:nvSpPr>
-          <p:cNvPr id="31" name="Rectangle 30"/>
-          <p:cNvSpPr/>
-          <p:nvPr/>
-        </p:nvSpPr>
-        <p:spPr>
-          <a:xfrm>
-            <a:off x="566928" y="5431536"/>
-            <a:ext cx="50292" cy="676656"/>
-          </a:xfrm>
-          <a:prstGeom prst="rect">
-            <a:avLst/>
-          </a:prstGeom>
-          <a:solidFill>
-            <a:srgbClr val="96CDB6"/>
-          </a:solidFill>
-          <a:ln>
-            <a:noFill/>
-          </a:ln>
-          <a:effectLst/>
-        </p:spPr>
-        <p:txBody>
-          <a:bodyPr rtlCol="0" anchor="ctr"/>
-          <a:lstStyle/>
-          <a:p>
-            <a:pPr algn="ctr"/>
-          </a:p>
-        </p:txBody>
-      </p:sp>
-      <p:sp>
-        <p:nvSpPr>
           <p:cNvPr id="32" name="TextBox 31"/>
           <p:cNvSpPr txBox="1"/>
           <p:nvPr/>
         </p:nvSpPr>
         <p:spPr>
           <a:xfrm>
-            <a:off x="822960" y="5522976"/>
-            <a:ext cx="1737360" cy="219456"/>
+            <a:off x="768096" y="6185916"/>
+            <a:ext cx="1554480" cy="182880"/>
           </a:xfrm>
           <a:prstGeom prst="rect">
             <a:avLst/>
@@ -7316,14 +7318,14 @@
               </a:spcAft>
             </a:pPr>
             <a:r>
-              <a:rPr sz="1050" b="1" i="0">
-                <a:solidFill>
-                  <a:srgbClr val="96CDB6"/>
-                </a:solidFill>
-                <a:latin typeface="Hiragino Sans GB"/>
-                <a:ea typeface="Hiragino Sans GB"/>
-              </a:rPr>
-              <a:t>定位</a:t>
+              <a:rPr sz="950" b="1" i="0">
+                <a:solidFill>
+                  <a:srgbClr val="1E6E5C"/>
+                </a:solidFill>
+                <a:latin typeface="Hiragino Sans GB"/>
+                <a:ea typeface="Hiragino Sans GB"/>
+              </a:rPr>
+              <a:t>破局点</a:t>
             </a:r>
           </a:p>
         </p:txBody>
@@ -7336,8 +7338,8 @@
         </p:nvSpPr>
         <p:spPr>
           <a:xfrm>
-            <a:off x="822960" y="5742432"/>
-            <a:ext cx="10545775" cy="274320"/>
+            <a:off x="2267712" y="6181344"/>
+            <a:ext cx="9137599" cy="201168"/>
           </a:xfrm>
           <a:prstGeom prst="rect">
             <a:avLst/>
@@ -7362,14 +7364,14 @@
               </a:spcAft>
             </a:pPr>
             <a:r>
-              <a:rPr sz="1300" b="1" i="0">
-                <a:solidFill>
-                  <a:srgbClr val="FFFFFF"/>
-                </a:solidFill>
-                <a:latin typeface="Hiragino Sans GB"/>
-                <a:ea typeface="Hiragino Sans GB"/>
-              </a:rPr>
-              <a:t>每一个功能都要回答同一个问题：它让答案更可信了吗？</a:t>
+              <a:rPr sz="1100" b="1" i="0">
+                <a:solidFill>
+                  <a:srgbClr val="26342E"/>
+                </a:solidFill>
+                <a:latin typeface="Hiragino Sans GB"/>
+                <a:ea typeface="Hiragino Sans GB"/>
+              </a:rPr>
+              <a:t>不是造一个更大的工具，是让「资料 → 题 → 复习」这条线自己转起来。</a:t>
             </a:r>
           </a:p>
         </p:txBody>
@@ -8921,16 +8923,48 @@
         </p:nvSpPr>
         <p:spPr>
           <a:xfrm>
-            <a:off x="566928" y="5431536"/>
-            <a:ext cx="11057839" cy="676656"/>
+            <a:off x="566928" y="6089904"/>
+            <a:ext cx="11057839" cy="365760"/>
           </a:xfrm>
           <a:prstGeom prst="roundRect">
             <a:avLst>
-              <a:gd name="adj" fmla="val 7567"/>
+              <a:gd name="adj" fmla="val 10000"/>
             </a:avLst>
           </a:prstGeom>
           <a:solidFill>
-            <a:srgbClr val="0E203D"/>
+            <a:srgbClr val="F3F7F5"/>
+          </a:solidFill>
+          <a:ln w="10160">
+            <a:solidFill>
+              <a:srgbClr val="CEDED8"/>
+            </a:solidFill>
+          </a:ln>
+          <a:effectLst/>
+        </p:spPr>
+        <p:txBody>
+          <a:bodyPr rtlCol="0" anchor="ctr"/>
+          <a:lstStyle/>
+          <a:p>
+            <a:pPr algn="ctr"/>
+          </a:p>
+        </p:txBody>
+      </p:sp>
+      <p:sp>
+        <p:nvSpPr>
+          <p:cNvPr id="37" name="Rectangle 36"/>
+          <p:cNvSpPr/>
+          <p:nvPr/>
+        </p:nvSpPr>
+        <p:spPr>
+          <a:xfrm>
+            <a:off x="566928" y="6089904"/>
+            <a:ext cx="41148" cy="365760"/>
+          </a:xfrm>
+          <a:prstGeom prst="rect">
+            <a:avLst/>
+          </a:prstGeom>
+          <a:solidFill>
+            <a:srgbClr val="1E856C"/>
           </a:solidFill>
           <a:ln>
             <a:noFill/>
@@ -8947,44 +8981,14 @@
       </p:sp>
       <p:sp>
         <p:nvSpPr>
-          <p:cNvPr id="37" name="Rectangle 36"/>
-          <p:cNvSpPr/>
-          <p:nvPr/>
-        </p:nvSpPr>
-        <p:spPr>
-          <a:xfrm>
-            <a:off x="566928" y="5431536"/>
-            <a:ext cx="50292" cy="676656"/>
-          </a:xfrm>
-          <a:prstGeom prst="rect">
-            <a:avLst/>
-          </a:prstGeom>
-          <a:solidFill>
-            <a:srgbClr val="96CDB6"/>
-          </a:solidFill>
-          <a:ln>
-            <a:noFill/>
-          </a:ln>
-          <a:effectLst/>
-        </p:spPr>
-        <p:txBody>
-          <a:bodyPr rtlCol="0" anchor="ctr"/>
-          <a:lstStyle/>
-          <a:p>
-            <a:pPr algn="ctr"/>
-          </a:p>
-        </p:txBody>
-      </p:sp>
-      <p:sp>
-        <p:nvSpPr>
           <p:cNvPr id="38" name="TextBox 37"/>
           <p:cNvSpPr txBox="1"/>
           <p:nvPr/>
         </p:nvSpPr>
         <p:spPr>
           <a:xfrm>
-            <a:off x="822960" y="5522976"/>
-            <a:ext cx="1737360" cy="219456"/>
+            <a:off x="768096" y="6185916"/>
+            <a:ext cx="1554480" cy="182880"/>
           </a:xfrm>
           <a:prstGeom prst="rect">
             <a:avLst/>
@@ -9009,9 +9013,9 @@
               </a:spcAft>
             </a:pPr>
             <a:r>
-              <a:rPr sz="1050" b="1" i="0">
-                <a:solidFill>
-                  <a:srgbClr val="96CDB6"/>
+              <a:rPr sz="950" b="1" i="0">
+                <a:solidFill>
+                  <a:srgbClr val="1E6E5C"/>
                 </a:solidFill>
                 <a:latin typeface="Hiragino Sans GB"/>
                 <a:ea typeface="Hiragino Sans GB"/>
@@ -9029,8 +9033,8 @@
         </p:nvSpPr>
         <p:spPr>
           <a:xfrm>
-            <a:off x="822960" y="5742432"/>
-            <a:ext cx="10545775" cy="274320"/>
+            <a:off x="2267712" y="6181344"/>
+            <a:ext cx="9137599" cy="201168"/>
           </a:xfrm>
           <a:prstGeom prst="rect">
             <a:avLst/>
@@ -9055,9 +9059,9 @@
               </a:spcAft>
             </a:pPr>
             <a:r>
-              <a:rPr sz="1300" b="1" i="0">
-                <a:solidFill>
-                  <a:srgbClr val="FFFFFF"/>
+              <a:rPr sz="1100" b="1" i="0">
+                <a:solidFill>
+                  <a:srgbClr val="26342E"/>
                 </a:solidFill>
                 <a:latin typeface="Hiragino Sans GB"/>
                 <a:ea typeface="Hiragino Sans GB"/>
@@ -11619,16 +11623,48 @@
         </p:nvSpPr>
         <p:spPr>
           <a:xfrm>
-            <a:off x="566928" y="5431536"/>
-            <a:ext cx="11057839" cy="676656"/>
+            <a:off x="566928" y="6089904"/>
+            <a:ext cx="11057839" cy="365760"/>
           </a:xfrm>
           <a:prstGeom prst="roundRect">
             <a:avLst>
-              <a:gd name="adj" fmla="val 7567"/>
+              <a:gd name="adj" fmla="val 10000"/>
             </a:avLst>
           </a:prstGeom>
           <a:solidFill>
-            <a:srgbClr val="0E203D"/>
+            <a:srgbClr val="F3F7F5"/>
+          </a:solidFill>
+          <a:ln w="10160">
+            <a:solidFill>
+              <a:srgbClr val="CEDED8"/>
+            </a:solidFill>
+          </a:ln>
+          <a:effectLst/>
+        </p:spPr>
+        <p:txBody>
+          <a:bodyPr rtlCol="0" anchor="ctr"/>
+          <a:lstStyle/>
+          <a:p>
+            <a:pPr algn="ctr"/>
+          </a:p>
+        </p:txBody>
+      </p:sp>
+      <p:sp>
+        <p:nvSpPr>
+          <p:cNvPr id="64" name="Rectangle 63"/>
+          <p:cNvSpPr/>
+          <p:nvPr/>
+        </p:nvSpPr>
+        <p:spPr>
+          <a:xfrm>
+            <a:off x="566928" y="6089904"/>
+            <a:ext cx="41148" cy="365760"/>
+          </a:xfrm>
+          <a:prstGeom prst="rect">
+            <a:avLst/>
+          </a:prstGeom>
+          <a:solidFill>
+            <a:srgbClr val="1E856C"/>
           </a:solidFill>
           <a:ln>
             <a:noFill/>
@@ -11645,44 +11681,14 @@
       </p:sp>
       <p:sp>
         <p:nvSpPr>
-          <p:cNvPr id="64" name="Rectangle 63"/>
-          <p:cNvSpPr/>
-          <p:nvPr/>
-        </p:nvSpPr>
-        <p:spPr>
-          <a:xfrm>
-            <a:off x="566928" y="5431536"/>
-            <a:ext cx="50292" cy="676656"/>
-          </a:xfrm>
-          <a:prstGeom prst="rect">
-            <a:avLst/>
-          </a:prstGeom>
-          <a:solidFill>
-            <a:srgbClr val="96CDB6"/>
-          </a:solidFill>
-          <a:ln>
-            <a:noFill/>
-          </a:ln>
-          <a:effectLst/>
-        </p:spPr>
-        <p:txBody>
-          <a:bodyPr rtlCol="0" anchor="ctr"/>
-          <a:lstStyle/>
-          <a:p>
-            <a:pPr algn="ctr"/>
-          </a:p>
-        </p:txBody>
-      </p:sp>
-      <p:sp>
-        <p:nvSpPr>
           <p:cNvPr id="65" name="TextBox 64"/>
           <p:cNvSpPr txBox="1"/>
           <p:nvPr/>
         </p:nvSpPr>
         <p:spPr>
           <a:xfrm>
-            <a:off x="822960" y="5522976"/>
-            <a:ext cx="1737360" cy="219456"/>
+            <a:off x="768096" y="6185916"/>
+            <a:ext cx="1554480" cy="182880"/>
           </a:xfrm>
           <a:prstGeom prst="rect">
             <a:avLst/>
@@ -11707,14 +11713,14 @@
               </a:spcAft>
             </a:pPr>
             <a:r>
-              <a:rPr sz="1050" b="1" i="0">
-                <a:solidFill>
-                  <a:srgbClr val="96CDB6"/>
-                </a:solidFill>
-                <a:latin typeface="Hiragino Sans GB"/>
-                <a:ea typeface="Hiragino Sans GB"/>
-              </a:rPr>
-              <a:t>定位</a:t>
+              <a:rPr sz="950" b="1" i="0">
+                <a:solidFill>
+                  <a:srgbClr val="1E6E5C"/>
+                </a:solidFill>
+                <a:latin typeface="Hiragino Sans GB"/>
+                <a:ea typeface="Hiragino Sans GB"/>
+              </a:rPr>
+              <a:t>流程</a:t>
             </a:r>
           </a:p>
         </p:txBody>
@@ -11727,8 +11733,8 @@
         </p:nvSpPr>
         <p:spPr>
           <a:xfrm>
-            <a:off x="822960" y="5742432"/>
-            <a:ext cx="10545775" cy="274320"/>
+            <a:off x="2267712" y="6181344"/>
+            <a:ext cx="9137599" cy="201168"/>
           </a:xfrm>
           <a:prstGeom prst="rect">
             <a:avLst/>
@@ -11753,14 +11759,14 @@
               </a:spcAft>
             </a:pPr>
             <a:r>
-              <a:rPr sz="1300" b="1" i="0">
-                <a:solidFill>
-                  <a:srgbClr val="FFFFFF"/>
-                </a:solidFill>
-                <a:latin typeface="Hiragino Sans GB"/>
-                <a:ea typeface="Hiragino Sans GB"/>
-              </a:rPr>
-              <a:t>每一个功能都要回答同一个问题：它让答案更可信了吗？</a:t>
+              <a:rPr sz="1100" b="1" i="0">
+                <a:solidFill>
+                  <a:srgbClr val="26342E"/>
+                </a:solidFill>
+                <a:latin typeface="Hiragino Sans GB"/>
+                <a:ea typeface="Hiragino Sans GB"/>
+              </a:rPr>
+              <a:t>用户只管传资料和做题，排期、难度、复习都自动接上。</a:t>
             </a:r>
           </a:p>
         </p:txBody>
@@ -13564,16 +13570,48 @@
         </p:nvSpPr>
         <p:spPr>
           <a:xfrm>
-            <a:off x="566928" y="5431536"/>
-            <a:ext cx="11057839" cy="676656"/>
+            <a:off x="566928" y="6089904"/>
+            <a:ext cx="11057839" cy="365760"/>
           </a:xfrm>
           <a:prstGeom prst="roundRect">
             <a:avLst>
-              <a:gd name="adj" fmla="val 7567"/>
+              <a:gd name="adj" fmla="val 10000"/>
             </a:avLst>
           </a:prstGeom>
           <a:solidFill>
-            <a:srgbClr val="0E203D"/>
+            <a:srgbClr val="F3F7F5"/>
+          </a:solidFill>
+          <a:ln w="10160">
+            <a:solidFill>
+              <a:srgbClr val="CEDED8"/>
+            </a:solidFill>
+          </a:ln>
+          <a:effectLst/>
+        </p:spPr>
+        <p:txBody>
+          <a:bodyPr rtlCol="0" anchor="ctr"/>
+          <a:lstStyle/>
+          <a:p>
+            <a:pPr algn="ctr"/>
+          </a:p>
+        </p:txBody>
+      </p:sp>
+      <p:sp>
+        <p:nvSpPr>
+          <p:cNvPr id="46" name="Rectangle 45"/>
+          <p:cNvSpPr/>
+          <p:nvPr/>
+        </p:nvSpPr>
+        <p:spPr>
+          <a:xfrm>
+            <a:off x="566928" y="6089904"/>
+            <a:ext cx="41148" cy="365760"/>
+          </a:xfrm>
+          <a:prstGeom prst="rect">
+            <a:avLst/>
+          </a:prstGeom>
+          <a:solidFill>
+            <a:srgbClr val="1E856C"/>
           </a:solidFill>
           <a:ln>
             <a:noFill/>
@@ -13590,44 +13628,14 @@
       </p:sp>
       <p:sp>
         <p:nvSpPr>
-          <p:cNvPr id="46" name="Rectangle 45"/>
-          <p:cNvSpPr/>
-          <p:nvPr/>
-        </p:nvSpPr>
-        <p:spPr>
-          <a:xfrm>
-            <a:off x="566928" y="5431536"/>
-            <a:ext cx="50292" cy="676656"/>
-          </a:xfrm>
-          <a:prstGeom prst="rect">
-            <a:avLst/>
-          </a:prstGeom>
-          <a:solidFill>
-            <a:srgbClr val="96CDB6"/>
-          </a:solidFill>
-          <a:ln>
-            <a:noFill/>
-          </a:ln>
-          <a:effectLst/>
-        </p:spPr>
-        <p:txBody>
-          <a:bodyPr rtlCol="0" anchor="ctr"/>
-          <a:lstStyle/>
-          <a:p>
-            <a:pPr algn="ctr"/>
-          </a:p>
-        </p:txBody>
-      </p:sp>
-      <p:sp>
-        <p:nvSpPr>
           <p:cNvPr id="47" name="TextBox 46"/>
           <p:cNvSpPr txBox="1"/>
           <p:nvPr/>
         </p:nvSpPr>
         <p:spPr>
           <a:xfrm>
-            <a:off x="822960" y="5522976"/>
-            <a:ext cx="1737360" cy="219456"/>
+            <a:off x="768096" y="6185916"/>
+            <a:ext cx="1554480" cy="182880"/>
           </a:xfrm>
           <a:prstGeom prst="rect">
             <a:avLst/>
@@ -13652,14 +13660,14 @@
               </a:spcAft>
             </a:pPr>
             <a:r>
-              <a:rPr sz="1050" b="1" i="0">
-                <a:solidFill>
-                  <a:srgbClr val="96CDB6"/>
-                </a:solidFill>
-                <a:latin typeface="Hiragino Sans GB"/>
-                <a:ea typeface="Hiragino Sans GB"/>
-              </a:rPr>
-              <a:t>定位</a:t>
+              <a:rPr sz="950" b="1" i="0">
+                <a:solidFill>
+                  <a:srgbClr val="1E6E5C"/>
+                </a:solidFill>
+                <a:latin typeface="Hiragino Sans GB"/>
+                <a:ea typeface="Hiragino Sans GB"/>
+              </a:rPr>
+              <a:t>亮点 ①</a:t>
             </a:r>
           </a:p>
         </p:txBody>
@@ -13672,8 +13680,8 @@
         </p:nvSpPr>
         <p:spPr>
           <a:xfrm>
-            <a:off x="822960" y="5742432"/>
-            <a:ext cx="10545775" cy="274320"/>
+            <a:off x="2267712" y="6181344"/>
+            <a:ext cx="9137599" cy="201168"/>
           </a:xfrm>
           <a:prstGeom prst="rect">
             <a:avLst/>
@@ -13698,14 +13706,14 @@
               </a:spcAft>
             </a:pPr>
             <a:r>
-              <a:rPr sz="1300" b="1" i="0">
-                <a:solidFill>
-                  <a:srgbClr val="FFFFFF"/>
-                </a:solidFill>
-                <a:latin typeface="Hiragino Sans GB"/>
-                <a:ea typeface="Hiragino Sans GB"/>
-              </a:rPr>
-              <a:t>每一个功能都要回答同一个问题：它让答案更可信了吗？</a:t>
+              <a:rPr sz="1100" b="1" i="0">
+                <a:solidFill>
+                  <a:srgbClr val="26342E"/>
+                </a:solidFill>
+                <a:latin typeface="Hiragino Sans GB"/>
+                <a:ea typeface="Hiragino Sans GB"/>
+              </a:rPr>
+              <a:t>四路召回 + 逐页切块 + 引用跳转 —— 这是纯对话模型做不到的。</a:t>
             </a:r>
           </a:p>
         </p:txBody>
@@ -15870,16 +15878,48 @@
         </p:nvSpPr>
         <p:spPr>
           <a:xfrm>
-            <a:off x="566928" y="5431536"/>
-            <a:ext cx="11057839" cy="676656"/>
+            <a:off x="566928" y="6089904"/>
+            <a:ext cx="11057839" cy="365760"/>
           </a:xfrm>
           <a:prstGeom prst="roundRect">
             <a:avLst>
-              <a:gd name="adj" fmla="val 7567"/>
+              <a:gd name="adj" fmla="val 10000"/>
             </a:avLst>
           </a:prstGeom>
           <a:solidFill>
-            <a:srgbClr val="0E203D"/>
+            <a:srgbClr val="F3F7F5"/>
+          </a:solidFill>
+          <a:ln w="10160">
+            <a:solidFill>
+              <a:srgbClr val="CEDED8"/>
+            </a:solidFill>
+          </a:ln>
+          <a:effectLst/>
+        </p:spPr>
+        <p:txBody>
+          <a:bodyPr rtlCol="0" anchor="ctr"/>
+          <a:lstStyle/>
+          <a:p>
+            <a:pPr algn="ctr"/>
+          </a:p>
+        </p:txBody>
+      </p:sp>
+      <p:sp>
+        <p:nvSpPr>
+          <p:cNvPr id="52" name="Rectangle 51"/>
+          <p:cNvSpPr/>
+          <p:nvPr/>
+        </p:nvSpPr>
+        <p:spPr>
+          <a:xfrm>
+            <a:off x="566928" y="6089904"/>
+            <a:ext cx="41148" cy="365760"/>
+          </a:xfrm>
+          <a:prstGeom prst="rect">
+            <a:avLst/>
+          </a:prstGeom>
+          <a:solidFill>
+            <a:srgbClr val="1E856C"/>
           </a:solidFill>
           <a:ln>
             <a:noFill/>
@@ -15896,44 +15936,14 @@
       </p:sp>
       <p:sp>
         <p:nvSpPr>
-          <p:cNvPr id="52" name="Rectangle 51"/>
-          <p:cNvSpPr/>
-          <p:nvPr/>
-        </p:nvSpPr>
-        <p:spPr>
-          <a:xfrm>
-            <a:off x="566928" y="5431536"/>
-            <a:ext cx="50292" cy="676656"/>
-          </a:xfrm>
-          <a:prstGeom prst="rect">
-            <a:avLst/>
-          </a:prstGeom>
-          <a:solidFill>
-            <a:srgbClr val="96CDB6"/>
-          </a:solidFill>
-          <a:ln>
-            <a:noFill/>
-          </a:ln>
-          <a:effectLst/>
-        </p:spPr>
-        <p:txBody>
-          <a:bodyPr rtlCol="0" anchor="ctr"/>
-          <a:lstStyle/>
-          <a:p>
-            <a:pPr algn="ctr"/>
-          </a:p>
-        </p:txBody>
-      </p:sp>
-      <p:sp>
-        <p:nvSpPr>
           <p:cNvPr id="53" name="TextBox 52"/>
           <p:cNvSpPr txBox="1"/>
           <p:nvPr/>
         </p:nvSpPr>
         <p:spPr>
           <a:xfrm>
-            <a:off x="822960" y="5522976"/>
-            <a:ext cx="1737360" cy="219456"/>
+            <a:off x="768096" y="6185916"/>
+            <a:ext cx="1554480" cy="182880"/>
           </a:xfrm>
           <a:prstGeom prst="rect">
             <a:avLst/>
@@ -15958,14 +15968,14 @@
               </a:spcAft>
             </a:pPr>
             <a:r>
-              <a:rPr sz="1050" b="1" i="0">
-                <a:solidFill>
-                  <a:srgbClr val="96CDB6"/>
-                </a:solidFill>
-                <a:latin typeface="Hiragino Sans GB"/>
-                <a:ea typeface="Hiragino Sans GB"/>
-              </a:rPr>
-              <a:t>定位</a:t>
+              <a:rPr sz="950" b="1" i="0">
+                <a:solidFill>
+                  <a:srgbClr val="1E6E5C"/>
+                </a:solidFill>
+                <a:latin typeface="Hiragino Sans GB"/>
+                <a:ea typeface="Hiragino Sans GB"/>
+              </a:rPr>
+              <a:t>亮点 ②</a:t>
             </a:r>
           </a:p>
         </p:txBody>
@@ -15978,8 +15988,8 @@
         </p:nvSpPr>
         <p:spPr>
           <a:xfrm>
-            <a:off x="822960" y="5742432"/>
-            <a:ext cx="10545775" cy="274320"/>
+            <a:off x="2267712" y="6181344"/>
+            <a:ext cx="9137599" cy="201168"/>
           </a:xfrm>
           <a:prstGeom prst="rect">
             <a:avLst/>
@@ -16004,14 +16014,14 @@
               </a:spcAft>
             </a:pPr>
             <a:r>
-              <a:rPr sz="1300" b="1" i="0">
-                <a:solidFill>
-                  <a:srgbClr val="FFFFFF"/>
-                </a:solidFill>
-                <a:latin typeface="Hiragino Sans GB"/>
-                <a:ea typeface="Hiragino Sans GB"/>
-              </a:rPr>
-              <a:t>每一个功能都要回答同一个问题：它让答案更可信了吗？</a:t>
+              <a:rPr sz="1100" b="1" i="0">
+                <a:solidFill>
+                  <a:srgbClr val="26342E"/>
+                </a:solidFill>
+                <a:latin typeface="Hiragino Sans GB"/>
+                <a:ea typeface="Hiragino Sans GB"/>
+              </a:rPr>
+              <a:t>写在提示词里模型可以忘，写在 interrupt() 里它跑不掉。</a:t>
             </a:r>
           </a:p>
         </p:txBody>
@@ -18252,16 +18262,48 @@
         </p:nvSpPr>
         <p:spPr>
           <a:xfrm>
-            <a:off x="566928" y="5431536"/>
-            <a:ext cx="11057839" cy="676656"/>
+            <a:off x="566928" y="6089904"/>
+            <a:ext cx="11057839" cy="365760"/>
           </a:xfrm>
           <a:prstGeom prst="roundRect">
             <a:avLst>
-              <a:gd name="adj" fmla="val 7567"/>
+              <a:gd name="adj" fmla="val 10000"/>
             </a:avLst>
           </a:prstGeom>
           <a:solidFill>
-            <a:srgbClr val="0E203D"/>
+            <a:srgbClr val="F3F7F5"/>
+          </a:solidFill>
+          <a:ln w="10160">
+            <a:solidFill>
+              <a:srgbClr val="CEDED8"/>
+            </a:solidFill>
+          </a:ln>
+          <a:effectLst/>
+        </p:spPr>
+        <p:txBody>
+          <a:bodyPr rtlCol="0" anchor="ctr"/>
+          <a:lstStyle/>
+          <a:p>
+            <a:pPr algn="ctr"/>
+          </a:p>
+        </p:txBody>
+      </p:sp>
+      <p:sp>
+        <p:nvSpPr>
+          <p:cNvPr id="56" name="Rectangle 55"/>
+          <p:cNvSpPr/>
+          <p:nvPr/>
+        </p:nvSpPr>
+        <p:spPr>
+          <a:xfrm>
+            <a:off x="566928" y="6089904"/>
+            <a:ext cx="41148" cy="365760"/>
+          </a:xfrm>
+          <a:prstGeom prst="rect">
+            <a:avLst/>
+          </a:prstGeom>
+          <a:solidFill>
+            <a:srgbClr val="1E856C"/>
           </a:solidFill>
           <a:ln>
             <a:noFill/>
@@ -18278,44 +18320,14 @@
       </p:sp>
       <p:sp>
         <p:nvSpPr>
-          <p:cNvPr id="56" name="Rectangle 55"/>
-          <p:cNvSpPr/>
-          <p:nvPr/>
-        </p:nvSpPr>
-        <p:spPr>
-          <a:xfrm>
-            <a:off x="566928" y="5431536"/>
-            <a:ext cx="50292" cy="676656"/>
-          </a:xfrm>
-          <a:prstGeom prst="rect">
-            <a:avLst/>
-          </a:prstGeom>
-          <a:solidFill>
-            <a:srgbClr val="96CDB6"/>
-          </a:solidFill>
-          <a:ln>
-            <a:noFill/>
-          </a:ln>
-          <a:effectLst/>
-        </p:spPr>
-        <p:txBody>
-          <a:bodyPr rtlCol="0" anchor="ctr"/>
-          <a:lstStyle/>
-          <a:p>
-            <a:pPr algn="ctr"/>
-          </a:p>
-        </p:txBody>
-      </p:sp>
-      <p:sp>
-        <p:nvSpPr>
           <p:cNvPr id="57" name="TextBox 56"/>
           <p:cNvSpPr txBox="1"/>
           <p:nvPr/>
         </p:nvSpPr>
         <p:spPr>
           <a:xfrm>
-            <a:off x="822960" y="5522976"/>
-            <a:ext cx="1737360" cy="219456"/>
+            <a:off x="768096" y="6185916"/>
+            <a:ext cx="1554480" cy="182880"/>
           </a:xfrm>
           <a:prstGeom prst="rect">
             <a:avLst/>
@@ -18340,14 +18352,14 @@
               </a:spcAft>
             </a:pPr>
             <a:r>
-              <a:rPr sz="1050" b="1" i="0">
-                <a:solidFill>
-                  <a:srgbClr val="96CDB6"/>
-                </a:solidFill>
-                <a:latin typeface="Hiragino Sans GB"/>
-                <a:ea typeface="Hiragino Sans GB"/>
-              </a:rPr>
-              <a:t>定位</a:t>
+              <a:rPr sz="950" b="1" i="0">
+                <a:solidFill>
+                  <a:srgbClr val="1E6E5C"/>
+                </a:solidFill>
+                <a:latin typeface="Hiragino Sans GB"/>
+                <a:ea typeface="Hiragino Sans GB"/>
+              </a:rPr>
+              <a:t>工程</a:t>
             </a:r>
           </a:p>
         </p:txBody>
@@ -18360,8 +18372,8 @@
         </p:nvSpPr>
         <p:spPr>
           <a:xfrm>
-            <a:off x="822960" y="5742432"/>
-            <a:ext cx="10545775" cy="274320"/>
+            <a:off x="2267712" y="6181344"/>
+            <a:ext cx="9137599" cy="201168"/>
           </a:xfrm>
           <a:prstGeom prst="rect">
             <a:avLst/>
@@ -18386,14 +18398,14 @@
               </a:spcAft>
             </a:pPr>
             <a:r>
-              <a:rPr sz="1300" b="1" i="0">
-                <a:solidFill>
-                  <a:srgbClr val="FFFFFF"/>
-                </a:solidFill>
-                <a:latin typeface="Hiragino Sans GB"/>
-                <a:ea typeface="Hiragino Sans GB"/>
-              </a:rPr>
-              <a:t>每一个功能都要回答同一个问题：它让答案更可信了吗？</a:t>
+              <a:rPr sz="1100" b="1" i="0">
+                <a:solidFill>
+                  <a:srgbClr val="26342E"/>
+                </a:solidFill>
+                <a:latin typeface="Hiragino Sans GB"/>
+                <a:ea typeface="Hiragino Sans GB"/>
+              </a:rPr>
+              <a:t>domain 层全是纯函数，回归测试跑一次十几秒，零 API 消耗。</a:t>
             </a:r>
           </a:p>
         </p:txBody>
@@ -19682,16 +19694,48 @@
         </p:nvSpPr>
         <p:spPr>
           <a:xfrm>
-            <a:off x="566928" y="5431536"/>
-            <a:ext cx="11057839" cy="676656"/>
+            <a:off x="566928" y="6089904"/>
+            <a:ext cx="11057839" cy="365760"/>
           </a:xfrm>
           <a:prstGeom prst="roundRect">
             <a:avLst>
-              <a:gd name="adj" fmla="val 7567"/>
+              <a:gd name="adj" fmla="val 10000"/>
             </a:avLst>
           </a:prstGeom>
           <a:solidFill>
-            <a:srgbClr val="0E203D"/>
+            <a:srgbClr val="F3F7F5"/>
+          </a:solidFill>
+          <a:ln w="10160">
+            <a:solidFill>
+              <a:srgbClr val="CEDED8"/>
+            </a:solidFill>
+          </a:ln>
+          <a:effectLst/>
+        </p:spPr>
+        <p:txBody>
+          <a:bodyPr rtlCol="0" anchor="ctr"/>
+          <a:lstStyle/>
+          <a:p>
+            <a:pPr algn="ctr"/>
+          </a:p>
+        </p:txBody>
+      </p:sp>
+      <p:sp>
+        <p:nvSpPr>
+          <p:cNvPr id="31" name="Rectangle 30"/>
+          <p:cNvSpPr/>
+          <p:nvPr/>
+        </p:nvSpPr>
+        <p:spPr>
+          <a:xfrm>
+            <a:off x="566928" y="6089904"/>
+            <a:ext cx="41148" cy="365760"/>
+          </a:xfrm>
+          <a:prstGeom prst="rect">
+            <a:avLst/>
+          </a:prstGeom>
+          <a:solidFill>
+            <a:srgbClr val="1E856C"/>
           </a:solidFill>
           <a:ln>
             <a:noFill/>
@@ -19708,44 +19752,14 @@
       </p:sp>
       <p:sp>
         <p:nvSpPr>
-          <p:cNvPr id="31" name="Rectangle 30"/>
-          <p:cNvSpPr/>
-          <p:nvPr/>
-        </p:nvSpPr>
-        <p:spPr>
-          <a:xfrm>
-            <a:off x="566928" y="5431536"/>
-            <a:ext cx="50292" cy="676656"/>
-          </a:xfrm>
-          <a:prstGeom prst="rect">
-            <a:avLst/>
-          </a:prstGeom>
-          <a:solidFill>
-            <a:srgbClr val="96CDB6"/>
-          </a:solidFill>
-          <a:ln>
-            <a:noFill/>
-          </a:ln>
-          <a:effectLst/>
-        </p:spPr>
-        <p:txBody>
-          <a:bodyPr rtlCol="0" anchor="ctr"/>
-          <a:lstStyle/>
-          <a:p>
-            <a:pPr algn="ctr"/>
-          </a:p>
-        </p:txBody>
-      </p:sp>
-      <p:sp>
-        <p:nvSpPr>
           <p:cNvPr id="32" name="TextBox 31"/>
           <p:cNvSpPr txBox="1"/>
           <p:nvPr/>
         </p:nvSpPr>
         <p:spPr>
           <a:xfrm>
-            <a:off x="822960" y="5522976"/>
-            <a:ext cx="1737360" cy="219456"/>
+            <a:off x="768096" y="6185916"/>
+            <a:ext cx="1554480" cy="182880"/>
           </a:xfrm>
           <a:prstGeom prst="rect">
             <a:avLst/>
@@ -19770,14 +19784,14 @@
               </a:spcAft>
             </a:pPr>
             <a:r>
-              <a:rPr sz="1050" b="1" i="0">
-                <a:solidFill>
-                  <a:srgbClr val="96CDB6"/>
-                </a:solidFill>
-                <a:latin typeface="Hiragino Sans GB"/>
-                <a:ea typeface="Hiragino Sans GB"/>
-              </a:rPr>
-              <a:t>定位</a:t>
+              <a:rPr sz="950" b="1" i="0">
+                <a:solidFill>
+                  <a:srgbClr val="1E6E5C"/>
+                </a:solidFill>
+                <a:latin typeface="Hiragino Sans GB"/>
+                <a:ea typeface="Hiragino Sans GB"/>
+              </a:rPr>
+              <a:t>边界</a:t>
             </a:r>
           </a:p>
         </p:txBody>
@@ -19790,8 +19804,8 @@
         </p:nvSpPr>
         <p:spPr>
           <a:xfrm>
-            <a:off x="822960" y="5742432"/>
-            <a:ext cx="10545775" cy="274320"/>
+            <a:off x="2267712" y="6181344"/>
+            <a:ext cx="9137599" cy="201168"/>
           </a:xfrm>
           <a:prstGeom prst="rect">
             <a:avLst/>
@@ -19816,14 +19830,14 @@
               </a:spcAft>
             </a:pPr>
             <a:r>
-              <a:rPr sz="1300" b="1" i="0">
-                <a:solidFill>
-                  <a:srgbClr val="FFFFFF"/>
-                </a:solidFill>
-                <a:latin typeface="Hiragino Sans GB"/>
-                <a:ea typeface="Hiragino Sans GB"/>
-              </a:rPr>
-              <a:t>每一个功能都要回答同一个问题：它让答案更可信了吗？</a:t>
+              <a:rPr sz="1100" b="1" i="0">
+                <a:solidFill>
+                  <a:srgbClr val="26342E"/>
+                </a:solidFill>
+                <a:latin typeface="Hiragino Sans GB"/>
+                <a:ea typeface="Hiragino Sans GB"/>
+              </a:rPr>
+              <a:t>六项能力每一项都有代码依据 —— 说清楚比多做一点更有用。</a:t>
             </a:r>
           </a:p>
         </p:txBody>

--- a/docs/作品集/参赛/知迹答辩/知迹答辩.pptx
+++ b/docs/作品集/参赛/知迹答辩/知迹答辩.pptx
@@ -9360,7 +9360,7 @@
                 <a:latin typeface="Hiragino Sans GB"/>
                 <a:ea typeface="Hiragino Sans GB"/>
               </a:rPr>
-              <a:t>硬核亮点 ① · 治幻觉</a:t>
+              <a:t>硬核亮点 ① · 答得准</a:t>
             </a:r>
           </a:p>
         </p:txBody>
@@ -11720,7 +11720,7 @@
                 <a:latin typeface="Hiragino Sans GB"/>
                 <a:ea typeface="Hiragino Sans GB"/>
               </a:rPr>
-              <a:t>流程</a:t>
+              <a:t>亮点 ① · 答得准</a:t>
             </a:r>
           </a:p>
         </p:txBody>
@@ -11766,7 +11766,7 @@
                 <a:latin typeface="Hiragino Sans GB"/>
                 <a:ea typeface="Hiragino Sans GB"/>
               </a:rPr>
-              <a:t>用户只管传资料和做题，排期、难度、复习都自动接上。</a:t>
+              <a:t>找得到、说得清出处 —— 但模型接下来要动手，这还只是回答问题。</a:t>
             </a:r>
           </a:p>
         </p:txBody>
@@ -12060,7 +12060,7 @@
                 <a:latin typeface="Hiragino Sans GB"/>
                 <a:ea typeface="Hiragino Sans GB"/>
               </a:rPr>
-              <a:t>硬核亮点 ② · 真 Agent 架构</a:t>
+              <a:t>硬核亮点 ② · 管得住</a:t>
             </a:r>
           </a:p>
         </p:txBody>
@@ -12106,7 +12106,7 @@
                 <a:latin typeface="Hiragino Sans GB"/>
                 <a:ea typeface="Hiragino Sans GB"/>
               </a:rPr>
-              <a:t>它是个 Agent，不是套壳：一次提问要走完四节点，写库之前必须等你点头</a:t>
+              <a:t>答得准只是第一步：它要动手时，权限和写库都得由系统说了算</a:t>
             </a:r>
           </a:p>
         </p:txBody>
@@ -13667,7 +13667,7 @@
                 <a:latin typeface="Hiragino Sans GB"/>
                 <a:ea typeface="Hiragino Sans GB"/>
               </a:rPr>
-              <a:t>亮点 ①</a:t>
+              <a:t>亮点 ② · 管得住</a:t>
             </a:r>
           </a:p>
         </p:txBody>
@@ -13713,7 +13713,7 @@
                 <a:latin typeface="Hiragino Sans GB"/>
                 <a:ea typeface="Hiragino Sans GB"/>
               </a:rPr>
-              <a:t>四路召回 + 逐页切块 + 引用跳转 —— 这是纯对话模型做不到的。</a:t>
+              <a:t>答得准 + 管得住 = 敢信 —— 接下来要证明的是：它今天没比昨天变笨。</a:t>
             </a:r>
           </a:p>
         </p:txBody>

--- a/docs/作品集/参赛/知迹答辩/知迹答辩.pptx
+++ b/docs/作品集/参赛/知迹答辩/知迹答辩.pptx
@@ -3530,7 +3530,7 @@
                 <a:latin typeface="Hiragino Sans GB"/>
                 <a:ea typeface="Hiragino Sans GB"/>
               </a:rPr>
-              <a:t>资料进去，题出来，复习排好 —— </a:t>
+              <a:t>资料进去，题出来，复习排好。</a:t>
             </a:r>
             <a:r>
               <a:rPr sz="1500" b="1" i="0">
@@ -4799,7 +4799,7 @@
                 <a:latin typeface="Hiragino Sans GB"/>
                 <a:ea typeface="Hiragino Sans GB"/>
               </a:rPr>
-              <a:t>资料存了一百份，AI 答得行云流水，翻开书才发现它连定理条件都记错了</a:t>
+              <a:t>它答得很顺，我一翻书，它连定理条件都记错了</a:t>
             </a:r>
           </a:p>
         </p:txBody>
@@ -4935,7 +4935,7 @@
                 <a:latin typeface="Hiragino Sans GB"/>
                 <a:ea typeface="Hiragino Sans GB"/>
               </a:rPr>
-              <a:t>期末周的真实困境</a:t>
+              <a:t>周一晚上</a:t>
             </a:r>
           </a:p>
         </p:txBody>
@@ -4981,7 +4981,7 @@
                 <a:latin typeface="Hiragino Sans GB"/>
                 <a:ea typeface="Hiragino Sans GB"/>
               </a:rPr>
-              <a:t>网盘里上百份讲义和历年卷，不知道从哪看起；问 AI 一道高数题，它答得头头是道 —— 一翻书，它连定理的条件都记错了。</a:t>
+              <a:t>期末周，网盘里堆着一百多份讲义和历年卷。我把三门课的资料拖进知迹，它没急着读，只把文件存好，等我点「解析入库」才动手切页。</a:t>
             </a:r>
           </a:p>
         </p:txBody>
@@ -5057,7 +5057,7 @@
                 <a:latin typeface="Hiragino Sans GB"/>
                 <a:ea typeface="Hiragino Sans GB"/>
               </a:rPr>
-              <a:t>更致命的是学习本身是断的</a:t>
+              <a:t>周三下午</a:t>
             </a:r>
           </a:p>
         </p:txBody>
@@ -5103,7 +5103,7 @@
                 <a:latin typeface="Hiragino Sans GB"/>
                 <a:ea typeface="Hiragino Sans GB"/>
               </a:rPr>
-              <a:t>学习该是「输入 → 练习 → 纠错 → 再复习」的连续闭环，但存资料的不管你错题，讲题的不管你下次还错不错。</a:t>
+              <a:t>我在对话框问「拉格朗日中值定理的条件是什么」。它答得挺顺，句末还贴了个小小的 [P12]。我点了一下，界面直接跳回讲义第 12 页那张原图。</a:t>
             </a:r>
           </a:p>
         </p:txBody>
@@ -5179,7 +5179,7 @@
                 <a:latin typeface="Hiragino Sans GB"/>
                 <a:ea typeface="Hiragino Sans GB"/>
               </a:rPr>
-              <a:t>所以问题不是模型不够聪明</a:t>
+              <a:t>周五晚上</a:t>
             </a:r>
           </a:p>
         </p:txBody>
@@ -5225,7 +5225,7 @@
                 <a:latin typeface="Hiragino Sans GB"/>
                 <a:ea typeface="Hiragino Sans GB"/>
               </a:rPr>
-              <a:t>是没有任何工具在管「这次复习到底有没有用」。答错的代价，要等到下次考试才暴露。</a:t>
+              <a:t>我让它按讲义的难度出几道题。答错一道，我顺手记下「概念混淆」这个错因，掌握度就悄悄降了一档。可第二天我打开题库，那道题的变式还在那儿等我。</a:t>
             </a:r>
           </a:p>
         </p:txBody>
@@ -5271,7 +5271,7 @@
                 <a:latin typeface="Hiragino Sans GB"/>
                 <a:ea typeface="Hiragino Sans GB"/>
               </a:rPr>
-              <a:t>三个断点，缺一不可</a:t>
+              <a:t>那几次翻车，坏在三处</a:t>
             </a:r>
           </a:p>
         </p:txBody>
@@ -5381,7 +5381,7 @@
                 <a:latin typeface="Hiragino Sans GB"/>
                 <a:ea typeface="Hiragino Sans GB"/>
               </a:rPr>
-              <a:t>信息过载</a:t>
+              <a:t>资料多，找不到</a:t>
             </a:r>
           </a:p>
         </p:txBody>
@@ -5427,7 +5427,7 @@
                 <a:latin typeface="Hiragino Sans GB"/>
                 <a:ea typeface="Hiragino Sans GB"/>
               </a:rPr>
-              <a:t>上百份资料散在各处，没有索引、找不动</a:t>
+              <a:t>一百多份讲义堆着，没有索引就等于没存</a:t>
             </a:r>
           </a:p>
         </p:txBody>
@@ -5537,7 +5537,7 @@
                 <a:latin typeface="Hiragino Sans GB"/>
                 <a:ea typeface="Hiragino Sans GB"/>
               </a:rPr>
-              <a:t>AI 幻觉</a:t>
+              <a:t>AI 答得流畅，却会错</a:t>
             </a:r>
           </a:p>
         </p:txBody>
@@ -5583,7 +5583,7 @@
                 <a:latin typeface="Hiragino Sans GB"/>
                 <a:ea typeface="Hiragino Sans GB"/>
               </a:rPr>
-              <a:t>答得像真的，但错了你分辨不出</a:t>
+              <a:t>它说得越顺，越难看出哪句是编的</a:t>
             </a:r>
           </a:p>
         </p:txBody>
@@ -5693,7 +5693,7 @@
                 <a:latin typeface="Hiragino Sans GB"/>
                 <a:ea typeface="Hiragino Sans GB"/>
               </a:rPr>
-              <a:t>学习断层</a:t>
+              <a:t>错题记了也白记</a:t>
             </a:r>
           </a:p>
         </p:txBody>
@@ -5739,7 +5739,7 @@
                 <a:latin typeface="Hiragino Sans GB"/>
                 <a:ea typeface="Hiragino Sans GB"/>
               </a:rPr>
-              <a:t>错题记住了，下次照样再错</a:t>
+              <a:t>下次出题不看你错在哪，等于没改</a:t>
             </a:r>
           </a:p>
         </p:txBody>
@@ -5752,12 +5752,12 @@
         </p:nvSpPr>
         <p:spPr>
           <a:xfrm>
-            <a:off x="566928" y="6053328"/>
-            <a:ext cx="11057839" cy="420624"/>
+            <a:off x="566928" y="6035040"/>
+            <a:ext cx="11057839" cy="365760"/>
           </a:xfrm>
           <a:prstGeom prst="roundRect">
             <a:avLst>
-              <a:gd name="adj" fmla="val 8695"/>
+              <a:gd name="adj" fmla="val 10000"/>
             </a:avLst>
           </a:prstGeom>
           <a:solidFill>
@@ -5786,8 +5786,8 @@
         </p:nvSpPr>
         <p:spPr>
           <a:xfrm>
-            <a:off x="566928" y="6053328"/>
-            <a:ext cx="41148" cy="420624"/>
+            <a:off x="566928" y="6035040"/>
+            <a:ext cx="41148" cy="365760"/>
           </a:xfrm>
           <a:prstGeom prst="rect">
             <a:avLst/>
@@ -5816,8 +5816,8 @@
         </p:nvSpPr>
         <p:spPr>
           <a:xfrm>
-            <a:off x="786384" y="6172200"/>
-            <a:ext cx="914400" cy="201168"/>
+            <a:off x="786384" y="6131052"/>
+            <a:ext cx="914400" cy="182880"/>
           </a:xfrm>
           <a:prstGeom prst="rect">
             <a:avLst/>
@@ -5842,7 +5842,7 @@
               </a:spcAft>
             </a:pPr>
             <a:r>
-              <a:rPr sz="1000" b="1" i="0">
+              <a:rPr sz="950" b="1" i="0">
                 <a:solidFill>
                   <a:srgbClr val="1E6E5C"/>
                 </a:solidFill>
@@ -5862,8 +5862,8 @@
         </p:nvSpPr>
         <p:spPr>
           <a:xfrm>
-            <a:off x="1755648" y="6144768"/>
-            <a:ext cx="4572000" cy="237744"/>
+            <a:off x="1755648" y="6126479"/>
+            <a:ext cx="4572000" cy="219456"/>
           </a:xfrm>
           <a:prstGeom prst="rect">
             <a:avLst/>
@@ -5895,7 +5895,7 @@
                 <a:latin typeface="Hiragino Sans GB"/>
                 <a:ea typeface="Hiragino Sans GB"/>
               </a:rPr>
-              <a:t>把三件事接成闭环</a:t>
+              <a:t>把三件事接起来</a:t>
             </a:r>
           </a:p>
         </p:txBody>
@@ -5908,8 +5908,8 @@
         </p:nvSpPr>
         <p:spPr>
           <a:xfrm>
-            <a:off x="6419088" y="6172200"/>
-            <a:ext cx="5022799" cy="201168"/>
+            <a:off x="6419088" y="6135624"/>
+            <a:ext cx="5022799" cy="182880"/>
           </a:xfrm>
           <a:prstGeom prst="rect">
             <a:avLst/>
@@ -5954,8 +5954,8 @@
         </p:nvSpPr>
         <p:spPr>
           <a:xfrm>
-            <a:off x="8973007" y="6172200"/>
-            <a:ext cx="2377440" cy="201168"/>
+            <a:off x="8973007" y="6135624"/>
+            <a:ext cx="2377440" cy="182880"/>
           </a:xfrm>
           <a:prstGeom prst="rect">
             <a:avLst/>
@@ -5987,7 +5987,7 @@
                 <a:latin typeface="Hiragino Sans GB"/>
                 <a:ea typeface="Hiragino Sans GB"/>
               </a:rPr>
-              <a:t>知迹只做三件事，做到能核验</a:t>
+              <a:t>知迹只做这些，做到能核验</a:t>
             </a:r>
           </a:p>
         </p:txBody>
@@ -6327,7 +6327,7 @@
                 <a:latin typeface="Hiragino Sans GB"/>
                 <a:ea typeface="Hiragino Sans GB"/>
               </a:rPr>
-              <a:t>知迹只死磕三件事：因为只有把闭环做透，才谈得上「可靠」</a:t>
+              <a:t>知迹只死磕这三件：接上了，答案才谈得上可靠</a:t>
             </a:r>
           </a:p>
         </p:txBody>
@@ -7215,7 +7215,7 @@
                 <a:latin typeface="Hiragino Sans GB"/>
                 <a:ea typeface="Hiragino Sans GB"/>
               </a:rPr>
-              <a:t>每一多一个功能，就多一条可能出错的路径 —— 而这个项目要证明的恰恰是「输出可信」。所以它只做单机、单用户、三个动作，做到底。技术上也不是拼装：权限、恢复、评测这三件事，都是围着「让答案可被核验」设计的。</a:t>
+              <a:t>每一多一个功能，就多一条可能出错的路径。而这个项目要证明的恰恰是「输出可信」。所以它只做单机、单用户、三个动作，做到底。技术上也不是拼装：权限、恢复、评测这三件事，都是围着「让答案可被核验」设计的。</a:t>
             </a:r>
           </a:p>
         </p:txBody>
@@ -7228,7 +7228,7 @@
         </p:nvSpPr>
         <p:spPr>
           <a:xfrm>
-            <a:off x="566928" y="6089904"/>
+            <a:off x="566928" y="6035040"/>
             <a:ext cx="11057839" cy="365760"/>
           </a:xfrm>
           <a:prstGeom prst="roundRect">
@@ -7262,7 +7262,7 @@
         </p:nvSpPr>
         <p:spPr>
           <a:xfrm>
-            <a:off x="566928" y="6089904"/>
+            <a:off x="566928" y="6035040"/>
             <a:ext cx="41148" cy="365760"/>
           </a:xfrm>
           <a:prstGeom prst="rect">
@@ -7292,7 +7292,7 @@
         </p:nvSpPr>
         <p:spPr>
           <a:xfrm>
-            <a:off x="768096" y="6185916"/>
+            <a:off x="768096" y="6131052"/>
             <a:ext cx="1554480" cy="182880"/>
           </a:xfrm>
           <a:prstGeom prst="rect">
@@ -7338,7 +7338,7 @@
         </p:nvSpPr>
         <p:spPr>
           <a:xfrm>
-            <a:off x="2267712" y="6181344"/>
+            <a:off x="2267712" y="6126479"/>
             <a:ext cx="9137599" cy="201168"/>
           </a:xfrm>
           <a:prstGeom prst="rect">
@@ -7711,7 +7711,7 @@
                 <a:latin typeface="Hiragino Sans GB"/>
                 <a:ea typeface="Hiragino Sans GB"/>
               </a:rPr>
-              <a:t>一个学生的四周：从传资料到自动排复习，中间每一步都留得下痕迹</a:t>
+              <a:t>换成知迹之后，这四周是这样过的</a:t>
             </a:r>
           </a:p>
         </p:txBody>
@@ -7973,7 +7973,7 @@
                 <a:latin typeface="Hiragino Sans GB"/>
                 <a:ea typeface="Hiragino Sans GB"/>
               </a:rPr>
-              <a:t>三份 PDF 和课件照片拖进知迹。</a:t>
+              <a:t>三份 PDF 和课件照片拖进去。</a:t>
             </a:r>
           </a:p>
           <a:p>
@@ -7996,7 +7996,7 @@
                 <a:latin typeface="Hiragino Sans GB"/>
                 <a:ea typeface="Hiragino Sans GB"/>
               </a:rPr>
-              <a:t>系统不急着读 —— 先落盘，等你点「解析入库」，后台才按页切块建索引。</a:t>
+              <a:t>系统不急着读，先落盘，等你点「解析入库」才按页切块建索引。</a:t>
             </a:r>
           </a:p>
         </p:txBody>
@@ -8254,7 +8254,30 @@
                 <a:latin typeface="Hiragino Sans GB"/>
                 <a:ea typeface="Hiragino Sans GB"/>
               </a:rPr>
-              <a:t>回答句末贴一个 [P12]，点一下就跳回讲义第 12 页原图。</a:t>
+              <a:t>句末贴一个 [P12]，点一下跳回第 12 页原图；</a:t>
+            </a:r>
+          </a:p>
+          <a:p>
+            <a:pPr algn="l">
+              <a:lnSpc>
+                <a:spcPct val="136000"/>
+              </a:lnSpc>
+              <a:spcBef>
+                <a:spcPts val="0"/>
+              </a:spcBef>
+              <a:spcAft>
+                <a:spcPts val="600"/>
+              </a:spcAft>
+            </a:pPr>
+            <a:r>
+              <a:rPr sz="1200" b="0" i="0">
+                <a:solidFill>
+                  <a:srgbClr val="58667C"/>
+                </a:solidFill>
+                <a:latin typeface="Hiragino Sans GB"/>
+                <a:ea typeface="Hiragino Sans GB"/>
+              </a:rPr>
+              <a:t>资料里没有的，走联网并标明是外部资料。</a:t>
             </a:r>
           </a:p>
         </p:txBody>
@@ -8512,7 +8535,30 @@
                 <a:latin typeface="Hiragino Sans GB"/>
                 <a:ea typeface="Hiragino Sans GB"/>
               </a:rPr>
-              <a:t>顺手记下「概念混淆」这个错因。</a:t>
+              <a:t>顺手记下「概念混淆」这个错因 ——</a:t>
+            </a:r>
+          </a:p>
+          <a:p>
+            <a:pPr algn="l">
+              <a:lnSpc>
+                <a:spcPct val="136000"/>
+              </a:lnSpc>
+              <a:spcBef>
+                <a:spcPts val="0"/>
+              </a:spcBef>
+              <a:spcAft>
+                <a:spcPts val="600"/>
+              </a:spcAft>
+            </a:pPr>
+            <a:r>
+              <a:rPr sz="1200" b="0" i="0">
+                <a:solidFill>
+                  <a:srgbClr val="58667C"/>
+                </a:solidFill>
+                <a:latin typeface="Hiragino Sans GB"/>
+                <a:ea typeface="Hiragino Sans GB"/>
+              </a:rPr>
+              <a:t>下次出题就按它加重。</a:t>
             </a:r>
           </a:p>
         </p:txBody>
@@ -8747,7 +8793,7 @@
                 <a:latin typeface="Hiragino Sans GB"/>
                 <a:ea typeface="Hiragino Sans GB"/>
               </a:rPr>
-              <a:t>今日复习自动推基于那道错题的变式题，</a:t>
+              <a:t>今日复习自动推那道错题的变式，</a:t>
             </a:r>
           </a:p>
           <a:p>
@@ -8770,7 +8816,7 @@
                 <a:latin typeface="Hiragino Sans GB"/>
                 <a:ea typeface="Hiragino Sans GB"/>
               </a:rPr>
-              <a:t>并把明天的日程排好。</a:t>
+              <a:t>明天的日程也一并排好。</a:t>
             </a:r>
           </a:p>
         </p:txBody>
@@ -8910,7 +8956,7 @@
                 <a:latin typeface="Hiragino Sans GB"/>
                 <a:ea typeface="Hiragino Sans GB"/>
               </a:rPr>
-              <a:t>没有华丽的图表，只有极度确定的闭环：每一步都知道自己依据什么、结果存在哪、下次还练不练。</a:t>
+              <a:t>没有华丽的图表，只有确定的一条线：每一步都知道自己依据什么、结果存在哪、下次还练不练。</a:t>
             </a:r>
           </a:p>
         </p:txBody>
@@ -8923,7 +8969,7 @@
         </p:nvSpPr>
         <p:spPr>
           <a:xfrm>
-            <a:off x="566928" y="6089904"/>
+            <a:off x="566928" y="6035040"/>
             <a:ext cx="11057839" cy="365760"/>
           </a:xfrm>
           <a:prstGeom prst="roundRect">
@@ -8957,7 +9003,7 @@
         </p:nvSpPr>
         <p:spPr>
           <a:xfrm>
-            <a:off x="566928" y="6089904"/>
+            <a:off x="566928" y="6035040"/>
             <a:ext cx="41148" cy="365760"/>
           </a:xfrm>
           <a:prstGeom prst="rect">
@@ -8987,7 +9033,7 @@
         </p:nvSpPr>
         <p:spPr>
           <a:xfrm>
-            <a:off x="768096" y="6185916"/>
+            <a:off x="768096" y="6131052"/>
             <a:ext cx="1554480" cy="182880"/>
           </a:xfrm>
           <a:prstGeom prst="rect">
@@ -9033,7 +9079,7 @@
         </p:nvSpPr>
         <p:spPr>
           <a:xfrm>
-            <a:off x="2267712" y="6181344"/>
+            <a:off x="2267712" y="6126479"/>
             <a:ext cx="9137599" cy="201168"/>
           </a:xfrm>
           <a:prstGeom prst="rect">
@@ -9512,7 +9558,7 @@
                 <a:latin typeface="Hiragino Sans GB"/>
                 <a:ea typeface="Hiragino Sans GB"/>
               </a:rPr>
-              <a:t>四路并行召回 —— 因为中文资料没有单一找法</a:t>
+              <a:t>四路并行召回：中文资料没有单一找法</a:t>
             </a:r>
           </a:p>
         </p:txBody>
@@ -11438,7 +11484,7 @@
                 <a:latin typeface="Hiragino Sans GB"/>
                 <a:ea typeface="Hiragino Sans GB"/>
               </a:rPr>
-              <a:t>整篇 PDF 切成一个片段，引用就只能指向「整篇」—— 答案对不对就无从核验</a:t>
+              <a:t>整篇 PDF 切成一个片段，引用就只能指向「整篇」，答案对不对就无从核验</a:t>
             </a:r>
           </a:p>
         </p:txBody>
@@ -11623,7 +11669,7 @@
         </p:nvSpPr>
         <p:spPr>
           <a:xfrm>
-            <a:off x="566928" y="6089904"/>
+            <a:off x="566928" y="6035040"/>
             <a:ext cx="11057839" cy="365760"/>
           </a:xfrm>
           <a:prstGeom prst="roundRect">
@@ -11657,7 +11703,7 @@
         </p:nvSpPr>
         <p:spPr>
           <a:xfrm>
-            <a:off x="566928" y="6089904"/>
+            <a:off x="566928" y="6035040"/>
             <a:ext cx="41148" cy="365760"/>
           </a:xfrm>
           <a:prstGeom prst="rect">
@@ -11687,7 +11733,7 @@
         </p:nvSpPr>
         <p:spPr>
           <a:xfrm>
-            <a:off x="768096" y="6185916"/>
+            <a:off x="768096" y="6131052"/>
             <a:ext cx="1554480" cy="182880"/>
           </a:xfrm>
           <a:prstGeom prst="rect">
@@ -11733,7 +11779,7 @@
         </p:nvSpPr>
         <p:spPr>
           <a:xfrm>
-            <a:off x="2267712" y="6181344"/>
+            <a:off x="2267712" y="6126479"/>
             <a:ext cx="9137599" cy="201168"/>
           </a:xfrm>
           <a:prstGeom prst="rect">
@@ -11766,7 +11812,7 @@
                 <a:latin typeface="Hiragino Sans GB"/>
                 <a:ea typeface="Hiragino Sans GB"/>
               </a:rPr>
-              <a:t>找得到、说得清出处 —— 但模型接下来要动手，这还只是回答问题。</a:t>
+              <a:t>找得到、说得清出处。可模型接下来要动手，这还只是回答问题。</a:t>
             </a:r>
           </a:p>
         </p:txBody>
@@ -12857,7 +12903,7 @@
                 <a:latin typeface="Hiragino Sans GB"/>
                 <a:ea typeface="Hiragino Sans GB"/>
               </a:rPr>
-              <a:t>application/graph.py · build_graph　——　上面这一行就是真的代码</a:t>
+              <a:t>application/graph.py · build_graph　·　上面这一行就是真的代码</a:t>
             </a:r>
           </a:p>
         </p:txBody>
@@ -13570,7 +13616,7 @@
         </p:nvSpPr>
         <p:spPr>
           <a:xfrm>
-            <a:off x="566928" y="6089904"/>
+            <a:off x="566928" y="6035040"/>
             <a:ext cx="11057839" cy="365760"/>
           </a:xfrm>
           <a:prstGeom prst="roundRect">
@@ -13604,7 +13650,7 @@
         </p:nvSpPr>
         <p:spPr>
           <a:xfrm>
-            <a:off x="566928" y="6089904"/>
+            <a:off x="566928" y="6035040"/>
             <a:ext cx="41148" cy="365760"/>
           </a:xfrm>
           <a:prstGeom prst="rect">
@@ -13634,7 +13680,7 @@
         </p:nvSpPr>
         <p:spPr>
           <a:xfrm>
-            <a:off x="768096" y="6185916"/>
+            <a:off x="768096" y="6131052"/>
             <a:ext cx="1554480" cy="182880"/>
           </a:xfrm>
           <a:prstGeom prst="rect">
@@ -13680,7 +13726,7 @@
         </p:nvSpPr>
         <p:spPr>
           <a:xfrm>
-            <a:off x="2267712" y="6181344"/>
+            <a:off x="2267712" y="6126479"/>
             <a:ext cx="9137599" cy="201168"/>
           </a:xfrm>
           <a:prstGeom prst="rect">
@@ -13713,7 +13759,7 @@
                 <a:latin typeface="Hiragino Sans GB"/>
                 <a:ea typeface="Hiragino Sans GB"/>
               </a:rPr>
-              <a:t>答得准 + 管得住 = 敢信 —— 接下来要证明的是：它今天没比昨天变笨。</a:t>
+              <a:t>答得准 + 管得住 = 敢信。接下来要证明的是：它今天没比昨天变笨。</a:t>
             </a:r>
           </a:p>
         </p:txBody>
@@ -15663,7 +15709,7 @@
                 <a:latin typeface="Hiragino Sans GB"/>
                 <a:ea typeface="Hiragino Sans GB"/>
               </a:rPr>
-              <a:t>复习排期、四档自评、检索融合、护栏 —— 测它们不用起数据库、不联网、不花一分钱额度。回归测试跑一次只要十几秒。</a:t>
+              <a:t>复习排期、四档自评、检索融合、护栏，测它们不用起数据库、不联网、不花一分钱额度。回归测试跑一次只要十几秒。</a:t>
             </a:r>
           </a:p>
         </p:txBody>
@@ -15878,7 +15924,7 @@
         </p:nvSpPr>
         <p:spPr>
           <a:xfrm>
-            <a:off x="566928" y="6089904"/>
+            <a:off x="566928" y="6035040"/>
             <a:ext cx="11057839" cy="365760"/>
           </a:xfrm>
           <a:prstGeom prst="roundRect">
@@ -15912,7 +15958,7 @@
         </p:nvSpPr>
         <p:spPr>
           <a:xfrm>
-            <a:off x="566928" y="6089904"/>
+            <a:off x="566928" y="6035040"/>
             <a:ext cx="41148" cy="365760"/>
           </a:xfrm>
           <a:prstGeom prst="rect">
@@ -15942,7 +15988,7 @@
         </p:nvSpPr>
         <p:spPr>
           <a:xfrm>
-            <a:off x="768096" y="6185916"/>
+            <a:off x="768096" y="6131052"/>
             <a:ext cx="1554480" cy="182880"/>
           </a:xfrm>
           <a:prstGeom prst="rect">
@@ -15988,7 +16034,7 @@
         </p:nvSpPr>
         <p:spPr>
           <a:xfrm>
-            <a:off x="2267712" y="6181344"/>
+            <a:off x="2267712" y="6126479"/>
             <a:ext cx="9137599" cy="201168"/>
           </a:xfrm>
           <a:prstGeom prst="rect">
@@ -18262,7 +18308,7 @@
         </p:nvSpPr>
         <p:spPr>
           <a:xfrm>
-            <a:off x="566928" y="6089904"/>
+            <a:off x="566928" y="6035040"/>
             <a:ext cx="11057839" cy="365760"/>
           </a:xfrm>
           <a:prstGeom prst="roundRect">
@@ -18296,7 +18342,7 @@
         </p:nvSpPr>
         <p:spPr>
           <a:xfrm>
-            <a:off x="566928" y="6089904"/>
+            <a:off x="566928" y="6035040"/>
             <a:ext cx="41148" cy="365760"/>
           </a:xfrm>
           <a:prstGeom prst="rect">
@@ -18326,7 +18372,7 @@
         </p:nvSpPr>
         <p:spPr>
           <a:xfrm>
-            <a:off x="768096" y="6185916"/>
+            <a:off x="768096" y="6131052"/>
             <a:ext cx="1554480" cy="182880"/>
           </a:xfrm>
           <a:prstGeom prst="rect">
@@ -18372,7 +18418,7 @@
         </p:nvSpPr>
         <p:spPr>
           <a:xfrm>
-            <a:off x="2267712" y="6181344"/>
+            <a:off x="2267712" y="6126479"/>
             <a:ext cx="9137599" cy="201168"/>
           </a:xfrm>
           <a:prstGeom prst="rect">
@@ -18405,7 +18451,7 @@
                 <a:latin typeface="Hiragino Sans GB"/>
                 <a:ea typeface="Hiragino Sans GB"/>
               </a:rPr>
-              <a:t>domain 层全是纯函数，回归测试跑一次十几秒，零 API 消耗。</a:t>
+              <a:t>domain 层不碰 I/O，回归测试跑一次十几秒，零 API 消耗。</a:t>
             </a:r>
           </a:p>
         </p:txBody>
@@ -19694,7 +19740,7 @@
         </p:nvSpPr>
         <p:spPr>
           <a:xfrm>
-            <a:off x="566928" y="6089904"/>
+            <a:off x="566928" y="6035040"/>
             <a:ext cx="11057839" cy="365760"/>
           </a:xfrm>
           <a:prstGeom prst="roundRect">
@@ -19728,7 +19774,7 @@
         </p:nvSpPr>
         <p:spPr>
           <a:xfrm>
-            <a:off x="566928" y="6089904"/>
+            <a:off x="566928" y="6035040"/>
             <a:ext cx="41148" cy="365760"/>
           </a:xfrm>
           <a:prstGeom prst="rect">
@@ -19758,7 +19804,7 @@
         </p:nvSpPr>
         <p:spPr>
           <a:xfrm>
-            <a:off x="768096" y="6185916"/>
+            <a:off x="768096" y="6131052"/>
             <a:ext cx="1554480" cy="182880"/>
           </a:xfrm>
           <a:prstGeom prst="rect">
@@ -19804,7 +19850,7 @@
         </p:nvSpPr>
         <p:spPr>
           <a:xfrm>
-            <a:off x="2267712" y="6181344"/>
+            <a:off x="2267712" y="6126479"/>
             <a:ext cx="9137599" cy="201168"/>
           </a:xfrm>
           <a:prstGeom prst="rect">
